--- a/outputs/codemap-ctxdb-token-simulation.pptx
+++ b/outputs/codemap-ctxdb-token-simulation.pptx
@@ -2,20 +2,20 @@
 <file path=ppt/presentation.xml><?xml version="1.0" encoding="utf-8"?>
 <p:presentation xmlns:p="http://schemas.openxmlformats.org/presentationml/2006/main">
   <p:sldMasterIdLst>
-    <p:sldMasterId xmlns:r="http://schemas.openxmlformats.org/officeDocument/2006/relationships" id="2147483648" r:id="Rbda94ebee436468e"/>
+    <p:sldMasterId xmlns:r="http://schemas.openxmlformats.org/officeDocument/2006/relationships" id="2147483648" r:id="R40fde7e56ae04d42"/>
   </p:sldMasterIdLst>
   <p:notesMasterIdLst>
-    <p:notesMasterId xmlns:r="http://schemas.openxmlformats.org/officeDocument/2006/relationships" r:id="R7a3f8777722147ec"/>
+    <p:notesMasterId xmlns:r="http://schemas.openxmlformats.org/officeDocument/2006/relationships" r:id="R2a5cb03b94044455"/>
   </p:notesMasterIdLst>
   <p:sldIdLst>
-    <p:sldId xmlns:r="http://schemas.openxmlformats.org/officeDocument/2006/relationships" id="256" r:id="R5d48658f8cae488d"/>
-    <p:sldId xmlns:r="http://schemas.openxmlformats.org/officeDocument/2006/relationships" id="257" r:id="Rf9e1a5dda8ee4b0c"/>
-    <p:sldId xmlns:r="http://schemas.openxmlformats.org/officeDocument/2006/relationships" id="258" r:id="Rfeade5006b014252"/>
-    <p:sldId xmlns:r="http://schemas.openxmlformats.org/officeDocument/2006/relationships" id="259" r:id="R2df37afed9b843e9"/>
-    <p:sldId xmlns:r="http://schemas.openxmlformats.org/officeDocument/2006/relationships" id="260" r:id="R009aac51c8184d0a"/>
-    <p:sldId xmlns:r="http://schemas.openxmlformats.org/officeDocument/2006/relationships" id="261" r:id="Reaa335e2bba24b60"/>
-    <p:sldId xmlns:r="http://schemas.openxmlformats.org/officeDocument/2006/relationships" id="262" r:id="R04ed3371207a4e3d"/>
-    <p:sldId xmlns:r="http://schemas.openxmlformats.org/officeDocument/2006/relationships" id="263" r:id="R266fb376ae724a6d"/>
+    <p:sldId xmlns:r="http://schemas.openxmlformats.org/officeDocument/2006/relationships" id="256" r:id="R6eb00dd1784d4076"/>
+    <p:sldId xmlns:r="http://schemas.openxmlformats.org/officeDocument/2006/relationships" id="257" r:id="R71a9a8385da94787"/>
+    <p:sldId xmlns:r="http://schemas.openxmlformats.org/officeDocument/2006/relationships" id="258" r:id="R88351f1d398243e8"/>
+    <p:sldId xmlns:r="http://schemas.openxmlformats.org/officeDocument/2006/relationships" id="259" r:id="R580249db05b347fb"/>
+    <p:sldId xmlns:r="http://schemas.openxmlformats.org/officeDocument/2006/relationships" id="260" r:id="R40fa9d62c9d04374"/>
+    <p:sldId xmlns:r="http://schemas.openxmlformats.org/officeDocument/2006/relationships" id="261" r:id="R1a6eaeb292854130"/>
+    <p:sldId xmlns:r="http://schemas.openxmlformats.org/officeDocument/2006/relationships" id="262" r:id="Rbbf9e5f0ed18466f"/>
+    <p:sldId xmlns:r="http://schemas.openxmlformats.org/officeDocument/2006/relationships" id="263" r:id="R3ffe819712f7484c"/>
   </p:sldIdLst>
   <p:sldSz cx="12192000" cy="6858000"/>
   <p:notesSz cx="6858000" cy="9144000"/>
@@ -1070,7 +1070,7 @@
   </p:cSld>
   <p:clrMap bg1="lt1" tx1="dk1" bg2="lt2" tx2="dk2" accent1="accent1" accent2="accent2" accent3="accent3" accent4="accent4" accent5="accent5" accent6="accent6" hlink="hlink" folHlink="folHlink"/>
   <p:sldLayoutIdLst>
-    <p:sldLayoutId xmlns:r="http://schemas.openxmlformats.org/officeDocument/2006/relationships" id="2147483649" r:id="Rafbccafe82574e00"/>
+    <p:sldLayoutId xmlns:r="http://schemas.openxmlformats.org/officeDocument/2006/relationships" id="2147483649" r:id="Re2dd6abe5b56426b"/>
   </p:sldLayoutIdLst>
   <p:txStyles>
     <p:titleStyle>
@@ -1813,7 +1813,7 @@
           <p:cNvPr id="1" name="">
             <a:extLst xmlns:a="http://schemas.openxmlformats.org/drawingml/2006/main">
               <a:ext uri="{FF2B5EF4-FFF2-40B4-BE49-F238E27FC236}">
-                <a16:creationId xmlns:a16="http://schemas.microsoft.com/office/drawing/2014/main" id="{CDF59738-D211-4AD3-BD78-7B603A1CA783}"/>
+                <a16:creationId xmlns:a16="http://schemas.microsoft.com/office/drawing/2014/main" id="{5A11AA72-536E-4267-95A1-D55F581EA83D}"/>
               </a:ext>
             </a:extLst>
           </p:cNvPr>
@@ -1873,19 +1873,19 @@
           <p:cNvPr id="2" name="">
             <a:extLst xmlns:a="http://schemas.openxmlformats.org/drawingml/2006/main">
               <a:ext uri="{FF2B5EF4-FFF2-40B4-BE49-F238E27FC236}">
-                <a16:creationId xmlns:a16="http://schemas.microsoft.com/office/drawing/2014/main" id="{F7974172-7F0D-42C1-8A70-E0632054D696}"/>
-              </a:ext>
-            </a:extLst>
-          </p:cNvPr>
-          <p:cNvSpPr>
-            <a:spLocks xmlns:a="http://schemas.openxmlformats.org/drawingml/2006/main" noGrp="1"/>
-          </p:cNvSpPr>
-          <p:nvPr/>
-        </p:nvSpPr>
-        <p:spPr>
-          <a:xfrm xmlns:a="http://schemas.openxmlformats.org/drawingml/2006/main">
-            <a:off x="400050" y="1600200"/>
-            <a:ext cx="8572500" cy="1695450"/>
+                <a16:creationId xmlns:a16="http://schemas.microsoft.com/office/drawing/2014/main" id="{8D196083-86B0-4CF2-A487-B2F57448F8C8}"/>
+              </a:ext>
+            </a:extLst>
+          </p:cNvPr>
+          <p:cNvSpPr>
+            <a:spLocks xmlns:a="http://schemas.openxmlformats.org/drawingml/2006/main" noGrp="1"/>
+          </p:cNvSpPr>
+          <p:nvPr/>
+        </p:nvSpPr>
+        <p:spPr>
+          <a:xfrm xmlns:a="http://schemas.openxmlformats.org/drawingml/2006/main">
+            <a:off x="400050" y="1562100"/>
+            <a:ext cx="8191500" cy="1752600"/>
           </a:xfrm>
           <a:prstGeom xmlns:a="http://schemas.openxmlformats.org/drawingml/2006/main" prst="rect">
             <a:avLst/>
@@ -1902,10 +1902,10 @@
           <a:p xmlns:a="http://schemas.openxmlformats.org/drawingml/2006/main">
             <a:pPr algn="l">
               <a:lnSpc>
-                <a:spcPct val="102000"/>
-              </a:lnSpc>
-              <a:buNone/>
-              <a:defRPr sz="4350" b="1">
+                <a:spcPct val="105000"/>
+              </a:lnSpc>
+              <a:buNone/>
+              <a:defRPr sz="3900" b="1">
                 <a:solidFill>
                   <a:srgbClr val="000000"/>
                 </a:solidFill>
@@ -1915,7 +1915,7 @@
               </a:defRPr>
             </a:pPr>
             <a:r>
-              <a:rPr sz="4350" b="1">
+              <a:rPr sz="3900" b="1">
                 <a:solidFill>
                   <a:srgbClr val="000000"/>
                 </a:solidFill>
@@ -1933,7 +1933,7 @@
           <p:cNvPr id="3" name="">
             <a:extLst xmlns:a="http://schemas.openxmlformats.org/drawingml/2006/main">
               <a:ext uri="{FF2B5EF4-FFF2-40B4-BE49-F238E27FC236}">
-                <a16:creationId xmlns:a16="http://schemas.microsoft.com/office/drawing/2014/main" id="{D7516688-6961-4E72-879C-D251FC50DA0F}"/>
+                <a16:creationId xmlns:a16="http://schemas.microsoft.com/office/drawing/2014/main" id="{C3459731-8D6D-4BA9-B4B8-361312DFAF3F}"/>
               </a:ext>
             </a:extLst>
           </p:cNvPr>
@@ -1945,7 +1945,7 @@
         <p:spPr>
           <a:xfrm xmlns:a="http://schemas.openxmlformats.org/drawingml/2006/main">
             <a:off x="400050" y="3638550"/>
-            <a:ext cx="7239000" cy="685800"/>
+            <a:ext cx="7239000" cy="800100"/>
           </a:xfrm>
           <a:prstGeom xmlns:a="http://schemas.openxmlformats.org/drawingml/2006/main" prst="rect">
             <a:avLst/>
@@ -1965,17 +1965,17 @@
                 <a:spcPct val="122000"/>
               </a:lnSpc>
               <a:buNone/>
-              <a:defRPr sz="1800" b="0">
-                <a:solidFill>
-                  <a:srgbClr val="555555"/>
-                </a:solidFill>
-                <a:latin typeface="Malgun Gothic"/>
-                <a:ea typeface="Malgun Gothic"/>
-                <a:cs typeface="Malgun Gothic"/>
-              </a:defRPr>
-            </a:pPr>
-            <a:r>
-              <a:rPr sz="1800" b="0">
+              <a:defRPr sz="1575" b="0">
+                <a:solidFill>
+                  <a:srgbClr val="555555"/>
+                </a:solidFill>
+                <a:latin typeface="Malgun Gothic"/>
+                <a:ea typeface="Malgun Gothic"/>
+                <a:cs typeface="Malgun Gothic"/>
+              </a:defRPr>
+            </a:pPr>
+            <a:r>
+              <a:rPr sz="1575" b="0">
                 <a:solidFill>
                   <a:srgbClr val="555555"/>
                 </a:solidFill>
@@ -1993,7 +1993,7 @@
           <p:cNvPr id="4" name="">
             <a:extLst xmlns:a="http://schemas.openxmlformats.org/drawingml/2006/main">
               <a:ext uri="{FF2B5EF4-FFF2-40B4-BE49-F238E27FC236}">
-                <a16:creationId xmlns:a16="http://schemas.microsoft.com/office/drawing/2014/main" id="{6F2C9ED8-3647-4046-B35D-7A0C537119C6}"/>
+                <a16:creationId xmlns:a16="http://schemas.microsoft.com/office/drawing/2014/main" id="{46F3D625-8D17-4E5C-A33F-CA06E213AF09}"/>
               </a:ext>
             </a:extLst>
           </p:cNvPr>
@@ -2024,7 +2024,7 @@
           <p:cNvPr id="5" name="">
             <a:extLst xmlns:a="http://schemas.openxmlformats.org/drawingml/2006/main">
               <a:ext uri="{FF2B5EF4-FFF2-40B4-BE49-F238E27FC236}">
-                <a16:creationId xmlns:a16="http://schemas.microsoft.com/office/drawing/2014/main" id="{C19A5183-02D9-49F9-99EC-87242ABFFCFD}"/>
+                <a16:creationId xmlns:a16="http://schemas.microsoft.com/office/drawing/2014/main" id="{E9EC1501-B492-4F08-AB6F-7806CF7741F5}"/>
               </a:ext>
             </a:extLst>
           </p:cNvPr>
@@ -2084,7 +2084,7 @@
           <p:cNvPr id="6" name="">
             <a:extLst xmlns:a="http://schemas.openxmlformats.org/drawingml/2006/main">
               <a:ext uri="{FF2B5EF4-FFF2-40B4-BE49-F238E27FC236}">
-                <a16:creationId xmlns:a16="http://schemas.microsoft.com/office/drawing/2014/main" id="{EDEECD22-FDE1-43F6-A1E1-BCCD3C99D9A7}"/>
+                <a16:creationId xmlns:a16="http://schemas.microsoft.com/office/drawing/2014/main" id="{48802D31-312B-416F-8790-4F4FB8DCA43A}"/>
               </a:ext>
             </a:extLst>
           </p:cNvPr>
@@ -2144,7 +2144,7 @@
           <p:cNvPr id="7" name="">
             <a:extLst xmlns:a="http://schemas.openxmlformats.org/drawingml/2006/main">
               <a:ext uri="{FF2B5EF4-FFF2-40B4-BE49-F238E27FC236}">
-                <a16:creationId xmlns:a16="http://schemas.microsoft.com/office/drawing/2014/main" id="{3B4EAE6B-4036-4DB8-9784-7E86FF09D44C}"/>
+                <a16:creationId xmlns:a16="http://schemas.microsoft.com/office/drawing/2014/main" id="{BA298014-4BA2-44AC-B020-74D70B719563}"/>
               </a:ext>
             </a:extLst>
           </p:cNvPr>
@@ -2175,7 +2175,7 @@
           <p:cNvPr id="8" name="">
             <a:extLst xmlns:a="http://schemas.openxmlformats.org/drawingml/2006/main">
               <a:ext uri="{FF2B5EF4-FFF2-40B4-BE49-F238E27FC236}">
-                <a16:creationId xmlns:a16="http://schemas.microsoft.com/office/drawing/2014/main" id="{2C8D60FF-76DB-4E57-9452-82A74C505626}"/>
+                <a16:creationId xmlns:a16="http://schemas.microsoft.com/office/drawing/2014/main" id="{EC698183-3BB7-44AC-AE20-9200CAED5708}"/>
               </a:ext>
             </a:extLst>
           </p:cNvPr>
@@ -2235,7 +2235,7 @@
           <p:cNvPr id="9" name="">
             <a:extLst xmlns:a="http://schemas.openxmlformats.org/drawingml/2006/main">
               <a:ext uri="{FF2B5EF4-FFF2-40B4-BE49-F238E27FC236}">
-                <a16:creationId xmlns:a16="http://schemas.microsoft.com/office/drawing/2014/main" id="{60C55CEE-3E38-434F-8B62-08F1F45E3705}"/>
+                <a16:creationId xmlns:a16="http://schemas.microsoft.com/office/drawing/2014/main" id="{B8C5ABA3-0CB1-40AB-8461-1791795F3731}"/>
               </a:ext>
             </a:extLst>
           </p:cNvPr>
@@ -2295,7 +2295,7 @@
           <p:cNvPr id="10" name="">
             <a:extLst xmlns:a="http://schemas.openxmlformats.org/drawingml/2006/main">
               <a:ext uri="{FF2B5EF4-FFF2-40B4-BE49-F238E27FC236}">
-                <a16:creationId xmlns:a16="http://schemas.microsoft.com/office/drawing/2014/main" id="{B952DEBC-E951-4F82-9545-3DAF2D1B2BA2}"/>
+                <a16:creationId xmlns:a16="http://schemas.microsoft.com/office/drawing/2014/main" id="{6214797F-5DFE-422B-B7A8-E16C2EECE8F2}"/>
               </a:ext>
             </a:extLst>
           </p:cNvPr>
@@ -2326,7 +2326,7 @@
           <p:cNvPr id="11" name="">
             <a:extLst xmlns:a="http://schemas.openxmlformats.org/drawingml/2006/main">
               <a:ext uri="{FF2B5EF4-FFF2-40B4-BE49-F238E27FC236}">
-                <a16:creationId xmlns:a16="http://schemas.microsoft.com/office/drawing/2014/main" id="{1ACAB3B3-68EF-441C-8808-A4534579E79F}"/>
+                <a16:creationId xmlns:a16="http://schemas.microsoft.com/office/drawing/2014/main" id="{E9FBD091-F315-4610-A714-E06AC7E9CF95}"/>
               </a:ext>
             </a:extLst>
           </p:cNvPr>
@@ -2386,7 +2386,7 @@
           <p:cNvPr id="12" name="">
             <a:extLst xmlns:a="http://schemas.openxmlformats.org/drawingml/2006/main">
               <a:ext uri="{FF2B5EF4-FFF2-40B4-BE49-F238E27FC236}">
-                <a16:creationId xmlns:a16="http://schemas.microsoft.com/office/drawing/2014/main" id="{EA16C091-4D7E-4FDE-AD1C-8A8839085EC0}"/>
+                <a16:creationId xmlns:a16="http://schemas.microsoft.com/office/drawing/2014/main" id="{CB08D7DA-238C-41E6-8954-557C46E3A372}"/>
               </a:ext>
             </a:extLst>
           </p:cNvPr>
@@ -2446,7 +2446,7 @@
           <p:cNvPr id="13" name="">
             <a:extLst xmlns:a="http://schemas.openxmlformats.org/drawingml/2006/main">
               <a:ext uri="{FF2B5EF4-FFF2-40B4-BE49-F238E27FC236}">
-                <a16:creationId xmlns:a16="http://schemas.microsoft.com/office/drawing/2014/main" id="{62EF3FFB-E47C-4F9A-9D32-661088759E13}"/>
+                <a16:creationId xmlns:a16="http://schemas.microsoft.com/office/drawing/2014/main" id="{0769A42D-8469-42F5-B40E-4614614A1E81}"/>
               </a:ext>
             </a:extLst>
           </p:cNvPr>
@@ -2477,7 +2477,7 @@
           <p:cNvPr id="14" name="">
             <a:extLst xmlns:a="http://schemas.openxmlformats.org/drawingml/2006/main">
               <a:ext uri="{FF2B5EF4-FFF2-40B4-BE49-F238E27FC236}">
-                <a16:creationId xmlns:a16="http://schemas.microsoft.com/office/drawing/2014/main" id="{2328CBE4-37A4-4882-A91C-4EB034C3CF58}"/>
+                <a16:creationId xmlns:a16="http://schemas.microsoft.com/office/drawing/2014/main" id="{41469F7D-54F6-45C8-8178-5D0C6A857CD3}"/>
               </a:ext>
             </a:extLst>
           </p:cNvPr>
@@ -2537,7 +2537,7 @@
           <p:cNvPr id="15" name="">
             <a:extLst xmlns:a="http://schemas.openxmlformats.org/drawingml/2006/main">
               <a:ext uri="{FF2B5EF4-FFF2-40B4-BE49-F238E27FC236}">
-                <a16:creationId xmlns:a16="http://schemas.microsoft.com/office/drawing/2014/main" id="{BE94BDF9-455B-49EA-8B37-539F5D9E36FD}"/>
+                <a16:creationId xmlns:a16="http://schemas.microsoft.com/office/drawing/2014/main" id="{A8690CEB-6BD1-4AA6-B870-D08A3C264F27}"/>
               </a:ext>
             </a:extLst>
           </p:cNvPr>
@@ -2595,7 +2595,7 @@
     </p:spTree>
     <p:extLst>
       <p:ext uri="{BB962C8B-B14F-4D97-AF65-F5344CB8AC3E}">
-        <p14:creationId xmlns:p14="http://schemas.microsoft.com/office/powerpoint/2010/main" val="2131960562"/>
+        <p14:creationId xmlns:p14="http://schemas.microsoft.com/office/powerpoint/2010/main" val="1543655770"/>
       </p:ext>
     </p:extLst>
   </p:cSld>
@@ -2626,7 +2626,7 @@
           <p:cNvPr id="1" name="">
             <a:extLst xmlns:a="http://schemas.openxmlformats.org/drawingml/2006/main">
               <a:ext uri="{FF2B5EF4-FFF2-40B4-BE49-F238E27FC236}">
-                <a16:creationId xmlns:a16="http://schemas.microsoft.com/office/drawing/2014/main" id="{D22EB23F-EDF9-4C1A-A852-1B25D5705A4A}"/>
+                <a16:creationId xmlns:a16="http://schemas.microsoft.com/office/drawing/2014/main" id="{BD827338-9313-4F0E-AC02-978130D7BD67}"/>
               </a:ext>
             </a:extLst>
           </p:cNvPr>
@@ -2686,7 +2686,7 @@
           <p:cNvPr id="2" name="">
             <a:extLst xmlns:a="http://schemas.openxmlformats.org/drawingml/2006/main">
               <a:ext uri="{FF2B5EF4-FFF2-40B4-BE49-F238E27FC236}">
-                <a16:creationId xmlns:a16="http://schemas.microsoft.com/office/drawing/2014/main" id="{0827DD09-8D82-4F19-AB60-99E71545F0AD}"/>
+                <a16:creationId xmlns:a16="http://schemas.microsoft.com/office/drawing/2014/main" id="{AA139C55-A486-4E97-BA3E-CCCD29676C9A}"/>
               </a:ext>
             </a:extLst>
           </p:cNvPr>
@@ -2698,7 +2698,7 @@
         <p:spPr>
           <a:xfrm xmlns:a="http://schemas.openxmlformats.org/drawingml/2006/main">
             <a:off x="400050" y="742950"/>
-            <a:ext cx="8858250" cy="1123950"/>
+            <a:ext cx="8572500" cy="1238250"/>
           </a:xfrm>
           <a:prstGeom xmlns:a="http://schemas.openxmlformats.org/drawingml/2006/main" prst="rect">
             <a:avLst/>
@@ -2715,10 +2715,10 @@
           <a:p xmlns:a="http://schemas.openxmlformats.org/drawingml/2006/main">
             <a:pPr algn="l">
               <a:lnSpc>
-                <a:spcPct val="102000"/>
-              </a:lnSpc>
-              <a:buNone/>
-              <a:defRPr sz="3600" b="1">
+                <a:spcPct val="105000"/>
+              </a:lnSpc>
+              <a:buNone/>
+              <a:defRPr sz="3150" b="1">
                 <a:solidFill>
                   <a:srgbClr val="000000"/>
                 </a:solidFill>
@@ -2728,7 +2728,7 @@
               </a:defRPr>
             </a:pPr>
             <a:r>
-              <a:rPr sz="3600" b="1">
+              <a:rPr sz="3150" b="1">
                 <a:solidFill>
                   <a:srgbClr val="000000"/>
                 </a:solidFill>
@@ -2746,19 +2746,19 @@
           <p:cNvPr id="3" name="">
             <a:extLst xmlns:a="http://schemas.openxmlformats.org/drawingml/2006/main">
               <a:ext uri="{FF2B5EF4-FFF2-40B4-BE49-F238E27FC236}">
-                <a16:creationId xmlns:a16="http://schemas.microsoft.com/office/drawing/2014/main" id="{126A4CD2-4E6F-4AE5-9B9C-65A429C61BBB}"/>
-              </a:ext>
-            </a:extLst>
-          </p:cNvPr>
-          <p:cNvSpPr>
-            <a:spLocks xmlns:a="http://schemas.openxmlformats.org/drawingml/2006/main" noGrp="1"/>
-          </p:cNvSpPr>
-          <p:nvPr/>
-        </p:nvSpPr>
-        <p:spPr>
-          <a:xfrm xmlns:a="http://schemas.openxmlformats.org/drawingml/2006/main">
-            <a:off x="400050" y="1943100"/>
-            <a:ext cx="7239000" cy="609600"/>
+                <a16:creationId xmlns:a16="http://schemas.microsoft.com/office/drawing/2014/main" id="{71E82E87-6706-4802-A777-118446AD311A}"/>
+              </a:ext>
+            </a:extLst>
+          </p:cNvPr>
+          <p:cNvSpPr>
+            <a:spLocks xmlns:a="http://schemas.openxmlformats.org/drawingml/2006/main" noGrp="1"/>
+          </p:cNvSpPr>
+          <p:nvPr/>
+        </p:nvSpPr>
+        <p:spPr>
+          <a:xfrm xmlns:a="http://schemas.openxmlformats.org/drawingml/2006/main">
+            <a:off x="400050" y="2076450"/>
+            <a:ext cx="7620000" cy="590550"/>
           </a:xfrm>
           <a:prstGeom xmlns:a="http://schemas.openxmlformats.org/drawingml/2006/main" prst="rect">
             <a:avLst/>
@@ -2775,20 +2775,20 @@
           <a:p xmlns:a="http://schemas.openxmlformats.org/drawingml/2006/main">
             <a:pPr algn="l">
               <a:lnSpc>
-                <a:spcPct val="125000"/>
-              </a:lnSpc>
-              <a:buNone/>
-              <a:defRPr sz="1650" b="0">
-                <a:solidFill>
-                  <a:srgbClr val="555555"/>
-                </a:solidFill>
-                <a:latin typeface="Malgun Gothic"/>
-                <a:ea typeface="Malgun Gothic"/>
-                <a:cs typeface="Malgun Gothic"/>
-              </a:defRPr>
-            </a:pPr>
-            <a:r>
-              <a:rPr sz="1650" b="0">
+                <a:spcPct val="122000"/>
+              </a:lnSpc>
+              <a:buNone/>
+              <a:defRPr sz="1500" b="0">
+                <a:solidFill>
+                  <a:srgbClr val="555555"/>
+                </a:solidFill>
+                <a:latin typeface="Malgun Gothic"/>
+                <a:ea typeface="Malgun Gothic"/>
+                <a:cs typeface="Malgun Gothic"/>
+              </a:defRPr>
+            </a:pPr>
+            <a:r>
+              <a:rPr sz="1500" b="0">
                 <a:solidFill>
                   <a:srgbClr val="555555"/>
                 </a:solidFill>
@@ -2806,7 +2806,7 @@
           <p:cNvPr id="4" name="">
             <a:extLst xmlns:a="http://schemas.openxmlformats.org/drawingml/2006/main">
               <a:ext uri="{FF2B5EF4-FFF2-40B4-BE49-F238E27FC236}">
-                <a16:creationId xmlns:a16="http://schemas.microsoft.com/office/drawing/2014/main" id="{3FB4D618-4C18-42B8-9709-DD346F84CD18}"/>
+                <a16:creationId xmlns:a16="http://schemas.microsoft.com/office/drawing/2014/main" id="{1292BCCE-FF83-467A-9FE3-B592DFEB74DB}"/>
               </a:ext>
             </a:extLst>
           </p:cNvPr>
@@ -2866,7 +2866,7 @@
           <p:cNvPr id="5" name="">
             <a:extLst xmlns:a="http://schemas.openxmlformats.org/drawingml/2006/main">
               <a:ext uri="{FF2B5EF4-FFF2-40B4-BE49-F238E27FC236}">
-                <a16:creationId xmlns:a16="http://schemas.microsoft.com/office/drawing/2014/main" id="{80E7CB6C-F3C7-4453-AF61-23DED4474225}"/>
+                <a16:creationId xmlns:a16="http://schemas.microsoft.com/office/drawing/2014/main" id="{FBA2CD43-3E5F-4811-A6DF-93A70240673C}"/>
               </a:ext>
             </a:extLst>
           </p:cNvPr>
@@ -2897,7 +2897,7 @@
           <p:cNvPr id="6" name="">
             <a:extLst xmlns:a="http://schemas.openxmlformats.org/drawingml/2006/main">
               <a:ext uri="{FF2B5EF4-FFF2-40B4-BE49-F238E27FC236}">
-                <a16:creationId xmlns:a16="http://schemas.microsoft.com/office/drawing/2014/main" id="{EAD2F226-F401-402C-A09B-7D3B8E4B15E8}"/>
+                <a16:creationId xmlns:a16="http://schemas.microsoft.com/office/drawing/2014/main" id="{E423985E-AFD1-47D5-835C-8911A4BDED40}"/>
               </a:ext>
             </a:extLst>
           </p:cNvPr>
@@ -2928,7 +2928,7 @@
           <p:cNvPr id="7" name="">
             <a:extLst xmlns:a="http://schemas.openxmlformats.org/drawingml/2006/main">
               <a:ext uri="{FF2B5EF4-FFF2-40B4-BE49-F238E27FC236}">
-                <a16:creationId xmlns:a16="http://schemas.microsoft.com/office/drawing/2014/main" id="{9EB0E016-1D74-4C5F-AB0F-F92FCAB93300}"/>
+                <a16:creationId xmlns:a16="http://schemas.microsoft.com/office/drawing/2014/main" id="{4A5EAD9F-B6D2-459D-B9D2-369288A05378}"/>
               </a:ext>
             </a:extLst>
           </p:cNvPr>
@@ -2959,7 +2959,7 @@
           <p:cNvPr id="8" name="">
             <a:extLst xmlns:a="http://schemas.openxmlformats.org/drawingml/2006/main">
               <a:ext uri="{FF2B5EF4-FFF2-40B4-BE49-F238E27FC236}">
-                <a16:creationId xmlns:a16="http://schemas.microsoft.com/office/drawing/2014/main" id="{819500BF-4E76-4058-966C-64CB604FCD98}"/>
+                <a16:creationId xmlns:a16="http://schemas.microsoft.com/office/drawing/2014/main" id="{65CE3581-B24F-45A6-9938-A11F04BE84DD}"/>
               </a:ext>
             </a:extLst>
           </p:cNvPr>
@@ -3019,7 +3019,7 @@
           <p:cNvPr id="9" name="">
             <a:extLst xmlns:a="http://schemas.openxmlformats.org/drawingml/2006/main">
               <a:ext uri="{FF2B5EF4-FFF2-40B4-BE49-F238E27FC236}">
-                <a16:creationId xmlns:a16="http://schemas.microsoft.com/office/drawing/2014/main" id="{B1DC7DF8-C494-43BF-94A6-E867BB873960}"/>
+                <a16:creationId xmlns:a16="http://schemas.microsoft.com/office/drawing/2014/main" id="{E065E96D-E52E-4C61-BBF5-1A3B8E9C07A7}"/>
               </a:ext>
             </a:extLst>
           </p:cNvPr>
@@ -3079,7 +3079,7 @@
           <p:cNvPr id="10" name="">
             <a:extLst xmlns:a="http://schemas.openxmlformats.org/drawingml/2006/main">
               <a:ext uri="{FF2B5EF4-FFF2-40B4-BE49-F238E27FC236}">
-                <a16:creationId xmlns:a16="http://schemas.microsoft.com/office/drawing/2014/main" id="{AD2F1F52-DC40-4E25-85F8-210155615718}"/>
+                <a16:creationId xmlns:a16="http://schemas.microsoft.com/office/drawing/2014/main" id="{4192954F-77E0-4AC1-A666-F14AE1854004}"/>
               </a:ext>
             </a:extLst>
           </p:cNvPr>
@@ -3139,7 +3139,7 @@
           <p:cNvPr id="11" name="">
             <a:extLst xmlns:a="http://schemas.openxmlformats.org/drawingml/2006/main">
               <a:ext uri="{FF2B5EF4-FFF2-40B4-BE49-F238E27FC236}">
-                <a16:creationId xmlns:a16="http://schemas.microsoft.com/office/drawing/2014/main" id="{05371DA3-508A-44B8-9EF1-84121C2818A5}"/>
+                <a16:creationId xmlns:a16="http://schemas.microsoft.com/office/drawing/2014/main" id="{65346A58-B626-476A-9DA0-1CE9C9F9E641}"/>
               </a:ext>
             </a:extLst>
           </p:cNvPr>
@@ -3199,7 +3199,7 @@
           <p:cNvPr id="12" name="">
             <a:extLst xmlns:a="http://schemas.openxmlformats.org/drawingml/2006/main">
               <a:ext uri="{FF2B5EF4-FFF2-40B4-BE49-F238E27FC236}">
-                <a16:creationId xmlns:a16="http://schemas.microsoft.com/office/drawing/2014/main" id="{F55D797A-E601-4EEF-8C03-C26CCACA4D7D}"/>
+                <a16:creationId xmlns:a16="http://schemas.microsoft.com/office/drawing/2014/main" id="{64144CD1-F0C6-47A7-BA6A-E45D62F4B497}"/>
               </a:ext>
             </a:extLst>
           </p:cNvPr>
@@ -3259,7 +3259,7 @@
           <p:cNvPr id="13" name="">
             <a:extLst xmlns:a="http://schemas.openxmlformats.org/drawingml/2006/main">
               <a:ext uri="{FF2B5EF4-FFF2-40B4-BE49-F238E27FC236}">
-                <a16:creationId xmlns:a16="http://schemas.microsoft.com/office/drawing/2014/main" id="{9005DD9C-EB58-42B3-9461-97B5D91775B0}"/>
+                <a16:creationId xmlns:a16="http://schemas.microsoft.com/office/drawing/2014/main" id="{A09B48C7-C325-4717-A412-CEB6328A9ECC}"/>
               </a:ext>
             </a:extLst>
           </p:cNvPr>
@@ -3319,7 +3319,7 @@
           <p:cNvPr id="14" name="">
             <a:extLst xmlns:a="http://schemas.openxmlformats.org/drawingml/2006/main">
               <a:ext uri="{FF2B5EF4-FFF2-40B4-BE49-F238E27FC236}">
-                <a16:creationId xmlns:a16="http://schemas.microsoft.com/office/drawing/2014/main" id="{B0C874E5-F5D5-4681-927A-4EDED00541F0}"/>
+                <a16:creationId xmlns:a16="http://schemas.microsoft.com/office/drawing/2014/main" id="{95EAFFA9-C2E2-4187-8F44-DFE628D5CCE0}"/>
               </a:ext>
             </a:extLst>
           </p:cNvPr>
@@ -3379,7 +3379,7 @@
           <p:cNvPr id="15" name="">
             <a:extLst xmlns:a="http://schemas.openxmlformats.org/drawingml/2006/main">
               <a:ext uri="{FF2B5EF4-FFF2-40B4-BE49-F238E27FC236}">
-                <a16:creationId xmlns:a16="http://schemas.microsoft.com/office/drawing/2014/main" id="{3208840E-B0BB-4B48-AA3B-2C584E95A2A2}"/>
+                <a16:creationId xmlns:a16="http://schemas.microsoft.com/office/drawing/2014/main" id="{9D130E71-60C0-41E4-A216-067695A7C471}"/>
               </a:ext>
             </a:extLst>
           </p:cNvPr>
@@ -3439,7 +3439,7 @@
           <p:cNvPr id="16" name="">
             <a:extLst xmlns:a="http://schemas.openxmlformats.org/drawingml/2006/main">
               <a:ext uri="{FF2B5EF4-FFF2-40B4-BE49-F238E27FC236}">
-                <a16:creationId xmlns:a16="http://schemas.microsoft.com/office/drawing/2014/main" id="{4B0B9A76-146A-477F-9876-6E85DE44F018}"/>
+                <a16:creationId xmlns:a16="http://schemas.microsoft.com/office/drawing/2014/main" id="{6B9012D9-6D5D-453F-9C1C-4262CAB7F7FB}"/>
               </a:ext>
             </a:extLst>
           </p:cNvPr>
@@ -3499,7 +3499,7 @@
           <p:cNvPr id="17" name="">
             <a:extLst xmlns:a="http://schemas.openxmlformats.org/drawingml/2006/main">
               <a:ext uri="{FF2B5EF4-FFF2-40B4-BE49-F238E27FC236}">
-                <a16:creationId xmlns:a16="http://schemas.microsoft.com/office/drawing/2014/main" id="{7F988D26-6384-4088-997A-464F4A5A9FB3}"/>
+                <a16:creationId xmlns:a16="http://schemas.microsoft.com/office/drawing/2014/main" id="{95F88F94-8DC3-4C1D-B863-083AFF67FE7B}"/>
               </a:ext>
             </a:extLst>
           </p:cNvPr>
@@ -3530,7 +3530,7 @@
           <p:cNvPr id="18" name="">
             <a:extLst xmlns:a="http://schemas.openxmlformats.org/drawingml/2006/main">
               <a:ext uri="{FF2B5EF4-FFF2-40B4-BE49-F238E27FC236}">
-                <a16:creationId xmlns:a16="http://schemas.microsoft.com/office/drawing/2014/main" id="{07B85988-C432-40D8-9F23-C41DC5FEF85B}"/>
+                <a16:creationId xmlns:a16="http://schemas.microsoft.com/office/drawing/2014/main" id="{F686749F-E70A-40DF-9483-C7A4B8238CD3}"/>
               </a:ext>
             </a:extLst>
           </p:cNvPr>
@@ -3590,7 +3590,7 @@
           <p:cNvPr id="19" name="">
             <a:extLst xmlns:a="http://schemas.openxmlformats.org/drawingml/2006/main">
               <a:ext uri="{FF2B5EF4-FFF2-40B4-BE49-F238E27FC236}">
-                <a16:creationId xmlns:a16="http://schemas.microsoft.com/office/drawing/2014/main" id="{DA456A6C-260D-4EE3-BC62-300DA9782C59}"/>
+                <a16:creationId xmlns:a16="http://schemas.microsoft.com/office/drawing/2014/main" id="{B385F31E-99AF-4D5F-90A4-E8BD2341D12A}"/>
               </a:ext>
             </a:extLst>
           </p:cNvPr>
@@ -3648,7 +3648,7 @@
     </p:spTree>
     <p:extLst>
       <p:ext uri="{BB962C8B-B14F-4D97-AF65-F5344CB8AC3E}">
-        <p14:creationId xmlns:p14="http://schemas.microsoft.com/office/powerpoint/2010/main" val="37925852"/>
+        <p14:creationId xmlns:p14="http://schemas.microsoft.com/office/powerpoint/2010/main" val="1838065814"/>
       </p:ext>
     </p:extLst>
   </p:cSld>
@@ -3679,7 +3679,7 @@
           <p:cNvPr id="1" name="">
             <a:extLst xmlns:a="http://schemas.openxmlformats.org/drawingml/2006/main">
               <a:ext uri="{FF2B5EF4-FFF2-40B4-BE49-F238E27FC236}">
-                <a16:creationId xmlns:a16="http://schemas.microsoft.com/office/drawing/2014/main" id="{18B3035B-BCA3-4476-843A-72714CFF9CDA}"/>
+                <a16:creationId xmlns:a16="http://schemas.microsoft.com/office/drawing/2014/main" id="{A571117B-A549-4E23-A2E3-2029F63E9B51}"/>
               </a:ext>
             </a:extLst>
           </p:cNvPr>
@@ -3739,7 +3739,7 @@
           <p:cNvPr id="2" name="">
             <a:extLst xmlns:a="http://schemas.openxmlformats.org/drawingml/2006/main">
               <a:ext uri="{FF2B5EF4-FFF2-40B4-BE49-F238E27FC236}">
-                <a16:creationId xmlns:a16="http://schemas.microsoft.com/office/drawing/2014/main" id="{6B3C2FAB-F3EA-4A70-A2AD-A06F12364187}"/>
+                <a16:creationId xmlns:a16="http://schemas.microsoft.com/office/drawing/2014/main" id="{F8D91AA6-4812-4CED-9EAB-63DC41191684}"/>
               </a:ext>
             </a:extLst>
           </p:cNvPr>
@@ -3751,7 +3751,7 @@
         <p:spPr>
           <a:xfrm xmlns:a="http://schemas.openxmlformats.org/drawingml/2006/main">
             <a:off x="400050" y="742950"/>
-            <a:ext cx="8858250" cy="1123950"/>
+            <a:ext cx="8572500" cy="1238250"/>
           </a:xfrm>
           <a:prstGeom xmlns:a="http://schemas.openxmlformats.org/drawingml/2006/main" prst="rect">
             <a:avLst/>
@@ -3768,10 +3768,10 @@
           <a:p xmlns:a="http://schemas.openxmlformats.org/drawingml/2006/main">
             <a:pPr algn="l">
               <a:lnSpc>
-                <a:spcPct val="102000"/>
-              </a:lnSpc>
-              <a:buNone/>
-              <a:defRPr sz="3600" b="1">
+                <a:spcPct val="105000"/>
+              </a:lnSpc>
+              <a:buNone/>
+              <a:defRPr sz="3150" b="1">
                 <a:solidFill>
                   <a:srgbClr val="000000"/>
                 </a:solidFill>
@@ -3781,7 +3781,7 @@
               </a:defRPr>
             </a:pPr>
             <a:r>
-              <a:rPr sz="3600" b="1">
+              <a:rPr sz="3150" b="1">
                 <a:solidFill>
                   <a:srgbClr val="000000"/>
                 </a:solidFill>
@@ -3799,19 +3799,19 @@
           <p:cNvPr id="3" name="">
             <a:extLst xmlns:a="http://schemas.openxmlformats.org/drawingml/2006/main">
               <a:ext uri="{FF2B5EF4-FFF2-40B4-BE49-F238E27FC236}">
-                <a16:creationId xmlns:a16="http://schemas.microsoft.com/office/drawing/2014/main" id="{8D34B78E-2597-46E4-8970-74B5B183BEE4}"/>
-              </a:ext>
-            </a:extLst>
-          </p:cNvPr>
-          <p:cNvSpPr>
-            <a:spLocks xmlns:a="http://schemas.openxmlformats.org/drawingml/2006/main" noGrp="1"/>
-          </p:cNvSpPr>
-          <p:nvPr/>
-        </p:nvSpPr>
-        <p:spPr>
-          <a:xfrm xmlns:a="http://schemas.openxmlformats.org/drawingml/2006/main">
-            <a:off x="400050" y="1943100"/>
-            <a:ext cx="7239000" cy="609600"/>
+                <a16:creationId xmlns:a16="http://schemas.microsoft.com/office/drawing/2014/main" id="{C7EEE748-076E-4021-AC3D-DB71521EC881}"/>
+              </a:ext>
+            </a:extLst>
+          </p:cNvPr>
+          <p:cNvSpPr>
+            <a:spLocks xmlns:a="http://schemas.openxmlformats.org/drawingml/2006/main" noGrp="1"/>
+          </p:cNvSpPr>
+          <p:nvPr/>
+        </p:nvSpPr>
+        <p:spPr>
+          <a:xfrm xmlns:a="http://schemas.openxmlformats.org/drawingml/2006/main">
+            <a:off x="400050" y="2076450"/>
+            <a:ext cx="7620000" cy="590550"/>
           </a:xfrm>
           <a:prstGeom xmlns:a="http://schemas.openxmlformats.org/drawingml/2006/main" prst="rect">
             <a:avLst/>
@@ -3828,20 +3828,20 @@
           <a:p xmlns:a="http://schemas.openxmlformats.org/drawingml/2006/main">
             <a:pPr algn="l">
               <a:lnSpc>
-                <a:spcPct val="125000"/>
-              </a:lnSpc>
-              <a:buNone/>
-              <a:defRPr sz="1650" b="0">
-                <a:solidFill>
-                  <a:srgbClr val="555555"/>
-                </a:solidFill>
-                <a:latin typeface="Malgun Gothic"/>
-                <a:ea typeface="Malgun Gothic"/>
-                <a:cs typeface="Malgun Gothic"/>
-              </a:defRPr>
-            </a:pPr>
-            <a:r>
-              <a:rPr sz="1650" b="0">
+                <a:spcPct val="122000"/>
+              </a:lnSpc>
+              <a:buNone/>
+              <a:defRPr sz="1500" b="0">
+                <a:solidFill>
+                  <a:srgbClr val="555555"/>
+                </a:solidFill>
+                <a:latin typeface="Malgun Gothic"/>
+                <a:ea typeface="Malgun Gothic"/>
+                <a:cs typeface="Malgun Gothic"/>
+              </a:defRPr>
+            </a:pPr>
+            <a:r>
+              <a:rPr sz="1500" b="0">
                 <a:solidFill>
                   <a:srgbClr val="555555"/>
                 </a:solidFill>
@@ -3859,7 +3859,7 @@
           <p:cNvPr id="4" name="">
             <a:extLst xmlns:a="http://schemas.openxmlformats.org/drawingml/2006/main">
               <a:ext uri="{FF2B5EF4-FFF2-40B4-BE49-F238E27FC236}">
-                <a16:creationId xmlns:a16="http://schemas.microsoft.com/office/drawing/2014/main" id="{33FBAF8F-A116-40A8-9BB6-775C68D97988}"/>
+                <a16:creationId xmlns:a16="http://schemas.microsoft.com/office/drawing/2014/main" id="{CA7A4BF0-3F18-4891-AD56-9CB7D1D8F672}"/>
               </a:ext>
             </a:extLst>
           </p:cNvPr>
@@ -3919,7 +3919,7 @@
           <p:cNvPr id="5" name="">
             <a:extLst xmlns:a="http://schemas.openxmlformats.org/drawingml/2006/main">
               <a:ext uri="{FF2B5EF4-FFF2-40B4-BE49-F238E27FC236}">
-                <a16:creationId xmlns:a16="http://schemas.microsoft.com/office/drawing/2014/main" id="{7053363E-CB3A-4FD5-8FD3-C5278A11B2AC}"/>
+                <a16:creationId xmlns:a16="http://schemas.microsoft.com/office/drawing/2014/main" id="{8CCD8C17-E4FB-48D7-A750-590CEB825632}"/>
               </a:ext>
             </a:extLst>
           </p:cNvPr>
@@ -3979,7 +3979,7 @@
           <p:cNvPr id="6" name="">
             <a:extLst xmlns:a="http://schemas.openxmlformats.org/drawingml/2006/main">
               <a:ext uri="{FF2B5EF4-FFF2-40B4-BE49-F238E27FC236}">
-                <a16:creationId xmlns:a16="http://schemas.microsoft.com/office/drawing/2014/main" id="{EF995284-CBDB-4C47-80F0-653735968BC5}"/>
+                <a16:creationId xmlns:a16="http://schemas.microsoft.com/office/drawing/2014/main" id="{7FB74187-0A5C-4C96-B257-6A643F233819}"/>
               </a:ext>
             </a:extLst>
           </p:cNvPr>
@@ -4039,7 +4039,7 @@
           <p:cNvPr id="7" name="">
             <a:extLst xmlns:a="http://schemas.openxmlformats.org/drawingml/2006/main">
               <a:ext uri="{FF2B5EF4-FFF2-40B4-BE49-F238E27FC236}">
-                <a16:creationId xmlns:a16="http://schemas.microsoft.com/office/drawing/2014/main" id="{E9E4C284-8B72-460B-87AB-507792114FF2}"/>
+                <a16:creationId xmlns:a16="http://schemas.microsoft.com/office/drawing/2014/main" id="{26332404-2273-408C-841E-FDA3826EC525}"/>
               </a:ext>
             </a:extLst>
           </p:cNvPr>
@@ -4099,7 +4099,7 @@
           <p:cNvPr id="8" name="">
             <a:extLst xmlns:a="http://schemas.openxmlformats.org/drawingml/2006/main">
               <a:ext uri="{FF2B5EF4-FFF2-40B4-BE49-F238E27FC236}">
-                <a16:creationId xmlns:a16="http://schemas.microsoft.com/office/drawing/2014/main" id="{0123339A-40DA-486E-8613-F5BFBFCA3BD2}"/>
+                <a16:creationId xmlns:a16="http://schemas.microsoft.com/office/drawing/2014/main" id="{78D45F58-76B9-4F40-A85A-F6380ED23BA6}"/>
               </a:ext>
             </a:extLst>
           </p:cNvPr>
@@ -4159,7 +4159,7 @@
           <p:cNvPr id="9" name="">
             <a:extLst xmlns:a="http://schemas.openxmlformats.org/drawingml/2006/main">
               <a:ext uri="{FF2B5EF4-FFF2-40B4-BE49-F238E27FC236}">
-                <a16:creationId xmlns:a16="http://schemas.microsoft.com/office/drawing/2014/main" id="{971F89EA-036A-4E01-A528-3B8CBF9FBA8F}"/>
+                <a16:creationId xmlns:a16="http://schemas.microsoft.com/office/drawing/2014/main" id="{6A4E8F42-D26B-4FE4-BBF3-EEDF9D7EC6AD}"/>
               </a:ext>
             </a:extLst>
           </p:cNvPr>
@@ -4219,7 +4219,7 @@
           <p:cNvPr id="10" name="">
             <a:extLst xmlns:a="http://schemas.openxmlformats.org/drawingml/2006/main">
               <a:ext uri="{FF2B5EF4-FFF2-40B4-BE49-F238E27FC236}">
-                <a16:creationId xmlns:a16="http://schemas.microsoft.com/office/drawing/2014/main" id="{F1D1AA35-1CD6-4FD8-AAAA-11BCB5B985CD}"/>
+                <a16:creationId xmlns:a16="http://schemas.microsoft.com/office/drawing/2014/main" id="{64A71F1D-675D-4D87-9261-4F21950EBFCD}"/>
               </a:ext>
             </a:extLst>
           </p:cNvPr>
@@ -4279,7 +4279,7 @@
           <p:cNvPr id="11" name="">
             <a:extLst xmlns:a="http://schemas.openxmlformats.org/drawingml/2006/main">
               <a:ext uri="{FF2B5EF4-FFF2-40B4-BE49-F238E27FC236}">
-                <a16:creationId xmlns:a16="http://schemas.microsoft.com/office/drawing/2014/main" id="{A71BDACB-4D91-4241-B3F0-2297790BF6FE}"/>
+                <a16:creationId xmlns:a16="http://schemas.microsoft.com/office/drawing/2014/main" id="{52B3BD06-B8B2-432C-A86A-8B8E02920F1A}"/>
               </a:ext>
             </a:extLst>
           </p:cNvPr>
@@ -4291,7 +4291,7 @@
         <p:spPr>
           <a:xfrm xmlns:a="http://schemas.openxmlformats.org/drawingml/2006/main">
             <a:off x="6762750" y="2914650"/>
-            <a:ext cx="4476750" cy="2381250"/>
+            <a:ext cx="4476750" cy="2686050"/>
           </a:xfrm>
           <a:prstGeom xmlns:a="http://schemas.openxmlformats.org/drawingml/2006/main" prst="rect">
             <a:avLst/>
@@ -4310,7 +4310,7 @@
           <p:cNvPr id="12" name="">
             <a:extLst xmlns:a="http://schemas.openxmlformats.org/drawingml/2006/main">
               <a:ext uri="{FF2B5EF4-FFF2-40B4-BE49-F238E27FC236}">
-                <a16:creationId xmlns:a16="http://schemas.microsoft.com/office/drawing/2014/main" id="{6C06283F-1F70-4A11-9BC8-A3F89A8CE02A}"/>
+                <a16:creationId xmlns:a16="http://schemas.microsoft.com/office/drawing/2014/main" id="{01C87E9E-A81A-4315-9102-BD002DE519DB}"/>
               </a:ext>
             </a:extLst>
           </p:cNvPr>
@@ -4370,19 +4370,19 @@
           <p:cNvPr id="13" name="">
             <a:extLst xmlns:a="http://schemas.openxmlformats.org/drawingml/2006/main">
               <a:ext uri="{FF2B5EF4-FFF2-40B4-BE49-F238E27FC236}">
-                <a16:creationId xmlns:a16="http://schemas.microsoft.com/office/drawing/2014/main" id="{2C1DD4BA-D10E-424C-91B0-6BCC34D5E3A6}"/>
-              </a:ext>
-            </a:extLst>
-          </p:cNvPr>
-          <p:cNvSpPr>
-            <a:spLocks xmlns:a="http://schemas.openxmlformats.org/drawingml/2006/main" noGrp="1"/>
-          </p:cNvSpPr>
-          <p:nvPr/>
-        </p:nvSpPr>
-        <p:spPr>
-          <a:xfrm xmlns:a="http://schemas.openxmlformats.org/drawingml/2006/main">
-            <a:off x="7067550" y="3676650"/>
-            <a:ext cx="3619500" cy="1200150"/>
+                <a16:creationId xmlns:a16="http://schemas.microsoft.com/office/drawing/2014/main" id="{370BFAB2-33B2-476F-9AC6-A250CB11FA82}"/>
+              </a:ext>
+            </a:extLst>
+          </p:cNvPr>
+          <p:cNvSpPr>
+            <a:spLocks xmlns:a="http://schemas.openxmlformats.org/drawingml/2006/main" noGrp="1"/>
+          </p:cNvSpPr>
+          <p:nvPr/>
+        </p:nvSpPr>
+        <p:spPr>
+          <a:xfrm xmlns:a="http://schemas.openxmlformats.org/drawingml/2006/main">
+            <a:off x="7067550" y="3733800"/>
+            <a:ext cx="3695700" cy="1009650"/>
           </a:xfrm>
           <a:prstGeom xmlns:a="http://schemas.openxmlformats.org/drawingml/2006/main" prst="rect">
             <a:avLst/>
@@ -4402,7 +4402,7 @@
                 <a:spcPct val="120000"/>
               </a:lnSpc>
               <a:buNone/>
-              <a:defRPr sz="1500" b="0">
+              <a:defRPr sz="1350" b="0">
                 <a:solidFill>
                   <a:srgbClr val="000000"/>
                 </a:solidFill>
@@ -4412,7 +4412,7 @@
               </a:defRPr>
             </a:pPr>
             <a:r>
-              <a:rPr sz="1500" b="0">
+              <a:rPr sz="1350" b="0">
                 <a:solidFill>
                   <a:srgbClr val="000000"/>
                 </a:solidFill>
@@ -4429,7 +4429,7 @@
                 <a:spcPct val="120000"/>
               </a:lnSpc>
               <a:buNone/>
-              <a:defRPr sz="1500" b="0">
+              <a:defRPr sz="1350" b="0">
                 <a:solidFill>
                   <a:srgbClr val="000000"/>
                 </a:solidFill>
@@ -4439,7 +4439,7 @@
               </a:defRPr>
             </a:pPr>
             <a:r>
-              <a:rPr sz="1500" b="0">
+              <a:rPr sz="1350" b="0">
                 <a:solidFill>
                   <a:srgbClr val="000000"/>
                 </a:solidFill>
@@ -4456,7 +4456,7 @@
                 <a:spcPct val="120000"/>
               </a:lnSpc>
               <a:buNone/>
-              <a:defRPr sz="1500" b="0">
+              <a:defRPr sz="1350" b="0">
                 <a:solidFill>
                   <a:srgbClr val="000000"/>
                 </a:solidFill>
@@ -4466,7 +4466,7 @@
               </a:defRPr>
             </a:pPr>
             <a:r>
-              <a:rPr sz="1500" b="0">
+              <a:rPr sz="1350" b="0">
                 <a:solidFill>
                   <a:srgbClr val="000000"/>
                 </a:solidFill>
@@ -4484,19 +4484,19 @@
           <p:cNvPr id="14" name="">
             <a:extLst xmlns:a="http://schemas.openxmlformats.org/drawingml/2006/main">
               <a:ext uri="{FF2B5EF4-FFF2-40B4-BE49-F238E27FC236}">
-                <a16:creationId xmlns:a16="http://schemas.microsoft.com/office/drawing/2014/main" id="{B0995840-171D-4BAB-8B57-555551FCB083}"/>
-              </a:ext>
-            </a:extLst>
-          </p:cNvPr>
-          <p:cNvSpPr>
-            <a:spLocks xmlns:a="http://schemas.openxmlformats.org/drawingml/2006/main" noGrp="1"/>
-          </p:cNvSpPr>
-          <p:nvPr/>
-        </p:nvSpPr>
-        <p:spPr>
-          <a:xfrm xmlns:a="http://schemas.openxmlformats.org/drawingml/2006/main">
-            <a:off x="7067550" y="5010150"/>
-            <a:ext cx="3524250" cy="266700"/>
+                <a16:creationId xmlns:a16="http://schemas.microsoft.com/office/drawing/2014/main" id="{F90F07AC-B83A-44D2-9FF3-8AB6D8C9F99E}"/>
+              </a:ext>
+            </a:extLst>
+          </p:cNvPr>
+          <p:cNvSpPr>
+            <a:spLocks xmlns:a="http://schemas.openxmlformats.org/drawingml/2006/main" noGrp="1"/>
+          </p:cNvSpPr>
+          <p:nvPr/>
+        </p:nvSpPr>
+        <p:spPr>
+          <a:xfrm xmlns:a="http://schemas.openxmlformats.org/drawingml/2006/main">
+            <a:off x="7067550" y="5105400"/>
+            <a:ext cx="3695700" cy="381000"/>
           </a:xfrm>
           <a:prstGeom xmlns:a="http://schemas.openxmlformats.org/drawingml/2006/main" prst="rect">
             <a:avLst/>
@@ -4516,7 +4516,7 @@
                 <a:spcPct val="112000"/>
               </a:lnSpc>
               <a:buNone/>
-              <a:defRPr sz="1350" b="1">
+              <a:defRPr sz="1275" b="1">
                 <a:solidFill>
                   <a:srgbClr val="FF6B35"/>
                 </a:solidFill>
@@ -4526,7 +4526,7 @@
               </a:defRPr>
             </a:pPr>
             <a:r>
-              <a:rPr sz="1350" b="1">
+              <a:rPr sz="1275" b="1">
                 <a:solidFill>
                   <a:srgbClr val="FF6B35"/>
                 </a:solidFill>
@@ -4544,7 +4544,7 @@
           <p:cNvPr id="15" name="">
             <a:extLst xmlns:a="http://schemas.openxmlformats.org/drawingml/2006/main">
               <a:ext uri="{FF2B5EF4-FFF2-40B4-BE49-F238E27FC236}">
-                <a16:creationId xmlns:a16="http://schemas.microsoft.com/office/drawing/2014/main" id="{8405EF42-16B4-4F93-9C0D-E7CA6F455D03}"/>
+                <a16:creationId xmlns:a16="http://schemas.microsoft.com/office/drawing/2014/main" id="{AC192349-7C2E-4D8B-A7BC-6A2388A347EB}"/>
               </a:ext>
             </a:extLst>
           </p:cNvPr>
@@ -4575,7 +4575,7 @@
           <p:cNvPr id="16" name="">
             <a:extLst xmlns:a="http://schemas.openxmlformats.org/drawingml/2006/main">
               <a:ext uri="{FF2B5EF4-FFF2-40B4-BE49-F238E27FC236}">
-                <a16:creationId xmlns:a16="http://schemas.microsoft.com/office/drawing/2014/main" id="{2E1274C0-F105-44CA-9682-9CCE4B7C6149}"/>
+                <a16:creationId xmlns:a16="http://schemas.microsoft.com/office/drawing/2014/main" id="{D709E206-8EC3-405A-8393-E8488E793792}"/>
               </a:ext>
             </a:extLst>
           </p:cNvPr>
@@ -4635,7 +4635,7 @@
           <p:cNvPr id="17" name="">
             <a:extLst xmlns:a="http://schemas.openxmlformats.org/drawingml/2006/main">
               <a:ext uri="{FF2B5EF4-FFF2-40B4-BE49-F238E27FC236}">
-                <a16:creationId xmlns:a16="http://schemas.microsoft.com/office/drawing/2014/main" id="{30BB5667-38FF-4C65-8295-F9FEDD13DBFB}"/>
+                <a16:creationId xmlns:a16="http://schemas.microsoft.com/office/drawing/2014/main" id="{76CB2225-287A-4C44-A7DC-A552F7DC945C}"/>
               </a:ext>
             </a:extLst>
           </p:cNvPr>
@@ -4693,7 +4693,7 @@
     </p:spTree>
     <p:extLst>
       <p:ext uri="{BB962C8B-B14F-4D97-AF65-F5344CB8AC3E}">
-        <p14:creationId xmlns:p14="http://schemas.microsoft.com/office/powerpoint/2010/main" val="588528828"/>
+        <p14:creationId xmlns:p14="http://schemas.microsoft.com/office/powerpoint/2010/main" val="79208298"/>
       </p:ext>
     </p:extLst>
   </p:cSld>
@@ -4724,7 +4724,7 @@
           <p:cNvPr id="1" name="">
             <a:extLst xmlns:a="http://schemas.openxmlformats.org/drawingml/2006/main">
               <a:ext uri="{FF2B5EF4-FFF2-40B4-BE49-F238E27FC236}">
-                <a16:creationId xmlns:a16="http://schemas.microsoft.com/office/drawing/2014/main" id="{B8D153D6-53AE-4F0A-BAD1-C0A8E5775CBE}"/>
+                <a16:creationId xmlns:a16="http://schemas.microsoft.com/office/drawing/2014/main" id="{E4D010AF-5EAB-4B4D-A14E-0EB9AED85D35}"/>
               </a:ext>
             </a:extLst>
           </p:cNvPr>
@@ -4784,7 +4784,7 @@
           <p:cNvPr id="2" name="">
             <a:extLst xmlns:a="http://schemas.openxmlformats.org/drawingml/2006/main">
               <a:ext uri="{FF2B5EF4-FFF2-40B4-BE49-F238E27FC236}">
-                <a16:creationId xmlns:a16="http://schemas.microsoft.com/office/drawing/2014/main" id="{AC8E8636-383D-4729-BD6B-9D91F9CBD8D9}"/>
+                <a16:creationId xmlns:a16="http://schemas.microsoft.com/office/drawing/2014/main" id="{0CF0C14A-4068-4118-B4BD-2673F776044A}"/>
               </a:ext>
             </a:extLst>
           </p:cNvPr>
@@ -4796,7 +4796,7 @@
         <p:spPr>
           <a:xfrm xmlns:a="http://schemas.openxmlformats.org/drawingml/2006/main">
             <a:off x="400050" y="742950"/>
-            <a:ext cx="8858250" cy="1123950"/>
+            <a:ext cx="8572500" cy="1238250"/>
           </a:xfrm>
           <a:prstGeom xmlns:a="http://schemas.openxmlformats.org/drawingml/2006/main" prst="rect">
             <a:avLst/>
@@ -4813,10 +4813,10 @@
           <a:p xmlns:a="http://schemas.openxmlformats.org/drawingml/2006/main">
             <a:pPr algn="l">
               <a:lnSpc>
-                <a:spcPct val="102000"/>
-              </a:lnSpc>
-              <a:buNone/>
-              <a:defRPr sz="3600" b="1">
+                <a:spcPct val="105000"/>
+              </a:lnSpc>
+              <a:buNone/>
+              <a:defRPr sz="3150" b="1">
                 <a:solidFill>
                   <a:srgbClr val="000000"/>
                 </a:solidFill>
@@ -4826,7 +4826,7 @@
               </a:defRPr>
             </a:pPr>
             <a:r>
-              <a:rPr sz="3600" b="1">
+              <a:rPr sz="3150" b="1">
                 <a:solidFill>
                   <a:srgbClr val="000000"/>
                 </a:solidFill>
@@ -4844,19 +4844,19 @@
           <p:cNvPr id="3" name="">
             <a:extLst xmlns:a="http://schemas.openxmlformats.org/drawingml/2006/main">
               <a:ext uri="{FF2B5EF4-FFF2-40B4-BE49-F238E27FC236}">
-                <a16:creationId xmlns:a16="http://schemas.microsoft.com/office/drawing/2014/main" id="{F7EC400B-DD3C-4817-8CCE-FEB59069CCFC}"/>
-              </a:ext>
-            </a:extLst>
-          </p:cNvPr>
-          <p:cNvSpPr>
-            <a:spLocks xmlns:a="http://schemas.openxmlformats.org/drawingml/2006/main" noGrp="1"/>
-          </p:cNvSpPr>
-          <p:nvPr/>
-        </p:nvSpPr>
-        <p:spPr>
-          <a:xfrm xmlns:a="http://schemas.openxmlformats.org/drawingml/2006/main">
-            <a:off x="400050" y="1943100"/>
-            <a:ext cx="7239000" cy="609600"/>
+                <a16:creationId xmlns:a16="http://schemas.microsoft.com/office/drawing/2014/main" id="{9569CFD1-5A52-45F0-AC1F-6136C8AD8083}"/>
+              </a:ext>
+            </a:extLst>
+          </p:cNvPr>
+          <p:cNvSpPr>
+            <a:spLocks xmlns:a="http://schemas.openxmlformats.org/drawingml/2006/main" noGrp="1"/>
+          </p:cNvSpPr>
+          <p:nvPr/>
+        </p:nvSpPr>
+        <p:spPr>
+          <a:xfrm xmlns:a="http://schemas.openxmlformats.org/drawingml/2006/main">
+            <a:off x="400050" y="2076450"/>
+            <a:ext cx="7620000" cy="590550"/>
           </a:xfrm>
           <a:prstGeom xmlns:a="http://schemas.openxmlformats.org/drawingml/2006/main" prst="rect">
             <a:avLst/>
@@ -4873,20 +4873,20 @@
           <a:p xmlns:a="http://schemas.openxmlformats.org/drawingml/2006/main">
             <a:pPr algn="l">
               <a:lnSpc>
-                <a:spcPct val="125000"/>
-              </a:lnSpc>
-              <a:buNone/>
-              <a:defRPr sz="1650" b="0">
-                <a:solidFill>
-                  <a:srgbClr val="555555"/>
-                </a:solidFill>
-                <a:latin typeface="Malgun Gothic"/>
-                <a:ea typeface="Malgun Gothic"/>
-                <a:cs typeface="Malgun Gothic"/>
-              </a:defRPr>
-            </a:pPr>
-            <a:r>
-              <a:rPr sz="1650" b="0">
+                <a:spcPct val="122000"/>
+              </a:lnSpc>
+              <a:buNone/>
+              <a:defRPr sz="1500" b="0">
+                <a:solidFill>
+                  <a:srgbClr val="555555"/>
+                </a:solidFill>
+                <a:latin typeface="Malgun Gothic"/>
+                <a:ea typeface="Malgun Gothic"/>
+                <a:cs typeface="Malgun Gothic"/>
+              </a:defRPr>
+            </a:pPr>
+            <a:r>
+              <a:rPr sz="1500" b="0">
                 <a:solidFill>
                   <a:srgbClr val="555555"/>
                 </a:solidFill>
@@ -4904,7 +4904,7 @@
           <p:cNvPr id="4" name="">
             <a:extLst xmlns:a="http://schemas.openxmlformats.org/drawingml/2006/main">
               <a:ext uri="{FF2B5EF4-FFF2-40B4-BE49-F238E27FC236}">
-                <a16:creationId xmlns:a16="http://schemas.microsoft.com/office/drawing/2014/main" id="{66F65708-2545-4F44-A5CE-457E007D1179}"/>
+                <a16:creationId xmlns:a16="http://schemas.microsoft.com/office/drawing/2014/main" id="{8BEB0603-64CF-478C-84E2-D7A023D7CFA3}"/>
               </a:ext>
             </a:extLst>
           </p:cNvPr>
@@ -4964,7 +4964,7 @@
           <p:cNvPr id="5" name="">
             <a:extLst xmlns:a="http://schemas.openxmlformats.org/drawingml/2006/main">
               <a:ext uri="{FF2B5EF4-FFF2-40B4-BE49-F238E27FC236}">
-                <a16:creationId xmlns:a16="http://schemas.microsoft.com/office/drawing/2014/main" id="{752C9266-2ED8-4305-BF3D-2B4D0CA2F4A7}"/>
+                <a16:creationId xmlns:a16="http://schemas.microsoft.com/office/drawing/2014/main" id="{9D648D72-69FD-41DE-9747-41293EFA051F}"/>
               </a:ext>
             </a:extLst>
           </p:cNvPr>
@@ -4995,7 +4995,7 @@
           <p:cNvPr id="6" name="">
             <a:extLst xmlns:a="http://schemas.openxmlformats.org/drawingml/2006/main">
               <a:ext uri="{FF2B5EF4-FFF2-40B4-BE49-F238E27FC236}">
-                <a16:creationId xmlns:a16="http://schemas.microsoft.com/office/drawing/2014/main" id="{DDA669B8-B5A9-4EDA-8DA2-440A36347E16}"/>
+                <a16:creationId xmlns:a16="http://schemas.microsoft.com/office/drawing/2014/main" id="{A600246D-6C71-4AD8-9136-99BC5F70845D}"/>
               </a:ext>
             </a:extLst>
           </p:cNvPr>
@@ -5055,7 +5055,7 @@
           <p:cNvPr id="7" name="">
             <a:extLst xmlns:a="http://schemas.openxmlformats.org/drawingml/2006/main">
               <a:ext uri="{FF2B5EF4-FFF2-40B4-BE49-F238E27FC236}">
-                <a16:creationId xmlns:a16="http://schemas.microsoft.com/office/drawing/2014/main" id="{9ACC48BD-A324-4F69-8E6B-9D0ED74FFD7F}"/>
+                <a16:creationId xmlns:a16="http://schemas.microsoft.com/office/drawing/2014/main" id="{5EB9330B-C89F-41B8-97FD-1266B2039434}"/>
               </a:ext>
             </a:extLst>
           </p:cNvPr>
@@ -5115,7 +5115,7 @@
           <p:cNvPr id="8" name="">
             <a:extLst xmlns:a="http://schemas.openxmlformats.org/drawingml/2006/main">
               <a:ext uri="{FF2B5EF4-FFF2-40B4-BE49-F238E27FC236}">
-                <a16:creationId xmlns:a16="http://schemas.microsoft.com/office/drawing/2014/main" id="{74B2ECB2-FFF6-4FA8-9307-D425098A7681}"/>
+                <a16:creationId xmlns:a16="http://schemas.microsoft.com/office/drawing/2014/main" id="{975981EE-8E77-4953-B65F-464943382DC1}"/>
               </a:ext>
             </a:extLst>
           </p:cNvPr>
@@ -5175,7 +5175,7 @@
           <p:cNvPr id="9" name="">
             <a:extLst xmlns:a="http://schemas.openxmlformats.org/drawingml/2006/main">
               <a:ext uri="{FF2B5EF4-FFF2-40B4-BE49-F238E27FC236}">
-                <a16:creationId xmlns:a16="http://schemas.microsoft.com/office/drawing/2014/main" id="{C3963233-E2DF-40C6-AE9F-A30B4F5094C7}"/>
+                <a16:creationId xmlns:a16="http://schemas.microsoft.com/office/drawing/2014/main" id="{10DD10B1-612A-4926-9F26-BE4AB4F64365}"/>
               </a:ext>
             </a:extLst>
           </p:cNvPr>
@@ -5235,7 +5235,7 @@
           <p:cNvPr id="10" name="">
             <a:extLst xmlns:a="http://schemas.openxmlformats.org/drawingml/2006/main">
               <a:ext uri="{FF2B5EF4-FFF2-40B4-BE49-F238E27FC236}">
-                <a16:creationId xmlns:a16="http://schemas.microsoft.com/office/drawing/2014/main" id="{8A1DE4C8-AB87-47C8-9F8E-9194D9BD2B93}"/>
+                <a16:creationId xmlns:a16="http://schemas.microsoft.com/office/drawing/2014/main" id="{112E97CB-7E91-46D7-8937-AEF8719337DF}"/>
               </a:ext>
             </a:extLst>
           </p:cNvPr>
@@ -5295,7 +5295,7 @@
           <p:cNvPr id="11" name="">
             <a:extLst xmlns:a="http://schemas.openxmlformats.org/drawingml/2006/main">
               <a:ext uri="{FF2B5EF4-FFF2-40B4-BE49-F238E27FC236}">
-                <a16:creationId xmlns:a16="http://schemas.microsoft.com/office/drawing/2014/main" id="{B3928E08-F69F-4837-933F-967965597603}"/>
+                <a16:creationId xmlns:a16="http://schemas.microsoft.com/office/drawing/2014/main" id="{B89ECF5C-5042-4F4C-9192-E89C52D66510}"/>
               </a:ext>
             </a:extLst>
           </p:cNvPr>
@@ -5355,7 +5355,7 @@
           <p:cNvPr id="12" name="">
             <a:extLst xmlns:a="http://schemas.openxmlformats.org/drawingml/2006/main">
               <a:ext uri="{FF2B5EF4-FFF2-40B4-BE49-F238E27FC236}">
-                <a16:creationId xmlns:a16="http://schemas.microsoft.com/office/drawing/2014/main" id="{DE566CA1-E30E-4A69-B814-4EB254EF8829}"/>
+                <a16:creationId xmlns:a16="http://schemas.microsoft.com/office/drawing/2014/main" id="{042E5AED-A701-4850-9021-386AFEBCD197}"/>
               </a:ext>
             </a:extLst>
           </p:cNvPr>
@@ -5415,7 +5415,7 @@
           <p:cNvPr id="13" name="">
             <a:extLst xmlns:a="http://schemas.openxmlformats.org/drawingml/2006/main">
               <a:ext uri="{FF2B5EF4-FFF2-40B4-BE49-F238E27FC236}">
-                <a16:creationId xmlns:a16="http://schemas.microsoft.com/office/drawing/2014/main" id="{073FC4B3-D5F6-4D8B-A5EA-9136B0921D0E}"/>
+                <a16:creationId xmlns:a16="http://schemas.microsoft.com/office/drawing/2014/main" id="{0C6C1BF1-DC20-478E-886C-F26D1D5A6DF1}"/>
               </a:ext>
             </a:extLst>
           </p:cNvPr>
@@ -5475,7 +5475,7 @@
           <p:cNvPr id="14" name="">
             <a:extLst xmlns:a="http://schemas.openxmlformats.org/drawingml/2006/main">
               <a:ext uri="{FF2B5EF4-FFF2-40B4-BE49-F238E27FC236}">
-                <a16:creationId xmlns:a16="http://schemas.microsoft.com/office/drawing/2014/main" id="{88226B22-4B25-4DC1-BABC-6D6DE22A1A44}"/>
+                <a16:creationId xmlns:a16="http://schemas.microsoft.com/office/drawing/2014/main" id="{2D111F46-74A8-4763-AD5C-05DEF78A4B5C}"/>
               </a:ext>
             </a:extLst>
           </p:cNvPr>
@@ -5535,7 +5535,7 @@
           <p:cNvPr id="15" name="">
             <a:extLst xmlns:a="http://schemas.openxmlformats.org/drawingml/2006/main">
               <a:ext uri="{FF2B5EF4-FFF2-40B4-BE49-F238E27FC236}">
-                <a16:creationId xmlns:a16="http://schemas.microsoft.com/office/drawing/2014/main" id="{ED252710-03D7-47A2-A544-81044D1F0C79}"/>
+                <a16:creationId xmlns:a16="http://schemas.microsoft.com/office/drawing/2014/main" id="{9F0BC85B-3521-47E9-8B99-B6D60F6C6E21}"/>
               </a:ext>
             </a:extLst>
           </p:cNvPr>
@@ -5547,7 +5547,7 @@
         <p:spPr>
           <a:xfrm xmlns:a="http://schemas.openxmlformats.org/drawingml/2006/main">
             <a:off x="876300" y="5619750"/>
-            <a:ext cx="9334500" cy="323850"/>
+            <a:ext cx="9334500" cy="419100"/>
           </a:xfrm>
           <a:prstGeom xmlns:a="http://schemas.openxmlformats.org/drawingml/2006/main" prst="rect">
             <a:avLst/>
@@ -5567,7 +5567,7 @@
                 <a:spcPct val="112000"/>
               </a:lnSpc>
               <a:buNone/>
-              <a:defRPr sz="1650" b="1">
+              <a:defRPr sz="1425" b="1">
                 <a:solidFill>
                   <a:srgbClr val="FF6B35"/>
                 </a:solidFill>
@@ -5577,7 +5577,7 @@
               </a:defRPr>
             </a:pPr>
             <a:r>
-              <a:rPr sz="1650" b="1">
+              <a:rPr sz="1425" b="1">
                 <a:solidFill>
                   <a:srgbClr val="FF6B35"/>
                 </a:solidFill>
@@ -5595,7 +5595,7 @@
           <p:cNvPr id="16" name="">
             <a:extLst xmlns:a="http://schemas.openxmlformats.org/drawingml/2006/main">
               <a:ext uri="{FF2B5EF4-FFF2-40B4-BE49-F238E27FC236}">
-                <a16:creationId xmlns:a16="http://schemas.microsoft.com/office/drawing/2014/main" id="{17D674A6-0C3F-4F9E-8E20-ACC8B6F3E9C7}"/>
+                <a16:creationId xmlns:a16="http://schemas.microsoft.com/office/drawing/2014/main" id="{D60B581E-6E5A-4D18-A78F-30B801668765}"/>
               </a:ext>
             </a:extLst>
           </p:cNvPr>
@@ -5626,7 +5626,7 @@
           <p:cNvPr id="17" name="">
             <a:extLst xmlns:a="http://schemas.openxmlformats.org/drawingml/2006/main">
               <a:ext uri="{FF2B5EF4-FFF2-40B4-BE49-F238E27FC236}">
-                <a16:creationId xmlns:a16="http://schemas.microsoft.com/office/drawing/2014/main" id="{65B670E0-3E68-428E-850B-9AAF9DB83A1C}"/>
+                <a16:creationId xmlns:a16="http://schemas.microsoft.com/office/drawing/2014/main" id="{F94B43DF-69D6-4399-867B-58E38891AD34}"/>
               </a:ext>
             </a:extLst>
           </p:cNvPr>
@@ -5686,7 +5686,7 @@
           <p:cNvPr id="18" name="">
             <a:extLst xmlns:a="http://schemas.openxmlformats.org/drawingml/2006/main">
               <a:ext uri="{FF2B5EF4-FFF2-40B4-BE49-F238E27FC236}">
-                <a16:creationId xmlns:a16="http://schemas.microsoft.com/office/drawing/2014/main" id="{469B9229-88B2-4917-A799-DADA7BE5916E}"/>
+                <a16:creationId xmlns:a16="http://schemas.microsoft.com/office/drawing/2014/main" id="{4269CF4D-A59D-436C-B281-0E77BEA4F7D5}"/>
               </a:ext>
             </a:extLst>
           </p:cNvPr>
@@ -5744,7 +5744,7 @@
     </p:spTree>
     <p:extLst>
       <p:ext uri="{BB962C8B-B14F-4D97-AF65-F5344CB8AC3E}">
-        <p14:creationId xmlns:p14="http://schemas.microsoft.com/office/powerpoint/2010/main" val="1079168961"/>
+        <p14:creationId xmlns:p14="http://schemas.microsoft.com/office/powerpoint/2010/main" val="601525397"/>
       </p:ext>
     </p:extLst>
   </p:cSld>
@@ -5775,7 +5775,7 @@
           <p:cNvPr id="1" name="">
             <a:extLst xmlns:a="http://schemas.openxmlformats.org/drawingml/2006/main">
               <a:ext uri="{FF2B5EF4-FFF2-40B4-BE49-F238E27FC236}">
-                <a16:creationId xmlns:a16="http://schemas.microsoft.com/office/drawing/2014/main" id="{54EE788F-1D44-4EA0-9307-51EE722B0EC6}"/>
+                <a16:creationId xmlns:a16="http://schemas.microsoft.com/office/drawing/2014/main" id="{4B0FBC00-4A46-4185-A95D-41EAC445E711}"/>
               </a:ext>
             </a:extLst>
           </p:cNvPr>
@@ -5835,7 +5835,7 @@
           <p:cNvPr id="2" name="">
             <a:extLst xmlns:a="http://schemas.openxmlformats.org/drawingml/2006/main">
               <a:ext uri="{FF2B5EF4-FFF2-40B4-BE49-F238E27FC236}">
-                <a16:creationId xmlns:a16="http://schemas.microsoft.com/office/drawing/2014/main" id="{DEB92F2A-D2E8-48FB-A14D-C4BB1E1EBEA5}"/>
+                <a16:creationId xmlns:a16="http://schemas.microsoft.com/office/drawing/2014/main" id="{63DEDD5A-BDB8-4273-91A5-5B70970A553C}"/>
               </a:ext>
             </a:extLst>
           </p:cNvPr>
@@ -5847,7 +5847,7 @@
         <p:spPr>
           <a:xfrm xmlns:a="http://schemas.openxmlformats.org/drawingml/2006/main">
             <a:off x="400050" y="742950"/>
-            <a:ext cx="8858250" cy="1123950"/>
+            <a:ext cx="8572500" cy="1238250"/>
           </a:xfrm>
           <a:prstGeom xmlns:a="http://schemas.openxmlformats.org/drawingml/2006/main" prst="rect">
             <a:avLst/>
@@ -5864,10 +5864,10 @@
           <a:p xmlns:a="http://schemas.openxmlformats.org/drawingml/2006/main">
             <a:pPr algn="l">
               <a:lnSpc>
-                <a:spcPct val="102000"/>
-              </a:lnSpc>
-              <a:buNone/>
-              <a:defRPr sz="3600" b="1">
+                <a:spcPct val="105000"/>
+              </a:lnSpc>
+              <a:buNone/>
+              <a:defRPr sz="3150" b="1">
                 <a:solidFill>
                   <a:srgbClr val="000000"/>
                 </a:solidFill>
@@ -5877,7 +5877,7 @@
               </a:defRPr>
             </a:pPr>
             <a:r>
-              <a:rPr sz="3600" b="1">
+              <a:rPr sz="3150" b="1">
                 <a:solidFill>
                   <a:srgbClr val="000000"/>
                 </a:solidFill>
@@ -5895,19 +5895,19 @@
           <p:cNvPr id="3" name="">
             <a:extLst xmlns:a="http://schemas.openxmlformats.org/drawingml/2006/main">
               <a:ext uri="{FF2B5EF4-FFF2-40B4-BE49-F238E27FC236}">
-                <a16:creationId xmlns:a16="http://schemas.microsoft.com/office/drawing/2014/main" id="{1F77639F-97E1-4C14-A8E0-0DE0FA6318B2}"/>
-              </a:ext>
-            </a:extLst>
-          </p:cNvPr>
-          <p:cNvSpPr>
-            <a:spLocks xmlns:a="http://schemas.openxmlformats.org/drawingml/2006/main" noGrp="1"/>
-          </p:cNvSpPr>
-          <p:nvPr/>
-        </p:nvSpPr>
-        <p:spPr>
-          <a:xfrm xmlns:a="http://schemas.openxmlformats.org/drawingml/2006/main">
-            <a:off x="400050" y="1943100"/>
-            <a:ext cx="7239000" cy="609600"/>
+                <a16:creationId xmlns:a16="http://schemas.microsoft.com/office/drawing/2014/main" id="{32130B35-4F13-43D6-847B-BAF4BEADC6FA}"/>
+              </a:ext>
+            </a:extLst>
+          </p:cNvPr>
+          <p:cNvSpPr>
+            <a:spLocks xmlns:a="http://schemas.openxmlformats.org/drawingml/2006/main" noGrp="1"/>
+          </p:cNvSpPr>
+          <p:nvPr/>
+        </p:nvSpPr>
+        <p:spPr>
+          <a:xfrm xmlns:a="http://schemas.openxmlformats.org/drawingml/2006/main">
+            <a:off x="400050" y="2076450"/>
+            <a:ext cx="7620000" cy="590550"/>
           </a:xfrm>
           <a:prstGeom xmlns:a="http://schemas.openxmlformats.org/drawingml/2006/main" prst="rect">
             <a:avLst/>
@@ -5924,20 +5924,20 @@
           <a:p xmlns:a="http://schemas.openxmlformats.org/drawingml/2006/main">
             <a:pPr algn="l">
               <a:lnSpc>
-                <a:spcPct val="125000"/>
-              </a:lnSpc>
-              <a:buNone/>
-              <a:defRPr sz="1650" b="0">
-                <a:solidFill>
-                  <a:srgbClr val="555555"/>
-                </a:solidFill>
-                <a:latin typeface="Malgun Gothic"/>
-                <a:ea typeface="Malgun Gothic"/>
-                <a:cs typeface="Malgun Gothic"/>
-              </a:defRPr>
-            </a:pPr>
-            <a:r>
-              <a:rPr sz="1650" b="0">
+                <a:spcPct val="122000"/>
+              </a:lnSpc>
+              <a:buNone/>
+              <a:defRPr sz="1500" b="0">
+                <a:solidFill>
+                  <a:srgbClr val="555555"/>
+                </a:solidFill>
+                <a:latin typeface="Malgun Gothic"/>
+                <a:ea typeface="Malgun Gothic"/>
+                <a:cs typeface="Malgun Gothic"/>
+              </a:defRPr>
+            </a:pPr>
+            <a:r>
+              <a:rPr sz="1500" b="0">
                 <a:solidFill>
                   <a:srgbClr val="555555"/>
                 </a:solidFill>
@@ -5955,7 +5955,7 @@
           <p:cNvPr id="4" name="">
             <a:extLst xmlns:a="http://schemas.openxmlformats.org/drawingml/2006/main">
               <a:ext uri="{FF2B5EF4-FFF2-40B4-BE49-F238E27FC236}">
-                <a16:creationId xmlns:a16="http://schemas.microsoft.com/office/drawing/2014/main" id="{63200BCB-CB01-4F82-9791-954724C9DD74}"/>
+                <a16:creationId xmlns:a16="http://schemas.microsoft.com/office/drawing/2014/main" id="{45E5C139-AEDC-47F3-B38F-8A9596FDEFD2}"/>
               </a:ext>
             </a:extLst>
           </p:cNvPr>
@@ -6015,7 +6015,7 @@
           <p:cNvPr id="5" name="">
             <a:extLst xmlns:a="http://schemas.openxmlformats.org/drawingml/2006/main">
               <a:ext uri="{FF2B5EF4-FFF2-40B4-BE49-F238E27FC236}">
-                <a16:creationId xmlns:a16="http://schemas.microsoft.com/office/drawing/2014/main" id="{350C97D5-D6A4-47A3-86F8-2C85FAD9267A}"/>
+                <a16:creationId xmlns:a16="http://schemas.microsoft.com/office/drawing/2014/main" id="{85B82D6B-EDFF-48F3-83BA-5115E620D742}"/>
               </a:ext>
             </a:extLst>
           </p:cNvPr>
@@ -6046,7 +6046,7 @@
           <p:cNvPr id="6" name="">
             <a:extLst xmlns:a="http://schemas.openxmlformats.org/drawingml/2006/main">
               <a:ext uri="{FF2B5EF4-FFF2-40B4-BE49-F238E27FC236}">
-                <a16:creationId xmlns:a16="http://schemas.microsoft.com/office/drawing/2014/main" id="{E181E06F-1C33-4CA0-957D-3C8996FD70F3}"/>
+                <a16:creationId xmlns:a16="http://schemas.microsoft.com/office/drawing/2014/main" id="{F01A89A1-32DD-4BAA-8674-DF174E5A5844}"/>
               </a:ext>
             </a:extLst>
           </p:cNvPr>
@@ -6077,7 +6077,7 @@
           <p:cNvPr id="7" name="">
             <a:extLst xmlns:a="http://schemas.openxmlformats.org/drawingml/2006/main">
               <a:ext uri="{FF2B5EF4-FFF2-40B4-BE49-F238E27FC236}">
-                <a16:creationId xmlns:a16="http://schemas.microsoft.com/office/drawing/2014/main" id="{76E89911-AB7A-4500-87B9-AB672C077D0A}"/>
+                <a16:creationId xmlns:a16="http://schemas.microsoft.com/office/drawing/2014/main" id="{E5D0B7E3-5DF3-4BB8-B28E-E921A74C607C}"/>
               </a:ext>
             </a:extLst>
           </p:cNvPr>
@@ -6137,7 +6137,7 @@
           <p:cNvPr id="8" name="">
             <a:extLst xmlns:a="http://schemas.openxmlformats.org/drawingml/2006/main">
               <a:ext uri="{FF2B5EF4-FFF2-40B4-BE49-F238E27FC236}">
-                <a16:creationId xmlns:a16="http://schemas.microsoft.com/office/drawing/2014/main" id="{B4C95744-D70F-44F4-8302-D54EC9C30D79}"/>
+                <a16:creationId xmlns:a16="http://schemas.microsoft.com/office/drawing/2014/main" id="{4656E6D3-7B4E-4B25-8954-9F2E2EAAF9D0}"/>
               </a:ext>
             </a:extLst>
           </p:cNvPr>
@@ -6197,7 +6197,7 @@
           <p:cNvPr id="9" name="">
             <a:extLst xmlns:a="http://schemas.openxmlformats.org/drawingml/2006/main">
               <a:ext uri="{FF2B5EF4-FFF2-40B4-BE49-F238E27FC236}">
-                <a16:creationId xmlns:a16="http://schemas.microsoft.com/office/drawing/2014/main" id="{A6EC0B0D-5744-42C2-869F-491ACA8988C9}"/>
+                <a16:creationId xmlns:a16="http://schemas.microsoft.com/office/drawing/2014/main" id="{41FDD025-D38E-4F46-9B31-EEBB96BA76A5}"/>
               </a:ext>
             </a:extLst>
           </p:cNvPr>
@@ -6257,7 +6257,7 @@
           <p:cNvPr id="10" name="">
             <a:extLst xmlns:a="http://schemas.openxmlformats.org/drawingml/2006/main">
               <a:ext uri="{FF2B5EF4-FFF2-40B4-BE49-F238E27FC236}">
-                <a16:creationId xmlns:a16="http://schemas.microsoft.com/office/drawing/2014/main" id="{4BB076A2-51E6-4434-A98B-16217C8C01EB}"/>
+                <a16:creationId xmlns:a16="http://schemas.microsoft.com/office/drawing/2014/main" id="{3D270231-909C-4968-9B46-928CB6BA60F4}"/>
               </a:ext>
             </a:extLst>
           </p:cNvPr>
@@ -6317,7 +6317,7 @@
           <p:cNvPr id="11" name="">
             <a:extLst xmlns:a="http://schemas.openxmlformats.org/drawingml/2006/main">
               <a:ext uri="{FF2B5EF4-FFF2-40B4-BE49-F238E27FC236}">
-                <a16:creationId xmlns:a16="http://schemas.microsoft.com/office/drawing/2014/main" id="{09E60048-D265-43EF-AAB5-404F2637F871}"/>
+                <a16:creationId xmlns:a16="http://schemas.microsoft.com/office/drawing/2014/main" id="{CE418DB9-CCCC-459E-B5B1-7F8A8F15BFF1}"/>
               </a:ext>
             </a:extLst>
           </p:cNvPr>
@@ -6377,7 +6377,7 @@
           <p:cNvPr id="12" name="">
             <a:extLst xmlns:a="http://schemas.openxmlformats.org/drawingml/2006/main">
               <a:ext uri="{FF2B5EF4-FFF2-40B4-BE49-F238E27FC236}">
-                <a16:creationId xmlns:a16="http://schemas.microsoft.com/office/drawing/2014/main" id="{40707EE5-B252-49C9-A0BC-1E60E3AB3D47}"/>
+                <a16:creationId xmlns:a16="http://schemas.microsoft.com/office/drawing/2014/main" id="{0512C617-7872-40DA-B78D-3DDBC6E5F07A}"/>
               </a:ext>
             </a:extLst>
           </p:cNvPr>
@@ -6437,7 +6437,7 @@
           <p:cNvPr id="13" name="">
             <a:extLst xmlns:a="http://schemas.openxmlformats.org/drawingml/2006/main">
               <a:ext uri="{FF2B5EF4-FFF2-40B4-BE49-F238E27FC236}">
-                <a16:creationId xmlns:a16="http://schemas.microsoft.com/office/drawing/2014/main" id="{176AC889-E72C-40CF-8BBB-3496A1126816}"/>
+                <a16:creationId xmlns:a16="http://schemas.microsoft.com/office/drawing/2014/main" id="{B647789F-ECA9-4DD4-BC5E-589060102E75}"/>
               </a:ext>
             </a:extLst>
           </p:cNvPr>
@@ -6497,7 +6497,7 @@
           <p:cNvPr id="14" name="">
             <a:extLst xmlns:a="http://schemas.openxmlformats.org/drawingml/2006/main">
               <a:ext uri="{FF2B5EF4-FFF2-40B4-BE49-F238E27FC236}">
-                <a16:creationId xmlns:a16="http://schemas.microsoft.com/office/drawing/2014/main" id="{2FC5B98B-6CB0-4AFF-AB97-668C92A0E775}"/>
+                <a16:creationId xmlns:a16="http://schemas.microsoft.com/office/drawing/2014/main" id="{5148D122-462A-4672-8B58-7DEBC4507F60}"/>
               </a:ext>
             </a:extLst>
           </p:cNvPr>
@@ -6557,7 +6557,7 @@
           <p:cNvPr id="15" name="">
             <a:extLst xmlns:a="http://schemas.openxmlformats.org/drawingml/2006/main">
               <a:ext uri="{FF2B5EF4-FFF2-40B4-BE49-F238E27FC236}">
-                <a16:creationId xmlns:a16="http://schemas.microsoft.com/office/drawing/2014/main" id="{26B44AA9-E284-4E0E-96F9-C8D53DE7F322}"/>
+                <a16:creationId xmlns:a16="http://schemas.microsoft.com/office/drawing/2014/main" id="{4C1A3DCC-8E54-42B3-93BC-891F0F4CD2B7}"/>
               </a:ext>
             </a:extLst>
           </p:cNvPr>
@@ -6617,7 +6617,7 @@
           <p:cNvPr id="16" name="">
             <a:extLst xmlns:a="http://schemas.openxmlformats.org/drawingml/2006/main">
               <a:ext uri="{FF2B5EF4-FFF2-40B4-BE49-F238E27FC236}">
-                <a16:creationId xmlns:a16="http://schemas.microsoft.com/office/drawing/2014/main" id="{5D71FCE8-A2D2-4C68-A432-BE6DF7A42576}"/>
+                <a16:creationId xmlns:a16="http://schemas.microsoft.com/office/drawing/2014/main" id="{693F09A8-8404-43E4-BDB6-A3F70E6D8965}"/>
               </a:ext>
             </a:extLst>
           </p:cNvPr>
@@ -6677,7 +6677,7 @@
           <p:cNvPr id="17" name="">
             <a:extLst xmlns:a="http://schemas.openxmlformats.org/drawingml/2006/main">
               <a:ext uri="{FF2B5EF4-FFF2-40B4-BE49-F238E27FC236}">
-                <a16:creationId xmlns:a16="http://schemas.microsoft.com/office/drawing/2014/main" id="{017A06FA-E43A-4739-B4C3-A83F3C3E668C}"/>
+                <a16:creationId xmlns:a16="http://schemas.microsoft.com/office/drawing/2014/main" id="{6E671FE1-2975-48F3-85A3-98464184DBD6}"/>
               </a:ext>
             </a:extLst>
           </p:cNvPr>
@@ -6737,7 +6737,7 @@
           <p:cNvPr id="18" name="">
             <a:extLst xmlns:a="http://schemas.openxmlformats.org/drawingml/2006/main">
               <a:ext uri="{FF2B5EF4-FFF2-40B4-BE49-F238E27FC236}">
-                <a16:creationId xmlns:a16="http://schemas.microsoft.com/office/drawing/2014/main" id="{7CBF6FFA-1935-4769-881D-0FC97D0271AB}"/>
+                <a16:creationId xmlns:a16="http://schemas.microsoft.com/office/drawing/2014/main" id="{32E4F758-62B0-40E1-A318-2BB878C783A4}"/>
               </a:ext>
             </a:extLst>
           </p:cNvPr>
@@ -6768,7 +6768,7 @@
           <p:cNvPr id="19" name="">
             <a:extLst xmlns:a="http://schemas.openxmlformats.org/drawingml/2006/main">
               <a:ext uri="{FF2B5EF4-FFF2-40B4-BE49-F238E27FC236}">
-                <a16:creationId xmlns:a16="http://schemas.microsoft.com/office/drawing/2014/main" id="{CDD3E646-B4D2-4794-BAA7-DD1D2F63D756}"/>
+                <a16:creationId xmlns:a16="http://schemas.microsoft.com/office/drawing/2014/main" id="{F6AFAA75-A9A2-402B-98D1-71321EDDF153}"/>
               </a:ext>
             </a:extLst>
           </p:cNvPr>
@@ -6828,7 +6828,7 @@
           <p:cNvPr id="20" name="">
             <a:extLst xmlns:a="http://schemas.openxmlformats.org/drawingml/2006/main">
               <a:ext uri="{FF2B5EF4-FFF2-40B4-BE49-F238E27FC236}">
-                <a16:creationId xmlns:a16="http://schemas.microsoft.com/office/drawing/2014/main" id="{70C6BDEC-20D7-46D1-A443-501438FAC904}"/>
+                <a16:creationId xmlns:a16="http://schemas.microsoft.com/office/drawing/2014/main" id="{7530A56F-01FD-44E8-AE5E-5A97B1C541F8}"/>
               </a:ext>
             </a:extLst>
           </p:cNvPr>
@@ -6886,7 +6886,7 @@
     </p:spTree>
     <p:extLst>
       <p:ext uri="{BB962C8B-B14F-4D97-AF65-F5344CB8AC3E}">
-        <p14:creationId xmlns:p14="http://schemas.microsoft.com/office/powerpoint/2010/main" val="1510534001"/>
+        <p14:creationId xmlns:p14="http://schemas.microsoft.com/office/powerpoint/2010/main" val="1090728396"/>
       </p:ext>
     </p:extLst>
   </p:cSld>
@@ -6917,7 +6917,7 @@
           <p:cNvPr id="1" name="">
             <a:extLst xmlns:a="http://schemas.openxmlformats.org/drawingml/2006/main">
               <a:ext uri="{FF2B5EF4-FFF2-40B4-BE49-F238E27FC236}">
-                <a16:creationId xmlns:a16="http://schemas.microsoft.com/office/drawing/2014/main" id="{D39F9A5C-1F2D-4CE6-95CD-0853885C0F38}"/>
+                <a16:creationId xmlns:a16="http://schemas.microsoft.com/office/drawing/2014/main" id="{521EFBA7-54E1-47B7-9A5F-070FE9C95237}"/>
               </a:ext>
             </a:extLst>
           </p:cNvPr>
@@ -6977,7 +6977,7 @@
           <p:cNvPr id="2" name="">
             <a:extLst xmlns:a="http://schemas.openxmlformats.org/drawingml/2006/main">
               <a:ext uri="{FF2B5EF4-FFF2-40B4-BE49-F238E27FC236}">
-                <a16:creationId xmlns:a16="http://schemas.microsoft.com/office/drawing/2014/main" id="{708E4564-90E7-470A-B289-9D6C68DD97FF}"/>
+                <a16:creationId xmlns:a16="http://schemas.microsoft.com/office/drawing/2014/main" id="{C02DE51A-4375-406C-9ED0-DA26EFAB96C8}"/>
               </a:ext>
             </a:extLst>
           </p:cNvPr>
@@ -6989,7 +6989,7 @@
         <p:spPr>
           <a:xfrm xmlns:a="http://schemas.openxmlformats.org/drawingml/2006/main">
             <a:off x="400050" y="742950"/>
-            <a:ext cx="8858250" cy="1123950"/>
+            <a:ext cx="8572500" cy="1238250"/>
           </a:xfrm>
           <a:prstGeom xmlns:a="http://schemas.openxmlformats.org/drawingml/2006/main" prst="rect">
             <a:avLst/>
@@ -7006,10 +7006,10 @@
           <a:p xmlns:a="http://schemas.openxmlformats.org/drawingml/2006/main">
             <a:pPr algn="l">
               <a:lnSpc>
-                <a:spcPct val="102000"/>
-              </a:lnSpc>
-              <a:buNone/>
-              <a:defRPr sz="3600" b="1">
+                <a:spcPct val="105000"/>
+              </a:lnSpc>
+              <a:buNone/>
+              <a:defRPr sz="3150" b="1">
                 <a:solidFill>
                   <a:srgbClr val="000000"/>
                 </a:solidFill>
@@ -7019,7 +7019,7 @@
               </a:defRPr>
             </a:pPr>
             <a:r>
-              <a:rPr sz="3600" b="1">
+              <a:rPr sz="3150" b="1">
                 <a:solidFill>
                   <a:srgbClr val="000000"/>
                 </a:solidFill>
@@ -7037,19 +7037,19 @@
           <p:cNvPr id="3" name="">
             <a:extLst xmlns:a="http://schemas.openxmlformats.org/drawingml/2006/main">
               <a:ext uri="{FF2B5EF4-FFF2-40B4-BE49-F238E27FC236}">
-                <a16:creationId xmlns:a16="http://schemas.microsoft.com/office/drawing/2014/main" id="{52420FD3-FC04-4835-AEC2-D214C60329EC}"/>
-              </a:ext>
-            </a:extLst>
-          </p:cNvPr>
-          <p:cNvSpPr>
-            <a:spLocks xmlns:a="http://schemas.openxmlformats.org/drawingml/2006/main" noGrp="1"/>
-          </p:cNvSpPr>
-          <p:nvPr/>
-        </p:nvSpPr>
-        <p:spPr>
-          <a:xfrm xmlns:a="http://schemas.openxmlformats.org/drawingml/2006/main">
-            <a:off x="400050" y="1943100"/>
-            <a:ext cx="7239000" cy="609600"/>
+                <a16:creationId xmlns:a16="http://schemas.microsoft.com/office/drawing/2014/main" id="{EB52B52F-B1D2-437D-9F5C-EBF34BA17A84}"/>
+              </a:ext>
+            </a:extLst>
+          </p:cNvPr>
+          <p:cNvSpPr>
+            <a:spLocks xmlns:a="http://schemas.openxmlformats.org/drawingml/2006/main" noGrp="1"/>
+          </p:cNvSpPr>
+          <p:nvPr/>
+        </p:nvSpPr>
+        <p:spPr>
+          <a:xfrm xmlns:a="http://schemas.openxmlformats.org/drawingml/2006/main">
+            <a:off x="400050" y="2076450"/>
+            <a:ext cx="7620000" cy="590550"/>
           </a:xfrm>
           <a:prstGeom xmlns:a="http://schemas.openxmlformats.org/drawingml/2006/main" prst="rect">
             <a:avLst/>
@@ -7066,20 +7066,20 @@
           <a:p xmlns:a="http://schemas.openxmlformats.org/drawingml/2006/main">
             <a:pPr algn="l">
               <a:lnSpc>
-                <a:spcPct val="125000"/>
-              </a:lnSpc>
-              <a:buNone/>
-              <a:defRPr sz="1650" b="0">
-                <a:solidFill>
-                  <a:srgbClr val="555555"/>
-                </a:solidFill>
-                <a:latin typeface="Malgun Gothic"/>
-                <a:ea typeface="Malgun Gothic"/>
-                <a:cs typeface="Malgun Gothic"/>
-              </a:defRPr>
-            </a:pPr>
-            <a:r>
-              <a:rPr sz="1650" b="0">
+                <a:spcPct val="122000"/>
+              </a:lnSpc>
+              <a:buNone/>
+              <a:defRPr sz="1500" b="0">
+                <a:solidFill>
+                  <a:srgbClr val="555555"/>
+                </a:solidFill>
+                <a:latin typeface="Malgun Gothic"/>
+                <a:ea typeface="Malgun Gothic"/>
+                <a:cs typeface="Malgun Gothic"/>
+              </a:defRPr>
+            </a:pPr>
+            <a:r>
+              <a:rPr sz="1500" b="0">
                 <a:solidFill>
                   <a:srgbClr val="555555"/>
                 </a:solidFill>
@@ -7097,7 +7097,7 @@
           <p:cNvPr id="4" name="">
             <a:extLst xmlns:a="http://schemas.openxmlformats.org/drawingml/2006/main">
               <a:ext uri="{FF2B5EF4-FFF2-40B4-BE49-F238E27FC236}">
-                <a16:creationId xmlns:a16="http://schemas.microsoft.com/office/drawing/2014/main" id="{00740102-7622-426E-965F-AC5DD371DCC3}"/>
+                <a16:creationId xmlns:a16="http://schemas.microsoft.com/office/drawing/2014/main" id="{2349C5ED-CD61-4454-A0C8-4AB69CF8D926}"/>
               </a:ext>
             </a:extLst>
           </p:cNvPr>
@@ -7164,7 +7164,7 @@
         </p:xfrm>
         <a:graphic xmlns:a="http://schemas.openxmlformats.org/drawingml/2006/main">
           <a:graphicData uri="http://schemas.openxmlformats.org/drawingml/2006/chart">
-            <c:chart xmlns:r="http://schemas.openxmlformats.org/officeDocument/2006/relationships" xmlns:c="http://schemas.openxmlformats.org/drawingml/2006/chart" r:id="R440a77950e724636"/>
+            <c:chart xmlns:r="http://schemas.openxmlformats.org/officeDocument/2006/relationships" xmlns:c="http://schemas.openxmlformats.org/drawingml/2006/chart" r:id="R27ca27a962a54823"/>
           </a:graphicData>
         </a:graphic>
       </p:graphicFrame>
@@ -7173,7 +7173,7 @@
           <p:cNvPr id="6" name="">
             <a:extLst xmlns:a="http://schemas.openxmlformats.org/drawingml/2006/main">
               <a:ext uri="{FF2B5EF4-FFF2-40B4-BE49-F238E27FC236}">
-                <a16:creationId xmlns:a16="http://schemas.microsoft.com/office/drawing/2014/main" id="{EA852A0C-B2A4-4283-A4AA-E2F87B895186}"/>
+                <a16:creationId xmlns:a16="http://schemas.microsoft.com/office/drawing/2014/main" id="{D5B5749E-40F6-449E-AB8D-79F258AE3CF4}"/>
               </a:ext>
             </a:extLst>
           </p:cNvPr>
@@ -7204,7 +7204,7 @@
           <p:cNvPr id="7" name="">
             <a:extLst xmlns:a="http://schemas.openxmlformats.org/drawingml/2006/main">
               <a:ext uri="{FF2B5EF4-FFF2-40B4-BE49-F238E27FC236}">
-                <a16:creationId xmlns:a16="http://schemas.microsoft.com/office/drawing/2014/main" id="{B67ACB47-CE5F-424B-8EC7-3952407D852D}"/>
+                <a16:creationId xmlns:a16="http://schemas.microsoft.com/office/drawing/2014/main" id="{B8E178CF-18B6-46F1-8494-5F1E88EA930B}"/>
               </a:ext>
             </a:extLst>
           </p:cNvPr>
@@ -7264,7 +7264,7 @@
           <p:cNvPr id="8" name="">
             <a:extLst xmlns:a="http://schemas.openxmlformats.org/drawingml/2006/main">
               <a:ext uri="{FF2B5EF4-FFF2-40B4-BE49-F238E27FC236}">
-                <a16:creationId xmlns:a16="http://schemas.microsoft.com/office/drawing/2014/main" id="{0082EC7C-55F6-4888-8223-ED4AE430C7F7}"/>
+                <a16:creationId xmlns:a16="http://schemas.microsoft.com/office/drawing/2014/main" id="{4E2BFE2D-A82D-44E8-8E00-E2C2379CDB4D}"/>
               </a:ext>
             </a:extLst>
           </p:cNvPr>
@@ -7324,7 +7324,7 @@
           <p:cNvPr id="9" name="">
             <a:extLst xmlns:a="http://schemas.openxmlformats.org/drawingml/2006/main">
               <a:ext uri="{FF2B5EF4-FFF2-40B4-BE49-F238E27FC236}">
-                <a16:creationId xmlns:a16="http://schemas.microsoft.com/office/drawing/2014/main" id="{017EC36F-DCAE-4F6F-892B-4416B8F58CCD}"/>
+                <a16:creationId xmlns:a16="http://schemas.microsoft.com/office/drawing/2014/main" id="{08475025-9E22-4665-AA0F-E9730F36A30B}"/>
               </a:ext>
             </a:extLst>
           </p:cNvPr>
@@ -7355,7 +7355,7 @@
           <p:cNvPr id="10" name="">
             <a:extLst xmlns:a="http://schemas.openxmlformats.org/drawingml/2006/main">
               <a:ext uri="{FF2B5EF4-FFF2-40B4-BE49-F238E27FC236}">
-                <a16:creationId xmlns:a16="http://schemas.microsoft.com/office/drawing/2014/main" id="{F7A71E92-BA1C-4753-9014-82B9402D8366}"/>
+                <a16:creationId xmlns:a16="http://schemas.microsoft.com/office/drawing/2014/main" id="{6A120156-0F26-4A9A-BA01-A00E8DEDABEB}"/>
               </a:ext>
             </a:extLst>
           </p:cNvPr>
@@ -7415,7 +7415,7 @@
           <p:cNvPr id="11" name="">
             <a:extLst xmlns:a="http://schemas.openxmlformats.org/drawingml/2006/main">
               <a:ext uri="{FF2B5EF4-FFF2-40B4-BE49-F238E27FC236}">
-                <a16:creationId xmlns:a16="http://schemas.microsoft.com/office/drawing/2014/main" id="{DBD6BD72-2F82-463D-81C0-361010D901FD}"/>
+                <a16:creationId xmlns:a16="http://schemas.microsoft.com/office/drawing/2014/main" id="{67B738A9-973B-4B88-8518-F6A1AE1628E9}"/>
               </a:ext>
             </a:extLst>
           </p:cNvPr>
@@ -7475,7 +7475,7 @@
           <p:cNvPr id="12" name="">
             <a:extLst xmlns:a="http://schemas.openxmlformats.org/drawingml/2006/main">
               <a:ext uri="{FF2B5EF4-FFF2-40B4-BE49-F238E27FC236}">
-                <a16:creationId xmlns:a16="http://schemas.microsoft.com/office/drawing/2014/main" id="{3D8E68E0-1660-4A41-A68C-873B993BB0BF}"/>
+                <a16:creationId xmlns:a16="http://schemas.microsoft.com/office/drawing/2014/main" id="{EB99C5FF-E303-4311-A135-7A67B87B0992}"/>
               </a:ext>
             </a:extLst>
           </p:cNvPr>
@@ -7535,7 +7535,7 @@
           <p:cNvPr id="13" name="">
             <a:extLst xmlns:a="http://schemas.openxmlformats.org/drawingml/2006/main">
               <a:ext uri="{FF2B5EF4-FFF2-40B4-BE49-F238E27FC236}">
-                <a16:creationId xmlns:a16="http://schemas.microsoft.com/office/drawing/2014/main" id="{4A75FBD7-E66A-4719-970A-504AC4239A90}"/>
+                <a16:creationId xmlns:a16="http://schemas.microsoft.com/office/drawing/2014/main" id="{6250CF3C-4C41-4E14-A388-F23D12FD65A8}"/>
               </a:ext>
             </a:extLst>
           </p:cNvPr>
@@ -7595,7 +7595,7 @@
           <p:cNvPr id="14" name="">
             <a:extLst xmlns:a="http://schemas.openxmlformats.org/drawingml/2006/main">
               <a:ext uri="{FF2B5EF4-FFF2-40B4-BE49-F238E27FC236}">
-                <a16:creationId xmlns:a16="http://schemas.microsoft.com/office/drawing/2014/main" id="{D00AA595-C44B-4A25-BEBF-13A5E9442E75}"/>
+                <a16:creationId xmlns:a16="http://schemas.microsoft.com/office/drawing/2014/main" id="{EB994B6C-338E-4EE8-851E-CB9AD163706D}"/>
               </a:ext>
             </a:extLst>
           </p:cNvPr>
@@ -7626,7 +7626,7 @@
           <p:cNvPr id="15" name="">
             <a:extLst xmlns:a="http://schemas.openxmlformats.org/drawingml/2006/main">
               <a:ext uri="{FF2B5EF4-FFF2-40B4-BE49-F238E27FC236}">
-                <a16:creationId xmlns:a16="http://schemas.microsoft.com/office/drawing/2014/main" id="{F7B171FA-CDDE-4134-8150-FD2ECDCF679C}"/>
+                <a16:creationId xmlns:a16="http://schemas.microsoft.com/office/drawing/2014/main" id="{6CEE1D5B-0B2A-4A12-98FD-27735B5FE374}"/>
               </a:ext>
             </a:extLst>
           </p:cNvPr>
@@ -7686,7 +7686,7 @@
           <p:cNvPr id="16" name="">
             <a:extLst xmlns:a="http://schemas.openxmlformats.org/drawingml/2006/main">
               <a:ext uri="{FF2B5EF4-FFF2-40B4-BE49-F238E27FC236}">
-                <a16:creationId xmlns:a16="http://schemas.microsoft.com/office/drawing/2014/main" id="{5139237D-3171-4CE0-A934-6326FC4FC201}"/>
+                <a16:creationId xmlns:a16="http://schemas.microsoft.com/office/drawing/2014/main" id="{A86235FA-A886-42AE-99AE-CC30853480C3}"/>
               </a:ext>
             </a:extLst>
           </p:cNvPr>
@@ -7744,7 +7744,7 @@
     </p:spTree>
     <p:extLst>
       <p:ext uri="{BB962C8B-B14F-4D97-AF65-F5344CB8AC3E}">
-        <p14:creationId xmlns:p14="http://schemas.microsoft.com/office/powerpoint/2010/main" val="1470648219"/>
+        <p14:creationId xmlns:p14="http://schemas.microsoft.com/office/powerpoint/2010/main" val="1665129731"/>
       </p:ext>
     </p:extLst>
   </p:cSld>
@@ -7775,7 +7775,7 @@
           <p:cNvPr id="1" name="">
             <a:extLst xmlns:a="http://schemas.openxmlformats.org/drawingml/2006/main">
               <a:ext uri="{FF2B5EF4-FFF2-40B4-BE49-F238E27FC236}">
-                <a16:creationId xmlns:a16="http://schemas.microsoft.com/office/drawing/2014/main" id="{E34E6E58-E656-4B0E-9232-7C9DB262D53D}"/>
+                <a16:creationId xmlns:a16="http://schemas.microsoft.com/office/drawing/2014/main" id="{503C5E28-483A-42A1-9336-60A34DE4E2CF}"/>
               </a:ext>
             </a:extLst>
           </p:cNvPr>
@@ -7835,7 +7835,7 @@
           <p:cNvPr id="2" name="">
             <a:extLst xmlns:a="http://schemas.openxmlformats.org/drawingml/2006/main">
               <a:ext uri="{FF2B5EF4-FFF2-40B4-BE49-F238E27FC236}">
-                <a16:creationId xmlns:a16="http://schemas.microsoft.com/office/drawing/2014/main" id="{F9117240-990F-49C4-BBC1-7F19E97F6D6B}"/>
+                <a16:creationId xmlns:a16="http://schemas.microsoft.com/office/drawing/2014/main" id="{84D5EEC5-F657-4770-9FD5-FBCB614294AA}"/>
               </a:ext>
             </a:extLst>
           </p:cNvPr>
@@ -7847,7 +7847,7 @@
         <p:spPr>
           <a:xfrm xmlns:a="http://schemas.openxmlformats.org/drawingml/2006/main">
             <a:off x="400050" y="742950"/>
-            <a:ext cx="8858250" cy="1123950"/>
+            <a:ext cx="8572500" cy="1238250"/>
           </a:xfrm>
           <a:prstGeom xmlns:a="http://schemas.openxmlformats.org/drawingml/2006/main" prst="rect">
             <a:avLst/>
@@ -7864,10 +7864,10 @@
           <a:p xmlns:a="http://schemas.openxmlformats.org/drawingml/2006/main">
             <a:pPr algn="l">
               <a:lnSpc>
-                <a:spcPct val="102000"/>
-              </a:lnSpc>
-              <a:buNone/>
-              <a:defRPr sz="3600" b="1">
+                <a:spcPct val="105000"/>
+              </a:lnSpc>
+              <a:buNone/>
+              <a:defRPr sz="3150" b="1">
                 <a:solidFill>
                   <a:srgbClr val="000000"/>
                 </a:solidFill>
@@ -7877,7 +7877,7 @@
               </a:defRPr>
             </a:pPr>
             <a:r>
-              <a:rPr sz="3600" b="1">
+              <a:rPr sz="3150" b="1">
                 <a:solidFill>
                   <a:srgbClr val="000000"/>
                 </a:solidFill>
@@ -7895,19 +7895,19 @@
           <p:cNvPr id="3" name="">
             <a:extLst xmlns:a="http://schemas.openxmlformats.org/drawingml/2006/main">
               <a:ext uri="{FF2B5EF4-FFF2-40B4-BE49-F238E27FC236}">
-                <a16:creationId xmlns:a16="http://schemas.microsoft.com/office/drawing/2014/main" id="{8265C17C-F040-4496-9FAE-2CB914F742B7}"/>
-              </a:ext>
-            </a:extLst>
-          </p:cNvPr>
-          <p:cNvSpPr>
-            <a:spLocks xmlns:a="http://schemas.openxmlformats.org/drawingml/2006/main" noGrp="1"/>
-          </p:cNvSpPr>
-          <p:nvPr/>
-        </p:nvSpPr>
-        <p:spPr>
-          <a:xfrm xmlns:a="http://schemas.openxmlformats.org/drawingml/2006/main">
-            <a:off x="400050" y="1943100"/>
-            <a:ext cx="7239000" cy="609600"/>
+                <a16:creationId xmlns:a16="http://schemas.microsoft.com/office/drawing/2014/main" id="{5149D3E9-BBA3-43B2-BBA8-691E083EBAA5}"/>
+              </a:ext>
+            </a:extLst>
+          </p:cNvPr>
+          <p:cNvSpPr>
+            <a:spLocks xmlns:a="http://schemas.openxmlformats.org/drawingml/2006/main" noGrp="1"/>
+          </p:cNvSpPr>
+          <p:nvPr/>
+        </p:nvSpPr>
+        <p:spPr>
+          <a:xfrm xmlns:a="http://schemas.openxmlformats.org/drawingml/2006/main">
+            <a:off x="400050" y="2076450"/>
+            <a:ext cx="7620000" cy="590550"/>
           </a:xfrm>
           <a:prstGeom xmlns:a="http://schemas.openxmlformats.org/drawingml/2006/main" prst="rect">
             <a:avLst/>
@@ -7924,20 +7924,20 @@
           <a:p xmlns:a="http://schemas.openxmlformats.org/drawingml/2006/main">
             <a:pPr algn="l">
               <a:lnSpc>
-                <a:spcPct val="125000"/>
-              </a:lnSpc>
-              <a:buNone/>
-              <a:defRPr sz="1650" b="0">
-                <a:solidFill>
-                  <a:srgbClr val="555555"/>
-                </a:solidFill>
-                <a:latin typeface="Malgun Gothic"/>
-                <a:ea typeface="Malgun Gothic"/>
-                <a:cs typeface="Malgun Gothic"/>
-              </a:defRPr>
-            </a:pPr>
-            <a:r>
-              <a:rPr sz="1650" b="0">
+                <a:spcPct val="122000"/>
+              </a:lnSpc>
+              <a:buNone/>
+              <a:defRPr sz="1500" b="0">
+                <a:solidFill>
+                  <a:srgbClr val="555555"/>
+                </a:solidFill>
+                <a:latin typeface="Malgun Gothic"/>
+                <a:ea typeface="Malgun Gothic"/>
+                <a:cs typeface="Malgun Gothic"/>
+              </a:defRPr>
+            </a:pPr>
+            <a:r>
+              <a:rPr sz="1500" b="0">
                 <a:solidFill>
                   <a:srgbClr val="555555"/>
                 </a:solidFill>
@@ -7955,7 +7955,7 @@
           <p:cNvPr id="4" name="">
             <a:extLst xmlns:a="http://schemas.openxmlformats.org/drawingml/2006/main">
               <a:ext uri="{FF2B5EF4-FFF2-40B4-BE49-F238E27FC236}">
-                <a16:creationId xmlns:a16="http://schemas.microsoft.com/office/drawing/2014/main" id="{0EE2DE81-48C9-418A-BE0C-6BD07DD0E145}"/>
+                <a16:creationId xmlns:a16="http://schemas.microsoft.com/office/drawing/2014/main" id="{1F02B513-EA53-4F20-BED3-DC775D399D44}"/>
               </a:ext>
             </a:extLst>
           </p:cNvPr>
@@ -8015,7 +8015,7 @@
           <p:cNvPr id="5" name="">
             <a:extLst xmlns:a="http://schemas.openxmlformats.org/drawingml/2006/main">
               <a:ext uri="{FF2B5EF4-FFF2-40B4-BE49-F238E27FC236}">
-                <a16:creationId xmlns:a16="http://schemas.microsoft.com/office/drawing/2014/main" id="{5DD46BE7-AD04-439D-A391-4C76C2948228}"/>
+                <a16:creationId xmlns:a16="http://schemas.microsoft.com/office/drawing/2014/main" id="{77FA610A-33FC-46B2-9297-2A80878A230A}"/>
               </a:ext>
             </a:extLst>
           </p:cNvPr>
@@ -8048,7 +8048,7 @@
           <p:cNvPr id="6" name="">
             <a:extLst xmlns:a="http://schemas.openxmlformats.org/drawingml/2006/main">
               <a:ext uri="{FF2B5EF4-FFF2-40B4-BE49-F238E27FC236}">
-                <a16:creationId xmlns:a16="http://schemas.microsoft.com/office/drawing/2014/main" id="{C4859B90-24B5-40B7-AD44-5B733FA3F71A}"/>
+                <a16:creationId xmlns:a16="http://schemas.microsoft.com/office/drawing/2014/main" id="{FFCFBA1F-5F44-49E9-AE1C-CBDF079D5C22}"/>
               </a:ext>
             </a:extLst>
           </p:cNvPr>
@@ -8108,7 +8108,7 @@
           <p:cNvPr id="7" name="">
             <a:extLst xmlns:a="http://schemas.openxmlformats.org/drawingml/2006/main">
               <a:ext uri="{FF2B5EF4-FFF2-40B4-BE49-F238E27FC236}">
-                <a16:creationId xmlns:a16="http://schemas.microsoft.com/office/drawing/2014/main" id="{16B06F6A-3D1D-4444-AD31-759D4BF6F692}"/>
+                <a16:creationId xmlns:a16="http://schemas.microsoft.com/office/drawing/2014/main" id="{2C355407-7005-4529-A301-B929CDFE49DA}"/>
               </a:ext>
             </a:extLst>
           </p:cNvPr>
@@ -8139,7 +8139,7 @@
           <p:cNvPr id="8" name="">
             <a:extLst xmlns:a="http://schemas.openxmlformats.org/drawingml/2006/main">
               <a:ext uri="{FF2B5EF4-FFF2-40B4-BE49-F238E27FC236}">
-                <a16:creationId xmlns:a16="http://schemas.microsoft.com/office/drawing/2014/main" id="{BA71DF50-1F66-4843-9920-6DAC90F6D35F}"/>
+                <a16:creationId xmlns:a16="http://schemas.microsoft.com/office/drawing/2014/main" id="{B47D6E37-E8CF-4646-9F92-3AF858D86D71}"/>
               </a:ext>
             </a:extLst>
           </p:cNvPr>
@@ -8199,7 +8199,7 @@
           <p:cNvPr id="9" name="">
             <a:extLst xmlns:a="http://schemas.openxmlformats.org/drawingml/2006/main">
               <a:ext uri="{FF2B5EF4-FFF2-40B4-BE49-F238E27FC236}">
-                <a16:creationId xmlns:a16="http://schemas.microsoft.com/office/drawing/2014/main" id="{4A4D08CD-46F3-4C92-A022-6F1A236BA216}"/>
+                <a16:creationId xmlns:a16="http://schemas.microsoft.com/office/drawing/2014/main" id="{7E411B48-20CB-4D91-B5A9-8C9355BE4770}"/>
               </a:ext>
             </a:extLst>
           </p:cNvPr>
@@ -8230,7 +8230,7 @@
           <p:cNvPr id="10" name="">
             <a:extLst xmlns:a="http://schemas.openxmlformats.org/drawingml/2006/main">
               <a:ext uri="{FF2B5EF4-FFF2-40B4-BE49-F238E27FC236}">
-                <a16:creationId xmlns:a16="http://schemas.microsoft.com/office/drawing/2014/main" id="{18719280-B543-46C1-9EC6-7BC3FD0740DC}"/>
+                <a16:creationId xmlns:a16="http://schemas.microsoft.com/office/drawing/2014/main" id="{4B23FED6-C575-4BC3-93A4-43548FE0DBC5}"/>
               </a:ext>
             </a:extLst>
           </p:cNvPr>
@@ -8290,7 +8290,7 @@
           <p:cNvPr id="11" name="">
             <a:extLst xmlns:a="http://schemas.openxmlformats.org/drawingml/2006/main">
               <a:ext uri="{FF2B5EF4-FFF2-40B4-BE49-F238E27FC236}">
-                <a16:creationId xmlns:a16="http://schemas.microsoft.com/office/drawing/2014/main" id="{E97919AD-36BF-43EB-A4AA-3A7CA38F9E94}"/>
+                <a16:creationId xmlns:a16="http://schemas.microsoft.com/office/drawing/2014/main" id="{C69AF8E0-272D-4DD7-8F82-A73774BAFAB7}"/>
               </a:ext>
             </a:extLst>
           </p:cNvPr>
@@ -8323,7 +8323,7 @@
           <p:cNvPr id="12" name="">
             <a:extLst xmlns:a="http://schemas.openxmlformats.org/drawingml/2006/main">
               <a:ext uri="{FF2B5EF4-FFF2-40B4-BE49-F238E27FC236}">
-                <a16:creationId xmlns:a16="http://schemas.microsoft.com/office/drawing/2014/main" id="{F99A093C-9A52-4986-ABFE-4F1DF082C54D}"/>
+                <a16:creationId xmlns:a16="http://schemas.microsoft.com/office/drawing/2014/main" id="{7E7272B7-E109-4FD2-A0D3-07A49E36A165}"/>
               </a:ext>
             </a:extLst>
           </p:cNvPr>
@@ -8383,7 +8383,7 @@
           <p:cNvPr id="13" name="">
             <a:extLst xmlns:a="http://schemas.openxmlformats.org/drawingml/2006/main">
               <a:ext uri="{FF2B5EF4-FFF2-40B4-BE49-F238E27FC236}">
-                <a16:creationId xmlns:a16="http://schemas.microsoft.com/office/drawing/2014/main" id="{1AA2F2E1-7267-46C1-A42E-7E82F0FDCDEF}"/>
+                <a16:creationId xmlns:a16="http://schemas.microsoft.com/office/drawing/2014/main" id="{5DAC5AE4-3F63-4197-A87E-E5723FAC7ADA}"/>
               </a:ext>
             </a:extLst>
           </p:cNvPr>
@@ -8414,7 +8414,7 @@
           <p:cNvPr id="14" name="">
             <a:extLst xmlns:a="http://schemas.openxmlformats.org/drawingml/2006/main">
               <a:ext uri="{FF2B5EF4-FFF2-40B4-BE49-F238E27FC236}">
-                <a16:creationId xmlns:a16="http://schemas.microsoft.com/office/drawing/2014/main" id="{0C18CE0C-F6B9-4FD0-9BAA-9ED3DFD58F65}"/>
+                <a16:creationId xmlns:a16="http://schemas.microsoft.com/office/drawing/2014/main" id="{D1F60045-CE69-482C-9834-BEA47F98DBC9}"/>
               </a:ext>
             </a:extLst>
           </p:cNvPr>
@@ -8474,7 +8474,7 @@
           <p:cNvPr id="15" name="">
             <a:extLst xmlns:a="http://schemas.openxmlformats.org/drawingml/2006/main">
               <a:ext uri="{FF2B5EF4-FFF2-40B4-BE49-F238E27FC236}">
-                <a16:creationId xmlns:a16="http://schemas.microsoft.com/office/drawing/2014/main" id="{E61447AF-58F5-4A03-870C-7DAA717792E2}"/>
+                <a16:creationId xmlns:a16="http://schemas.microsoft.com/office/drawing/2014/main" id="{B22B4FE8-B0D3-49A6-B19A-2818EE9E514B}"/>
               </a:ext>
             </a:extLst>
           </p:cNvPr>
@@ -8505,7 +8505,7 @@
           <p:cNvPr id="16" name="">
             <a:extLst xmlns:a="http://schemas.openxmlformats.org/drawingml/2006/main">
               <a:ext uri="{FF2B5EF4-FFF2-40B4-BE49-F238E27FC236}">
-                <a16:creationId xmlns:a16="http://schemas.microsoft.com/office/drawing/2014/main" id="{0D39672B-08C0-4EBC-B4F3-04543DDB0B02}"/>
+                <a16:creationId xmlns:a16="http://schemas.microsoft.com/office/drawing/2014/main" id="{157A94EF-155F-4DBA-9EF4-F8E0515E77AA}"/>
               </a:ext>
             </a:extLst>
           </p:cNvPr>
@@ -8565,7 +8565,7 @@
           <p:cNvPr id="17" name="">
             <a:extLst xmlns:a="http://schemas.openxmlformats.org/drawingml/2006/main">
               <a:ext uri="{FF2B5EF4-FFF2-40B4-BE49-F238E27FC236}">
-                <a16:creationId xmlns:a16="http://schemas.microsoft.com/office/drawing/2014/main" id="{265CE981-9766-466B-88DE-854E86F282CF}"/>
+                <a16:creationId xmlns:a16="http://schemas.microsoft.com/office/drawing/2014/main" id="{49DAD5AC-D672-450D-BE0C-FC666D89B527}"/>
               </a:ext>
             </a:extLst>
           </p:cNvPr>
@@ -8598,7 +8598,7 @@
           <p:cNvPr id="18" name="">
             <a:extLst xmlns:a="http://schemas.openxmlformats.org/drawingml/2006/main">
               <a:ext uri="{FF2B5EF4-FFF2-40B4-BE49-F238E27FC236}">
-                <a16:creationId xmlns:a16="http://schemas.microsoft.com/office/drawing/2014/main" id="{EA7C4FA6-D830-4446-8E26-30B32E5793A4}"/>
+                <a16:creationId xmlns:a16="http://schemas.microsoft.com/office/drawing/2014/main" id="{F27F17F5-85BA-4479-BFF8-4488F8C0A813}"/>
               </a:ext>
             </a:extLst>
           </p:cNvPr>
@@ -8658,7 +8658,7 @@
           <p:cNvPr id="19" name="">
             <a:extLst xmlns:a="http://schemas.openxmlformats.org/drawingml/2006/main">
               <a:ext uri="{FF2B5EF4-FFF2-40B4-BE49-F238E27FC236}">
-                <a16:creationId xmlns:a16="http://schemas.microsoft.com/office/drawing/2014/main" id="{8CEAF7F0-31BB-4B8D-9530-8A10AAF9F119}"/>
+                <a16:creationId xmlns:a16="http://schemas.microsoft.com/office/drawing/2014/main" id="{F97D1B4F-6576-468B-AA82-939FE99D2491}"/>
               </a:ext>
             </a:extLst>
           </p:cNvPr>
@@ -8689,7 +8689,7 @@
           <p:cNvPr id="20" name="">
             <a:extLst xmlns:a="http://schemas.openxmlformats.org/drawingml/2006/main">
               <a:ext uri="{FF2B5EF4-FFF2-40B4-BE49-F238E27FC236}">
-                <a16:creationId xmlns:a16="http://schemas.microsoft.com/office/drawing/2014/main" id="{AD44F088-EA25-44D4-9622-C0267CF10D65}"/>
+                <a16:creationId xmlns:a16="http://schemas.microsoft.com/office/drawing/2014/main" id="{C3A339F7-FA92-456B-9957-58596C013B46}"/>
               </a:ext>
             </a:extLst>
           </p:cNvPr>
@@ -8749,7 +8749,7 @@
           <p:cNvPr id="21" name="">
             <a:extLst xmlns:a="http://schemas.openxmlformats.org/drawingml/2006/main">
               <a:ext uri="{FF2B5EF4-FFF2-40B4-BE49-F238E27FC236}">
-                <a16:creationId xmlns:a16="http://schemas.microsoft.com/office/drawing/2014/main" id="{41279D8D-47E9-44DD-B733-DFA1238C1948}"/>
+                <a16:creationId xmlns:a16="http://schemas.microsoft.com/office/drawing/2014/main" id="{9B34AD0E-EF2B-4069-85AD-43F72EAD78C0}"/>
               </a:ext>
             </a:extLst>
           </p:cNvPr>
@@ -8780,7 +8780,7 @@
           <p:cNvPr id="22" name="">
             <a:extLst xmlns:a="http://schemas.openxmlformats.org/drawingml/2006/main">
               <a:ext uri="{FF2B5EF4-FFF2-40B4-BE49-F238E27FC236}">
-                <a16:creationId xmlns:a16="http://schemas.microsoft.com/office/drawing/2014/main" id="{5DC16208-6E0D-4F15-969C-CC7A1D2E9CD2}"/>
+                <a16:creationId xmlns:a16="http://schemas.microsoft.com/office/drawing/2014/main" id="{04705BAC-A2E5-4305-A532-C89F5537FA05}"/>
               </a:ext>
             </a:extLst>
           </p:cNvPr>
@@ -8840,7 +8840,7 @@
           <p:cNvPr id="23" name="">
             <a:extLst xmlns:a="http://schemas.openxmlformats.org/drawingml/2006/main">
               <a:ext uri="{FF2B5EF4-FFF2-40B4-BE49-F238E27FC236}">
-                <a16:creationId xmlns:a16="http://schemas.microsoft.com/office/drawing/2014/main" id="{11D64D53-54CD-4702-AC89-29B89AE0D968}"/>
+                <a16:creationId xmlns:a16="http://schemas.microsoft.com/office/drawing/2014/main" id="{CCD434C4-6A5C-4978-BBBC-38CBDDF730F3}"/>
               </a:ext>
             </a:extLst>
           </p:cNvPr>
@@ -8873,7 +8873,7 @@
           <p:cNvPr id="24" name="">
             <a:extLst xmlns:a="http://schemas.openxmlformats.org/drawingml/2006/main">
               <a:ext uri="{FF2B5EF4-FFF2-40B4-BE49-F238E27FC236}">
-                <a16:creationId xmlns:a16="http://schemas.microsoft.com/office/drawing/2014/main" id="{B90B39AE-6283-414F-9667-A662E500DD98}"/>
+                <a16:creationId xmlns:a16="http://schemas.microsoft.com/office/drawing/2014/main" id="{94446207-82A3-452A-B294-E6D4777E308A}"/>
               </a:ext>
             </a:extLst>
           </p:cNvPr>
@@ -8933,7 +8933,7 @@
           <p:cNvPr id="25" name="">
             <a:extLst xmlns:a="http://schemas.openxmlformats.org/drawingml/2006/main">
               <a:ext uri="{FF2B5EF4-FFF2-40B4-BE49-F238E27FC236}">
-                <a16:creationId xmlns:a16="http://schemas.microsoft.com/office/drawing/2014/main" id="{CC94D667-EDE3-4FF2-A580-7C45FED16267}"/>
+                <a16:creationId xmlns:a16="http://schemas.microsoft.com/office/drawing/2014/main" id="{9ACF52C0-6804-4E71-9E6A-982B52689865}"/>
               </a:ext>
             </a:extLst>
           </p:cNvPr>
@@ -8964,7 +8964,7 @@
           <p:cNvPr id="26" name="">
             <a:extLst xmlns:a="http://schemas.openxmlformats.org/drawingml/2006/main">
               <a:ext uri="{FF2B5EF4-FFF2-40B4-BE49-F238E27FC236}">
-                <a16:creationId xmlns:a16="http://schemas.microsoft.com/office/drawing/2014/main" id="{69593E5B-4A40-4367-8194-9B2E80C26772}"/>
+                <a16:creationId xmlns:a16="http://schemas.microsoft.com/office/drawing/2014/main" id="{A5F8F838-B390-4D14-821C-522E3F2B818F}"/>
               </a:ext>
             </a:extLst>
           </p:cNvPr>
@@ -9024,7 +9024,7 @@
           <p:cNvPr id="27" name="">
             <a:extLst xmlns:a="http://schemas.openxmlformats.org/drawingml/2006/main">
               <a:ext uri="{FF2B5EF4-FFF2-40B4-BE49-F238E27FC236}">
-                <a16:creationId xmlns:a16="http://schemas.microsoft.com/office/drawing/2014/main" id="{56E02CE3-D328-4155-808C-6AAC0D1AAFAC}"/>
+                <a16:creationId xmlns:a16="http://schemas.microsoft.com/office/drawing/2014/main" id="{E8A255CC-8E82-4A5C-AA76-962294599DFA}"/>
               </a:ext>
             </a:extLst>
           </p:cNvPr>
@@ -9055,7 +9055,7 @@
           <p:cNvPr id="28" name="">
             <a:extLst xmlns:a="http://schemas.openxmlformats.org/drawingml/2006/main">
               <a:ext uri="{FF2B5EF4-FFF2-40B4-BE49-F238E27FC236}">
-                <a16:creationId xmlns:a16="http://schemas.microsoft.com/office/drawing/2014/main" id="{49987056-3A0C-4486-BF68-512B7CA38CB6}"/>
+                <a16:creationId xmlns:a16="http://schemas.microsoft.com/office/drawing/2014/main" id="{EA7F3A21-2CEF-43AF-BE5D-670D2E583074}"/>
               </a:ext>
             </a:extLst>
           </p:cNvPr>
@@ -9115,7 +9115,7 @@
           <p:cNvPr id="29" name="">
             <a:extLst xmlns:a="http://schemas.openxmlformats.org/drawingml/2006/main">
               <a:ext uri="{FF2B5EF4-FFF2-40B4-BE49-F238E27FC236}">
-                <a16:creationId xmlns:a16="http://schemas.microsoft.com/office/drawing/2014/main" id="{DB0EC69A-3AE1-4554-8AC7-44E6631148E3}"/>
+                <a16:creationId xmlns:a16="http://schemas.microsoft.com/office/drawing/2014/main" id="{9AA5E7AA-9BD0-48B9-98E4-0D220CE2052B}"/>
               </a:ext>
             </a:extLst>
           </p:cNvPr>
@@ -9148,7 +9148,7 @@
           <p:cNvPr id="30" name="">
             <a:extLst xmlns:a="http://schemas.openxmlformats.org/drawingml/2006/main">
               <a:ext uri="{FF2B5EF4-FFF2-40B4-BE49-F238E27FC236}">
-                <a16:creationId xmlns:a16="http://schemas.microsoft.com/office/drawing/2014/main" id="{77AAAF62-F3A2-49E5-830A-8B3D86C44B3E}"/>
+                <a16:creationId xmlns:a16="http://schemas.microsoft.com/office/drawing/2014/main" id="{A012EAA6-8A50-46CC-B184-D7AAEB158F74}"/>
               </a:ext>
             </a:extLst>
           </p:cNvPr>
@@ -9208,7 +9208,7 @@
           <p:cNvPr id="31" name="">
             <a:extLst xmlns:a="http://schemas.openxmlformats.org/drawingml/2006/main">
               <a:ext uri="{FF2B5EF4-FFF2-40B4-BE49-F238E27FC236}">
-                <a16:creationId xmlns:a16="http://schemas.microsoft.com/office/drawing/2014/main" id="{AF4C3248-3F2E-4AD7-8A12-A1DBB1B5B802}"/>
+                <a16:creationId xmlns:a16="http://schemas.microsoft.com/office/drawing/2014/main" id="{B9ED006E-7F68-4893-9B76-088757B02F30}"/>
               </a:ext>
             </a:extLst>
           </p:cNvPr>
@@ -9239,7 +9239,7 @@
           <p:cNvPr id="32" name="">
             <a:extLst xmlns:a="http://schemas.openxmlformats.org/drawingml/2006/main">
               <a:ext uri="{FF2B5EF4-FFF2-40B4-BE49-F238E27FC236}">
-                <a16:creationId xmlns:a16="http://schemas.microsoft.com/office/drawing/2014/main" id="{2DB7C25F-8C7E-4808-807B-A2FBB562AD83}"/>
+                <a16:creationId xmlns:a16="http://schemas.microsoft.com/office/drawing/2014/main" id="{86B9BB81-6B6F-4FDD-8C3F-41A42B8F901B}"/>
               </a:ext>
             </a:extLst>
           </p:cNvPr>
@@ -9299,7 +9299,7 @@
           <p:cNvPr id="33" name="">
             <a:extLst xmlns:a="http://schemas.openxmlformats.org/drawingml/2006/main">
               <a:ext uri="{FF2B5EF4-FFF2-40B4-BE49-F238E27FC236}">
-                <a16:creationId xmlns:a16="http://schemas.microsoft.com/office/drawing/2014/main" id="{5F800DA9-4DB2-4858-B1DA-1EAF4B48E25F}"/>
+                <a16:creationId xmlns:a16="http://schemas.microsoft.com/office/drawing/2014/main" id="{1C2640FF-8045-4A38-9F89-5EC0A6D2DAE4}"/>
               </a:ext>
             </a:extLst>
           </p:cNvPr>
@@ -9330,7 +9330,7 @@
           <p:cNvPr id="34" name="">
             <a:extLst xmlns:a="http://schemas.openxmlformats.org/drawingml/2006/main">
               <a:ext uri="{FF2B5EF4-FFF2-40B4-BE49-F238E27FC236}">
-                <a16:creationId xmlns:a16="http://schemas.microsoft.com/office/drawing/2014/main" id="{4F3B1DF1-3419-4387-9CC3-A466379D4FE6}"/>
+                <a16:creationId xmlns:a16="http://schemas.microsoft.com/office/drawing/2014/main" id="{BD6BE439-0DFA-4266-8731-CA3DC94FBA6D}"/>
               </a:ext>
             </a:extLst>
           </p:cNvPr>
@@ -9390,7 +9390,7 @@
           <p:cNvPr id="35" name="">
             <a:extLst xmlns:a="http://schemas.openxmlformats.org/drawingml/2006/main">
               <a:ext uri="{FF2B5EF4-FFF2-40B4-BE49-F238E27FC236}">
-                <a16:creationId xmlns:a16="http://schemas.microsoft.com/office/drawing/2014/main" id="{5C15A4E3-6678-412C-A911-306177F6B681}"/>
+                <a16:creationId xmlns:a16="http://schemas.microsoft.com/office/drawing/2014/main" id="{0C438323-A1BF-43D9-8B41-5F02A7EFC742}"/>
               </a:ext>
             </a:extLst>
           </p:cNvPr>
@@ -9421,7 +9421,7 @@
           <p:cNvPr id="36" name="">
             <a:extLst xmlns:a="http://schemas.openxmlformats.org/drawingml/2006/main">
               <a:ext uri="{FF2B5EF4-FFF2-40B4-BE49-F238E27FC236}">
-                <a16:creationId xmlns:a16="http://schemas.microsoft.com/office/drawing/2014/main" id="{77C49A51-13CA-4111-836C-327DC517E240}"/>
+                <a16:creationId xmlns:a16="http://schemas.microsoft.com/office/drawing/2014/main" id="{12DE23EF-ADF9-43C6-B881-3A0037EED6EF}"/>
               </a:ext>
             </a:extLst>
           </p:cNvPr>
@@ -9481,7 +9481,7 @@
           <p:cNvPr id="37" name="">
             <a:extLst xmlns:a="http://schemas.openxmlformats.org/drawingml/2006/main">
               <a:ext uri="{FF2B5EF4-FFF2-40B4-BE49-F238E27FC236}">
-                <a16:creationId xmlns:a16="http://schemas.microsoft.com/office/drawing/2014/main" id="{7902A972-16CB-49C1-8B01-038E6F4BAAB4}"/>
+                <a16:creationId xmlns:a16="http://schemas.microsoft.com/office/drawing/2014/main" id="{DE502E7D-B176-4C79-9129-38D90ACD7CC6}"/>
               </a:ext>
             </a:extLst>
           </p:cNvPr>
@@ -9539,7 +9539,7 @@
     </p:spTree>
     <p:extLst>
       <p:ext uri="{BB962C8B-B14F-4D97-AF65-F5344CB8AC3E}">
-        <p14:creationId xmlns:p14="http://schemas.microsoft.com/office/powerpoint/2010/main" val="768216896"/>
+        <p14:creationId xmlns:p14="http://schemas.microsoft.com/office/powerpoint/2010/main" val="2001704105"/>
       </p:ext>
     </p:extLst>
   </p:cSld>
@@ -9570,7 +9570,7 @@
           <p:cNvPr id="1" name="">
             <a:extLst xmlns:a="http://schemas.openxmlformats.org/drawingml/2006/main">
               <a:ext uri="{FF2B5EF4-FFF2-40B4-BE49-F238E27FC236}">
-                <a16:creationId xmlns:a16="http://schemas.microsoft.com/office/drawing/2014/main" id="{81308300-313D-4371-B792-D36C4393100D}"/>
+                <a16:creationId xmlns:a16="http://schemas.microsoft.com/office/drawing/2014/main" id="{2FF0B34D-578E-4C46-9909-6B5F80681289}"/>
               </a:ext>
             </a:extLst>
           </p:cNvPr>
@@ -9630,7 +9630,7 @@
           <p:cNvPr id="2" name="">
             <a:extLst xmlns:a="http://schemas.openxmlformats.org/drawingml/2006/main">
               <a:ext uri="{FF2B5EF4-FFF2-40B4-BE49-F238E27FC236}">
-                <a16:creationId xmlns:a16="http://schemas.microsoft.com/office/drawing/2014/main" id="{E5EFD444-A6FA-4D6D-8866-B672FDC541FB}"/>
+                <a16:creationId xmlns:a16="http://schemas.microsoft.com/office/drawing/2014/main" id="{240D70A0-CB96-48DD-BCB9-742754E4929F}"/>
               </a:ext>
             </a:extLst>
           </p:cNvPr>
@@ -9642,7 +9642,7 @@
         <p:spPr>
           <a:xfrm xmlns:a="http://schemas.openxmlformats.org/drawingml/2006/main">
             <a:off x="400050" y="742950"/>
-            <a:ext cx="8858250" cy="1123950"/>
+            <a:ext cx="8572500" cy="1238250"/>
           </a:xfrm>
           <a:prstGeom xmlns:a="http://schemas.openxmlformats.org/drawingml/2006/main" prst="rect">
             <a:avLst/>
@@ -9659,10 +9659,10 @@
           <a:p xmlns:a="http://schemas.openxmlformats.org/drawingml/2006/main">
             <a:pPr algn="l">
               <a:lnSpc>
-                <a:spcPct val="102000"/>
-              </a:lnSpc>
-              <a:buNone/>
-              <a:defRPr sz="3600" b="1">
+                <a:spcPct val="105000"/>
+              </a:lnSpc>
+              <a:buNone/>
+              <a:defRPr sz="3150" b="1">
                 <a:solidFill>
                   <a:srgbClr val="000000"/>
                 </a:solidFill>
@@ -9672,7 +9672,7 @@
               </a:defRPr>
             </a:pPr>
             <a:r>
-              <a:rPr sz="3600" b="1">
+              <a:rPr sz="3150" b="1">
                 <a:solidFill>
                   <a:srgbClr val="000000"/>
                 </a:solidFill>
@@ -9690,19 +9690,19 @@
           <p:cNvPr id="3" name="">
             <a:extLst xmlns:a="http://schemas.openxmlformats.org/drawingml/2006/main">
               <a:ext uri="{FF2B5EF4-FFF2-40B4-BE49-F238E27FC236}">
-                <a16:creationId xmlns:a16="http://schemas.microsoft.com/office/drawing/2014/main" id="{D7F40E15-D939-4333-B83E-7A957C2062CD}"/>
-              </a:ext>
-            </a:extLst>
-          </p:cNvPr>
-          <p:cNvSpPr>
-            <a:spLocks xmlns:a="http://schemas.openxmlformats.org/drawingml/2006/main" noGrp="1"/>
-          </p:cNvSpPr>
-          <p:nvPr/>
-        </p:nvSpPr>
-        <p:spPr>
-          <a:xfrm xmlns:a="http://schemas.openxmlformats.org/drawingml/2006/main">
-            <a:off x="400050" y="1943100"/>
-            <a:ext cx="7239000" cy="609600"/>
+                <a16:creationId xmlns:a16="http://schemas.microsoft.com/office/drawing/2014/main" id="{556026C1-191A-4060-BF0F-8E2B250C27EF}"/>
+              </a:ext>
+            </a:extLst>
+          </p:cNvPr>
+          <p:cNvSpPr>
+            <a:spLocks xmlns:a="http://schemas.openxmlformats.org/drawingml/2006/main" noGrp="1"/>
+          </p:cNvSpPr>
+          <p:nvPr/>
+        </p:nvSpPr>
+        <p:spPr>
+          <a:xfrm xmlns:a="http://schemas.openxmlformats.org/drawingml/2006/main">
+            <a:off x="400050" y="2076450"/>
+            <a:ext cx="7620000" cy="590550"/>
           </a:xfrm>
           <a:prstGeom xmlns:a="http://schemas.openxmlformats.org/drawingml/2006/main" prst="rect">
             <a:avLst/>
@@ -9719,20 +9719,20 @@
           <a:p xmlns:a="http://schemas.openxmlformats.org/drawingml/2006/main">
             <a:pPr algn="l">
               <a:lnSpc>
-                <a:spcPct val="125000"/>
-              </a:lnSpc>
-              <a:buNone/>
-              <a:defRPr sz="1650" b="0">
-                <a:solidFill>
-                  <a:srgbClr val="555555"/>
-                </a:solidFill>
-                <a:latin typeface="Malgun Gothic"/>
-                <a:ea typeface="Malgun Gothic"/>
-                <a:cs typeface="Malgun Gothic"/>
-              </a:defRPr>
-            </a:pPr>
-            <a:r>
-              <a:rPr sz="1650" b="0">
+                <a:spcPct val="122000"/>
+              </a:lnSpc>
+              <a:buNone/>
+              <a:defRPr sz="1500" b="0">
+                <a:solidFill>
+                  <a:srgbClr val="555555"/>
+                </a:solidFill>
+                <a:latin typeface="Malgun Gothic"/>
+                <a:ea typeface="Malgun Gothic"/>
+                <a:cs typeface="Malgun Gothic"/>
+              </a:defRPr>
+            </a:pPr>
+            <a:r>
+              <a:rPr sz="1500" b="0">
                 <a:solidFill>
                   <a:srgbClr val="555555"/>
                 </a:solidFill>
@@ -9750,7 +9750,7 @@
           <p:cNvPr id="4" name="">
             <a:extLst xmlns:a="http://schemas.openxmlformats.org/drawingml/2006/main">
               <a:ext uri="{FF2B5EF4-FFF2-40B4-BE49-F238E27FC236}">
-                <a16:creationId xmlns:a16="http://schemas.microsoft.com/office/drawing/2014/main" id="{C260959A-6986-4CAA-9EBF-BE3C576AC126}"/>
+                <a16:creationId xmlns:a16="http://schemas.microsoft.com/office/drawing/2014/main" id="{CB4AA190-94F4-48A4-B85B-EB0B21617F28}"/>
               </a:ext>
             </a:extLst>
           </p:cNvPr>
@@ -9810,7 +9810,7 @@
           <p:cNvPr id="5" name="">
             <a:extLst xmlns:a="http://schemas.openxmlformats.org/drawingml/2006/main">
               <a:ext uri="{FF2B5EF4-FFF2-40B4-BE49-F238E27FC236}">
-                <a16:creationId xmlns:a16="http://schemas.microsoft.com/office/drawing/2014/main" id="{7FB82E17-5198-47EB-AA2F-423EDF281FB2}"/>
+                <a16:creationId xmlns:a16="http://schemas.microsoft.com/office/drawing/2014/main" id="{6E79FB0A-4C61-410B-8CF2-D95B6CED4E97}"/>
               </a:ext>
             </a:extLst>
           </p:cNvPr>
@@ -9841,7 +9841,7 @@
           <p:cNvPr id="6" name="">
             <a:extLst xmlns:a="http://schemas.openxmlformats.org/drawingml/2006/main">
               <a:ext uri="{FF2B5EF4-FFF2-40B4-BE49-F238E27FC236}">
-                <a16:creationId xmlns:a16="http://schemas.microsoft.com/office/drawing/2014/main" id="{171D90F0-002B-4C14-8D9C-B0467ADD9FB5}"/>
+                <a16:creationId xmlns:a16="http://schemas.microsoft.com/office/drawing/2014/main" id="{1E280748-1C2A-4B67-A288-93A953664F0F}"/>
               </a:ext>
             </a:extLst>
           </p:cNvPr>
@@ -9901,7 +9901,7 @@
           <p:cNvPr id="7" name="">
             <a:extLst xmlns:a="http://schemas.openxmlformats.org/drawingml/2006/main">
               <a:ext uri="{FF2B5EF4-FFF2-40B4-BE49-F238E27FC236}">
-                <a16:creationId xmlns:a16="http://schemas.microsoft.com/office/drawing/2014/main" id="{B0333AE2-CD66-4311-ABC1-37B64DAD8D44}"/>
+                <a16:creationId xmlns:a16="http://schemas.microsoft.com/office/drawing/2014/main" id="{B4155CE7-D7BE-48C4-9510-36E714B59E3A}"/>
               </a:ext>
             </a:extLst>
           </p:cNvPr>
@@ -9961,7 +9961,7 @@
           <p:cNvPr id="8" name="">
             <a:extLst xmlns:a="http://schemas.openxmlformats.org/drawingml/2006/main">
               <a:ext uri="{FF2B5EF4-FFF2-40B4-BE49-F238E27FC236}">
-                <a16:creationId xmlns:a16="http://schemas.microsoft.com/office/drawing/2014/main" id="{9A0744A6-30BC-4558-A60D-691C8A202541}"/>
+                <a16:creationId xmlns:a16="http://schemas.microsoft.com/office/drawing/2014/main" id="{EF17AB41-E148-4A15-9976-E953EC836BAF}"/>
               </a:ext>
             </a:extLst>
           </p:cNvPr>
@@ -9992,7 +9992,7 @@
           <p:cNvPr id="9" name="">
             <a:extLst xmlns:a="http://schemas.openxmlformats.org/drawingml/2006/main">
               <a:ext uri="{FF2B5EF4-FFF2-40B4-BE49-F238E27FC236}">
-                <a16:creationId xmlns:a16="http://schemas.microsoft.com/office/drawing/2014/main" id="{A6A08E10-2C0E-4D81-87C5-C7EA2128A0D1}"/>
+                <a16:creationId xmlns:a16="http://schemas.microsoft.com/office/drawing/2014/main" id="{06C5807E-1237-423F-9F06-53C77336B0CF}"/>
               </a:ext>
             </a:extLst>
           </p:cNvPr>
@@ -10052,7 +10052,7 @@
           <p:cNvPr id="10" name="">
             <a:extLst xmlns:a="http://schemas.openxmlformats.org/drawingml/2006/main">
               <a:ext uri="{FF2B5EF4-FFF2-40B4-BE49-F238E27FC236}">
-                <a16:creationId xmlns:a16="http://schemas.microsoft.com/office/drawing/2014/main" id="{3AEAFA49-408C-46C2-96AE-4E2A8A021D33}"/>
+                <a16:creationId xmlns:a16="http://schemas.microsoft.com/office/drawing/2014/main" id="{D6DB51B0-B2BA-4B8A-A604-155A13F124DD}"/>
               </a:ext>
             </a:extLst>
           </p:cNvPr>
@@ -10112,7 +10112,7 @@
           <p:cNvPr id="11" name="">
             <a:extLst xmlns:a="http://schemas.openxmlformats.org/drawingml/2006/main">
               <a:ext uri="{FF2B5EF4-FFF2-40B4-BE49-F238E27FC236}">
-                <a16:creationId xmlns:a16="http://schemas.microsoft.com/office/drawing/2014/main" id="{8114C225-0488-4945-8B9B-8344831FD78F}"/>
+                <a16:creationId xmlns:a16="http://schemas.microsoft.com/office/drawing/2014/main" id="{3AF1F0B1-6A0F-4A6C-A633-791BEC9A6F86}"/>
               </a:ext>
             </a:extLst>
           </p:cNvPr>
@@ -10143,7 +10143,7 @@
           <p:cNvPr id="12" name="">
             <a:extLst xmlns:a="http://schemas.openxmlformats.org/drawingml/2006/main">
               <a:ext uri="{FF2B5EF4-FFF2-40B4-BE49-F238E27FC236}">
-                <a16:creationId xmlns:a16="http://schemas.microsoft.com/office/drawing/2014/main" id="{15D5B239-12D4-44E2-8007-D35BE2FC5D0E}"/>
+                <a16:creationId xmlns:a16="http://schemas.microsoft.com/office/drawing/2014/main" id="{C0B5A739-859E-4689-BB96-C43A5973D50B}"/>
               </a:ext>
             </a:extLst>
           </p:cNvPr>
@@ -10203,7 +10203,7 @@
           <p:cNvPr id="13" name="">
             <a:extLst xmlns:a="http://schemas.openxmlformats.org/drawingml/2006/main">
               <a:ext uri="{FF2B5EF4-FFF2-40B4-BE49-F238E27FC236}">
-                <a16:creationId xmlns:a16="http://schemas.microsoft.com/office/drawing/2014/main" id="{B89830E7-8C28-4A6A-923F-C7A2AC264CA3}"/>
+                <a16:creationId xmlns:a16="http://schemas.microsoft.com/office/drawing/2014/main" id="{0D0F70D2-01EA-4CD9-A7AA-8D6B59EB080C}"/>
               </a:ext>
             </a:extLst>
           </p:cNvPr>
@@ -10263,7 +10263,7 @@
           <p:cNvPr id="14" name="">
             <a:extLst xmlns:a="http://schemas.openxmlformats.org/drawingml/2006/main">
               <a:ext uri="{FF2B5EF4-FFF2-40B4-BE49-F238E27FC236}">
-                <a16:creationId xmlns:a16="http://schemas.microsoft.com/office/drawing/2014/main" id="{90625031-5545-484A-BB1B-3AC4FB8EED65}"/>
+                <a16:creationId xmlns:a16="http://schemas.microsoft.com/office/drawing/2014/main" id="{9CB6013D-1E68-4885-980F-863C5EC2CAD0}"/>
               </a:ext>
             </a:extLst>
           </p:cNvPr>
@@ -10275,7 +10275,7 @@
         <p:spPr>
           <a:xfrm xmlns:a="http://schemas.openxmlformats.org/drawingml/2006/main">
             <a:off x="1219200" y="5334000"/>
-            <a:ext cx="9715500" cy="400050"/>
+            <a:ext cx="9715500" cy="457200"/>
           </a:xfrm>
           <a:prstGeom xmlns:a="http://schemas.openxmlformats.org/drawingml/2006/main" prst="rect">
             <a:avLst/>
@@ -10295,7 +10295,7 @@
                 <a:spcPct val="112000"/>
               </a:lnSpc>
               <a:buNone/>
-              <a:defRPr sz="2250" b="1">
+              <a:defRPr sz="1950" b="1">
                 <a:solidFill>
                   <a:srgbClr val="000000"/>
                 </a:solidFill>
@@ -10305,7 +10305,7 @@
               </a:defRPr>
             </a:pPr>
             <a:r>
-              <a:rPr sz="2250" b="1">
+              <a:rPr sz="1950" b="1">
                 <a:solidFill>
                   <a:srgbClr val="000000"/>
                 </a:solidFill>
@@ -10323,7 +10323,7 @@
           <p:cNvPr id="15" name="">
             <a:extLst xmlns:a="http://schemas.openxmlformats.org/drawingml/2006/main">
               <a:ext uri="{FF2B5EF4-FFF2-40B4-BE49-F238E27FC236}">
-                <a16:creationId xmlns:a16="http://schemas.microsoft.com/office/drawing/2014/main" id="{38061B70-AD3D-4E9C-A195-DF53D5C2C48E}"/>
+                <a16:creationId xmlns:a16="http://schemas.microsoft.com/office/drawing/2014/main" id="{0EB42AFC-B2E4-4275-8721-3148D93AC413}"/>
               </a:ext>
             </a:extLst>
           </p:cNvPr>
@@ -10354,7 +10354,7 @@
           <p:cNvPr id="16" name="">
             <a:extLst xmlns:a="http://schemas.openxmlformats.org/drawingml/2006/main">
               <a:ext uri="{FF2B5EF4-FFF2-40B4-BE49-F238E27FC236}">
-                <a16:creationId xmlns:a16="http://schemas.microsoft.com/office/drawing/2014/main" id="{58BE85BE-1E77-468E-8EA8-F220316F3F37}"/>
+                <a16:creationId xmlns:a16="http://schemas.microsoft.com/office/drawing/2014/main" id="{B4B71F1C-7D73-4A11-9CE9-82F5505E1742}"/>
               </a:ext>
             </a:extLst>
           </p:cNvPr>
@@ -10414,7 +10414,7 @@
           <p:cNvPr id="17" name="">
             <a:extLst xmlns:a="http://schemas.openxmlformats.org/drawingml/2006/main">
               <a:ext uri="{FF2B5EF4-FFF2-40B4-BE49-F238E27FC236}">
-                <a16:creationId xmlns:a16="http://schemas.microsoft.com/office/drawing/2014/main" id="{EEE2E017-96FB-44FB-BBA0-22292A07DF65}"/>
+                <a16:creationId xmlns:a16="http://schemas.microsoft.com/office/drawing/2014/main" id="{8D1696D4-5438-4C17-B10F-5AF83295C8ED}"/>
               </a:ext>
             </a:extLst>
           </p:cNvPr>
@@ -10472,7 +10472,7 @@
     </p:spTree>
     <p:extLst>
       <p:ext uri="{BB962C8B-B14F-4D97-AF65-F5344CB8AC3E}">
-        <p14:creationId xmlns:p14="http://schemas.microsoft.com/office/powerpoint/2010/main" val="1863675690"/>
+        <p14:creationId xmlns:p14="http://schemas.microsoft.com/office/powerpoint/2010/main" val="557607530"/>
       </p:ext>
     </p:extLst>
   </p:cSld>

--- a/outputs/codemap-ctxdb-token-simulation.pptx
+++ b/outputs/codemap-ctxdb-token-simulation.pptx
@@ -2,20 +2,21 @@
 <file path=ppt/presentation.xml><?xml version="1.0" encoding="utf-8"?>
 <p:presentation xmlns:p="http://schemas.openxmlformats.org/presentationml/2006/main">
   <p:sldMasterIdLst>
-    <p:sldMasterId xmlns:r="http://schemas.openxmlformats.org/officeDocument/2006/relationships" id="2147483648" r:id="R40fde7e56ae04d42"/>
+    <p:sldMasterId xmlns:r="http://schemas.openxmlformats.org/officeDocument/2006/relationships" id="2147483648" r:id="Re9bc3b29075b4173"/>
   </p:sldMasterIdLst>
   <p:notesMasterIdLst>
-    <p:notesMasterId xmlns:r="http://schemas.openxmlformats.org/officeDocument/2006/relationships" r:id="R2a5cb03b94044455"/>
+    <p:notesMasterId xmlns:r="http://schemas.openxmlformats.org/officeDocument/2006/relationships" r:id="Rae8e575d661c4089"/>
   </p:notesMasterIdLst>
   <p:sldIdLst>
-    <p:sldId xmlns:r="http://schemas.openxmlformats.org/officeDocument/2006/relationships" id="256" r:id="R6eb00dd1784d4076"/>
-    <p:sldId xmlns:r="http://schemas.openxmlformats.org/officeDocument/2006/relationships" id="257" r:id="R71a9a8385da94787"/>
-    <p:sldId xmlns:r="http://schemas.openxmlformats.org/officeDocument/2006/relationships" id="258" r:id="R88351f1d398243e8"/>
-    <p:sldId xmlns:r="http://schemas.openxmlformats.org/officeDocument/2006/relationships" id="259" r:id="R580249db05b347fb"/>
-    <p:sldId xmlns:r="http://schemas.openxmlformats.org/officeDocument/2006/relationships" id="260" r:id="R40fa9d62c9d04374"/>
-    <p:sldId xmlns:r="http://schemas.openxmlformats.org/officeDocument/2006/relationships" id="261" r:id="R1a6eaeb292854130"/>
-    <p:sldId xmlns:r="http://schemas.openxmlformats.org/officeDocument/2006/relationships" id="262" r:id="Rbbf9e5f0ed18466f"/>
-    <p:sldId xmlns:r="http://schemas.openxmlformats.org/officeDocument/2006/relationships" id="263" r:id="R3ffe819712f7484c"/>
+    <p:sldId xmlns:r="http://schemas.openxmlformats.org/officeDocument/2006/relationships" id="256" r:id="R182e599be2314c52"/>
+    <p:sldId xmlns:r="http://schemas.openxmlformats.org/officeDocument/2006/relationships" id="257" r:id="R5fc664c946ef4f63"/>
+    <p:sldId xmlns:r="http://schemas.openxmlformats.org/officeDocument/2006/relationships" id="258" r:id="Rc8a7e636c3004c31"/>
+    <p:sldId xmlns:r="http://schemas.openxmlformats.org/officeDocument/2006/relationships" id="259" r:id="Re3be52a733f54291"/>
+    <p:sldId xmlns:r="http://schemas.openxmlformats.org/officeDocument/2006/relationships" id="260" r:id="Rb4ee92be71924d3a"/>
+    <p:sldId xmlns:r="http://schemas.openxmlformats.org/officeDocument/2006/relationships" id="261" r:id="R6c3475137963456e"/>
+    <p:sldId xmlns:r="http://schemas.openxmlformats.org/officeDocument/2006/relationships" id="262" r:id="R58c6662229ab4f9b"/>
+    <p:sldId xmlns:r="http://schemas.openxmlformats.org/officeDocument/2006/relationships" id="263" r:id="R4a8059d8aa5d4529"/>
+    <p:sldId xmlns:r="http://schemas.openxmlformats.org/officeDocument/2006/relationships" id="264" r:id="Rbc00fc4e55d0475a"/>
   </p:sldIdLst>
   <p:sldSz cx="12192000" cy="6858000"/>
   <p:notesSz cx="6858000" cy="9144000"/>
@@ -1032,6 +1033,72 @@
 </p:notes>
 </file>
 
+<file path=ppt/notesSlides/notesSlide9.xml><?xml version="1.0" encoding="utf-8"?>
+<p:notes xmlns:p="http://schemas.openxmlformats.org/presentationml/2006/main">
+  <p:cSld>
+    <p:spTree>
+      <p:nvGrpSpPr>
+        <p:cNvPr id="1" name=""/>
+        <p:cNvGrpSpPr/>
+        <p:nvPr/>
+      </p:nvGrpSpPr>
+      <p:grpSpPr>
+        <a:xfrm xmlns:a="http://schemas.openxmlformats.org/drawingml/2006/main"/>
+      </p:grpSpPr>
+      <p:sp>
+        <p:nvSpPr>
+          <p:cNvPr id="2" name="Slide Image Placeholder 1"/>
+          <p:cNvSpPr>
+            <a:spLocks xmlns:a="http://schemas.openxmlformats.org/drawingml/2006/main" noGrp="1"/>
+          </p:cNvSpPr>
+          <p:nvPr>
+            <p:ph type="sldImg" idx="0"/>
+          </p:nvPr>
+        </p:nvSpPr>
+        <p:spPr/>
+      </p:sp>
+      <p:sp>
+        <p:nvSpPr>
+          <p:cNvPr id="3" name="Notes Placeholder 2"/>
+          <p:cNvSpPr>
+            <a:spLocks xmlns:a="http://schemas.openxmlformats.org/drawingml/2006/main" noGrp="1"/>
+          </p:cNvSpPr>
+          <p:nvPr>
+            <p:ph type="body" idx="1"/>
+          </p:nvPr>
+        </p:nvSpPr>
+        <p:spPr/>
+        <p:txBody>
+          <a:bodyPr xmlns:a="http://schemas.openxmlformats.org/drawingml/2006/main"/>
+          <a:lstStyle xmlns:a="http://schemas.openxmlformats.org/drawingml/2006/main"/>
+          <a:p xmlns:a="http://schemas.openxmlformats.org/drawingml/2006/main"/>
+        </p:txBody>
+      </p:sp>
+      <p:sp>
+        <p:nvSpPr>
+          <p:cNvPr id="4" name="Slide Number Placeholder 3"/>
+          <p:cNvSpPr>
+            <a:spLocks xmlns:a="http://schemas.openxmlformats.org/drawingml/2006/main" noGrp="1"/>
+          </p:cNvSpPr>
+          <p:nvPr>
+            <p:ph type="sldNum" idx="5"/>
+          </p:nvPr>
+        </p:nvSpPr>
+        <p:spPr/>
+        <p:txBody>
+          <a:bodyPr xmlns:a="http://schemas.openxmlformats.org/drawingml/2006/main"/>
+          <a:lstStyle xmlns:a="http://schemas.openxmlformats.org/drawingml/2006/main"/>
+          <a:p xmlns:a="http://schemas.openxmlformats.org/drawingml/2006/main"/>
+        </p:txBody>
+      </p:sp>
+    </p:spTree>
+  </p:cSld>
+  <p:clrMapOvr>
+    <a:masterClrMapping xmlns:a="http://schemas.openxmlformats.org/drawingml/2006/main"/>
+  </p:clrMapOvr>
+</p:notes>
+</file>
+
 <file path=ppt/slideLayouts/slideLayout1.xml><?xml version="1.0" encoding="utf-8"?>
 <p:sldLayout xmlns:p="http://schemas.openxmlformats.org/presentationml/2006/main" type="title">
   <p:cSld name="Title Slide">
@@ -1070,7 +1137,7 @@
   </p:cSld>
   <p:clrMap bg1="lt1" tx1="dk1" bg2="lt2" tx2="dk2" accent1="accent1" accent2="accent2" accent3="accent3" accent4="accent4" accent5="accent5" accent6="accent6" hlink="hlink" folHlink="folHlink"/>
   <p:sldLayoutIdLst>
-    <p:sldLayoutId xmlns:r="http://schemas.openxmlformats.org/officeDocument/2006/relationships" id="2147483649" r:id="Re2dd6abe5b56426b"/>
+    <p:sldLayoutId xmlns:r="http://schemas.openxmlformats.org/officeDocument/2006/relationships" id="2147483649" r:id="Rc0486d4b066a4fe4"/>
   </p:sldLayoutIdLst>
   <p:txStyles>
     <p:titleStyle>
@@ -1624,7 +1691,7 @@
                 <c:v>위치 탐색</c:v>
               </c:pt>
               <c:pt idx="1">
-                <c:v>세션 재개</c:v>
+                <c:v>기억 복원</c:v>
               </c:pt>
             </c:strLit>
           </c:cat>
@@ -1660,7 +1727,7 @@
                 <c:v>위치 탐색</c:v>
               </c:pt>
               <c:pt idx="1">
-                <c:v>세션 재개</c:v>
+                <c:v>기억 복원</c:v>
               </c:pt>
             </c:strLit>
           </c:cat>
@@ -1813,7 +1880,7 @@
           <p:cNvPr id="1" name="">
             <a:extLst xmlns:a="http://schemas.openxmlformats.org/drawingml/2006/main">
               <a:ext uri="{FF2B5EF4-FFF2-40B4-BE49-F238E27FC236}">
-                <a16:creationId xmlns:a16="http://schemas.microsoft.com/office/drawing/2014/main" id="{5A11AA72-536E-4267-95A1-D55F581EA83D}"/>
+                <a16:creationId xmlns:a16="http://schemas.microsoft.com/office/drawing/2014/main" id="{971A5A43-27DA-48DB-AF46-54E3AF48C996}"/>
               </a:ext>
             </a:extLst>
           </p:cNvPr>
@@ -1873,7 +1940,7 @@
           <p:cNvPr id="2" name="">
             <a:extLst xmlns:a="http://schemas.openxmlformats.org/drawingml/2006/main">
               <a:ext uri="{FF2B5EF4-FFF2-40B4-BE49-F238E27FC236}">
-                <a16:creationId xmlns:a16="http://schemas.microsoft.com/office/drawing/2014/main" id="{8D196083-86B0-4CF2-A487-B2F57448F8C8}"/>
+                <a16:creationId xmlns:a16="http://schemas.microsoft.com/office/drawing/2014/main" id="{5A6F2AA6-1A71-4F78-B30C-4884F8AE63CA}"/>
               </a:ext>
             </a:extLst>
           </p:cNvPr>
@@ -1933,7 +2000,7 @@
           <p:cNvPr id="3" name="">
             <a:extLst xmlns:a="http://schemas.openxmlformats.org/drawingml/2006/main">
               <a:ext uri="{FF2B5EF4-FFF2-40B4-BE49-F238E27FC236}">
-                <a16:creationId xmlns:a16="http://schemas.microsoft.com/office/drawing/2014/main" id="{C3459731-8D6D-4BA9-B4B8-361312DFAF3F}"/>
+                <a16:creationId xmlns:a16="http://schemas.microsoft.com/office/drawing/2014/main" id="{5565199D-6EFD-4210-88F9-400841B695F0}"/>
               </a:ext>
             </a:extLst>
           </p:cNvPr>
@@ -1983,7 +2050,7 @@
                 <a:ea typeface="Malgun Gothic"/>
                 <a:cs typeface="Malgun Gothic"/>
               </a:rPr>
-              <a:t>파일을 덜 읽고, 세션을 덜 다시 해석하게 만들어 에이전트가 실제 수정 지점에 빨리 도달합니다.</a:t>
+              <a:t>ctxdb는 저장된 작업 기억을 키워드로 읽고, codemap은 수정 위치를 레지스트리로 찾습니다.</a:t>
             </a:r>
           </a:p>
         </p:txBody>
@@ -1993,7 +2060,7 @@
           <p:cNvPr id="4" name="">
             <a:extLst xmlns:a="http://schemas.openxmlformats.org/drawingml/2006/main">
               <a:ext uri="{FF2B5EF4-FFF2-40B4-BE49-F238E27FC236}">
-                <a16:creationId xmlns:a16="http://schemas.microsoft.com/office/drawing/2014/main" id="{46F3D625-8D17-4E5C-A33F-CA06E213AF09}"/>
+                <a16:creationId xmlns:a16="http://schemas.microsoft.com/office/drawing/2014/main" id="{153DFC8E-B70A-411F-9785-62B32D842DC9}"/>
               </a:ext>
             </a:extLst>
           </p:cNvPr>
@@ -2024,7 +2091,7 @@
           <p:cNvPr id="5" name="">
             <a:extLst xmlns:a="http://schemas.openxmlformats.org/drawingml/2006/main">
               <a:ext uri="{FF2B5EF4-FFF2-40B4-BE49-F238E27FC236}">
-                <a16:creationId xmlns:a16="http://schemas.microsoft.com/office/drawing/2014/main" id="{E9EC1501-B492-4F08-AB6F-7806CF7741F5}"/>
+                <a16:creationId xmlns:a16="http://schemas.microsoft.com/office/drawing/2014/main" id="{1D247724-EEDF-439D-AB82-EAC794D179F4}"/>
               </a:ext>
             </a:extLst>
           </p:cNvPr>
@@ -2084,7 +2151,7 @@
           <p:cNvPr id="6" name="">
             <a:extLst xmlns:a="http://schemas.openxmlformats.org/drawingml/2006/main">
               <a:ext uri="{FF2B5EF4-FFF2-40B4-BE49-F238E27FC236}">
-                <a16:creationId xmlns:a16="http://schemas.microsoft.com/office/drawing/2014/main" id="{48802D31-312B-416F-8790-4F4FB8DCA43A}"/>
+                <a16:creationId xmlns:a16="http://schemas.microsoft.com/office/drawing/2014/main" id="{488CE5DC-2202-45DF-A9F9-8B8E52C99650}"/>
               </a:ext>
             </a:extLst>
           </p:cNvPr>
@@ -2144,7 +2211,7 @@
           <p:cNvPr id="7" name="">
             <a:extLst xmlns:a="http://schemas.openxmlformats.org/drawingml/2006/main">
               <a:ext uri="{FF2B5EF4-FFF2-40B4-BE49-F238E27FC236}">
-                <a16:creationId xmlns:a16="http://schemas.microsoft.com/office/drawing/2014/main" id="{BA298014-4BA2-44AC-B020-74D70B719563}"/>
+                <a16:creationId xmlns:a16="http://schemas.microsoft.com/office/drawing/2014/main" id="{284ED4CF-3D81-4A40-BC9F-29BE18DEFC7B}"/>
               </a:ext>
             </a:extLst>
           </p:cNvPr>
@@ -2175,7 +2242,7 @@
           <p:cNvPr id="8" name="">
             <a:extLst xmlns:a="http://schemas.openxmlformats.org/drawingml/2006/main">
               <a:ext uri="{FF2B5EF4-FFF2-40B4-BE49-F238E27FC236}">
-                <a16:creationId xmlns:a16="http://schemas.microsoft.com/office/drawing/2014/main" id="{EC698183-3BB7-44AC-AE20-9200CAED5708}"/>
+                <a16:creationId xmlns:a16="http://schemas.microsoft.com/office/drawing/2014/main" id="{06FE78F1-016B-4302-9167-17A37AA7D1A6}"/>
               </a:ext>
             </a:extLst>
           </p:cNvPr>
@@ -2235,7 +2302,7 @@
           <p:cNvPr id="9" name="">
             <a:extLst xmlns:a="http://schemas.openxmlformats.org/drawingml/2006/main">
               <a:ext uri="{FF2B5EF4-FFF2-40B4-BE49-F238E27FC236}">
-                <a16:creationId xmlns:a16="http://schemas.microsoft.com/office/drawing/2014/main" id="{B8C5ABA3-0CB1-40AB-8461-1791795F3731}"/>
+                <a16:creationId xmlns:a16="http://schemas.microsoft.com/office/drawing/2014/main" id="{1AD4131F-083A-43BF-9432-366A28F7FE9B}"/>
               </a:ext>
             </a:extLst>
           </p:cNvPr>
@@ -2295,7 +2362,7 @@
           <p:cNvPr id="10" name="">
             <a:extLst xmlns:a="http://schemas.openxmlformats.org/drawingml/2006/main">
               <a:ext uri="{FF2B5EF4-FFF2-40B4-BE49-F238E27FC236}">
-                <a16:creationId xmlns:a16="http://schemas.microsoft.com/office/drawing/2014/main" id="{6214797F-5DFE-422B-B7A8-E16C2EECE8F2}"/>
+                <a16:creationId xmlns:a16="http://schemas.microsoft.com/office/drawing/2014/main" id="{769A9987-A6C5-418F-9F21-9BFF0B541A52}"/>
               </a:ext>
             </a:extLst>
           </p:cNvPr>
@@ -2326,7 +2393,7 @@
           <p:cNvPr id="11" name="">
             <a:extLst xmlns:a="http://schemas.openxmlformats.org/drawingml/2006/main">
               <a:ext uri="{FF2B5EF4-FFF2-40B4-BE49-F238E27FC236}">
-                <a16:creationId xmlns:a16="http://schemas.microsoft.com/office/drawing/2014/main" id="{E9FBD091-F315-4610-A714-E06AC7E9CF95}"/>
+                <a16:creationId xmlns:a16="http://schemas.microsoft.com/office/drawing/2014/main" id="{EC3DFCF8-ECEF-4CF0-94FE-ABBF913FD478}"/>
               </a:ext>
             </a:extLst>
           </p:cNvPr>
@@ -2386,7 +2453,7 @@
           <p:cNvPr id="12" name="">
             <a:extLst xmlns:a="http://schemas.openxmlformats.org/drawingml/2006/main">
               <a:ext uri="{FF2B5EF4-FFF2-40B4-BE49-F238E27FC236}">
-                <a16:creationId xmlns:a16="http://schemas.microsoft.com/office/drawing/2014/main" id="{CB08D7DA-238C-41E6-8954-557C46E3A372}"/>
+                <a16:creationId xmlns:a16="http://schemas.microsoft.com/office/drawing/2014/main" id="{FDEDE5B6-D5AB-4199-A863-1F1AEFE3C769}"/>
               </a:ext>
             </a:extLst>
           </p:cNvPr>
@@ -2446,7 +2513,7 @@
           <p:cNvPr id="13" name="">
             <a:extLst xmlns:a="http://schemas.openxmlformats.org/drawingml/2006/main">
               <a:ext uri="{FF2B5EF4-FFF2-40B4-BE49-F238E27FC236}">
-                <a16:creationId xmlns:a16="http://schemas.microsoft.com/office/drawing/2014/main" id="{0769A42D-8469-42F5-B40E-4614614A1E81}"/>
+                <a16:creationId xmlns:a16="http://schemas.microsoft.com/office/drawing/2014/main" id="{854FB686-3F91-4441-9F81-7331349371C7}"/>
               </a:ext>
             </a:extLst>
           </p:cNvPr>
@@ -2477,7 +2544,7 @@
           <p:cNvPr id="14" name="">
             <a:extLst xmlns:a="http://schemas.openxmlformats.org/drawingml/2006/main">
               <a:ext uri="{FF2B5EF4-FFF2-40B4-BE49-F238E27FC236}">
-                <a16:creationId xmlns:a16="http://schemas.microsoft.com/office/drawing/2014/main" id="{41469F7D-54F6-45C8-8178-5D0C6A857CD3}"/>
+                <a16:creationId xmlns:a16="http://schemas.microsoft.com/office/drawing/2014/main" id="{A5351775-C320-417D-AA96-539F536558F7}"/>
               </a:ext>
             </a:extLst>
           </p:cNvPr>
@@ -2537,7 +2604,7 @@
           <p:cNvPr id="15" name="">
             <a:extLst xmlns:a="http://schemas.openxmlformats.org/drawingml/2006/main">
               <a:ext uri="{FF2B5EF4-FFF2-40B4-BE49-F238E27FC236}">
-                <a16:creationId xmlns:a16="http://schemas.microsoft.com/office/drawing/2014/main" id="{A8690CEB-6BD1-4AA6-B870-D08A3C264F27}"/>
+                <a16:creationId xmlns:a16="http://schemas.microsoft.com/office/drawing/2014/main" id="{872E510A-652F-468F-97E5-9C7D3B11FCB5}"/>
               </a:ext>
             </a:extLst>
           </p:cNvPr>
@@ -2595,7 +2662,7 @@
     </p:spTree>
     <p:extLst>
       <p:ext uri="{BB962C8B-B14F-4D97-AF65-F5344CB8AC3E}">
-        <p14:creationId xmlns:p14="http://schemas.microsoft.com/office/powerpoint/2010/main" val="1543655770"/>
+        <p14:creationId xmlns:p14="http://schemas.microsoft.com/office/powerpoint/2010/main" val="347847925"/>
       </p:ext>
     </p:extLst>
   </p:cSld>
@@ -2626,7 +2693,7 @@
           <p:cNvPr id="1" name="">
             <a:extLst xmlns:a="http://schemas.openxmlformats.org/drawingml/2006/main">
               <a:ext uri="{FF2B5EF4-FFF2-40B4-BE49-F238E27FC236}">
-                <a16:creationId xmlns:a16="http://schemas.microsoft.com/office/drawing/2014/main" id="{BD827338-9313-4F0E-AC02-978130D7BD67}"/>
+                <a16:creationId xmlns:a16="http://schemas.microsoft.com/office/drawing/2014/main" id="{1CA86C47-2F53-420E-8B64-9AD8EB92DB9C}"/>
               </a:ext>
             </a:extLst>
           </p:cNvPr>
@@ -2686,7 +2753,7 @@
           <p:cNvPr id="2" name="">
             <a:extLst xmlns:a="http://schemas.openxmlformats.org/drawingml/2006/main">
               <a:ext uri="{FF2B5EF4-FFF2-40B4-BE49-F238E27FC236}">
-                <a16:creationId xmlns:a16="http://schemas.microsoft.com/office/drawing/2014/main" id="{AA139C55-A486-4E97-BA3E-CCCD29676C9A}"/>
+                <a16:creationId xmlns:a16="http://schemas.microsoft.com/office/drawing/2014/main" id="{D516DF3C-0B46-45F4-B005-CAD327305A95}"/>
               </a:ext>
             </a:extLst>
           </p:cNvPr>
@@ -2746,7 +2813,7 @@
           <p:cNvPr id="3" name="">
             <a:extLst xmlns:a="http://schemas.openxmlformats.org/drawingml/2006/main">
               <a:ext uri="{FF2B5EF4-FFF2-40B4-BE49-F238E27FC236}">
-                <a16:creationId xmlns:a16="http://schemas.microsoft.com/office/drawing/2014/main" id="{71E82E87-6706-4802-A777-118446AD311A}"/>
+                <a16:creationId xmlns:a16="http://schemas.microsoft.com/office/drawing/2014/main" id="{DC3D654F-BAD0-4E66-9A8E-7AA57D4A24EA}"/>
               </a:ext>
             </a:extLst>
           </p:cNvPr>
@@ -2806,7 +2873,7 @@
           <p:cNvPr id="4" name="">
             <a:extLst xmlns:a="http://schemas.openxmlformats.org/drawingml/2006/main">
               <a:ext uri="{FF2B5EF4-FFF2-40B4-BE49-F238E27FC236}">
-                <a16:creationId xmlns:a16="http://schemas.microsoft.com/office/drawing/2014/main" id="{1292BCCE-FF83-467A-9FE3-B592DFEB74DB}"/>
+                <a16:creationId xmlns:a16="http://schemas.microsoft.com/office/drawing/2014/main" id="{BC2317AB-B4AC-44C6-A8E5-C6DE9DDB3081}"/>
               </a:ext>
             </a:extLst>
           </p:cNvPr>
@@ -2866,7 +2933,7 @@
           <p:cNvPr id="5" name="">
             <a:extLst xmlns:a="http://schemas.openxmlformats.org/drawingml/2006/main">
               <a:ext uri="{FF2B5EF4-FFF2-40B4-BE49-F238E27FC236}">
-                <a16:creationId xmlns:a16="http://schemas.microsoft.com/office/drawing/2014/main" id="{FBA2CD43-3E5F-4811-A6DF-93A70240673C}"/>
+                <a16:creationId xmlns:a16="http://schemas.microsoft.com/office/drawing/2014/main" id="{BDB41C10-BCD1-4302-8B26-0E74CFA5FF71}"/>
               </a:ext>
             </a:extLst>
           </p:cNvPr>
@@ -2897,7 +2964,7 @@
           <p:cNvPr id="6" name="">
             <a:extLst xmlns:a="http://schemas.openxmlformats.org/drawingml/2006/main">
               <a:ext uri="{FF2B5EF4-FFF2-40B4-BE49-F238E27FC236}">
-                <a16:creationId xmlns:a16="http://schemas.microsoft.com/office/drawing/2014/main" id="{E423985E-AFD1-47D5-835C-8911A4BDED40}"/>
+                <a16:creationId xmlns:a16="http://schemas.microsoft.com/office/drawing/2014/main" id="{B8BD43C5-C9B9-4038-B9AA-E4D6D7BD16FF}"/>
               </a:ext>
             </a:extLst>
           </p:cNvPr>
@@ -2928,7 +2995,7 @@
           <p:cNvPr id="7" name="">
             <a:extLst xmlns:a="http://schemas.openxmlformats.org/drawingml/2006/main">
               <a:ext uri="{FF2B5EF4-FFF2-40B4-BE49-F238E27FC236}">
-                <a16:creationId xmlns:a16="http://schemas.microsoft.com/office/drawing/2014/main" id="{4A5EAD9F-B6D2-459D-B9D2-369288A05378}"/>
+                <a16:creationId xmlns:a16="http://schemas.microsoft.com/office/drawing/2014/main" id="{B6955AED-EAF0-48B4-A88F-75B6B9EC0C51}"/>
               </a:ext>
             </a:extLst>
           </p:cNvPr>
@@ -2959,7 +3026,7 @@
           <p:cNvPr id="8" name="">
             <a:extLst xmlns:a="http://schemas.openxmlformats.org/drawingml/2006/main">
               <a:ext uri="{FF2B5EF4-FFF2-40B4-BE49-F238E27FC236}">
-                <a16:creationId xmlns:a16="http://schemas.microsoft.com/office/drawing/2014/main" id="{65CE3581-B24F-45A6-9938-A11F04BE84DD}"/>
+                <a16:creationId xmlns:a16="http://schemas.microsoft.com/office/drawing/2014/main" id="{2B9CD4D5-3727-4A6B-8334-AE810B2254B3}"/>
               </a:ext>
             </a:extLst>
           </p:cNvPr>
@@ -3019,7 +3086,7 @@
           <p:cNvPr id="9" name="">
             <a:extLst xmlns:a="http://schemas.openxmlformats.org/drawingml/2006/main">
               <a:ext uri="{FF2B5EF4-FFF2-40B4-BE49-F238E27FC236}">
-                <a16:creationId xmlns:a16="http://schemas.microsoft.com/office/drawing/2014/main" id="{E065E96D-E52E-4C61-BBF5-1A3B8E9C07A7}"/>
+                <a16:creationId xmlns:a16="http://schemas.microsoft.com/office/drawing/2014/main" id="{1197594B-7297-45CA-9A2E-06D18178188C}"/>
               </a:ext>
             </a:extLst>
           </p:cNvPr>
@@ -3079,7 +3146,7 @@
           <p:cNvPr id="10" name="">
             <a:extLst xmlns:a="http://schemas.openxmlformats.org/drawingml/2006/main">
               <a:ext uri="{FF2B5EF4-FFF2-40B4-BE49-F238E27FC236}">
-                <a16:creationId xmlns:a16="http://schemas.microsoft.com/office/drawing/2014/main" id="{4192954F-77E0-4AC1-A666-F14AE1854004}"/>
+                <a16:creationId xmlns:a16="http://schemas.microsoft.com/office/drawing/2014/main" id="{A5365177-63F2-4688-8562-8696D1DD1ADC}"/>
               </a:ext>
             </a:extLst>
           </p:cNvPr>
@@ -3139,7 +3206,7 @@
           <p:cNvPr id="11" name="">
             <a:extLst xmlns:a="http://schemas.openxmlformats.org/drawingml/2006/main">
               <a:ext uri="{FF2B5EF4-FFF2-40B4-BE49-F238E27FC236}">
-                <a16:creationId xmlns:a16="http://schemas.microsoft.com/office/drawing/2014/main" id="{65346A58-B626-476A-9DA0-1CE9C9F9E641}"/>
+                <a16:creationId xmlns:a16="http://schemas.microsoft.com/office/drawing/2014/main" id="{F1507FD2-ACA9-4131-85AE-B5D8DCCD9D96}"/>
               </a:ext>
             </a:extLst>
           </p:cNvPr>
@@ -3199,7 +3266,7 @@
           <p:cNvPr id="12" name="">
             <a:extLst xmlns:a="http://schemas.openxmlformats.org/drawingml/2006/main">
               <a:ext uri="{FF2B5EF4-FFF2-40B4-BE49-F238E27FC236}">
-                <a16:creationId xmlns:a16="http://schemas.microsoft.com/office/drawing/2014/main" id="{64144CD1-F0C6-47A7-BA6A-E45D62F4B497}"/>
+                <a16:creationId xmlns:a16="http://schemas.microsoft.com/office/drawing/2014/main" id="{0AB6B1F1-831B-49A5-BF2B-30E64039ABC8}"/>
               </a:ext>
             </a:extLst>
           </p:cNvPr>
@@ -3259,7 +3326,7 @@
           <p:cNvPr id="13" name="">
             <a:extLst xmlns:a="http://schemas.openxmlformats.org/drawingml/2006/main">
               <a:ext uri="{FF2B5EF4-FFF2-40B4-BE49-F238E27FC236}">
-                <a16:creationId xmlns:a16="http://schemas.microsoft.com/office/drawing/2014/main" id="{A09B48C7-C325-4717-A412-CEB6328A9ECC}"/>
+                <a16:creationId xmlns:a16="http://schemas.microsoft.com/office/drawing/2014/main" id="{2C55793D-9A22-4A2B-8DAB-4BEE6A57C3A6}"/>
               </a:ext>
             </a:extLst>
           </p:cNvPr>
@@ -3319,7 +3386,7 @@
           <p:cNvPr id="14" name="">
             <a:extLst xmlns:a="http://schemas.openxmlformats.org/drawingml/2006/main">
               <a:ext uri="{FF2B5EF4-FFF2-40B4-BE49-F238E27FC236}">
-                <a16:creationId xmlns:a16="http://schemas.microsoft.com/office/drawing/2014/main" id="{95EAFFA9-C2E2-4187-8F44-DFE628D5CCE0}"/>
+                <a16:creationId xmlns:a16="http://schemas.microsoft.com/office/drawing/2014/main" id="{3D8BEF80-0831-42F6-8EBE-2E33A2BC708D}"/>
               </a:ext>
             </a:extLst>
           </p:cNvPr>
@@ -3379,7 +3446,7 @@
           <p:cNvPr id="15" name="">
             <a:extLst xmlns:a="http://schemas.openxmlformats.org/drawingml/2006/main">
               <a:ext uri="{FF2B5EF4-FFF2-40B4-BE49-F238E27FC236}">
-                <a16:creationId xmlns:a16="http://schemas.microsoft.com/office/drawing/2014/main" id="{9D130E71-60C0-41E4-A216-067695A7C471}"/>
+                <a16:creationId xmlns:a16="http://schemas.microsoft.com/office/drawing/2014/main" id="{0F32B4C1-53AF-45CC-B84D-352607CE3ED1}"/>
               </a:ext>
             </a:extLst>
           </p:cNvPr>
@@ -3439,7 +3506,7 @@
           <p:cNvPr id="16" name="">
             <a:extLst xmlns:a="http://schemas.openxmlformats.org/drawingml/2006/main">
               <a:ext uri="{FF2B5EF4-FFF2-40B4-BE49-F238E27FC236}">
-                <a16:creationId xmlns:a16="http://schemas.microsoft.com/office/drawing/2014/main" id="{6B9012D9-6D5D-453F-9C1C-4262CAB7F7FB}"/>
+                <a16:creationId xmlns:a16="http://schemas.microsoft.com/office/drawing/2014/main" id="{F7A572BF-7E59-4ED8-B856-9C708E59BFD4}"/>
               </a:ext>
             </a:extLst>
           </p:cNvPr>
@@ -3499,7 +3566,7 @@
           <p:cNvPr id="17" name="">
             <a:extLst xmlns:a="http://schemas.openxmlformats.org/drawingml/2006/main">
               <a:ext uri="{FF2B5EF4-FFF2-40B4-BE49-F238E27FC236}">
-                <a16:creationId xmlns:a16="http://schemas.microsoft.com/office/drawing/2014/main" id="{95F88F94-8DC3-4C1D-B863-083AFF67FE7B}"/>
+                <a16:creationId xmlns:a16="http://schemas.microsoft.com/office/drawing/2014/main" id="{FB9301DC-EDCB-4B6B-9A15-BC522CE3D80D}"/>
               </a:ext>
             </a:extLst>
           </p:cNvPr>
@@ -3530,7 +3597,7 @@
           <p:cNvPr id="18" name="">
             <a:extLst xmlns:a="http://schemas.openxmlformats.org/drawingml/2006/main">
               <a:ext uri="{FF2B5EF4-FFF2-40B4-BE49-F238E27FC236}">
-                <a16:creationId xmlns:a16="http://schemas.microsoft.com/office/drawing/2014/main" id="{F686749F-E70A-40DF-9483-C7A4B8238CD3}"/>
+                <a16:creationId xmlns:a16="http://schemas.microsoft.com/office/drawing/2014/main" id="{6199B739-2462-47F6-9257-53D96EA76BBB}"/>
               </a:ext>
             </a:extLst>
           </p:cNvPr>
@@ -3590,7 +3657,7 @@
           <p:cNvPr id="19" name="">
             <a:extLst xmlns:a="http://schemas.openxmlformats.org/drawingml/2006/main">
               <a:ext uri="{FF2B5EF4-FFF2-40B4-BE49-F238E27FC236}">
-                <a16:creationId xmlns:a16="http://schemas.microsoft.com/office/drawing/2014/main" id="{B385F31E-99AF-4D5F-90A4-E8BD2341D12A}"/>
+                <a16:creationId xmlns:a16="http://schemas.microsoft.com/office/drawing/2014/main" id="{D97B76B1-5729-46B1-BE24-37A50A6F2C2F}"/>
               </a:ext>
             </a:extLst>
           </p:cNvPr>
@@ -3648,7 +3715,7 @@
     </p:spTree>
     <p:extLst>
       <p:ext uri="{BB962C8B-B14F-4D97-AF65-F5344CB8AC3E}">
-        <p14:creationId xmlns:p14="http://schemas.microsoft.com/office/powerpoint/2010/main" val="1838065814"/>
+        <p14:creationId xmlns:p14="http://schemas.microsoft.com/office/powerpoint/2010/main" val="607328788"/>
       </p:ext>
     </p:extLst>
   </p:cSld>
@@ -3679,7 +3746,7 @@
           <p:cNvPr id="1" name="">
             <a:extLst xmlns:a="http://schemas.openxmlformats.org/drawingml/2006/main">
               <a:ext uri="{FF2B5EF4-FFF2-40B4-BE49-F238E27FC236}">
-                <a16:creationId xmlns:a16="http://schemas.microsoft.com/office/drawing/2014/main" id="{A571117B-A549-4E23-A2E3-2029F63E9B51}"/>
+                <a16:creationId xmlns:a16="http://schemas.microsoft.com/office/drawing/2014/main" id="{234456C3-1741-42FF-8654-99BD1D7C5898}"/>
               </a:ext>
             </a:extLst>
           </p:cNvPr>
@@ -3739,7 +3806,7 @@
           <p:cNvPr id="2" name="">
             <a:extLst xmlns:a="http://schemas.openxmlformats.org/drawingml/2006/main">
               <a:ext uri="{FF2B5EF4-FFF2-40B4-BE49-F238E27FC236}">
-                <a16:creationId xmlns:a16="http://schemas.microsoft.com/office/drawing/2014/main" id="{F8D91AA6-4812-4CED-9EAB-63DC41191684}"/>
+                <a16:creationId xmlns:a16="http://schemas.microsoft.com/office/drawing/2014/main" id="{9DEAD8B2-F8EA-4226-9930-3D5C8BDB3047}"/>
               </a:ext>
             </a:extLst>
           </p:cNvPr>
@@ -3799,7 +3866,7 @@
           <p:cNvPr id="3" name="">
             <a:extLst xmlns:a="http://schemas.openxmlformats.org/drawingml/2006/main">
               <a:ext uri="{FF2B5EF4-FFF2-40B4-BE49-F238E27FC236}">
-                <a16:creationId xmlns:a16="http://schemas.microsoft.com/office/drawing/2014/main" id="{C7EEE748-076E-4021-AC3D-DB71521EC881}"/>
+                <a16:creationId xmlns:a16="http://schemas.microsoft.com/office/drawing/2014/main" id="{CF6FDE51-022E-448E-A666-34FCE0F11410}"/>
               </a:ext>
             </a:extLst>
           </p:cNvPr>
@@ -3859,7 +3926,7 @@
           <p:cNvPr id="4" name="">
             <a:extLst xmlns:a="http://schemas.openxmlformats.org/drawingml/2006/main">
               <a:ext uri="{FF2B5EF4-FFF2-40B4-BE49-F238E27FC236}">
-                <a16:creationId xmlns:a16="http://schemas.microsoft.com/office/drawing/2014/main" id="{CA7A4BF0-3F18-4891-AD56-9CB7D1D8F672}"/>
+                <a16:creationId xmlns:a16="http://schemas.microsoft.com/office/drawing/2014/main" id="{0C665EC1-F77C-4DBE-95C4-49B566871E14}"/>
               </a:ext>
             </a:extLst>
           </p:cNvPr>
@@ -3919,7 +3986,7 @@
           <p:cNvPr id="5" name="">
             <a:extLst xmlns:a="http://schemas.openxmlformats.org/drawingml/2006/main">
               <a:ext uri="{FF2B5EF4-FFF2-40B4-BE49-F238E27FC236}">
-                <a16:creationId xmlns:a16="http://schemas.microsoft.com/office/drawing/2014/main" id="{8CCD8C17-E4FB-48D7-A750-590CEB825632}"/>
+                <a16:creationId xmlns:a16="http://schemas.microsoft.com/office/drawing/2014/main" id="{20D157B0-0135-4A79-8A98-F5C309A711C7}"/>
               </a:ext>
             </a:extLst>
           </p:cNvPr>
@@ -3979,7 +4046,7 @@
           <p:cNvPr id="6" name="">
             <a:extLst xmlns:a="http://schemas.openxmlformats.org/drawingml/2006/main">
               <a:ext uri="{FF2B5EF4-FFF2-40B4-BE49-F238E27FC236}">
-                <a16:creationId xmlns:a16="http://schemas.microsoft.com/office/drawing/2014/main" id="{7FB74187-0A5C-4C96-B257-6A643F233819}"/>
+                <a16:creationId xmlns:a16="http://schemas.microsoft.com/office/drawing/2014/main" id="{FA84C2FD-4376-4413-86D0-94AB3E3D5D05}"/>
               </a:ext>
             </a:extLst>
           </p:cNvPr>
@@ -4039,7 +4106,7 @@
           <p:cNvPr id="7" name="">
             <a:extLst xmlns:a="http://schemas.openxmlformats.org/drawingml/2006/main">
               <a:ext uri="{FF2B5EF4-FFF2-40B4-BE49-F238E27FC236}">
-                <a16:creationId xmlns:a16="http://schemas.microsoft.com/office/drawing/2014/main" id="{26332404-2273-408C-841E-FDA3826EC525}"/>
+                <a16:creationId xmlns:a16="http://schemas.microsoft.com/office/drawing/2014/main" id="{82FFDFE3-D514-4A0C-B24E-7FDBA9FF400C}"/>
               </a:ext>
             </a:extLst>
           </p:cNvPr>
@@ -4099,7 +4166,7 @@
           <p:cNvPr id="8" name="">
             <a:extLst xmlns:a="http://schemas.openxmlformats.org/drawingml/2006/main">
               <a:ext uri="{FF2B5EF4-FFF2-40B4-BE49-F238E27FC236}">
-                <a16:creationId xmlns:a16="http://schemas.microsoft.com/office/drawing/2014/main" id="{78D45F58-76B9-4F40-A85A-F6380ED23BA6}"/>
+                <a16:creationId xmlns:a16="http://schemas.microsoft.com/office/drawing/2014/main" id="{631B604B-D5B2-4C68-8CE4-A3B78C391BD2}"/>
               </a:ext>
             </a:extLst>
           </p:cNvPr>
@@ -4159,7 +4226,7 @@
           <p:cNvPr id="9" name="">
             <a:extLst xmlns:a="http://schemas.openxmlformats.org/drawingml/2006/main">
               <a:ext uri="{FF2B5EF4-FFF2-40B4-BE49-F238E27FC236}">
-                <a16:creationId xmlns:a16="http://schemas.microsoft.com/office/drawing/2014/main" id="{6A4E8F42-D26B-4FE4-BBF3-EEDF9D7EC6AD}"/>
+                <a16:creationId xmlns:a16="http://schemas.microsoft.com/office/drawing/2014/main" id="{4A198D5C-2E3C-4A9F-86D4-7587EF418E0A}"/>
               </a:ext>
             </a:extLst>
           </p:cNvPr>
@@ -4219,7 +4286,7 @@
           <p:cNvPr id="10" name="">
             <a:extLst xmlns:a="http://schemas.openxmlformats.org/drawingml/2006/main">
               <a:ext uri="{FF2B5EF4-FFF2-40B4-BE49-F238E27FC236}">
-                <a16:creationId xmlns:a16="http://schemas.microsoft.com/office/drawing/2014/main" id="{64A71F1D-675D-4D87-9261-4F21950EBFCD}"/>
+                <a16:creationId xmlns:a16="http://schemas.microsoft.com/office/drawing/2014/main" id="{8190AAB1-2D80-4710-9A94-E31B881896F1}"/>
               </a:ext>
             </a:extLst>
           </p:cNvPr>
@@ -4279,7 +4346,7 @@
           <p:cNvPr id="11" name="">
             <a:extLst xmlns:a="http://schemas.openxmlformats.org/drawingml/2006/main">
               <a:ext uri="{FF2B5EF4-FFF2-40B4-BE49-F238E27FC236}">
-                <a16:creationId xmlns:a16="http://schemas.microsoft.com/office/drawing/2014/main" id="{52B3BD06-B8B2-432C-A86A-8B8E02920F1A}"/>
+                <a16:creationId xmlns:a16="http://schemas.microsoft.com/office/drawing/2014/main" id="{00DD6CF6-52CC-46DC-919A-25B75CF14041}"/>
               </a:ext>
             </a:extLst>
           </p:cNvPr>
@@ -4310,7 +4377,7 @@
           <p:cNvPr id="12" name="">
             <a:extLst xmlns:a="http://schemas.openxmlformats.org/drawingml/2006/main">
               <a:ext uri="{FF2B5EF4-FFF2-40B4-BE49-F238E27FC236}">
-                <a16:creationId xmlns:a16="http://schemas.microsoft.com/office/drawing/2014/main" id="{01C87E9E-A81A-4315-9102-BD002DE519DB}"/>
+                <a16:creationId xmlns:a16="http://schemas.microsoft.com/office/drawing/2014/main" id="{13C0B38C-5929-4AF7-A3F7-2FD11C42BCF2}"/>
               </a:ext>
             </a:extLst>
           </p:cNvPr>
@@ -4370,7 +4437,7 @@
           <p:cNvPr id="13" name="">
             <a:extLst xmlns:a="http://schemas.openxmlformats.org/drawingml/2006/main">
               <a:ext uri="{FF2B5EF4-FFF2-40B4-BE49-F238E27FC236}">
-                <a16:creationId xmlns:a16="http://schemas.microsoft.com/office/drawing/2014/main" id="{370BFAB2-33B2-476F-9AC6-A250CB11FA82}"/>
+                <a16:creationId xmlns:a16="http://schemas.microsoft.com/office/drawing/2014/main" id="{FE80DCE1-E840-4F2C-8C6A-7A2082E73718}"/>
               </a:ext>
             </a:extLst>
           </p:cNvPr>
@@ -4484,7 +4551,7 @@
           <p:cNvPr id="14" name="">
             <a:extLst xmlns:a="http://schemas.openxmlformats.org/drawingml/2006/main">
               <a:ext uri="{FF2B5EF4-FFF2-40B4-BE49-F238E27FC236}">
-                <a16:creationId xmlns:a16="http://schemas.microsoft.com/office/drawing/2014/main" id="{F90F07AC-B83A-44D2-9FF3-8AB6D8C9F99E}"/>
+                <a16:creationId xmlns:a16="http://schemas.microsoft.com/office/drawing/2014/main" id="{9F87AD68-7C79-4F15-91C7-B208865F969E}"/>
               </a:ext>
             </a:extLst>
           </p:cNvPr>
@@ -4544,7 +4611,7 @@
           <p:cNvPr id="15" name="">
             <a:extLst xmlns:a="http://schemas.openxmlformats.org/drawingml/2006/main">
               <a:ext uri="{FF2B5EF4-FFF2-40B4-BE49-F238E27FC236}">
-                <a16:creationId xmlns:a16="http://schemas.microsoft.com/office/drawing/2014/main" id="{AC192349-7C2E-4D8B-A7BC-6A2388A347EB}"/>
+                <a16:creationId xmlns:a16="http://schemas.microsoft.com/office/drawing/2014/main" id="{1E12E019-7CB7-4DB8-8E1C-BB262B56EAA6}"/>
               </a:ext>
             </a:extLst>
           </p:cNvPr>
@@ -4575,7 +4642,7 @@
           <p:cNvPr id="16" name="">
             <a:extLst xmlns:a="http://schemas.openxmlformats.org/drawingml/2006/main">
               <a:ext uri="{FF2B5EF4-FFF2-40B4-BE49-F238E27FC236}">
-                <a16:creationId xmlns:a16="http://schemas.microsoft.com/office/drawing/2014/main" id="{D709E206-8EC3-405A-8393-E8488E793792}"/>
+                <a16:creationId xmlns:a16="http://schemas.microsoft.com/office/drawing/2014/main" id="{79C53F4B-D5F1-4F09-8938-75198AA67D5A}"/>
               </a:ext>
             </a:extLst>
           </p:cNvPr>
@@ -4635,7 +4702,7 @@
           <p:cNvPr id="17" name="">
             <a:extLst xmlns:a="http://schemas.openxmlformats.org/drawingml/2006/main">
               <a:ext uri="{FF2B5EF4-FFF2-40B4-BE49-F238E27FC236}">
-                <a16:creationId xmlns:a16="http://schemas.microsoft.com/office/drawing/2014/main" id="{76CB2225-287A-4C44-A7DC-A552F7DC945C}"/>
+                <a16:creationId xmlns:a16="http://schemas.microsoft.com/office/drawing/2014/main" id="{8E551B95-8675-42E6-BA9B-5D160994F864}"/>
               </a:ext>
             </a:extLst>
           </p:cNvPr>
@@ -4693,7 +4760,7 @@
     </p:spTree>
     <p:extLst>
       <p:ext uri="{BB962C8B-B14F-4D97-AF65-F5344CB8AC3E}">
-        <p14:creationId xmlns:p14="http://schemas.microsoft.com/office/powerpoint/2010/main" val="79208298"/>
+        <p14:creationId xmlns:p14="http://schemas.microsoft.com/office/powerpoint/2010/main" val="577179941"/>
       </p:ext>
     </p:extLst>
   </p:cSld>
@@ -4724,7 +4791,7 @@
           <p:cNvPr id="1" name="">
             <a:extLst xmlns:a="http://schemas.openxmlformats.org/drawingml/2006/main">
               <a:ext uri="{FF2B5EF4-FFF2-40B4-BE49-F238E27FC236}">
-                <a16:creationId xmlns:a16="http://schemas.microsoft.com/office/drawing/2014/main" id="{E4D010AF-5EAB-4B4D-A14E-0EB9AED85D35}"/>
+                <a16:creationId xmlns:a16="http://schemas.microsoft.com/office/drawing/2014/main" id="{D21DFC47-780B-4224-9EF6-25FCA0D16285}"/>
               </a:ext>
             </a:extLst>
           </p:cNvPr>
@@ -4784,7 +4851,7 @@
           <p:cNvPr id="2" name="">
             <a:extLst xmlns:a="http://schemas.openxmlformats.org/drawingml/2006/main">
               <a:ext uri="{FF2B5EF4-FFF2-40B4-BE49-F238E27FC236}">
-                <a16:creationId xmlns:a16="http://schemas.microsoft.com/office/drawing/2014/main" id="{0CF0C14A-4068-4118-B4BD-2673F776044A}"/>
+                <a16:creationId xmlns:a16="http://schemas.microsoft.com/office/drawing/2014/main" id="{66E78231-F729-4147-B7B6-9E708D94B913}"/>
               </a:ext>
             </a:extLst>
           </p:cNvPr>
@@ -4834,7 +4901,7 @@
                 <a:ea typeface="Malgun Gothic"/>
                 <a:cs typeface="Malgun Gothic"/>
               </a:rPr>
-              <a:t>ctxdb는 세션이 시작되거나 재개될 때 작동합니다</a:t>
+              <a:t>ctxdb는 명령 내용으로 저장된 기억을 읽습니다</a:t>
             </a:r>
           </a:p>
         </p:txBody>
@@ -4844,7 +4911,7 @@
           <p:cNvPr id="3" name="">
             <a:extLst xmlns:a="http://schemas.openxmlformats.org/drawingml/2006/main">
               <a:ext uri="{FF2B5EF4-FFF2-40B4-BE49-F238E27FC236}">
-                <a16:creationId xmlns:a16="http://schemas.microsoft.com/office/drawing/2014/main" id="{9569CFD1-5A52-45F0-AC1F-6136C8AD8083}"/>
+                <a16:creationId xmlns:a16="http://schemas.microsoft.com/office/drawing/2014/main" id="{C199605D-B64A-4C4E-9BDC-C1AE677F883C}"/>
               </a:ext>
             </a:extLst>
           </p:cNvPr>
@@ -4894,7 +4961,7 @@
                 <a:ea typeface="Malgun Gothic"/>
                 <a:cs typeface="Malgun Gothic"/>
               </a:rPr>
-              <a:t>현재 작업 상태를 원문에서 다시 만드는 대신, 키워드에 맞는 요약 레벨까지만 읽습니다.</a:t>
+              <a:t>세션 재시작 전용이 아니라, 사용자 커맨드의 키워드로 필요한 L2 요약만 가져오는 읽기 경로입니다.</a:t>
             </a:r>
           </a:p>
         </p:txBody>
@@ -4904,7 +4971,7 @@
           <p:cNvPr id="4" name="">
             <a:extLst xmlns:a="http://schemas.openxmlformats.org/drawingml/2006/main">
               <a:ext uri="{FF2B5EF4-FFF2-40B4-BE49-F238E27FC236}">
-                <a16:creationId xmlns:a16="http://schemas.microsoft.com/office/drawing/2014/main" id="{8BEB0603-64CF-478C-84E2-D7A023D7CFA3}"/>
+                <a16:creationId xmlns:a16="http://schemas.microsoft.com/office/drawing/2014/main" id="{04CC6A2A-50CE-4971-911B-CFAF17E9EAC3}"/>
               </a:ext>
             </a:extLst>
           </p:cNvPr>
@@ -4964,19 +5031,19 @@
           <p:cNvPr id="5" name="">
             <a:extLst xmlns:a="http://schemas.openxmlformats.org/drawingml/2006/main">
               <a:ext uri="{FF2B5EF4-FFF2-40B4-BE49-F238E27FC236}">
-                <a16:creationId xmlns:a16="http://schemas.microsoft.com/office/drawing/2014/main" id="{9D648D72-69FD-41DE-9747-41293EFA051F}"/>
-              </a:ext>
-            </a:extLst>
-          </p:cNvPr>
-          <p:cNvSpPr>
-            <a:spLocks xmlns:a="http://schemas.openxmlformats.org/drawingml/2006/main" noGrp="1"/>
-          </p:cNvSpPr>
-          <p:nvPr/>
-        </p:nvSpPr>
-        <p:spPr>
-          <a:xfrm xmlns:a="http://schemas.openxmlformats.org/drawingml/2006/main">
-            <a:off x="666750" y="3028950"/>
-            <a:ext cx="10287000" cy="685800"/>
+                <a16:creationId xmlns:a16="http://schemas.microsoft.com/office/drawing/2014/main" id="{447F0A50-DB48-453E-8B48-D1E91351CB0F}"/>
+              </a:ext>
+            </a:extLst>
+          </p:cNvPr>
+          <p:cNvSpPr>
+            <a:spLocks xmlns:a="http://schemas.openxmlformats.org/drawingml/2006/main" noGrp="1"/>
+          </p:cNvSpPr>
+          <p:nvPr/>
+        </p:nvSpPr>
+        <p:spPr>
+          <a:xfrm xmlns:a="http://schemas.openxmlformats.org/drawingml/2006/main">
+            <a:off x="666750" y="2990850"/>
+            <a:ext cx="10287000" cy="742950"/>
           </a:xfrm>
           <a:prstGeom xmlns:a="http://schemas.openxmlformats.org/drawingml/2006/main" prst="rect">
             <a:avLst/>
@@ -4995,18 +5062,18 @@
           <p:cNvPr id="6" name="">
             <a:extLst xmlns:a="http://schemas.openxmlformats.org/drawingml/2006/main">
               <a:ext uri="{FF2B5EF4-FFF2-40B4-BE49-F238E27FC236}">
-                <a16:creationId xmlns:a16="http://schemas.microsoft.com/office/drawing/2014/main" id="{A600246D-6C71-4AD8-9136-99BC5F70845D}"/>
-              </a:ext>
-            </a:extLst>
-          </p:cNvPr>
-          <p:cNvSpPr>
-            <a:spLocks xmlns:a="http://schemas.openxmlformats.org/drawingml/2006/main" noGrp="1"/>
-          </p:cNvSpPr>
-          <p:nvPr/>
-        </p:nvSpPr>
-        <p:spPr>
-          <a:xfrm xmlns:a="http://schemas.openxmlformats.org/drawingml/2006/main">
-            <a:off x="876300" y="3219450"/>
+                <a16:creationId xmlns:a16="http://schemas.microsoft.com/office/drawing/2014/main" id="{D00CA1A3-B598-4D3A-8AC5-950AAFE2FBC3}"/>
+              </a:ext>
+            </a:extLst>
+          </p:cNvPr>
+          <p:cNvSpPr>
+            <a:spLocks xmlns:a="http://schemas.openxmlformats.org/drawingml/2006/main" noGrp="1"/>
+          </p:cNvSpPr>
+          <p:nvPr/>
+        </p:nvSpPr>
+        <p:spPr>
+          <a:xfrm xmlns:a="http://schemas.openxmlformats.org/drawingml/2006/main">
+            <a:off x="876300" y="3200400"/>
             <a:ext cx="1428750" cy="304800"/>
           </a:xfrm>
           <a:prstGeom xmlns:a="http://schemas.openxmlformats.org/drawingml/2006/main" prst="rect">
@@ -5045,7 +5112,7 @@
                 <a:ea typeface="Malgun Gothic"/>
                 <a:cs typeface="Malgun Gothic"/>
               </a:rPr>
-              <a:t>첫 메시지</a:t>
+              <a:t>사용자 명령</a:t>
             </a:r>
           </a:p>
         </p:txBody>
@@ -5055,18 +5122,18 @@
           <p:cNvPr id="7" name="">
             <a:extLst xmlns:a="http://schemas.openxmlformats.org/drawingml/2006/main">
               <a:ext uri="{FF2B5EF4-FFF2-40B4-BE49-F238E27FC236}">
-                <a16:creationId xmlns:a16="http://schemas.microsoft.com/office/drawing/2014/main" id="{5EB9330B-C89F-41B8-97FD-1266B2039434}"/>
-              </a:ext>
-            </a:extLst>
-          </p:cNvPr>
-          <p:cNvSpPr>
-            <a:spLocks xmlns:a="http://schemas.openxmlformats.org/drawingml/2006/main" noGrp="1"/>
-          </p:cNvSpPr>
-          <p:nvPr/>
-        </p:nvSpPr>
-        <p:spPr>
-          <a:xfrm xmlns:a="http://schemas.openxmlformats.org/drawingml/2006/main">
-            <a:off x="2457450" y="3219450"/>
+                <a16:creationId xmlns:a16="http://schemas.microsoft.com/office/drawing/2014/main" id="{5AD2936E-6D3E-42F6-9EE4-07434525D146}"/>
+              </a:ext>
+            </a:extLst>
+          </p:cNvPr>
+          <p:cNvSpPr>
+            <a:spLocks xmlns:a="http://schemas.openxmlformats.org/drawingml/2006/main" noGrp="1"/>
+          </p:cNvSpPr>
+          <p:nvPr/>
+        </p:nvSpPr>
+        <p:spPr>
+          <a:xfrm xmlns:a="http://schemas.openxmlformats.org/drawingml/2006/main">
+            <a:off x="2476500" y="3200400"/>
             <a:ext cx="3429000" cy="304800"/>
           </a:xfrm>
           <a:prstGeom xmlns:a="http://schemas.openxmlformats.org/drawingml/2006/main" prst="rect">
@@ -5115,18 +5182,18 @@
           <p:cNvPr id="8" name="">
             <a:extLst xmlns:a="http://schemas.openxmlformats.org/drawingml/2006/main">
               <a:ext uri="{FF2B5EF4-FFF2-40B4-BE49-F238E27FC236}">
-                <a16:creationId xmlns:a16="http://schemas.microsoft.com/office/drawing/2014/main" id="{975981EE-8E77-4953-B65F-464943382DC1}"/>
-              </a:ext>
-            </a:extLst>
-          </p:cNvPr>
-          <p:cNvSpPr>
-            <a:spLocks xmlns:a="http://schemas.openxmlformats.org/drawingml/2006/main" noGrp="1"/>
-          </p:cNvSpPr>
-          <p:nvPr/>
-        </p:nvSpPr>
-        <p:spPr>
-          <a:xfrm xmlns:a="http://schemas.openxmlformats.org/drawingml/2006/main">
-            <a:off x="7296150" y="3238500"/>
+                <a16:creationId xmlns:a16="http://schemas.microsoft.com/office/drawing/2014/main" id="{36D0F482-E67D-4C9D-BD19-30DA5375FB84}"/>
+              </a:ext>
+            </a:extLst>
+          </p:cNvPr>
+          <p:cNvSpPr>
+            <a:spLocks xmlns:a="http://schemas.openxmlformats.org/drawingml/2006/main" noGrp="1"/>
+          </p:cNvSpPr>
+          <p:nvPr/>
+        </p:nvSpPr>
+        <p:spPr>
+          <a:xfrm xmlns:a="http://schemas.openxmlformats.org/drawingml/2006/main">
+            <a:off x="7353300" y="3219450"/>
             <a:ext cx="2857500" cy="266700"/>
           </a:xfrm>
           <a:prstGeom xmlns:a="http://schemas.openxmlformats.org/drawingml/2006/main" prst="rect">
@@ -5175,7 +5242,7 @@
           <p:cNvPr id="9" name="">
             <a:extLst xmlns:a="http://schemas.openxmlformats.org/drawingml/2006/main">
               <a:ext uri="{FF2B5EF4-FFF2-40B4-BE49-F238E27FC236}">
-                <a16:creationId xmlns:a16="http://schemas.microsoft.com/office/drawing/2014/main" id="{10DD10B1-612A-4926-9F26-BE4AB4F64365}"/>
+                <a16:creationId xmlns:a16="http://schemas.microsoft.com/office/drawing/2014/main" id="{F48DB1CA-49F7-4A49-8713-52E9E0494DEF}"/>
               </a:ext>
             </a:extLst>
           </p:cNvPr>
@@ -5235,7 +5302,7 @@
           <p:cNvPr id="10" name="">
             <a:extLst xmlns:a="http://schemas.openxmlformats.org/drawingml/2006/main">
               <a:ext uri="{FF2B5EF4-FFF2-40B4-BE49-F238E27FC236}">
-                <a16:creationId xmlns:a16="http://schemas.microsoft.com/office/drawing/2014/main" id="{112E97CB-7E91-46D7-8937-AEF8719337DF}"/>
+                <a16:creationId xmlns:a16="http://schemas.microsoft.com/office/drawing/2014/main" id="{8DE1D39C-6BD8-495B-9695-22D6A7432646}"/>
               </a:ext>
             </a:extLst>
           </p:cNvPr>
@@ -5285,7 +5352,7 @@
                 <a:ea typeface="Malgun Gothic"/>
                 <a:cs typeface="Malgun Gothic"/>
               </a:rPr>
-              <a:t>INDEX 매칭</a:t>
+              <a:t>INDEX/L1 매칭</a:t>
             </a:r>
           </a:p>
         </p:txBody>
@@ -5295,7 +5362,7 @@
           <p:cNvPr id="11" name="">
             <a:extLst xmlns:a="http://schemas.openxmlformats.org/drawingml/2006/main">
               <a:ext uri="{FF2B5EF4-FFF2-40B4-BE49-F238E27FC236}">
-                <a16:creationId xmlns:a16="http://schemas.microsoft.com/office/drawing/2014/main" id="{B89ECF5C-5042-4F4C-9192-E89C52D66510}"/>
+                <a16:creationId xmlns:a16="http://schemas.microsoft.com/office/drawing/2014/main" id="{2DF52711-3568-4D7D-99E9-8AF2106D6B4E}"/>
               </a:ext>
             </a:extLst>
           </p:cNvPr>
@@ -5345,7 +5412,7 @@
                 <a:ea typeface="Malgun Gothic"/>
                 <a:cs typeface="Malgun Gothic"/>
               </a:rPr>
-              <a:t>키워드가 어느 L1/L2 영역에 해당하는지 판단</a:t>
+              <a:t>키워드가 어느 작업 기억 영역에 해당하는지 판단</a:t>
             </a:r>
           </a:p>
         </p:txBody>
@@ -5355,7 +5422,7 @@
           <p:cNvPr id="12" name="">
             <a:extLst xmlns:a="http://schemas.openxmlformats.org/drawingml/2006/main">
               <a:ext uri="{FF2B5EF4-FFF2-40B4-BE49-F238E27FC236}">
-                <a16:creationId xmlns:a16="http://schemas.microsoft.com/office/drawing/2014/main" id="{042E5AED-A701-4850-9021-386AFEBCD197}"/>
+                <a16:creationId xmlns:a16="http://schemas.microsoft.com/office/drawing/2014/main" id="{4F55E19D-F959-489F-BAEF-8B18DA180955}"/>
               </a:ext>
             </a:extLst>
           </p:cNvPr>
@@ -5415,7 +5482,7 @@
           <p:cNvPr id="13" name="">
             <a:extLst xmlns:a="http://schemas.openxmlformats.org/drawingml/2006/main">
               <a:ext uri="{FF2B5EF4-FFF2-40B4-BE49-F238E27FC236}">
-                <a16:creationId xmlns:a16="http://schemas.microsoft.com/office/drawing/2014/main" id="{0C6C1BF1-DC20-478E-886C-F26D1D5A6DF1}"/>
+                <a16:creationId xmlns:a16="http://schemas.microsoft.com/office/drawing/2014/main" id="{29EF5615-B9C1-4E05-A1F2-9871B3F60AFC}"/>
               </a:ext>
             </a:extLst>
           </p:cNvPr>
@@ -5465,7 +5532,7 @@
                 <a:ea typeface="Malgun Gothic"/>
                 <a:cs typeface="Malgun Gothic"/>
               </a:rPr>
-              <a:t>L2 현재 상태만 로드</a:t>
+              <a:t>L2 요약만 로드</a:t>
             </a:r>
           </a:p>
         </p:txBody>
@@ -5475,7 +5542,7 @@
           <p:cNvPr id="14" name="">
             <a:extLst xmlns:a="http://schemas.openxmlformats.org/drawingml/2006/main">
               <a:ext uri="{FF2B5EF4-FFF2-40B4-BE49-F238E27FC236}">
-                <a16:creationId xmlns:a16="http://schemas.microsoft.com/office/drawing/2014/main" id="{2D111F46-74A8-4763-AD5C-05DEF78A4B5C}"/>
+                <a16:creationId xmlns:a16="http://schemas.microsoft.com/office/drawing/2014/main" id="{0F332053-4AB4-401C-878F-82248A7EB331}"/>
               </a:ext>
             </a:extLst>
           </p:cNvPr>
@@ -5525,7 +5592,7 @@
                 <a:ea typeface="Malgun Gothic"/>
                 <a:cs typeface="Malgun Gothic"/>
               </a:rPr>
-              <a:t>전체 메타 이력과 오래된 설계 원문은 건너뜀</a:t>
+              <a:t>저장된 현재 상태를 읽고, 원문 재구성은 건너뜀</a:t>
             </a:r>
           </a:p>
         </p:txBody>
@@ -5535,7 +5602,7 @@
           <p:cNvPr id="15" name="">
             <a:extLst xmlns:a="http://schemas.openxmlformats.org/drawingml/2006/main">
               <a:ext uri="{FF2B5EF4-FFF2-40B4-BE49-F238E27FC236}">
-                <a16:creationId xmlns:a16="http://schemas.microsoft.com/office/drawing/2014/main" id="{9F0BC85B-3521-47E9-8B99-B6D60F6C6E21}"/>
+                <a16:creationId xmlns:a16="http://schemas.microsoft.com/office/drawing/2014/main" id="{9C484263-EEAC-458B-88DA-C2EF3406C3B5}"/>
               </a:ext>
             </a:extLst>
           </p:cNvPr>
@@ -5585,7 +5652,7 @@
                 <a:ea typeface="Malgun Gothic"/>
                 <a:cs typeface="Malgun Gothic"/>
               </a:rPr>
-              <a:t>작동 예시: 새 세션 시작, /resume, compact 이후 재개, 다른 에이전트가 이어받는 순간</a:t>
+              <a:t>대표 시점: 새 세션 시작, /resume, handoff 인수, 사용자가 “이어서” 요청하는 순간</a:t>
             </a:r>
           </a:p>
         </p:txBody>
@@ -5595,7 +5662,7 @@
           <p:cNvPr id="16" name="">
             <a:extLst xmlns:a="http://schemas.openxmlformats.org/drawingml/2006/main">
               <a:ext uri="{FF2B5EF4-FFF2-40B4-BE49-F238E27FC236}">
-                <a16:creationId xmlns:a16="http://schemas.microsoft.com/office/drawing/2014/main" id="{D60B581E-6E5A-4D18-A78F-30B801668765}"/>
+                <a16:creationId xmlns:a16="http://schemas.microsoft.com/office/drawing/2014/main" id="{E18DF0A6-03CE-4F6D-8152-6A20E65EFF26}"/>
               </a:ext>
             </a:extLst>
           </p:cNvPr>
@@ -5626,7 +5693,7 @@
           <p:cNvPr id="17" name="">
             <a:extLst xmlns:a="http://schemas.openxmlformats.org/drawingml/2006/main">
               <a:ext uri="{FF2B5EF4-FFF2-40B4-BE49-F238E27FC236}">
-                <a16:creationId xmlns:a16="http://schemas.microsoft.com/office/drawing/2014/main" id="{F94B43DF-69D6-4399-867B-58E38891AD34}"/>
+                <a16:creationId xmlns:a16="http://schemas.microsoft.com/office/drawing/2014/main" id="{D0C2BFA4-6DC2-4D44-8846-021B83544B2D}"/>
               </a:ext>
             </a:extLst>
           </p:cNvPr>
@@ -5686,7 +5753,7 @@
           <p:cNvPr id="18" name="">
             <a:extLst xmlns:a="http://schemas.openxmlformats.org/drawingml/2006/main">
               <a:ext uri="{FF2B5EF4-FFF2-40B4-BE49-F238E27FC236}">
-                <a16:creationId xmlns:a16="http://schemas.microsoft.com/office/drawing/2014/main" id="{4269CF4D-A59D-436C-B281-0E77BEA4F7D5}"/>
+                <a16:creationId xmlns:a16="http://schemas.microsoft.com/office/drawing/2014/main" id="{947F4BDB-4A9A-4EE9-97D4-C631143093F8}"/>
               </a:ext>
             </a:extLst>
           </p:cNvPr>
@@ -5744,7 +5811,7 @@
     </p:spTree>
     <p:extLst>
       <p:ext uri="{BB962C8B-B14F-4D97-AF65-F5344CB8AC3E}">
-        <p14:creationId xmlns:p14="http://schemas.microsoft.com/office/powerpoint/2010/main" val="601525397"/>
+        <p14:creationId xmlns:p14="http://schemas.microsoft.com/office/powerpoint/2010/main" val="576220999"/>
       </p:ext>
     </p:extLst>
   </p:cSld>
@@ -5775,7 +5842,7 @@
           <p:cNvPr id="1" name="">
             <a:extLst xmlns:a="http://schemas.openxmlformats.org/drawingml/2006/main">
               <a:ext uri="{FF2B5EF4-FFF2-40B4-BE49-F238E27FC236}">
-                <a16:creationId xmlns:a16="http://schemas.microsoft.com/office/drawing/2014/main" id="{4B0FBC00-4A46-4185-A95D-41EAC445E711}"/>
+                <a16:creationId xmlns:a16="http://schemas.microsoft.com/office/drawing/2014/main" id="{E822D3F3-2797-4FFE-8125-2E63AEE8E815}"/>
               </a:ext>
             </a:extLst>
           </p:cNvPr>
@@ -5825,7 +5892,7 @@
                 <a:ea typeface="Malgun Gothic"/>
                 <a:cs typeface="Malgun Gothic"/>
               </a:rPr>
-              <a:t>관계</a:t>
+              <a:t>context-saver</a:t>
             </a:r>
           </a:p>
         </p:txBody>
@@ -5835,7 +5902,7 @@
           <p:cNvPr id="2" name="">
             <a:extLst xmlns:a="http://schemas.openxmlformats.org/drawingml/2006/main">
               <a:ext uri="{FF2B5EF4-FFF2-40B4-BE49-F238E27FC236}">
-                <a16:creationId xmlns:a16="http://schemas.microsoft.com/office/drawing/2014/main" id="{63DEDD5A-BDB8-4273-91A5-5B70970A553C}"/>
+                <a16:creationId xmlns:a16="http://schemas.microsoft.com/office/drawing/2014/main" id="{9EFEC940-AFA1-450A-B2D1-F087E80BE4C8}"/>
               </a:ext>
             </a:extLst>
           </p:cNvPr>
@@ -5885,7 +5952,7 @@
                 <a:ea typeface="Malgun Gothic"/>
                 <a:cs typeface="Malgun Gothic"/>
               </a:rPr>
-              <a:t>두 스킬은 같은 일을 하지 않습니다</a:t>
+              <a:t>context-saver는 ctxdb에 기억을 저장하는 단계입니다</a:t>
             </a:r>
           </a:p>
         </p:txBody>
@@ -5895,7 +5962,7 @@
           <p:cNvPr id="3" name="">
             <a:extLst xmlns:a="http://schemas.openxmlformats.org/drawingml/2006/main">
               <a:ext uri="{FF2B5EF4-FFF2-40B4-BE49-F238E27FC236}">
-                <a16:creationId xmlns:a16="http://schemas.microsoft.com/office/drawing/2014/main" id="{32130B35-4F13-43D6-847B-BAF4BEADC6FA}"/>
+                <a16:creationId xmlns:a16="http://schemas.microsoft.com/office/drawing/2014/main" id="{7AB6F647-C916-493B-9B0F-00C1238FB9B2}"/>
               </a:ext>
             </a:extLst>
           </p:cNvPr>
@@ -5945,7 +6012,7 @@
                 <a:ea typeface="Malgun Gothic"/>
                 <a:cs typeface="Malgun Gothic"/>
               </a:rPr>
-              <a:t>ctxdb는 세션의 출발점을 줄이고, codemap은 코드 탐색의 이동 거리를 줄입니다.</a:t>
+              <a:t>사용자가 직접 호출할 수도 있고, hook/checkpoint/handoff 흐름에서 저장 절차로 사용됩니다.</a:t>
             </a:r>
           </a:p>
         </p:txBody>
@@ -5955,7 +6022,7 @@
           <p:cNvPr id="4" name="">
             <a:extLst xmlns:a="http://schemas.openxmlformats.org/drawingml/2006/main">
               <a:ext uri="{FF2B5EF4-FFF2-40B4-BE49-F238E27FC236}">
-                <a16:creationId xmlns:a16="http://schemas.microsoft.com/office/drawing/2014/main" id="{45E5C139-AEDC-47F3-B38F-8A9596FDEFD2}"/>
+                <a16:creationId xmlns:a16="http://schemas.microsoft.com/office/drawing/2014/main" id="{07B69FEC-0E93-4AE2-9558-0E620D930B2E}"/>
               </a:ext>
             </a:extLst>
           </p:cNvPr>
@@ -6015,28 +6082,30 @@
           <p:cNvPr id="5" name="">
             <a:extLst xmlns:a="http://schemas.openxmlformats.org/drawingml/2006/main">
               <a:ext uri="{FF2B5EF4-FFF2-40B4-BE49-F238E27FC236}">
-                <a16:creationId xmlns:a16="http://schemas.microsoft.com/office/drawing/2014/main" id="{85B82D6B-EDFF-48F3-83BA-5115E620D742}"/>
-              </a:ext>
-            </a:extLst>
-          </p:cNvPr>
-          <p:cNvSpPr>
-            <a:spLocks xmlns:a="http://schemas.openxmlformats.org/drawingml/2006/main" noGrp="1"/>
-          </p:cNvSpPr>
-          <p:nvPr/>
-        </p:nvSpPr>
-        <p:spPr>
-          <a:xfrm xmlns:a="http://schemas.openxmlformats.org/drawingml/2006/main">
-            <a:off x="628650" y="2914650"/>
-            <a:ext cx="4953000" cy="2381250"/>
+                <a16:creationId xmlns:a16="http://schemas.microsoft.com/office/drawing/2014/main" id="{9DB62038-A234-4CB8-8F2A-63954F8F42DE}"/>
+              </a:ext>
+            </a:extLst>
+          </p:cNvPr>
+          <p:cNvSpPr>
+            <a:spLocks xmlns:a="http://schemas.openxmlformats.org/drawingml/2006/main" noGrp="1"/>
+          </p:cNvSpPr>
+          <p:nvPr/>
+        </p:nvSpPr>
+        <p:spPr>
+          <a:xfrm xmlns:a="http://schemas.openxmlformats.org/drawingml/2006/main">
+            <a:off x="704850" y="2705100"/>
+            <a:ext cx="10096500" cy="400050"/>
           </a:xfrm>
           <a:prstGeom xmlns:a="http://schemas.openxmlformats.org/drawingml/2006/main" prst="rect">
             <a:avLst/>
           </a:prstGeom>
           <a:solidFill xmlns:a="http://schemas.openxmlformats.org/drawingml/2006/main">
-            <a:srgbClr val="F7F7F7"/>
+            <a:srgbClr val="EDEDED"/>
           </a:solidFill>
-          <a:ln xmlns:a="http://schemas.openxmlformats.org/drawingml/2006/main" w="0">
-            <a:noFill/>
+          <a:ln xmlns:a="http://schemas.openxmlformats.org/drawingml/2006/main" w="9525">
+            <a:solidFill>
+              <a:srgbClr val="B8BCC4"/>
+            </a:solidFill>
             <a:prstDash val="solid"/>
           </a:ln>
         </p:spPr>
@@ -6046,50 +6115,232 @@
           <p:cNvPr id="6" name="">
             <a:extLst xmlns:a="http://schemas.openxmlformats.org/drawingml/2006/main">
               <a:ext uri="{FF2B5EF4-FFF2-40B4-BE49-F238E27FC236}">
-                <a16:creationId xmlns:a16="http://schemas.microsoft.com/office/drawing/2014/main" id="{F01A89A1-32DD-4BAA-8674-DF174E5A5844}"/>
-              </a:ext>
-            </a:extLst>
-          </p:cNvPr>
-          <p:cNvSpPr>
-            <a:spLocks xmlns:a="http://schemas.openxmlformats.org/drawingml/2006/main" noGrp="1"/>
-          </p:cNvSpPr>
-          <p:nvPr/>
-        </p:nvSpPr>
-        <p:spPr>
-          <a:xfrm xmlns:a="http://schemas.openxmlformats.org/drawingml/2006/main">
-            <a:off x="6610350" y="2914650"/>
-            <a:ext cx="4953000" cy="2381250"/>
+                <a16:creationId xmlns:a16="http://schemas.microsoft.com/office/drawing/2014/main" id="{34B7B7E5-CF23-4A54-BDB5-CFB09036E1BA}"/>
+              </a:ext>
+            </a:extLst>
+          </p:cNvPr>
+          <p:cNvSpPr>
+            <a:spLocks xmlns:a="http://schemas.openxmlformats.org/drawingml/2006/main" noGrp="1"/>
+          </p:cNvSpPr>
+          <p:nvPr/>
+        </p:nvSpPr>
+        <p:spPr>
+          <a:xfrm xmlns:a="http://schemas.openxmlformats.org/drawingml/2006/main">
+            <a:off x="876300" y="2809875"/>
+            <a:ext cx="1562100" cy="228600"/>
+          </a:xfrm>
+          <a:prstGeom xmlns:a="http://schemas.openxmlformats.org/drawingml/2006/main" prst="rect">
+            <a:avLst/>
+          </a:prstGeom>
+          <a:noFill xmlns:a="http://schemas.openxmlformats.org/drawingml/2006/main"/>
+          <a:ln xmlns:a="http://schemas.openxmlformats.org/drawingml/2006/main" w="0">
+            <a:noFill/>
+            <a:prstDash val="solid"/>
+          </a:ln>
+        </p:spPr>
+        <p:txBody>
+          <a:bodyPr xmlns:a="http://schemas.openxmlformats.org/drawingml/2006/main"/>
+          <a:lstStyle xmlns:a="http://schemas.openxmlformats.org/drawingml/2006/main"/>
+          <a:p xmlns:a="http://schemas.openxmlformats.org/drawingml/2006/main">
+            <a:pPr algn="l">
+              <a:lnSpc>
+                <a:spcPct val="112000"/>
+              </a:lnSpc>
+              <a:buNone/>
+              <a:defRPr sz="1350" b="1">
+                <a:solidFill>
+                  <a:srgbClr val="000000"/>
+                </a:solidFill>
+                <a:latin typeface="Malgun Gothic"/>
+                <a:ea typeface="Malgun Gothic"/>
+                <a:cs typeface="Malgun Gothic"/>
+              </a:defRPr>
+            </a:pPr>
+            <a:r>
+              <a:rPr sz="1350" b="1">
+                <a:solidFill>
+                  <a:srgbClr val="000000"/>
+                </a:solidFill>
+                <a:latin typeface="Malgun Gothic"/>
+                <a:ea typeface="Malgun Gothic"/>
+                <a:cs typeface="Malgun Gothic"/>
+              </a:rPr>
+              <a:t>언제 호출되나</a:t>
+            </a:r>
+          </a:p>
+        </p:txBody>
+      </p:sp>
+      <p:sp>
+        <p:nvSpPr>
+          <p:cNvPr id="7" name="">
+            <a:extLst xmlns:a="http://schemas.openxmlformats.org/drawingml/2006/main">
+              <a:ext uri="{FF2B5EF4-FFF2-40B4-BE49-F238E27FC236}">
+                <a16:creationId xmlns:a16="http://schemas.microsoft.com/office/drawing/2014/main" id="{0CFBA1B6-F8B0-4A14-B45B-B42E9F76EB4A}"/>
+              </a:ext>
+            </a:extLst>
+          </p:cNvPr>
+          <p:cNvSpPr>
+            <a:spLocks xmlns:a="http://schemas.openxmlformats.org/drawingml/2006/main" noGrp="1"/>
+          </p:cNvSpPr>
+          <p:nvPr/>
+        </p:nvSpPr>
+        <p:spPr>
+          <a:xfrm xmlns:a="http://schemas.openxmlformats.org/drawingml/2006/main">
+            <a:off x="2686050" y="2809875"/>
+            <a:ext cx="3181350" cy="228600"/>
+          </a:xfrm>
+          <a:prstGeom xmlns:a="http://schemas.openxmlformats.org/drawingml/2006/main" prst="rect">
+            <a:avLst/>
+          </a:prstGeom>
+          <a:noFill xmlns:a="http://schemas.openxmlformats.org/drawingml/2006/main"/>
+          <a:ln xmlns:a="http://schemas.openxmlformats.org/drawingml/2006/main" w="0">
+            <a:noFill/>
+            <a:prstDash val="solid"/>
+          </a:ln>
+        </p:spPr>
+        <p:txBody>
+          <a:bodyPr xmlns:a="http://schemas.openxmlformats.org/drawingml/2006/main"/>
+          <a:lstStyle xmlns:a="http://schemas.openxmlformats.org/drawingml/2006/main"/>
+          <a:p xmlns:a="http://schemas.openxmlformats.org/drawingml/2006/main">
+            <a:pPr algn="l">
+              <a:lnSpc>
+                <a:spcPct val="112000"/>
+              </a:lnSpc>
+              <a:buNone/>
+              <a:defRPr sz="1350" b="1">
+                <a:solidFill>
+                  <a:srgbClr val="000000"/>
+                </a:solidFill>
+                <a:latin typeface="Malgun Gothic"/>
+                <a:ea typeface="Malgun Gothic"/>
+                <a:cs typeface="Malgun Gothic"/>
+              </a:defRPr>
+            </a:pPr>
+            <a:r>
+              <a:rPr sz="1350" b="1">
+                <a:solidFill>
+                  <a:srgbClr val="000000"/>
+                </a:solidFill>
+                <a:latin typeface="Malgun Gothic"/>
+                <a:ea typeface="Malgun Gothic"/>
+                <a:cs typeface="Malgun Gothic"/>
+              </a:rPr>
+              <a:t>트리거</a:t>
+            </a:r>
+          </a:p>
+        </p:txBody>
+      </p:sp>
+      <p:sp>
+        <p:nvSpPr>
+          <p:cNvPr id="8" name="">
+            <a:extLst xmlns:a="http://schemas.openxmlformats.org/drawingml/2006/main">
+              <a:ext uri="{FF2B5EF4-FFF2-40B4-BE49-F238E27FC236}">
+                <a16:creationId xmlns:a16="http://schemas.microsoft.com/office/drawing/2014/main" id="{2FF14756-A038-4818-8359-28C87C4D0FAD}"/>
+              </a:ext>
+            </a:extLst>
+          </p:cNvPr>
+          <p:cNvSpPr>
+            <a:spLocks xmlns:a="http://schemas.openxmlformats.org/drawingml/2006/main" noGrp="1"/>
+          </p:cNvSpPr>
+          <p:nvPr/>
+        </p:nvSpPr>
+        <p:spPr>
+          <a:xfrm xmlns:a="http://schemas.openxmlformats.org/drawingml/2006/main">
+            <a:off x="6115050" y="2809875"/>
+            <a:ext cx="4610100" cy="228600"/>
+          </a:xfrm>
+          <a:prstGeom xmlns:a="http://schemas.openxmlformats.org/drawingml/2006/main" prst="rect">
+            <a:avLst/>
+          </a:prstGeom>
+          <a:noFill xmlns:a="http://schemas.openxmlformats.org/drawingml/2006/main"/>
+          <a:ln xmlns:a="http://schemas.openxmlformats.org/drawingml/2006/main" w="0">
+            <a:noFill/>
+            <a:prstDash val="solid"/>
+          </a:ln>
+        </p:spPr>
+        <p:txBody>
+          <a:bodyPr xmlns:a="http://schemas.openxmlformats.org/drawingml/2006/main"/>
+          <a:lstStyle xmlns:a="http://schemas.openxmlformats.org/drawingml/2006/main"/>
+          <a:p xmlns:a="http://schemas.openxmlformats.org/drawingml/2006/main">
+            <a:pPr algn="l">
+              <a:lnSpc>
+                <a:spcPct val="112000"/>
+              </a:lnSpc>
+              <a:buNone/>
+              <a:defRPr sz="1350" b="1">
+                <a:solidFill>
+                  <a:srgbClr val="000000"/>
+                </a:solidFill>
+                <a:latin typeface="Malgun Gothic"/>
+                <a:ea typeface="Malgun Gothic"/>
+                <a:cs typeface="Malgun Gothic"/>
+              </a:defRPr>
+            </a:pPr>
+            <a:r>
+              <a:rPr sz="1350" b="1">
+                <a:solidFill>
+                  <a:srgbClr val="000000"/>
+                </a:solidFill>
+                <a:latin typeface="Malgun Gothic"/>
+                <a:ea typeface="Malgun Gothic"/>
+                <a:cs typeface="Malgun Gothic"/>
+              </a:rPr>
+              <a:t>저장 결과</a:t>
+            </a:r>
+          </a:p>
+        </p:txBody>
+      </p:sp>
+      <p:sp>
+        <p:nvSpPr>
+          <p:cNvPr id="9" name="">
+            <a:extLst xmlns:a="http://schemas.openxmlformats.org/drawingml/2006/main">
+              <a:ext uri="{FF2B5EF4-FFF2-40B4-BE49-F238E27FC236}">
+                <a16:creationId xmlns:a16="http://schemas.microsoft.com/office/drawing/2014/main" id="{11047E7F-32AC-4782-86D6-12F835C8A0BD}"/>
+              </a:ext>
+            </a:extLst>
+          </p:cNvPr>
+          <p:cNvSpPr>
+            <a:spLocks xmlns:a="http://schemas.openxmlformats.org/drawingml/2006/main" noGrp="1"/>
+          </p:cNvSpPr>
+          <p:nvPr/>
+        </p:nvSpPr>
+        <p:spPr>
+          <a:xfrm xmlns:a="http://schemas.openxmlformats.org/drawingml/2006/main">
+            <a:off x="704850" y="3143250"/>
+            <a:ext cx="10096500" cy="514350"/>
           </a:xfrm>
           <a:prstGeom xmlns:a="http://schemas.openxmlformats.org/drawingml/2006/main" prst="rect">
             <a:avLst/>
           </a:prstGeom>
           <a:solidFill xmlns:a="http://schemas.openxmlformats.org/drawingml/2006/main">
-            <a:srgbClr val="F7F7F7"/>
+            <a:srgbClr val="FFFFFF"/>
           </a:solidFill>
-          <a:ln xmlns:a="http://schemas.openxmlformats.org/drawingml/2006/main" w="0">
-            <a:noFill/>
-            <a:prstDash val="solid"/>
-          </a:ln>
-        </p:spPr>
-      </p:sp>
-      <p:sp>
-        <p:nvSpPr>
-          <p:cNvPr id="7" name="">
-            <a:extLst xmlns:a="http://schemas.openxmlformats.org/drawingml/2006/main">
-              <a:ext uri="{FF2B5EF4-FFF2-40B4-BE49-F238E27FC236}">
-                <a16:creationId xmlns:a16="http://schemas.microsoft.com/office/drawing/2014/main" id="{E5D0B7E3-5DF3-4BB8-B28E-E921A74C607C}"/>
-              </a:ext>
-            </a:extLst>
-          </p:cNvPr>
-          <p:cNvSpPr>
-            <a:spLocks xmlns:a="http://schemas.openxmlformats.org/drawingml/2006/main" noGrp="1"/>
-          </p:cNvSpPr>
-          <p:nvPr/>
-        </p:nvSpPr>
-        <p:spPr>
-          <a:xfrm xmlns:a="http://schemas.openxmlformats.org/drawingml/2006/main">
-            <a:off x="914400" y="3162300"/>
-            <a:ext cx="2286000" cy="514350"/>
+          <a:ln xmlns:a="http://schemas.openxmlformats.org/drawingml/2006/main" w="9525">
+            <a:solidFill>
+              <a:srgbClr val="B8BCC4"/>
+            </a:solidFill>
+            <a:prstDash val="solid"/>
+          </a:ln>
+        </p:spPr>
+      </p:sp>
+      <p:sp>
+        <p:nvSpPr>
+          <p:cNvPr id="10" name="">
+            <a:extLst xmlns:a="http://schemas.openxmlformats.org/drawingml/2006/main">
+              <a:ext uri="{FF2B5EF4-FFF2-40B4-BE49-F238E27FC236}">
+                <a16:creationId xmlns:a16="http://schemas.microsoft.com/office/drawing/2014/main" id="{43D1DB7C-071E-4218-ABC3-ED29A3999E6C}"/>
+              </a:ext>
+            </a:extLst>
+          </p:cNvPr>
+          <p:cNvSpPr>
+            <a:spLocks xmlns:a="http://schemas.openxmlformats.org/drawingml/2006/main" noGrp="1"/>
+          </p:cNvSpPr>
+          <p:nvPr/>
+        </p:nvSpPr>
+        <p:spPr>
+          <a:xfrm xmlns:a="http://schemas.openxmlformats.org/drawingml/2006/main">
+            <a:off x="876300" y="3286125"/>
+            <a:ext cx="1524000" cy="266700"/>
           </a:xfrm>
           <a:prstGeom xmlns:a="http://schemas.openxmlformats.org/drawingml/2006/main" prst="rect">
             <a:avLst/>
@@ -6109,7 +6360,7 @@
                 <a:spcPct val="112000"/>
               </a:lnSpc>
               <a:buNone/>
-              <a:defRPr sz="3300" b="1">
+              <a:defRPr sz="1425" b="1">
                 <a:solidFill>
                   <a:srgbClr val="000000"/>
                 </a:solidFill>
@@ -6119,7 +6370,7 @@
               </a:defRPr>
             </a:pPr>
             <a:r>
-              <a:rPr sz="3300" b="1">
+              <a:rPr sz="1425" b="1">
                 <a:solidFill>
                   <a:srgbClr val="000000"/>
                 </a:solidFill>
@@ -6127,187 +6378,7 @@
                 <a:ea typeface="Malgun Gothic"/>
                 <a:cs typeface="Malgun Gothic"/>
               </a:rPr>
-              <a:t>ctxdb</a:t>
-            </a:r>
-          </a:p>
-        </p:txBody>
-      </p:sp>
-      <p:sp>
-        <p:nvSpPr>
-          <p:cNvPr id="8" name="">
-            <a:extLst xmlns:a="http://schemas.openxmlformats.org/drawingml/2006/main">
-              <a:ext uri="{FF2B5EF4-FFF2-40B4-BE49-F238E27FC236}">
-                <a16:creationId xmlns:a16="http://schemas.microsoft.com/office/drawing/2014/main" id="{4656E6D3-7B4E-4B25-8954-9F2E2EAAF9D0}"/>
-              </a:ext>
-            </a:extLst>
-          </p:cNvPr>
-          <p:cNvSpPr>
-            <a:spLocks xmlns:a="http://schemas.openxmlformats.org/drawingml/2006/main" noGrp="1"/>
-          </p:cNvSpPr>
-          <p:nvPr/>
-        </p:nvSpPr>
-        <p:spPr>
-          <a:xfrm xmlns:a="http://schemas.openxmlformats.org/drawingml/2006/main">
-            <a:off x="914400" y="3867150"/>
-            <a:ext cx="1333500" cy="266700"/>
-          </a:xfrm>
-          <a:prstGeom xmlns:a="http://schemas.openxmlformats.org/drawingml/2006/main" prst="rect">
-            <a:avLst/>
-          </a:prstGeom>
-          <a:noFill xmlns:a="http://schemas.openxmlformats.org/drawingml/2006/main"/>
-          <a:ln xmlns:a="http://schemas.openxmlformats.org/drawingml/2006/main" w="0">
-            <a:noFill/>
-            <a:prstDash val="solid"/>
-          </a:ln>
-        </p:spPr>
-        <p:txBody>
-          <a:bodyPr xmlns:a="http://schemas.openxmlformats.org/drawingml/2006/main"/>
-          <a:lstStyle xmlns:a="http://schemas.openxmlformats.org/drawingml/2006/main"/>
-          <a:p xmlns:a="http://schemas.openxmlformats.org/drawingml/2006/main">
-            <a:pPr algn="l">
-              <a:lnSpc>
-                <a:spcPct val="112000"/>
-              </a:lnSpc>
-              <a:buNone/>
-              <a:defRPr sz="1350" b="1">
-                <a:solidFill>
-                  <a:srgbClr val="555555"/>
-                </a:solidFill>
-                <a:latin typeface="Malgun Gothic"/>
-                <a:ea typeface="Malgun Gothic"/>
-                <a:cs typeface="Malgun Gothic"/>
-              </a:defRPr>
-            </a:pPr>
-            <a:r>
-              <a:rPr sz="1350" b="1">
-                <a:solidFill>
-                  <a:srgbClr val="555555"/>
-                </a:solidFill>
-                <a:latin typeface="Malgun Gothic"/>
-                <a:ea typeface="Malgun Gothic"/>
-                <a:cs typeface="Malgun Gothic"/>
-              </a:rPr>
-              <a:t>언제 쓰나</a:t>
-            </a:r>
-          </a:p>
-        </p:txBody>
-      </p:sp>
-      <p:sp>
-        <p:nvSpPr>
-          <p:cNvPr id="9" name="">
-            <a:extLst xmlns:a="http://schemas.openxmlformats.org/drawingml/2006/main">
-              <a:ext uri="{FF2B5EF4-FFF2-40B4-BE49-F238E27FC236}">
-                <a16:creationId xmlns:a16="http://schemas.microsoft.com/office/drawing/2014/main" id="{41FDD025-D38E-4F46-9B31-EEBB96BA76A5}"/>
-              </a:ext>
-            </a:extLst>
-          </p:cNvPr>
-          <p:cNvSpPr>
-            <a:spLocks xmlns:a="http://schemas.openxmlformats.org/drawingml/2006/main" noGrp="1"/>
-          </p:cNvSpPr>
-          <p:nvPr/>
-        </p:nvSpPr>
-        <p:spPr>
-          <a:xfrm xmlns:a="http://schemas.openxmlformats.org/drawingml/2006/main">
-            <a:off x="2381250" y="3867150"/>
-            <a:ext cx="2476500" cy="266700"/>
-          </a:xfrm>
-          <a:prstGeom xmlns:a="http://schemas.openxmlformats.org/drawingml/2006/main" prst="rect">
-            <a:avLst/>
-          </a:prstGeom>
-          <a:noFill xmlns:a="http://schemas.openxmlformats.org/drawingml/2006/main"/>
-          <a:ln xmlns:a="http://schemas.openxmlformats.org/drawingml/2006/main" w="0">
-            <a:noFill/>
-            <a:prstDash val="solid"/>
-          </a:ln>
-        </p:spPr>
-        <p:txBody>
-          <a:bodyPr xmlns:a="http://schemas.openxmlformats.org/drawingml/2006/main"/>
-          <a:lstStyle xmlns:a="http://schemas.openxmlformats.org/drawingml/2006/main"/>
-          <a:p xmlns:a="http://schemas.openxmlformats.org/drawingml/2006/main">
-            <a:pPr algn="l">
-              <a:lnSpc>
-                <a:spcPct val="112000"/>
-              </a:lnSpc>
-              <a:buNone/>
-              <a:defRPr sz="1500" b="0">
-                <a:solidFill>
-                  <a:srgbClr val="000000"/>
-                </a:solidFill>
-                <a:latin typeface="Malgun Gothic"/>
-                <a:ea typeface="Malgun Gothic"/>
-                <a:cs typeface="Malgun Gothic"/>
-              </a:defRPr>
-            </a:pPr>
-            <a:r>
-              <a:rPr sz="1500" b="0">
-                <a:solidFill>
-                  <a:srgbClr val="000000"/>
-                </a:solidFill>
-                <a:latin typeface="Malgun Gothic"/>
-                <a:ea typeface="Malgun Gothic"/>
-                <a:cs typeface="Malgun Gothic"/>
-              </a:rPr>
-              <a:t>세션 시작 / 재개 / handoff</a:t>
-            </a:r>
-          </a:p>
-        </p:txBody>
-      </p:sp>
-      <p:sp>
-        <p:nvSpPr>
-          <p:cNvPr id="10" name="">
-            <a:extLst xmlns:a="http://schemas.openxmlformats.org/drawingml/2006/main">
-              <a:ext uri="{FF2B5EF4-FFF2-40B4-BE49-F238E27FC236}">
-                <a16:creationId xmlns:a16="http://schemas.microsoft.com/office/drawing/2014/main" id="{3D270231-909C-4968-9B46-928CB6BA60F4}"/>
-              </a:ext>
-            </a:extLst>
-          </p:cNvPr>
-          <p:cNvSpPr>
-            <a:spLocks xmlns:a="http://schemas.openxmlformats.org/drawingml/2006/main" noGrp="1"/>
-          </p:cNvSpPr>
-          <p:nvPr/>
-        </p:nvSpPr>
-        <p:spPr>
-          <a:xfrm xmlns:a="http://schemas.openxmlformats.org/drawingml/2006/main">
-            <a:off x="914400" y="4400550"/>
-            <a:ext cx="1333500" cy="266700"/>
-          </a:xfrm>
-          <a:prstGeom xmlns:a="http://schemas.openxmlformats.org/drawingml/2006/main" prst="rect">
-            <a:avLst/>
-          </a:prstGeom>
-          <a:noFill xmlns:a="http://schemas.openxmlformats.org/drawingml/2006/main"/>
-          <a:ln xmlns:a="http://schemas.openxmlformats.org/drawingml/2006/main" w="0">
-            <a:noFill/>
-            <a:prstDash val="solid"/>
-          </a:ln>
-        </p:spPr>
-        <p:txBody>
-          <a:bodyPr xmlns:a="http://schemas.openxmlformats.org/drawingml/2006/main"/>
-          <a:lstStyle xmlns:a="http://schemas.openxmlformats.org/drawingml/2006/main"/>
-          <a:p xmlns:a="http://schemas.openxmlformats.org/drawingml/2006/main">
-            <a:pPr algn="l">
-              <a:lnSpc>
-                <a:spcPct val="112000"/>
-              </a:lnSpc>
-              <a:buNone/>
-              <a:defRPr sz="1350" b="1">
-                <a:solidFill>
-                  <a:srgbClr val="555555"/>
-                </a:solidFill>
-                <a:latin typeface="Malgun Gothic"/>
-                <a:ea typeface="Malgun Gothic"/>
-                <a:cs typeface="Malgun Gothic"/>
-              </a:defRPr>
-            </a:pPr>
-            <a:r>
-              <a:rPr sz="1350" b="1">
-                <a:solidFill>
-                  <a:srgbClr val="555555"/>
-                </a:solidFill>
-                <a:latin typeface="Malgun Gothic"/>
-                <a:ea typeface="Malgun Gothic"/>
-                <a:cs typeface="Malgun Gothic"/>
-              </a:rPr>
-              <a:t>줄이는 것</a:t>
+              <a:t>직접 호출</a:t>
             </a:r>
           </a:p>
         </p:txBody>
@@ -6317,439 +6388,19 @@
           <p:cNvPr id="11" name="">
             <a:extLst xmlns:a="http://schemas.openxmlformats.org/drawingml/2006/main">
               <a:ext uri="{FF2B5EF4-FFF2-40B4-BE49-F238E27FC236}">
-                <a16:creationId xmlns:a16="http://schemas.microsoft.com/office/drawing/2014/main" id="{CE418DB9-CCCC-459E-B5B1-7F8A8F15BFF1}"/>
-              </a:ext>
-            </a:extLst>
-          </p:cNvPr>
-          <p:cNvSpPr>
-            <a:spLocks xmlns:a="http://schemas.openxmlformats.org/drawingml/2006/main" noGrp="1"/>
-          </p:cNvSpPr>
-          <p:nvPr/>
-        </p:nvSpPr>
-        <p:spPr>
-          <a:xfrm xmlns:a="http://schemas.openxmlformats.org/drawingml/2006/main">
-            <a:off x="2381250" y="4400550"/>
-            <a:ext cx="2476500" cy="266700"/>
-          </a:xfrm>
-          <a:prstGeom xmlns:a="http://schemas.openxmlformats.org/drawingml/2006/main" prst="rect">
-            <a:avLst/>
-          </a:prstGeom>
-          <a:noFill xmlns:a="http://schemas.openxmlformats.org/drawingml/2006/main"/>
-          <a:ln xmlns:a="http://schemas.openxmlformats.org/drawingml/2006/main" w="0">
-            <a:noFill/>
-            <a:prstDash val="solid"/>
-          </a:ln>
-        </p:spPr>
-        <p:txBody>
-          <a:bodyPr xmlns:a="http://schemas.openxmlformats.org/drawingml/2006/main"/>
-          <a:lstStyle xmlns:a="http://schemas.openxmlformats.org/drawingml/2006/main"/>
-          <a:p xmlns:a="http://schemas.openxmlformats.org/drawingml/2006/main">
-            <a:pPr algn="l">
-              <a:lnSpc>
-                <a:spcPct val="112000"/>
-              </a:lnSpc>
-              <a:buNone/>
-              <a:defRPr sz="1500" b="0">
-                <a:solidFill>
-                  <a:srgbClr val="000000"/>
-                </a:solidFill>
-                <a:latin typeface="Malgun Gothic"/>
-                <a:ea typeface="Malgun Gothic"/>
-                <a:cs typeface="Malgun Gothic"/>
-              </a:defRPr>
-            </a:pPr>
-            <a:r>
-              <a:rPr sz="1500" b="0">
-                <a:solidFill>
-                  <a:srgbClr val="000000"/>
-                </a:solidFill>
-                <a:latin typeface="Malgun Gothic"/>
-                <a:ea typeface="Malgun Gothic"/>
-                <a:cs typeface="Malgun Gothic"/>
-              </a:rPr>
-              <a:t>상태 복원에 쓰는 읽기</a:t>
-            </a:r>
-          </a:p>
-        </p:txBody>
-      </p:sp>
-      <p:sp>
-        <p:nvSpPr>
-          <p:cNvPr id="12" name="">
-            <a:extLst xmlns:a="http://schemas.openxmlformats.org/drawingml/2006/main">
-              <a:ext uri="{FF2B5EF4-FFF2-40B4-BE49-F238E27FC236}">
-                <a16:creationId xmlns:a16="http://schemas.microsoft.com/office/drawing/2014/main" id="{0512C617-7872-40DA-B78D-3DDBC6E5F07A}"/>
-              </a:ext>
-            </a:extLst>
-          </p:cNvPr>
-          <p:cNvSpPr>
-            <a:spLocks xmlns:a="http://schemas.openxmlformats.org/drawingml/2006/main" noGrp="1"/>
-          </p:cNvSpPr>
-          <p:nvPr/>
-        </p:nvSpPr>
-        <p:spPr>
-          <a:xfrm xmlns:a="http://schemas.openxmlformats.org/drawingml/2006/main">
-            <a:off x="6896100" y="3162300"/>
-            <a:ext cx="2476500" cy="514350"/>
-          </a:xfrm>
-          <a:prstGeom xmlns:a="http://schemas.openxmlformats.org/drawingml/2006/main" prst="rect">
-            <a:avLst/>
-          </a:prstGeom>
-          <a:noFill xmlns:a="http://schemas.openxmlformats.org/drawingml/2006/main"/>
-          <a:ln xmlns:a="http://schemas.openxmlformats.org/drawingml/2006/main" w="0">
-            <a:noFill/>
-            <a:prstDash val="solid"/>
-          </a:ln>
-        </p:spPr>
-        <p:txBody>
-          <a:bodyPr xmlns:a="http://schemas.openxmlformats.org/drawingml/2006/main"/>
-          <a:lstStyle xmlns:a="http://schemas.openxmlformats.org/drawingml/2006/main"/>
-          <a:p xmlns:a="http://schemas.openxmlformats.org/drawingml/2006/main">
-            <a:pPr algn="l">
-              <a:lnSpc>
-                <a:spcPct val="112000"/>
-              </a:lnSpc>
-              <a:buNone/>
-              <a:defRPr sz="3300" b="1">
-                <a:solidFill>
-                  <a:srgbClr val="000000"/>
-                </a:solidFill>
-                <a:latin typeface="Malgun Gothic"/>
-                <a:ea typeface="Malgun Gothic"/>
-                <a:cs typeface="Malgun Gothic"/>
-              </a:defRPr>
-            </a:pPr>
-            <a:r>
-              <a:rPr sz="3300" b="1">
-                <a:solidFill>
-                  <a:srgbClr val="000000"/>
-                </a:solidFill>
-                <a:latin typeface="Malgun Gothic"/>
-                <a:ea typeface="Malgun Gothic"/>
-                <a:cs typeface="Malgun Gothic"/>
-              </a:rPr>
-              <a:t>codemap</a:t>
-            </a:r>
-          </a:p>
-        </p:txBody>
-      </p:sp>
-      <p:sp>
-        <p:nvSpPr>
-          <p:cNvPr id="13" name="">
-            <a:extLst xmlns:a="http://schemas.openxmlformats.org/drawingml/2006/main">
-              <a:ext uri="{FF2B5EF4-FFF2-40B4-BE49-F238E27FC236}">
-                <a16:creationId xmlns:a16="http://schemas.microsoft.com/office/drawing/2014/main" id="{B647789F-ECA9-4DD4-BC5E-589060102E75}"/>
-              </a:ext>
-            </a:extLst>
-          </p:cNvPr>
-          <p:cNvSpPr>
-            <a:spLocks xmlns:a="http://schemas.openxmlformats.org/drawingml/2006/main" noGrp="1"/>
-          </p:cNvSpPr>
-          <p:nvPr/>
-        </p:nvSpPr>
-        <p:spPr>
-          <a:xfrm xmlns:a="http://schemas.openxmlformats.org/drawingml/2006/main">
-            <a:off x="6896100" y="3867150"/>
-            <a:ext cx="1333500" cy="266700"/>
-          </a:xfrm>
-          <a:prstGeom xmlns:a="http://schemas.openxmlformats.org/drawingml/2006/main" prst="rect">
-            <a:avLst/>
-          </a:prstGeom>
-          <a:noFill xmlns:a="http://schemas.openxmlformats.org/drawingml/2006/main"/>
-          <a:ln xmlns:a="http://schemas.openxmlformats.org/drawingml/2006/main" w="0">
-            <a:noFill/>
-            <a:prstDash val="solid"/>
-          </a:ln>
-        </p:spPr>
-        <p:txBody>
-          <a:bodyPr xmlns:a="http://schemas.openxmlformats.org/drawingml/2006/main"/>
-          <a:lstStyle xmlns:a="http://schemas.openxmlformats.org/drawingml/2006/main"/>
-          <a:p xmlns:a="http://schemas.openxmlformats.org/drawingml/2006/main">
-            <a:pPr algn="l">
-              <a:lnSpc>
-                <a:spcPct val="112000"/>
-              </a:lnSpc>
-              <a:buNone/>
-              <a:defRPr sz="1350" b="1">
-                <a:solidFill>
-                  <a:srgbClr val="555555"/>
-                </a:solidFill>
-                <a:latin typeface="Malgun Gothic"/>
-                <a:ea typeface="Malgun Gothic"/>
-                <a:cs typeface="Malgun Gothic"/>
-              </a:defRPr>
-            </a:pPr>
-            <a:r>
-              <a:rPr sz="1350" b="1">
-                <a:solidFill>
-                  <a:srgbClr val="555555"/>
-                </a:solidFill>
-                <a:latin typeface="Malgun Gothic"/>
-                <a:ea typeface="Malgun Gothic"/>
-                <a:cs typeface="Malgun Gothic"/>
-              </a:rPr>
-              <a:t>언제 쓰나</a:t>
-            </a:r>
-          </a:p>
-        </p:txBody>
-      </p:sp>
-      <p:sp>
-        <p:nvSpPr>
-          <p:cNvPr id="14" name="">
-            <a:extLst xmlns:a="http://schemas.openxmlformats.org/drawingml/2006/main">
-              <a:ext uri="{FF2B5EF4-FFF2-40B4-BE49-F238E27FC236}">
-                <a16:creationId xmlns:a16="http://schemas.microsoft.com/office/drawing/2014/main" id="{5148D122-462A-4672-8B58-7DEBC4507F60}"/>
-              </a:ext>
-            </a:extLst>
-          </p:cNvPr>
-          <p:cNvSpPr>
-            <a:spLocks xmlns:a="http://schemas.openxmlformats.org/drawingml/2006/main" noGrp="1"/>
-          </p:cNvSpPr>
-          <p:nvPr/>
-        </p:nvSpPr>
-        <p:spPr>
-          <a:xfrm xmlns:a="http://schemas.openxmlformats.org/drawingml/2006/main">
-            <a:off x="8362950" y="3867150"/>
-            <a:ext cx="2628900" cy="266700"/>
-          </a:xfrm>
-          <a:prstGeom xmlns:a="http://schemas.openxmlformats.org/drawingml/2006/main" prst="rect">
-            <a:avLst/>
-          </a:prstGeom>
-          <a:noFill xmlns:a="http://schemas.openxmlformats.org/drawingml/2006/main"/>
-          <a:ln xmlns:a="http://schemas.openxmlformats.org/drawingml/2006/main" w="0">
-            <a:noFill/>
-            <a:prstDash val="solid"/>
-          </a:ln>
-        </p:spPr>
-        <p:txBody>
-          <a:bodyPr xmlns:a="http://schemas.openxmlformats.org/drawingml/2006/main"/>
-          <a:lstStyle xmlns:a="http://schemas.openxmlformats.org/drawingml/2006/main"/>
-          <a:p xmlns:a="http://schemas.openxmlformats.org/drawingml/2006/main">
-            <a:pPr algn="l">
-              <a:lnSpc>
-                <a:spcPct val="112000"/>
-              </a:lnSpc>
-              <a:buNone/>
-              <a:defRPr sz="1500" b="0">
-                <a:solidFill>
-                  <a:srgbClr val="000000"/>
-                </a:solidFill>
-                <a:latin typeface="Malgun Gothic"/>
-                <a:ea typeface="Malgun Gothic"/>
-                <a:cs typeface="Malgun Gothic"/>
-              </a:defRPr>
-            </a:pPr>
-            <a:r>
-              <a:rPr sz="1500" b="0">
-                <a:solidFill>
-                  <a:srgbClr val="000000"/>
-                </a:solidFill>
-                <a:latin typeface="Malgun Gothic"/>
-                <a:ea typeface="Malgun Gothic"/>
-                <a:cs typeface="Malgun Gothic"/>
-              </a:rPr>
-              <a:t>코드 위치 확인 / 수정 직전</a:t>
-            </a:r>
-          </a:p>
-        </p:txBody>
-      </p:sp>
-      <p:sp>
-        <p:nvSpPr>
-          <p:cNvPr id="15" name="">
-            <a:extLst xmlns:a="http://schemas.openxmlformats.org/drawingml/2006/main">
-              <a:ext uri="{FF2B5EF4-FFF2-40B4-BE49-F238E27FC236}">
-                <a16:creationId xmlns:a16="http://schemas.microsoft.com/office/drawing/2014/main" id="{4C1A3DCC-8E54-42B3-93BC-891F0F4CD2B7}"/>
-              </a:ext>
-            </a:extLst>
-          </p:cNvPr>
-          <p:cNvSpPr>
-            <a:spLocks xmlns:a="http://schemas.openxmlformats.org/drawingml/2006/main" noGrp="1"/>
-          </p:cNvSpPr>
-          <p:nvPr/>
-        </p:nvSpPr>
-        <p:spPr>
-          <a:xfrm xmlns:a="http://schemas.openxmlformats.org/drawingml/2006/main">
-            <a:off x="6896100" y="4400550"/>
-            <a:ext cx="1333500" cy="266700"/>
-          </a:xfrm>
-          <a:prstGeom xmlns:a="http://schemas.openxmlformats.org/drawingml/2006/main" prst="rect">
-            <a:avLst/>
-          </a:prstGeom>
-          <a:noFill xmlns:a="http://schemas.openxmlformats.org/drawingml/2006/main"/>
-          <a:ln xmlns:a="http://schemas.openxmlformats.org/drawingml/2006/main" w="0">
-            <a:noFill/>
-            <a:prstDash val="solid"/>
-          </a:ln>
-        </p:spPr>
-        <p:txBody>
-          <a:bodyPr xmlns:a="http://schemas.openxmlformats.org/drawingml/2006/main"/>
-          <a:lstStyle xmlns:a="http://schemas.openxmlformats.org/drawingml/2006/main"/>
-          <a:p xmlns:a="http://schemas.openxmlformats.org/drawingml/2006/main">
-            <a:pPr algn="l">
-              <a:lnSpc>
-                <a:spcPct val="112000"/>
-              </a:lnSpc>
-              <a:buNone/>
-              <a:defRPr sz="1350" b="1">
-                <a:solidFill>
-                  <a:srgbClr val="555555"/>
-                </a:solidFill>
-                <a:latin typeface="Malgun Gothic"/>
-                <a:ea typeface="Malgun Gothic"/>
-                <a:cs typeface="Malgun Gothic"/>
-              </a:defRPr>
-            </a:pPr>
-            <a:r>
-              <a:rPr sz="1350" b="1">
-                <a:solidFill>
-                  <a:srgbClr val="555555"/>
-                </a:solidFill>
-                <a:latin typeface="Malgun Gothic"/>
-                <a:ea typeface="Malgun Gothic"/>
-                <a:cs typeface="Malgun Gothic"/>
-              </a:rPr>
-              <a:t>줄이는 것</a:t>
-            </a:r>
-          </a:p>
-        </p:txBody>
-      </p:sp>
-      <p:sp>
-        <p:nvSpPr>
-          <p:cNvPr id="16" name="">
-            <a:extLst xmlns:a="http://schemas.openxmlformats.org/drawingml/2006/main">
-              <a:ext uri="{FF2B5EF4-FFF2-40B4-BE49-F238E27FC236}">
-                <a16:creationId xmlns:a16="http://schemas.microsoft.com/office/drawing/2014/main" id="{693F09A8-8404-43E4-BDB6-A3F70E6D8965}"/>
-              </a:ext>
-            </a:extLst>
-          </p:cNvPr>
-          <p:cNvSpPr>
-            <a:spLocks xmlns:a="http://schemas.openxmlformats.org/drawingml/2006/main" noGrp="1"/>
-          </p:cNvSpPr>
-          <p:nvPr/>
-        </p:nvSpPr>
-        <p:spPr>
-          <a:xfrm xmlns:a="http://schemas.openxmlformats.org/drawingml/2006/main">
-            <a:off x="8362950" y="4400550"/>
-            <a:ext cx="2628900" cy="266700"/>
-          </a:xfrm>
-          <a:prstGeom xmlns:a="http://schemas.openxmlformats.org/drawingml/2006/main" prst="rect">
-            <a:avLst/>
-          </a:prstGeom>
-          <a:noFill xmlns:a="http://schemas.openxmlformats.org/drawingml/2006/main"/>
-          <a:ln xmlns:a="http://schemas.openxmlformats.org/drawingml/2006/main" w="0">
-            <a:noFill/>
-            <a:prstDash val="solid"/>
-          </a:ln>
-        </p:spPr>
-        <p:txBody>
-          <a:bodyPr xmlns:a="http://schemas.openxmlformats.org/drawingml/2006/main"/>
-          <a:lstStyle xmlns:a="http://schemas.openxmlformats.org/drawingml/2006/main"/>
-          <a:p xmlns:a="http://schemas.openxmlformats.org/drawingml/2006/main">
-            <a:pPr algn="l">
-              <a:lnSpc>
-                <a:spcPct val="112000"/>
-              </a:lnSpc>
-              <a:buNone/>
-              <a:defRPr sz="1500" b="0">
-                <a:solidFill>
-                  <a:srgbClr val="000000"/>
-                </a:solidFill>
-                <a:latin typeface="Malgun Gothic"/>
-                <a:ea typeface="Malgun Gothic"/>
-                <a:cs typeface="Malgun Gothic"/>
-              </a:defRPr>
-            </a:pPr>
-            <a:r>
-              <a:rPr sz="1500" b="0">
-                <a:solidFill>
-                  <a:srgbClr val="000000"/>
-                </a:solidFill>
-                <a:latin typeface="Malgun Gothic"/>
-                <a:ea typeface="Malgun Gothic"/>
-                <a:cs typeface="Malgun Gothic"/>
-              </a:rPr>
-              <a:t>타깃 찾기에 쓰는 읽기</a:t>
-            </a:r>
-          </a:p>
-        </p:txBody>
-      </p:sp>
-      <p:sp>
-        <p:nvSpPr>
-          <p:cNvPr id="17" name="">
-            <a:extLst xmlns:a="http://schemas.openxmlformats.org/drawingml/2006/main">
-              <a:ext uri="{FF2B5EF4-FFF2-40B4-BE49-F238E27FC236}">
-                <a16:creationId xmlns:a16="http://schemas.microsoft.com/office/drawing/2014/main" id="{6E671FE1-2975-48F3-85A3-98464184DBD6}"/>
-              </a:ext>
-            </a:extLst>
-          </p:cNvPr>
-          <p:cNvSpPr>
-            <a:spLocks xmlns:a="http://schemas.openxmlformats.org/drawingml/2006/main" noGrp="1"/>
-          </p:cNvSpPr>
-          <p:nvPr/>
-        </p:nvSpPr>
-        <p:spPr>
-          <a:xfrm xmlns:a="http://schemas.openxmlformats.org/drawingml/2006/main">
-            <a:off x="1123950" y="5676900"/>
-            <a:ext cx="9144000" cy="342900"/>
-          </a:xfrm>
-          <a:prstGeom xmlns:a="http://schemas.openxmlformats.org/drawingml/2006/main" prst="rect">
-            <a:avLst/>
-          </a:prstGeom>
-          <a:noFill xmlns:a="http://schemas.openxmlformats.org/drawingml/2006/main"/>
-          <a:ln xmlns:a="http://schemas.openxmlformats.org/drawingml/2006/main" w="0">
-            <a:noFill/>
-            <a:prstDash val="solid"/>
-          </a:ln>
-        </p:spPr>
-        <p:txBody>
-          <a:bodyPr xmlns:a="http://schemas.openxmlformats.org/drawingml/2006/main"/>
-          <a:lstStyle xmlns:a="http://schemas.openxmlformats.org/drawingml/2006/main"/>
-          <a:p xmlns:a="http://schemas.openxmlformats.org/drawingml/2006/main">
-            <a:pPr algn="ctr">
-              <a:lnSpc>
-                <a:spcPct val="112000"/>
-              </a:lnSpc>
-              <a:buNone/>
-              <a:defRPr sz="1950" b="1">
-                <a:solidFill>
-                  <a:srgbClr val="000000"/>
-                </a:solidFill>
-                <a:latin typeface="Malgun Gothic"/>
-                <a:ea typeface="Malgun Gothic"/>
-                <a:cs typeface="Malgun Gothic"/>
-              </a:defRPr>
-            </a:pPr>
-            <a:r>
-              <a:rPr sz="1950" b="1">
-                <a:solidFill>
-                  <a:srgbClr val="000000"/>
-                </a:solidFill>
-                <a:latin typeface="Malgun Gothic"/>
-                <a:ea typeface="Malgun Gothic"/>
-                <a:cs typeface="Malgun Gothic"/>
-              </a:rPr>
-              <a:t>순서: ctxdb로 현재 상태를 잡고, codemap으로 실제 수정 위치를 찾습니다.</a:t>
-            </a:r>
-          </a:p>
-        </p:txBody>
-      </p:sp>
-      <p:sp>
-        <p:nvSpPr>
-          <p:cNvPr id="18" name="">
-            <a:extLst xmlns:a="http://schemas.openxmlformats.org/drawingml/2006/main">
-              <a:ext uri="{FF2B5EF4-FFF2-40B4-BE49-F238E27FC236}">
-                <a16:creationId xmlns:a16="http://schemas.microsoft.com/office/drawing/2014/main" id="{32E4F758-62B0-40E1-A318-2BB878C783A4}"/>
-              </a:ext>
-            </a:extLst>
-          </p:cNvPr>
-          <p:cNvSpPr>
-            <a:spLocks xmlns:a="http://schemas.openxmlformats.org/drawingml/2006/main" noGrp="1"/>
-          </p:cNvSpPr>
-          <p:nvPr/>
-        </p:nvSpPr>
-        <p:spPr>
-          <a:xfrm xmlns:a="http://schemas.openxmlformats.org/drawingml/2006/main">
-            <a:off x="400050" y="6191250"/>
-            <a:ext cx="11391900" cy="9525"/>
+                <a16:creationId xmlns:a16="http://schemas.microsoft.com/office/drawing/2014/main" id="{AF1803C5-6F80-48C2-B2E4-F68A5B384EBE}"/>
+              </a:ext>
+            </a:extLst>
+          </p:cNvPr>
+          <p:cNvSpPr>
+            <a:spLocks xmlns:a="http://schemas.openxmlformats.org/drawingml/2006/main" noGrp="1"/>
+          </p:cNvSpPr>
+          <p:nvPr/>
+        </p:nvSpPr>
+        <p:spPr>
+          <a:xfrm xmlns:a="http://schemas.openxmlformats.org/drawingml/2006/main">
+            <a:off x="2514600" y="3143250"/>
+            <a:ext cx="9525" cy="514350"/>
           </a:xfrm>
           <a:prstGeom xmlns:a="http://schemas.openxmlformats.org/drawingml/2006/main" prst="rect">
             <a:avLst/>
@@ -6765,10 +6416,1077 @@
       </p:sp>
       <p:sp>
         <p:nvSpPr>
+          <p:cNvPr id="12" name="">
+            <a:extLst xmlns:a="http://schemas.openxmlformats.org/drawingml/2006/main">
+              <a:ext uri="{FF2B5EF4-FFF2-40B4-BE49-F238E27FC236}">
+                <a16:creationId xmlns:a16="http://schemas.microsoft.com/office/drawing/2014/main" id="{332CC689-F181-4B8A-92EF-C9D4795CEB6D}"/>
+              </a:ext>
+            </a:extLst>
+          </p:cNvPr>
+          <p:cNvSpPr>
+            <a:spLocks xmlns:a="http://schemas.openxmlformats.org/drawingml/2006/main" noGrp="1"/>
+          </p:cNvSpPr>
+          <p:nvPr/>
+        </p:nvSpPr>
+        <p:spPr>
+          <a:xfrm xmlns:a="http://schemas.openxmlformats.org/drawingml/2006/main">
+            <a:off x="2686050" y="3286125"/>
+            <a:ext cx="3143250" cy="266700"/>
+          </a:xfrm>
+          <a:prstGeom xmlns:a="http://schemas.openxmlformats.org/drawingml/2006/main" prst="rect">
+            <a:avLst/>
+          </a:prstGeom>
+          <a:noFill xmlns:a="http://schemas.openxmlformats.org/drawingml/2006/main"/>
+          <a:ln xmlns:a="http://schemas.openxmlformats.org/drawingml/2006/main" w="0">
+            <a:noFill/>
+            <a:prstDash val="solid"/>
+          </a:ln>
+        </p:spPr>
+        <p:txBody>
+          <a:bodyPr xmlns:a="http://schemas.openxmlformats.org/drawingml/2006/main"/>
+          <a:lstStyle xmlns:a="http://schemas.openxmlformats.org/drawingml/2006/main"/>
+          <a:p xmlns:a="http://schemas.openxmlformats.org/drawingml/2006/main">
+            <a:pPr algn="l">
+              <a:lnSpc>
+                <a:spcPct val="112000"/>
+              </a:lnSpc>
+              <a:buNone/>
+              <a:defRPr sz="1275" b="0">
+                <a:solidFill>
+                  <a:srgbClr val="555555"/>
+                </a:solidFill>
+                <a:latin typeface="Malgun Gothic"/>
+                <a:ea typeface="Malgun Gothic"/>
+                <a:cs typeface="Malgun Gothic"/>
+              </a:defRPr>
+            </a:pPr>
+            <a:r>
+              <a:rPr sz="1275" b="0">
+                <a:solidFill>
+                  <a:srgbClr val="555555"/>
+                </a:solidFill>
+                <a:latin typeface="Malgun Gothic"/>
+                <a:ea typeface="Malgun Gothic"/>
+                <a:cs typeface="Malgun Gothic"/>
+              </a:rPr>
+              <a:t>세션저장 / save context</a:t>
+            </a:r>
+          </a:p>
+        </p:txBody>
+      </p:sp>
+      <p:sp>
+        <p:nvSpPr>
+          <p:cNvPr id="13" name="">
+            <a:extLst xmlns:a="http://schemas.openxmlformats.org/drawingml/2006/main">
+              <a:ext uri="{FF2B5EF4-FFF2-40B4-BE49-F238E27FC236}">
+                <a16:creationId xmlns:a16="http://schemas.microsoft.com/office/drawing/2014/main" id="{2E31185A-6AA8-4DD3-B365-0B21B42B0FE1}"/>
+              </a:ext>
+            </a:extLst>
+          </p:cNvPr>
+          <p:cNvSpPr>
+            <a:spLocks xmlns:a="http://schemas.openxmlformats.org/drawingml/2006/main" noGrp="1"/>
+          </p:cNvSpPr>
+          <p:nvPr/>
+        </p:nvSpPr>
+        <p:spPr>
+          <a:xfrm xmlns:a="http://schemas.openxmlformats.org/drawingml/2006/main">
+            <a:off x="5943600" y="3143250"/>
+            <a:ext cx="9525" cy="514350"/>
+          </a:xfrm>
+          <a:prstGeom xmlns:a="http://schemas.openxmlformats.org/drawingml/2006/main" prst="rect">
+            <a:avLst/>
+          </a:prstGeom>
+          <a:solidFill xmlns:a="http://schemas.openxmlformats.org/drawingml/2006/main">
+            <a:srgbClr val="B8BCC4"/>
+          </a:solidFill>
+          <a:ln xmlns:a="http://schemas.openxmlformats.org/drawingml/2006/main" w="0">
+            <a:noFill/>
+            <a:prstDash val="solid"/>
+          </a:ln>
+        </p:spPr>
+      </p:sp>
+      <p:sp>
+        <p:nvSpPr>
+          <p:cNvPr id="14" name="">
+            <a:extLst xmlns:a="http://schemas.openxmlformats.org/drawingml/2006/main">
+              <a:ext uri="{FF2B5EF4-FFF2-40B4-BE49-F238E27FC236}">
+                <a16:creationId xmlns:a16="http://schemas.microsoft.com/office/drawing/2014/main" id="{EE546E98-7DF8-4C84-B294-DBC34B5246CB}"/>
+              </a:ext>
+            </a:extLst>
+          </p:cNvPr>
+          <p:cNvSpPr>
+            <a:spLocks xmlns:a="http://schemas.openxmlformats.org/drawingml/2006/main" noGrp="1"/>
+          </p:cNvSpPr>
+          <p:nvPr/>
+        </p:nvSpPr>
+        <p:spPr>
+          <a:xfrm xmlns:a="http://schemas.openxmlformats.org/drawingml/2006/main">
+            <a:off x="6115050" y="3286125"/>
+            <a:ext cx="4572000" cy="266700"/>
+          </a:xfrm>
+          <a:prstGeom xmlns:a="http://schemas.openxmlformats.org/drawingml/2006/main" prst="rect">
+            <a:avLst/>
+          </a:prstGeom>
+          <a:noFill xmlns:a="http://schemas.openxmlformats.org/drawingml/2006/main"/>
+          <a:ln xmlns:a="http://schemas.openxmlformats.org/drawingml/2006/main" w="0">
+            <a:noFill/>
+            <a:prstDash val="solid"/>
+          </a:ln>
+        </p:spPr>
+        <p:txBody>
+          <a:bodyPr xmlns:a="http://schemas.openxmlformats.org/drawingml/2006/main"/>
+          <a:lstStyle xmlns:a="http://schemas.openxmlformats.org/drawingml/2006/main"/>
+          <a:p xmlns:a="http://schemas.openxmlformats.org/drawingml/2006/main">
+            <a:pPr algn="l">
+              <a:lnSpc>
+                <a:spcPct val="112000"/>
+              </a:lnSpc>
+              <a:buNone/>
+              <a:defRPr sz="1275" b="0">
+                <a:solidFill>
+                  <a:srgbClr val="555555"/>
+                </a:solidFill>
+                <a:latin typeface="Malgun Gothic"/>
+                <a:ea typeface="Malgun Gothic"/>
+                <a:cs typeface="Malgun Gothic"/>
+              </a:defRPr>
+            </a:pPr>
+            <a:r>
+              <a:rPr sz="1275" b="0">
+                <a:solidFill>
+                  <a:srgbClr val="555555"/>
+                </a:solidFill>
+                <a:latin typeface="Malgun Gothic"/>
+                <a:ea typeface="Malgun Gothic"/>
+                <a:cs typeface="Malgun Gothic"/>
+              </a:rPr>
+              <a:t>.ctxdb/L2에 현재 작업 요약 append</a:t>
+            </a:r>
+          </a:p>
+        </p:txBody>
+      </p:sp>
+      <p:sp>
+        <p:nvSpPr>
+          <p:cNvPr id="15" name="">
+            <a:extLst xmlns:a="http://schemas.openxmlformats.org/drawingml/2006/main">
+              <a:ext uri="{FF2B5EF4-FFF2-40B4-BE49-F238E27FC236}">
+                <a16:creationId xmlns:a16="http://schemas.microsoft.com/office/drawing/2014/main" id="{F572431B-6252-4D3F-AA37-7BAA264B78F9}"/>
+              </a:ext>
+            </a:extLst>
+          </p:cNvPr>
+          <p:cNvSpPr>
+            <a:spLocks xmlns:a="http://schemas.openxmlformats.org/drawingml/2006/main" noGrp="1"/>
+          </p:cNvSpPr>
+          <p:nvPr/>
+        </p:nvSpPr>
+        <p:spPr>
+          <a:xfrm xmlns:a="http://schemas.openxmlformats.org/drawingml/2006/main">
+            <a:off x="704850" y="3657600"/>
+            <a:ext cx="10096500" cy="514350"/>
+          </a:xfrm>
+          <a:prstGeom xmlns:a="http://schemas.openxmlformats.org/drawingml/2006/main" prst="rect">
+            <a:avLst/>
+          </a:prstGeom>
+          <a:solidFill xmlns:a="http://schemas.openxmlformats.org/drawingml/2006/main">
+            <a:srgbClr val="FFFFFF"/>
+          </a:solidFill>
+          <a:ln xmlns:a="http://schemas.openxmlformats.org/drawingml/2006/main" w="9525">
+            <a:solidFill>
+              <a:srgbClr val="B8BCC4"/>
+            </a:solidFill>
+            <a:prstDash val="solid"/>
+          </a:ln>
+        </p:spPr>
+      </p:sp>
+      <p:sp>
+        <p:nvSpPr>
+          <p:cNvPr id="16" name="">
+            <a:extLst xmlns:a="http://schemas.openxmlformats.org/drawingml/2006/main">
+              <a:ext uri="{FF2B5EF4-FFF2-40B4-BE49-F238E27FC236}">
+                <a16:creationId xmlns:a16="http://schemas.microsoft.com/office/drawing/2014/main" id="{CFBEFC13-A80B-441E-8A29-7A8769DD39E2}"/>
+              </a:ext>
+            </a:extLst>
+          </p:cNvPr>
+          <p:cNvSpPr>
+            <a:spLocks xmlns:a="http://schemas.openxmlformats.org/drawingml/2006/main" noGrp="1"/>
+          </p:cNvSpPr>
+          <p:nvPr/>
+        </p:nvSpPr>
+        <p:spPr>
+          <a:xfrm xmlns:a="http://schemas.openxmlformats.org/drawingml/2006/main">
+            <a:off x="876300" y="3800475"/>
+            <a:ext cx="1524000" cy="266700"/>
+          </a:xfrm>
+          <a:prstGeom xmlns:a="http://schemas.openxmlformats.org/drawingml/2006/main" prst="rect">
+            <a:avLst/>
+          </a:prstGeom>
+          <a:noFill xmlns:a="http://schemas.openxmlformats.org/drawingml/2006/main"/>
+          <a:ln xmlns:a="http://schemas.openxmlformats.org/drawingml/2006/main" w="0">
+            <a:noFill/>
+            <a:prstDash val="solid"/>
+          </a:ln>
+        </p:spPr>
+        <p:txBody>
+          <a:bodyPr xmlns:a="http://schemas.openxmlformats.org/drawingml/2006/main"/>
+          <a:lstStyle xmlns:a="http://schemas.openxmlformats.org/drawingml/2006/main"/>
+          <a:p xmlns:a="http://schemas.openxmlformats.org/drawingml/2006/main">
+            <a:pPr algn="l">
+              <a:lnSpc>
+                <a:spcPct val="112000"/>
+              </a:lnSpc>
+              <a:buNone/>
+              <a:defRPr sz="1425" b="1">
+                <a:solidFill>
+                  <a:srgbClr val="000000"/>
+                </a:solidFill>
+                <a:latin typeface="Malgun Gothic"/>
+                <a:ea typeface="Malgun Gothic"/>
+                <a:cs typeface="Malgun Gothic"/>
+              </a:defRPr>
+            </a:pPr>
+            <a:r>
+              <a:rPr sz="1425" b="1">
+                <a:solidFill>
+                  <a:srgbClr val="000000"/>
+                </a:solidFill>
+                <a:latin typeface="Malgun Gothic"/>
+                <a:ea typeface="Malgun Gothic"/>
+                <a:cs typeface="Malgun Gothic"/>
+              </a:rPr>
+              <a:t>hook</a:t>
+            </a:r>
+          </a:p>
+        </p:txBody>
+      </p:sp>
+      <p:sp>
+        <p:nvSpPr>
+          <p:cNvPr id="17" name="">
+            <a:extLst xmlns:a="http://schemas.openxmlformats.org/drawingml/2006/main">
+              <a:ext uri="{FF2B5EF4-FFF2-40B4-BE49-F238E27FC236}">
+                <a16:creationId xmlns:a16="http://schemas.microsoft.com/office/drawing/2014/main" id="{5DEBF5EA-05E6-4553-9EA9-5109220E53FC}"/>
+              </a:ext>
+            </a:extLst>
+          </p:cNvPr>
+          <p:cNvSpPr>
+            <a:spLocks xmlns:a="http://schemas.openxmlformats.org/drawingml/2006/main" noGrp="1"/>
+          </p:cNvSpPr>
+          <p:nvPr/>
+        </p:nvSpPr>
+        <p:spPr>
+          <a:xfrm xmlns:a="http://schemas.openxmlformats.org/drawingml/2006/main">
+            <a:off x="2514600" y="3657600"/>
+            <a:ext cx="9525" cy="514350"/>
+          </a:xfrm>
+          <a:prstGeom xmlns:a="http://schemas.openxmlformats.org/drawingml/2006/main" prst="rect">
+            <a:avLst/>
+          </a:prstGeom>
+          <a:solidFill xmlns:a="http://schemas.openxmlformats.org/drawingml/2006/main">
+            <a:srgbClr val="B8BCC4"/>
+          </a:solidFill>
+          <a:ln xmlns:a="http://schemas.openxmlformats.org/drawingml/2006/main" w="0">
+            <a:noFill/>
+            <a:prstDash val="solid"/>
+          </a:ln>
+        </p:spPr>
+      </p:sp>
+      <p:sp>
+        <p:nvSpPr>
+          <p:cNvPr id="18" name="">
+            <a:extLst xmlns:a="http://schemas.openxmlformats.org/drawingml/2006/main">
+              <a:ext uri="{FF2B5EF4-FFF2-40B4-BE49-F238E27FC236}">
+                <a16:creationId xmlns:a16="http://schemas.microsoft.com/office/drawing/2014/main" id="{922A31A4-551C-451D-863A-77CD9FC1A8E0}"/>
+              </a:ext>
+            </a:extLst>
+          </p:cNvPr>
+          <p:cNvSpPr>
+            <a:spLocks xmlns:a="http://schemas.openxmlformats.org/drawingml/2006/main" noGrp="1"/>
+          </p:cNvSpPr>
+          <p:nvPr/>
+        </p:nvSpPr>
+        <p:spPr>
+          <a:xfrm xmlns:a="http://schemas.openxmlformats.org/drawingml/2006/main">
+            <a:off x="2686050" y="3800475"/>
+            <a:ext cx="3143250" cy="266700"/>
+          </a:xfrm>
+          <a:prstGeom xmlns:a="http://schemas.openxmlformats.org/drawingml/2006/main" prst="rect">
+            <a:avLst/>
+          </a:prstGeom>
+          <a:noFill xmlns:a="http://schemas.openxmlformats.org/drawingml/2006/main"/>
+          <a:ln xmlns:a="http://schemas.openxmlformats.org/drawingml/2006/main" w="0">
+            <a:noFill/>
+            <a:prstDash val="solid"/>
+          </a:ln>
+        </p:spPr>
+        <p:txBody>
+          <a:bodyPr xmlns:a="http://schemas.openxmlformats.org/drawingml/2006/main"/>
+          <a:lstStyle xmlns:a="http://schemas.openxmlformats.org/drawingml/2006/main"/>
+          <a:p xmlns:a="http://schemas.openxmlformats.org/drawingml/2006/main">
+            <a:pPr algn="l">
+              <a:lnSpc>
+                <a:spcPct val="112000"/>
+              </a:lnSpc>
+              <a:buNone/>
+              <a:defRPr sz="1275" b="0">
+                <a:solidFill>
+                  <a:srgbClr val="555555"/>
+                </a:solidFill>
+                <a:latin typeface="Malgun Gothic"/>
+                <a:ea typeface="Malgun Gothic"/>
+                <a:cs typeface="Malgun Gothic"/>
+              </a:defRPr>
+            </a:pPr>
+            <a:r>
+              <a:rPr sz="1275" b="0">
+                <a:solidFill>
+                  <a:srgbClr val="555555"/>
+                </a:solidFill>
+                <a:latin typeface="Malgun Gothic"/>
+                <a:ea typeface="Malgun Gothic"/>
+                <a:cs typeface="Malgun Gothic"/>
+              </a:rPr>
+              <a:t>Stop / PreCompact / 8턴 checkpoint</a:t>
+            </a:r>
+          </a:p>
+        </p:txBody>
+      </p:sp>
+      <p:sp>
+        <p:nvSpPr>
           <p:cNvPr id="19" name="">
             <a:extLst xmlns:a="http://schemas.openxmlformats.org/drawingml/2006/main">
               <a:ext uri="{FF2B5EF4-FFF2-40B4-BE49-F238E27FC236}">
-                <a16:creationId xmlns:a16="http://schemas.microsoft.com/office/drawing/2014/main" id="{F6AFAA75-A9A2-402B-98D1-71321EDDF153}"/>
+                <a16:creationId xmlns:a16="http://schemas.microsoft.com/office/drawing/2014/main" id="{A7C81F38-0722-4D48-BF96-B51AF75716E5}"/>
+              </a:ext>
+            </a:extLst>
+          </p:cNvPr>
+          <p:cNvSpPr>
+            <a:spLocks xmlns:a="http://schemas.openxmlformats.org/drawingml/2006/main" noGrp="1"/>
+          </p:cNvSpPr>
+          <p:nvPr/>
+        </p:nvSpPr>
+        <p:spPr>
+          <a:xfrm xmlns:a="http://schemas.openxmlformats.org/drawingml/2006/main">
+            <a:off x="5943600" y="3657600"/>
+            <a:ext cx="9525" cy="514350"/>
+          </a:xfrm>
+          <a:prstGeom xmlns:a="http://schemas.openxmlformats.org/drawingml/2006/main" prst="rect">
+            <a:avLst/>
+          </a:prstGeom>
+          <a:solidFill xmlns:a="http://schemas.openxmlformats.org/drawingml/2006/main">
+            <a:srgbClr val="B8BCC4"/>
+          </a:solidFill>
+          <a:ln xmlns:a="http://schemas.openxmlformats.org/drawingml/2006/main" w="0">
+            <a:noFill/>
+            <a:prstDash val="solid"/>
+          </a:ln>
+        </p:spPr>
+      </p:sp>
+      <p:sp>
+        <p:nvSpPr>
+          <p:cNvPr id="20" name="">
+            <a:extLst xmlns:a="http://schemas.openxmlformats.org/drawingml/2006/main">
+              <a:ext uri="{FF2B5EF4-FFF2-40B4-BE49-F238E27FC236}">
+                <a16:creationId xmlns:a16="http://schemas.microsoft.com/office/drawing/2014/main" id="{5929425D-6F71-4CA2-9F57-B5E58BD2B74C}"/>
+              </a:ext>
+            </a:extLst>
+          </p:cNvPr>
+          <p:cNvSpPr>
+            <a:spLocks xmlns:a="http://schemas.openxmlformats.org/drawingml/2006/main" noGrp="1"/>
+          </p:cNvSpPr>
+          <p:nvPr/>
+        </p:nvSpPr>
+        <p:spPr>
+          <a:xfrm xmlns:a="http://schemas.openxmlformats.org/drawingml/2006/main">
+            <a:off x="6115050" y="3800475"/>
+            <a:ext cx="4572000" cy="266700"/>
+          </a:xfrm>
+          <a:prstGeom xmlns:a="http://schemas.openxmlformats.org/drawingml/2006/main" prst="rect">
+            <a:avLst/>
+          </a:prstGeom>
+          <a:noFill xmlns:a="http://schemas.openxmlformats.org/drawingml/2006/main"/>
+          <a:ln xmlns:a="http://schemas.openxmlformats.org/drawingml/2006/main" w="0">
+            <a:noFill/>
+            <a:prstDash val="solid"/>
+          </a:ln>
+        </p:spPr>
+        <p:txBody>
+          <a:bodyPr xmlns:a="http://schemas.openxmlformats.org/drawingml/2006/main"/>
+          <a:lstStyle xmlns:a="http://schemas.openxmlformats.org/drawingml/2006/main"/>
+          <a:p xmlns:a="http://schemas.openxmlformats.org/drawingml/2006/main">
+            <a:pPr algn="l">
+              <a:lnSpc>
+                <a:spcPct val="112000"/>
+              </a:lnSpc>
+              <a:buNone/>
+              <a:defRPr sz="1275" b="0">
+                <a:solidFill>
+                  <a:srgbClr val="555555"/>
+                </a:solidFill>
+                <a:latin typeface="Malgun Gothic"/>
+                <a:ea typeface="Malgun Gothic"/>
+                <a:cs typeface="Malgun Gothic"/>
+              </a:defRPr>
+            </a:pPr>
+            <a:r>
+              <a:rPr sz="1275" b="0">
+                <a:solidFill>
+                  <a:srgbClr val="555555"/>
+                </a:solidFill>
+                <a:latin typeface="Malgun Gothic"/>
+                <a:ea typeface="Malgun Gothic"/>
+                <a:cs typeface="Malgun Gothic"/>
+              </a:rPr>
+              <a:t>저장 필요 신호를 보고 agent가 저장 수행</a:t>
+            </a:r>
+          </a:p>
+        </p:txBody>
+      </p:sp>
+      <p:sp>
+        <p:nvSpPr>
+          <p:cNvPr id="21" name="">
+            <a:extLst xmlns:a="http://schemas.openxmlformats.org/drawingml/2006/main">
+              <a:ext uri="{FF2B5EF4-FFF2-40B4-BE49-F238E27FC236}">
+                <a16:creationId xmlns:a16="http://schemas.microsoft.com/office/drawing/2014/main" id="{0E8AEE81-CFEC-4460-A18A-FD7517EB3FF0}"/>
+              </a:ext>
+            </a:extLst>
+          </p:cNvPr>
+          <p:cNvSpPr>
+            <a:spLocks xmlns:a="http://schemas.openxmlformats.org/drawingml/2006/main" noGrp="1"/>
+          </p:cNvSpPr>
+          <p:nvPr/>
+        </p:nvSpPr>
+        <p:spPr>
+          <a:xfrm xmlns:a="http://schemas.openxmlformats.org/drawingml/2006/main">
+            <a:off x="704850" y="4171950"/>
+            <a:ext cx="10096500" cy="514350"/>
+          </a:xfrm>
+          <a:prstGeom xmlns:a="http://schemas.openxmlformats.org/drawingml/2006/main" prst="rect">
+            <a:avLst/>
+          </a:prstGeom>
+          <a:solidFill xmlns:a="http://schemas.openxmlformats.org/drawingml/2006/main">
+            <a:srgbClr val="FFFFFF"/>
+          </a:solidFill>
+          <a:ln xmlns:a="http://schemas.openxmlformats.org/drawingml/2006/main" w="9525">
+            <a:solidFill>
+              <a:srgbClr val="B8BCC4"/>
+            </a:solidFill>
+            <a:prstDash val="solid"/>
+          </a:ln>
+        </p:spPr>
+      </p:sp>
+      <p:sp>
+        <p:nvSpPr>
+          <p:cNvPr id="22" name="">
+            <a:extLst xmlns:a="http://schemas.openxmlformats.org/drawingml/2006/main">
+              <a:ext uri="{FF2B5EF4-FFF2-40B4-BE49-F238E27FC236}">
+                <a16:creationId xmlns:a16="http://schemas.microsoft.com/office/drawing/2014/main" id="{D1DB809C-75D8-41D4-983E-C7930662CDD6}"/>
+              </a:ext>
+            </a:extLst>
+          </p:cNvPr>
+          <p:cNvSpPr>
+            <a:spLocks xmlns:a="http://schemas.openxmlformats.org/drawingml/2006/main" noGrp="1"/>
+          </p:cNvSpPr>
+          <p:nvPr/>
+        </p:nvSpPr>
+        <p:spPr>
+          <a:xfrm xmlns:a="http://schemas.openxmlformats.org/drawingml/2006/main">
+            <a:off x="876300" y="4314825"/>
+            <a:ext cx="1524000" cy="266700"/>
+          </a:xfrm>
+          <a:prstGeom xmlns:a="http://schemas.openxmlformats.org/drawingml/2006/main" prst="rect">
+            <a:avLst/>
+          </a:prstGeom>
+          <a:noFill xmlns:a="http://schemas.openxmlformats.org/drawingml/2006/main"/>
+          <a:ln xmlns:a="http://schemas.openxmlformats.org/drawingml/2006/main" w="0">
+            <a:noFill/>
+            <a:prstDash val="solid"/>
+          </a:ln>
+        </p:spPr>
+        <p:txBody>
+          <a:bodyPr xmlns:a="http://schemas.openxmlformats.org/drawingml/2006/main"/>
+          <a:lstStyle xmlns:a="http://schemas.openxmlformats.org/drawingml/2006/main"/>
+          <a:p xmlns:a="http://schemas.openxmlformats.org/drawingml/2006/main">
+            <a:pPr algn="l">
+              <a:lnSpc>
+                <a:spcPct val="112000"/>
+              </a:lnSpc>
+              <a:buNone/>
+              <a:defRPr sz="1425" b="1">
+                <a:solidFill>
+                  <a:srgbClr val="000000"/>
+                </a:solidFill>
+                <a:latin typeface="Malgun Gothic"/>
+                <a:ea typeface="Malgun Gothic"/>
+                <a:cs typeface="Malgun Gothic"/>
+              </a:defRPr>
+            </a:pPr>
+            <a:r>
+              <a:rPr sz="1425" b="1">
+                <a:solidFill>
+                  <a:srgbClr val="000000"/>
+                </a:solidFill>
+                <a:latin typeface="Malgun Gothic"/>
+                <a:ea typeface="Malgun Gothic"/>
+                <a:cs typeface="Malgun Gothic"/>
+              </a:rPr>
+              <a:t>/checkpoint</a:t>
+            </a:r>
+          </a:p>
+        </p:txBody>
+      </p:sp>
+      <p:sp>
+        <p:nvSpPr>
+          <p:cNvPr id="23" name="">
+            <a:extLst xmlns:a="http://schemas.openxmlformats.org/drawingml/2006/main">
+              <a:ext uri="{FF2B5EF4-FFF2-40B4-BE49-F238E27FC236}">
+                <a16:creationId xmlns:a16="http://schemas.microsoft.com/office/drawing/2014/main" id="{AC7DE6E6-4695-4B6F-8690-343016F49239}"/>
+              </a:ext>
+            </a:extLst>
+          </p:cNvPr>
+          <p:cNvSpPr>
+            <a:spLocks xmlns:a="http://schemas.openxmlformats.org/drawingml/2006/main" noGrp="1"/>
+          </p:cNvSpPr>
+          <p:nvPr/>
+        </p:nvSpPr>
+        <p:spPr>
+          <a:xfrm xmlns:a="http://schemas.openxmlformats.org/drawingml/2006/main">
+            <a:off x="2514600" y="4171950"/>
+            <a:ext cx="9525" cy="514350"/>
+          </a:xfrm>
+          <a:prstGeom xmlns:a="http://schemas.openxmlformats.org/drawingml/2006/main" prst="rect">
+            <a:avLst/>
+          </a:prstGeom>
+          <a:solidFill xmlns:a="http://schemas.openxmlformats.org/drawingml/2006/main">
+            <a:srgbClr val="B8BCC4"/>
+          </a:solidFill>
+          <a:ln xmlns:a="http://schemas.openxmlformats.org/drawingml/2006/main" w="0">
+            <a:noFill/>
+            <a:prstDash val="solid"/>
+          </a:ln>
+        </p:spPr>
+      </p:sp>
+      <p:sp>
+        <p:nvSpPr>
+          <p:cNvPr id="24" name="">
+            <a:extLst xmlns:a="http://schemas.openxmlformats.org/drawingml/2006/main">
+              <a:ext uri="{FF2B5EF4-FFF2-40B4-BE49-F238E27FC236}">
+                <a16:creationId xmlns:a16="http://schemas.microsoft.com/office/drawing/2014/main" id="{EAF24168-41A3-426D-8341-A95DF4499BB2}"/>
+              </a:ext>
+            </a:extLst>
+          </p:cNvPr>
+          <p:cNvSpPr>
+            <a:spLocks xmlns:a="http://schemas.openxmlformats.org/drawingml/2006/main" noGrp="1"/>
+          </p:cNvSpPr>
+          <p:nvPr/>
+        </p:nvSpPr>
+        <p:spPr>
+          <a:xfrm xmlns:a="http://schemas.openxmlformats.org/drawingml/2006/main">
+            <a:off x="2686050" y="4314825"/>
+            <a:ext cx="3143250" cy="266700"/>
+          </a:xfrm>
+          <a:prstGeom xmlns:a="http://schemas.openxmlformats.org/drawingml/2006/main" prst="rect">
+            <a:avLst/>
+          </a:prstGeom>
+          <a:noFill xmlns:a="http://schemas.openxmlformats.org/drawingml/2006/main"/>
+          <a:ln xmlns:a="http://schemas.openxmlformats.org/drawingml/2006/main" w="0">
+            <a:noFill/>
+            <a:prstDash val="solid"/>
+          </a:ln>
+        </p:spPr>
+        <p:txBody>
+          <a:bodyPr xmlns:a="http://schemas.openxmlformats.org/drawingml/2006/main"/>
+          <a:lstStyle xmlns:a="http://schemas.openxmlformats.org/drawingml/2006/main"/>
+          <a:p xmlns:a="http://schemas.openxmlformats.org/drawingml/2006/main">
+            <a:pPr algn="l">
+              <a:lnSpc>
+                <a:spcPct val="112000"/>
+              </a:lnSpc>
+              <a:buNone/>
+              <a:defRPr sz="1275" b="0">
+                <a:solidFill>
+                  <a:srgbClr val="555555"/>
+                </a:solidFill>
+                <a:latin typeface="Malgun Gothic"/>
+                <a:ea typeface="Malgun Gothic"/>
+                <a:cs typeface="Malgun Gothic"/>
+              </a:defRPr>
+            </a:pPr>
+            <a:r>
+              <a:rPr sz="1275" b="0">
+                <a:solidFill>
+                  <a:srgbClr val="555555"/>
+                </a:solidFill>
+                <a:latin typeface="Malgun Gothic"/>
+                <a:ea typeface="Malgun Gothic"/>
+                <a:cs typeface="Malgun Gothic"/>
+              </a:rPr>
+              <a:t>lane, codemap, meta 정리</a:t>
+            </a:r>
+          </a:p>
+        </p:txBody>
+      </p:sp>
+      <p:sp>
+        <p:nvSpPr>
+          <p:cNvPr id="25" name="">
+            <a:extLst xmlns:a="http://schemas.openxmlformats.org/drawingml/2006/main">
+              <a:ext uri="{FF2B5EF4-FFF2-40B4-BE49-F238E27FC236}">
+                <a16:creationId xmlns:a16="http://schemas.microsoft.com/office/drawing/2014/main" id="{3D51198F-B532-4FC2-ADAF-E2DA8BBDF02B}"/>
+              </a:ext>
+            </a:extLst>
+          </p:cNvPr>
+          <p:cNvSpPr>
+            <a:spLocks xmlns:a="http://schemas.openxmlformats.org/drawingml/2006/main" noGrp="1"/>
+          </p:cNvSpPr>
+          <p:nvPr/>
+        </p:nvSpPr>
+        <p:spPr>
+          <a:xfrm xmlns:a="http://schemas.openxmlformats.org/drawingml/2006/main">
+            <a:off x="5943600" y="4171950"/>
+            <a:ext cx="9525" cy="514350"/>
+          </a:xfrm>
+          <a:prstGeom xmlns:a="http://schemas.openxmlformats.org/drawingml/2006/main" prst="rect">
+            <a:avLst/>
+          </a:prstGeom>
+          <a:solidFill xmlns:a="http://schemas.openxmlformats.org/drawingml/2006/main">
+            <a:srgbClr val="B8BCC4"/>
+          </a:solidFill>
+          <a:ln xmlns:a="http://schemas.openxmlformats.org/drawingml/2006/main" w="0">
+            <a:noFill/>
+            <a:prstDash val="solid"/>
+          </a:ln>
+        </p:spPr>
+      </p:sp>
+      <p:sp>
+        <p:nvSpPr>
+          <p:cNvPr id="26" name="">
+            <a:extLst xmlns:a="http://schemas.openxmlformats.org/drawingml/2006/main">
+              <a:ext uri="{FF2B5EF4-FFF2-40B4-BE49-F238E27FC236}">
+                <a16:creationId xmlns:a16="http://schemas.microsoft.com/office/drawing/2014/main" id="{D80474F4-103E-4B1D-A204-09438ECE368D}"/>
+              </a:ext>
+            </a:extLst>
+          </p:cNvPr>
+          <p:cNvSpPr>
+            <a:spLocks xmlns:a="http://schemas.openxmlformats.org/drawingml/2006/main" noGrp="1"/>
+          </p:cNvSpPr>
+          <p:nvPr/>
+        </p:nvSpPr>
+        <p:spPr>
+          <a:xfrm xmlns:a="http://schemas.openxmlformats.org/drawingml/2006/main">
+            <a:off x="6115050" y="4314825"/>
+            <a:ext cx="4572000" cy="266700"/>
+          </a:xfrm>
+          <a:prstGeom xmlns:a="http://schemas.openxmlformats.org/drawingml/2006/main" prst="rect">
+            <a:avLst/>
+          </a:prstGeom>
+          <a:noFill xmlns:a="http://schemas.openxmlformats.org/drawingml/2006/main"/>
+          <a:ln xmlns:a="http://schemas.openxmlformats.org/drawingml/2006/main" w="0">
+            <a:noFill/>
+            <a:prstDash val="solid"/>
+          </a:ln>
+        </p:spPr>
+        <p:txBody>
+          <a:bodyPr xmlns:a="http://schemas.openxmlformats.org/drawingml/2006/main"/>
+          <a:lstStyle xmlns:a="http://schemas.openxmlformats.org/drawingml/2006/main"/>
+          <a:p xmlns:a="http://schemas.openxmlformats.org/drawingml/2006/main">
+            <a:pPr algn="l">
+              <a:lnSpc>
+                <a:spcPct val="112000"/>
+              </a:lnSpc>
+              <a:buNone/>
+              <a:defRPr sz="1275" b="0">
+                <a:solidFill>
+                  <a:srgbClr val="555555"/>
+                </a:solidFill>
+                <a:latin typeface="Malgun Gothic"/>
+                <a:ea typeface="Malgun Gothic"/>
+                <a:cs typeface="Malgun Gothic"/>
+              </a:defRPr>
+            </a:pPr>
+            <a:r>
+              <a:rPr sz="1275" b="0">
+                <a:solidFill>
+                  <a:srgbClr val="555555"/>
+                </a:solidFill>
+                <a:latin typeface="Malgun Gothic"/>
+                <a:ea typeface="Malgun Gothic"/>
+                <a:cs typeface="Malgun Gothic"/>
+              </a:rPr>
+              <a:t>다음 세션 복원을 위해 ctxdb도 갱신</a:t>
+            </a:r>
+          </a:p>
+        </p:txBody>
+      </p:sp>
+      <p:sp>
+        <p:nvSpPr>
+          <p:cNvPr id="27" name="">
+            <a:extLst xmlns:a="http://schemas.openxmlformats.org/drawingml/2006/main">
+              <a:ext uri="{FF2B5EF4-FFF2-40B4-BE49-F238E27FC236}">
+                <a16:creationId xmlns:a16="http://schemas.microsoft.com/office/drawing/2014/main" id="{8A43A8AF-EC00-4A5C-AC1E-3F93EC01A943}"/>
+              </a:ext>
+            </a:extLst>
+          </p:cNvPr>
+          <p:cNvSpPr>
+            <a:spLocks xmlns:a="http://schemas.openxmlformats.org/drawingml/2006/main" noGrp="1"/>
+          </p:cNvSpPr>
+          <p:nvPr/>
+        </p:nvSpPr>
+        <p:spPr>
+          <a:xfrm xmlns:a="http://schemas.openxmlformats.org/drawingml/2006/main">
+            <a:off x="704850" y="4686300"/>
+            <a:ext cx="10096500" cy="514350"/>
+          </a:xfrm>
+          <a:prstGeom xmlns:a="http://schemas.openxmlformats.org/drawingml/2006/main" prst="rect">
+            <a:avLst/>
+          </a:prstGeom>
+          <a:solidFill xmlns:a="http://schemas.openxmlformats.org/drawingml/2006/main">
+            <a:srgbClr val="FFFFFF"/>
+          </a:solidFill>
+          <a:ln xmlns:a="http://schemas.openxmlformats.org/drawingml/2006/main" w="9525">
+            <a:solidFill>
+              <a:srgbClr val="B8BCC4"/>
+            </a:solidFill>
+            <a:prstDash val="solid"/>
+          </a:ln>
+        </p:spPr>
+      </p:sp>
+      <p:sp>
+        <p:nvSpPr>
+          <p:cNvPr id="28" name="">
+            <a:extLst xmlns:a="http://schemas.openxmlformats.org/drawingml/2006/main">
+              <a:ext uri="{FF2B5EF4-FFF2-40B4-BE49-F238E27FC236}">
+                <a16:creationId xmlns:a16="http://schemas.microsoft.com/office/drawing/2014/main" id="{B929F64A-E790-47AE-B12E-E92CD9C281F6}"/>
+              </a:ext>
+            </a:extLst>
+          </p:cNvPr>
+          <p:cNvSpPr>
+            <a:spLocks xmlns:a="http://schemas.openxmlformats.org/drawingml/2006/main" noGrp="1"/>
+          </p:cNvSpPr>
+          <p:nvPr/>
+        </p:nvSpPr>
+        <p:spPr>
+          <a:xfrm xmlns:a="http://schemas.openxmlformats.org/drawingml/2006/main">
+            <a:off x="876300" y="4829175"/>
+            <a:ext cx="1524000" cy="266700"/>
+          </a:xfrm>
+          <a:prstGeom xmlns:a="http://schemas.openxmlformats.org/drawingml/2006/main" prst="rect">
+            <a:avLst/>
+          </a:prstGeom>
+          <a:noFill xmlns:a="http://schemas.openxmlformats.org/drawingml/2006/main"/>
+          <a:ln xmlns:a="http://schemas.openxmlformats.org/drawingml/2006/main" w="0">
+            <a:noFill/>
+            <a:prstDash val="solid"/>
+          </a:ln>
+        </p:spPr>
+        <p:txBody>
+          <a:bodyPr xmlns:a="http://schemas.openxmlformats.org/drawingml/2006/main"/>
+          <a:lstStyle xmlns:a="http://schemas.openxmlformats.org/drawingml/2006/main"/>
+          <a:p xmlns:a="http://schemas.openxmlformats.org/drawingml/2006/main">
+            <a:pPr algn="l">
+              <a:lnSpc>
+                <a:spcPct val="112000"/>
+              </a:lnSpc>
+              <a:buNone/>
+              <a:defRPr sz="1425" b="1">
+                <a:solidFill>
+                  <a:srgbClr val="000000"/>
+                </a:solidFill>
+                <a:latin typeface="Malgun Gothic"/>
+                <a:ea typeface="Malgun Gothic"/>
+                <a:cs typeface="Malgun Gothic"/>
+              </a:defRPr>
+            </a:pPr>
+            <a:r>
+              <a:rPr sz="1425" b="1">
+                <a:solidFill>
+                  <a:srgbClr val="000000"/>
+                </a:solidFill>
+                <a:latin typeface="Malgun Gothic"/>
+                <a:ea typeface="Malgun Gothic"/>
+                <a:cs typeface="Malgun Gothic"/>
+              </a:rPr>
+              <a:t>/handoff</a:t>
+            </a:r>
+          </a:p>
+        </p:txBody>
+      </p:sp>
+      <p:sp>
+        <p:nvSpPr>
+          <p:cNvPr id="29" name="">
+            <a:extLst xmlns:a="http://schemas.openxmlformats.org/drawingml/2006/main">
+              <a:ext uri="{FF2B5EF4-FFF2-40B4-BE49-F238E27FC236}">
+                <a16:creationId xmlns:a16="http://schemas.microsoft.com/office/drawing/2014/main" id="{D95A692B-19B4-44A6-8A91-B3E285027D62}"/>
+              </a:ext>
+            </a:extLst>
+          </p:cNvPr>
+          <p:cNvSpPr>
+            <a:spLocks xmlns:a="http://schemas.openxmlformats.org/drawingml/2006/main" noGrp="1"/>
+          </p:cNvSpPr>
+          <p:nvPr/>
+        </p:nvSpPr>
+        <p:spPr>
+          <a:xfrm xmlns:a="http://schemas.openxmlformats.org/drawingml/2006/main">
+            <a:off x="2514600" y="4686300"/>
+            <a:ext cx="9525" cy="514350"/>
+          </a:xfrm>
+          <a:prstGeom xmlns:a="http://schemas.openxmlformats.org/drawingml/2006/main" prst="rect">
+            <a:avLst/>
+          </a:prstGeom>
+          <a:solidFill xmlns:a="http://schemas.openxmlformats.org/drawingml/2006/main">
+            <a:srgbClr val="B8BCC4"/>
+          </a:solidFill>
+          <a:ln xmlns:a="http://schemas.openxmlformats.org/drawingml/2006/main" w="0">
+            <a:noFill/>
+            <a:prstDash val="solid"/>
+          </a:ln>
+        </p:spPr>
+      </p:sp>
+      <p:sp>
+        <p:nvSpPr>
+          <p:cNvPr id="30" name="">
+            <a:extLst xmlns:a="http://schemas.openxmlformats.org/drawingml/2006/main">
+              <a:ext uri="{FF2B5EF4-FFF2-40B4-BE49-F238E27FC236}">
+                <a16:creationId xmlns:a16="http://schemas.microsoft.com/office/drawing/2014/main" id="{BD2A8078-5C6F-4DB4-8062-36952D002643}"/>
+              </a:ext>
+            </a:extLst>
+          </p:cNvPr>
+          <p:cNvSpPr>
+            <a:spLocks xmlns:a="http://schemas.openxmlformats.org/drawingml/2006/main" noGrp="1"/>
+          </p:cNvSpPr>
+          <p:nvPr/>
+        </p:nvSpPr>
+        <p:spPr>
+          <a:xfrm xmlns:a="http://schemas.openxmlformats.org/drawingml/2006/main">
+            <a:off x="2686050" y="4829175"/>
+            <a:ext cx="3143250" cy="266700"/>
+          </a:xfrm>
+          <a:prstGeom xmlns:a="http://schemas.openxmlformats.org/drawingml/2006/main" prst="rect">
+            <a:avLst/>
+          </a:prstGeom>
+          <a:noFill xmlns:a="http://schemas.openxmlformats.org/drawingml/2006/main"/>
+          <a:ln xmlns:a="http://schemas.openxmlformats.org/drawingml/2006/main" w="0">
+            <a:noFill/>
+            <a:prstDash val="solid"/>
+          </a:ln>
+        </p:spPr>
+        <p:txBody>
+          <a:bodyPr xmlns:a="http://schemas.openxmlformats.org/drawingml/2006/main"/>
+          <a:lstStyle xmlns:a="http://schemas.openxmlformats.org/drawingml/2006/main"/>
+          <a:p xmlns:a="http://schemas.openxmlformats.org/drawingml/2006/main">
+            <a:pPr algn="l">
+              <a:lnSpc>
+                <a:spcPct val="112000"/>
+              </a:lnSpc>
+              <a:buNone/>
+              <a:defRPr sz="1275" b="0">
+                <a:solidFill>
+                  <a:srgbClr val="555555"/>
+                </a:solidFill>
+                <a:latin typeface="Malgun Gothic"/>
+                <a:ea typeface="Malgun Gothic"/>
+                <a:cs typeface="Malgun Gothic"/>
+              </a:defRPr>
+            </a:pPr>
+            <a:r>
+              <a:rPr sz="1275" b="0">
+                <a:solidFill>
+                  <a:srgbClr val="555555"/>
+                </a:solidFill>
+                <a:latin typeface="Malgun Gothic"/>
+                <a:ea typeface="Malgun Gothic"/>
+                <a:cs typeface="Malgun Gothic"/>
+              </a:rPr>
+              <a:t>handoff snapshot 작성</a:t>
+            </a:r>
+          </a:p>
+        </p:txBody>
+      </p:sp>
+      <p:sp>
+        <p:nvSpPr>
+          <p:cNvPr id="31" name="">
+            <a:extLst xmlns:a="http://schemas.openxmlformats.org/drawingml/2006/main">
+              <a:ext uri="{FF2B5EF4-FFF2-40B4-BE49-F238E27FC236}">
+                <a16:creationId xmlns:a16="http://schemas.microsoft.com/office/drawing/2014/main" id="{343E39B5-1F38-40A9-8ECD-A2BE8DC16F9F}"/>
+              </a:ext>
+            </a:extLst>
+          </p:cNvPr>
+          <p:cNvSpPr>
+            <a:spLocks xmlns:a="http://schemas.openxmlformats.org/drawingml/2006/main" noGrp="1"/>
+          </p:cNvSpPr>
+          <p:nvPr/>
+        </p:nvSpPr>
+        <p:spPr>
+          <a:xfrm xmlns:a="http://schemas.openxmlformats.org/drawingml/2006/main">
+            <a:off x="5943600" y="4686300"/>
+            <a:ext cx="9525" cy="514350"/>
+          </a:xfrm>
+          <a:prstGeom xmlns:a="http://schemas.openxmlformats.org/drawingml/2006/main" prst="rect">
+            <a:avLst/>
+          </a:prstGeom>
+          <a:solidFill xmlns:a="http://schemas.openxmlformats.org/drawingml/2006/main">
+            <a:srgbClr val="B8BCC4"/>
+          </a:solidFill>
+          <a:ln xmlns:a="http://schemas.openxmlformats.org/drawingml/2006/main" w="0">
+            <a:noFill/>
+            <a:prstDash val="solid"/>
+          </a:ln>
+        </p:spPr>
+      </p:sp>
+      <p:sp>
+        <p:nvSpPr>
+          <p:cNvPr id="32" name="">
+            <a:extLst xmlns:a="http://schemas.openxmlformats.org/drawingml/2006/main">
+              <a:ext uri="{FF2B5EF4-FFF2-40B4-BE49-F238E27FC236}">
+                <a16:creationId xmlns:a16="http://schemas.microsoft.com/office/drawing/2014/main" id="{17616EDB-84FF-4C19-A58B-AFDF2935486A}"/>
+              </a:ext>
+            </a:extLst>
+          </p:cNvPr>
+          <p:cNvSpPr>
+            <a:spLocks xmlns:a="http://schemas.openxmlformats.org/drawingml/2006/main" noGrp="1"/>
+          </p:cNvSpPr>
+          <p:nvPr/>
+        </p:nvSpPr>
+        <p:spPr>
+          <a:xfrm xmlns:a="http://schemas.openxmlformats.org/drawingml/2006/main">
+            <a:off x="6115050" y="4829175"/>
+            <a:ext cx="4572000" cy="266700"/>
+          </a:xfrm>
+          <a:prstGeom xmlns:a="http://schemas.openxmlformats.org/drawingml/2006/main" prst="rect">
+            <a:avLst/>
+          </a:prstGeom>
+          <a:noFill xmlns:a="http://schemas.openxmlformats.org/drawingml/2006/main"/>
+          <a:ln xmlns:a="http://schemas.openxmlformats.org/drawingml/2006/main" w="0">
+            <a:noFill/>
+            <a:prstDash val="solid"/>
+          </a:ln>
+        </p:spPr>
+        <p:txBody>
+          <a:bodyPr xmlns:a="http://schemas.openxmlformats.org/drawingml/2006/main"/>
+          <a:lstStyle xmlns:a="http://schemas.openxmlformats.org/drawingml/2006/main"/>
+          <a:p xmlns:a="http://schemas.openxmlformats.org/drawingml/2006/main">
+            <a:pPr algn="l">
+              <a:lnSpc>
+                <a:spcPct val="112000"/>
+              </a:lnSpc>
+              <a:buNone/>
+              <a:defRPr sz="1275" b="0">
+                <a:solidFill>
+                  <a:srgbClr val="555555"/>
+                </a:solidFill>
+                <a:latin typeface="Malgun Gothic"/>
+                <a:ea typeface="Malgun Gothic"/>
+                <a:cs typeface="Malgun Gothic"/>
+              </a:defRPr>
+            </a:pPr>
+            <a:r>
+              <a:rPr sz="1275" b="0">
+                <a:solidFill>
+                  <a:srgbClr val="555555"/>
+                </a:solidFill>
+                <a:latin typeface="Malgun Gothic"/>
+                <a:ea typeface="Malgun Gothic"/>
+                <a:cs typeface="Malgun Gothic"/>
+              </a:rPr>
+              <a:t>인수 agent가 키워드로 찾을 기억 보강</a:t>
+            </a:r>
+          </a:p>
+        </p:txBody>
+      </p:sp>
+      <p:sp>
+        <p:nvSpPr>
+          <p:cNvPr id="33" name="">
+            <a:extLst xmlns:a="http://schemas.openxmlformats.org/drawingml/2006/main">
+              <a:ext uri="{FF2B5EF4-FFF2-40B4-BE49-F238E27FC236}">
+                <a16:creationId xmlns:a16="http://schemas.microsoft.com/office/drawing/2014/main" id="{E10B3E81-31DB-40F8-AF5B-4A343592A88B}"/>
+              </a:ext>
+            </a:extLst>
+          </p:cNvPr>
+          <p:cNvSpPr>
+            <a:spLocks xmlns:a="http://schemas.openxmlformats.org/drawingml/2006/main" noGrp="1"/>
+          </p:cNvSpPr>
+          <p:nvPr/>
+        </p:nvSpPr>
+        <p:spPr>
+          <a:xfrm xmlns:a="http://schemas.openxmlformats.org/drawingml/2006/main">
+            <a:off x="971550" y="5619750"/>
+            <a:ext cx="9525000" cy="419100"/>
+          </a:xfrm>
+          <a:prstGeom xmlns:a="http://schemas.openxmlformats.org/drawingml/2006/main" prst="rect">
+            <a:avLst/>
+          </a:prstGeom>
+          <a:noFill xmlns:a="http://schemas.openxmlformats.org/drawingml/2006/main"/>
+          <a:ln xmlns:a="http://schemas.openxmlformats.org/drawingml/2006/main" w="0">
+            <a:noFill/>
+            <a:prstDash val="solid"/>
+          </a:ln>
+        </p:spPr>
+        <p:txBody>
+          <a:bodyPr xmlns:a="http://schemas.openxmlformats.org/drawingml/2006/main"/>
+          <a:lstStyle xmlns:a="http://schemas.openxmlformats.org/drawingml/2006/main"/>
+          <a:p xmlns:a="http://schemas.openxmlformats.org/drawingml/2006/main">
+            <a:pPr algn="ctr">
+              <a:lnSpc>
+                <a:spcPct val="112000"/>
+              </a:lnSpc>
+              <a:buNone/>
+              <a:defRPr sz="1650" b="1">
+                <a:solidFill>
+                  <a:srgbClr val="000000"/>
+                </a:solidFill>
+                <a:latin typeface="Malgun Gothic"/>
+                <a:ea typeface="Malgun Gothic"/>
+                <a:cs typeface="Malgun Gothic"/>
+              </a:defRPr>
+            </a:pPr>
+            <a:r>
+              <a:rPr sz="1650" b="1">
+                <a:solidFill>
+                  <a:srgbClr val="000000"/>
+                </a:solidFill>
+                <a:latin typeface="Malgun Gothic"/>
+                <a:ea typeface="Malgun Gothic"/>
+                <a:cs typeface="Malgun Gothic"/>
+              </a:rPr>
+              <a:t>핵심: context-saver가 저장해 둔 L2가 있어야, ctxdb가 다음 요청에서 적게 읽을 수 있습니다.</a:t>
+            </a:r>
+          </a:p>
+        </p:txBody>
+      </p:sp>
+      <p:sp>
+        <p:nvSpPr>
+          <p:cNvPr id="34" name="">
+            <a:extLst xmlns:a="http://schemas.openxmlformats.org/drawingml/2006/main">
+              <a:ext uri="{FF2B5EF4-FFF2-40B4-BE49-F238E27FC236}">
+                <a16:creationId xmlns:a16="http://schemas.microsoft.com/office/drawing/2014/main" id="{3845C39E-DADA-4337-857F-FE318103008E}"/>
+              </a:ext>
+            </a:extLst>
+          </p:cNvPr>
+          <p:cNvSpPr>
+            <a:spLocks xmlns:a="http://schemas.openxmlformats.org/drawingml/2006/main" noGrp="1"/>
+          </p:cNvSpPr>
+          <p:nvPr/>
+        </p:nvSpPr>
+        <p:spPr>
+          <a:xfrm xmlns:a="http://schemas.openxmlformats.org/drawingml/2006/main">
+            <a:off x="400050" y="6191250"/>
+            <a:ext cx="11391900" cy="9525"/>
+          </a:xfrm>
+          <a:prstGeom xmlns:a="http://schemas.openxmlformats.org/drawingml/2006/main" prst="rect">
+            <a:avLst/>
+          </a:prstGeom>
+          <a:solidFill xmlns:a="http://schemas.openxmlformats.org/drawingml/2006/main">
+            <a:srgbClr val="B8BCC4"/>
+          </a:solidFill>
+          <a:ln xmlns:a="http://schemas.openxmlformats.org/drawingml/2006/main" w="0">
+            <a:noFill/>
+            <a:prstDash val="solid"/>
+          </a:ln>
+        </p:spPr>
+      </p:sp>
+      <p:sp>
+        <p:nvSpPr>
+          <p:cNvPr id="35" name="">
+            <a:extLst xmlns:a="http://schemas.openxmlformats.org/drawingml/2006/main">
+              <a:ext uri="{FF2B5EF4-FFF2-40B4-BE49-F238E27FC236}">
+                <a16:creationId xmlns:a16="http://schemas.microsoft.com/office/drawing/2014/main" id="{ABECF597-EAA1-4EA9-94D4-33AEA442624E}"/>
               </a:ext>
             </a:extLst>
           </p:cNvPr>
@@ -6825,10 +7543,10 @@
       </p:sp>
       <p:sp>
         <p:nvSpPr>
-          <p:cNvPr id="20" name="">
-            <a:extLst xmlns:a="http://schemas.openxmlformats.org/drawingml/2006/main">
-              <a:ext uri="{FF2B5EF4-FFF2-40B4-BE49-F238E27FC236}">
-                <a16:creationId xmlns:a16="http://schemas.microsoft.com/office/drawing/2014/main" id="{7530A56F-01FD-44E8-AE5E-5A97B1C541F8}"/>
+          <p:cNvPr id="36" name="">
+            <a:extLst xmlns:a="http://schemas.openxmlformats.org/drawingml/2006/main">
+              <a:ext uri="{FF2B5EF4-FFF2-40B4-BE49-F238E27FC236}">
+                <a16:creationId xmlns:a16="http://schemas.microsoft.com/office/drawing/2014/main" id="{EB94700F-7AAA-45A0-B148-D0715B85E674}"/>
               </a:ext>
             </a:extLst>
           </p:cNvPr>
@@ -6886,7 +7604,7 @@
     </p:spTree>
     <p:extLst>
       <p:ext uri="{BB962C8B-B14F-4D97-AF65-F5344CB8AC3E}">
-        <p14:creationId xmlns:p14="http://schemas.microsoft.com/office/powerpoint/2010/main" val="1090728396"/>
+        <p14:creationId xmlns:p14="http://schemas.microsoft.com/office/powerpoint/2010/main" val="2102232569"/>
       </p:ext>
     </p:extLst>
   </p:cSld>
@@ -6917,7 +7635,7 @@
           <p:cNvPr id="1" name="">
             <a:extLst xmlns:a="http://schemas.openxmlformats.org/drawingml/2006/main">
               <a:ext uri="{FF2B5EF4-FFF2-40B4-BE49-F238E27FC236}">
-                <a16:creationId xmlns:a16="http://schemas.microsoft.com/office/drawing/2014/main" id="{521EFBA7-54E1-47B7-9A5F-070FE9C95237}"/>
+                <a16:creationId xmlns:a16="http://schemas.microsoft.com/office/drawing/2014/main" id="{40712165-DC13-49AD-90FA-DEB3DF76EA19}"/>
               </a:ext>
             </a:extLst>
           </p:cNvPr>
@@ -6967,7 +7685,7 @@
                 <a:ea typeface="Malgun Gothic"/>
                 <a:cs typeface="Malgun Gothic"/>
               </a:rPr>
-              <a:t>시뮬레이션</a:t>
+              <a:t>관계</a:t>
             </a:r>
           </a:p>
         </p:txBody>
@@ -6977,7 +7695,7 @@
           <p:cNvPr id="2" name="">
             <a:extLst xmlns:a="http://schemas.openxmlformats.org/drawingml/2006/main">
               <a:ext uri="{FF2B5EF4-FFF2-40B4-BE49-F238E27FC236}">
-                <a16:creationId xmlns:a16="http://schemas.microsoft.com/office/drawing/2014/main" id="{C02DE51A-4375-406C-9ED0-DA26EFAB96C8}"/>
+                <a16:creationId xmlns:a16="http://schemas.microsoft.com/office/drawing/2014/main" id="{9275512A-B203-4654-95CD-81897CF577E5}"/>
               </a:ext>
             </a:extLst>
           </p:cNvPr>
@@ -7027,7 +7745,7 @@
                 <a:ea typeface="Malgun Gothic"/>
                 <a:cs typeface="Malgun Gothic"/>
               </a:rPr>
-              <a:t>Project A에서는 두 구간 모두 읽기 비용이 크게 줄었습니다</a:t>
+              <a:t>저장과 읽기, 코드 위치 찾기는 서로 다른 역할입니다</a:t>
             </a:r>
           </a:p>
         </p:txBody>
@@ -7037,7 +7755,7 @@
           <p:cNvPr id="3" name="">
             <a:extLst xmlns:a="http://schemas.openxmlformats.org/drawingml/2006/main">
               <a:ext uri="{FF2B5EF4-FFF2-40B4-BE49-F238E27FC236}">
-                <a16:creationId xmlns:a16="http://schemas.microsoft.com/office/drawing/2014/main" id="{EB52B52F-B1D2-437D-9F5C-EBF34BA17A84}"/>
+                <a16:creationId xmlns:a16="http://schemas.microsoft.com/office/drawing/2014/main" id="{24009AB7-6AC6-4681-BB3A-6ACA01D88067}"/>
               </a:ext>
             </a:extLst>
           </p:cNvPr>
@@ -7087,7 +7805,7 @@
                 <a:ea typeface="Malgun Gothic"/>
                 <a:cs typeface="Malgun Gothic"/>
               </a:rPr>
-              <a:t>값은 파일 크기 기반 근사 토큰이며, 발표용으로 프로젝트명과 파일명은 일반화했습니다.</a:t>
+              <a:t>토큰을 줄이려면 어느 단계에서 무엇을 줄이는지 분리해서 봐야 합니다.</a:t>
             </a:r>
           </a:p>
         </p:txBody>
@@ -7097,7 +7815,7 @@
           <p:cNvPr id="4" name="">
             <a:extLst xmlns:a="http://schemas.openxmlformats.org/drawingml/2006/main">
               <a:ext uri="{FF2B5EF4-FFF2-40B4-BE49-F238E27FC236}">
-                <a16:creationId xmlns:a16="http://schemas.microsoft.com/office/drawing/2014/main" id="{2349C5ED-CD61-4454-A0C8-4AB69CF8D926}"/>
+                <a16:creationId xmlns:a16="http://schemas.microsoft.com/office/drawing/2014/main" id="{F3927F00-4FCB-45C7-8275-313F47E9858F}"/>
               </a:ext>
             </a:extLst>
           </p:cNvPr>
@@ -7152,40 +7870,235 @@
           </a:p>
         </p:txBody>
       </p:sp>
-      <p:graphicFrame>
-        <p:nvGraphicFramePr>
-          <p:cNvPr id="21" name="Chart"/>
-          <p:cNvGraphicFramePr/>
-          <p:nvPr/>
-        </p:nvGraphicFramePr>
-        <p:xfrm>
-          <a:off xmlns:a="http://schemas.openxmlformats.org/drawingml/2006/main" x="704850" y="2781300"/>
-          <a:ext xmlns:a="http://schemas.openxmlformats.org/drawingml/2006/main" cx="6191250" cy="2571750"/>
-        </p:xfrm>
-        <a:graphic xmlns:a="http://schemas.openxmlformats.org/drawingml/2006/main">
-          <a:graphicData uri="http://schemas.openxmlformats.org/drawingml/2006/chart">
-            <c:chart xmlns:r="http://schemas.openxmlformats.org/officeDocument/2006/relationships" xmlns:c="http://schemas.openxmlformats.org/drawingml/2006/chart" r:id="R27ca27a962a54823"/>
-          </a:graphicData>
-        </a:graphic>
-      </p:graphicFrame>
+      <p:sp>
+        <p:nvSpPr>
+          <p:cNvPr id="5" name="">
+            <a:extLst xmlns:a="http://schemas.openxmlformats.org/drawingml/2006/main">
+              <a:ext uri="{FF2B5EF4-FFF2-40B4-BE49-F238E27FC236}">
+                <a16:creationId xmlns:a16="http://schemas.microsoft.com/office/drawing/2014/main" id="{FA38EA96-9867-4277-A5A7-1C0A3F118E6D}"/>
+              </a:ext>
+            </a:extLst>
+          </p:cNvPr>
+          <p:cNvSpPr>
+            <a:spLocks xmlns:a="http://schemas.openxmlformats.org/drawingml/2006/main" noGrp="1"/>
+          </p:cNvSpPr>
+          <p:nvPr/>
+        </p:nvSpPr>
+        <p:spPr>
+          <a:xfrm xmlns:a="http://schemas.openxmlformats.org/drawingml/2006/main">
+            <a:off x="666750" y="3048000"/>
+            <a:ext cx="3143250" cy="1790700"/>
+          </a:xfrm>
+          <a:prstGeom xmlns:a="http://schemas.openxmlformats.org/drawingml/2006/main" prst="rect">
+            <a:avLst/>
+          </a:prstGeom>
+          <a:solidFill xmlns:a="http://schemas.openxmlformats.org/drawingml/2006/main">
+            <a:srgbClr val="F7F7F7"/>
+          </a:solidFill>
+          <a:ln xmlns:a="http://schemas.openxmlformats.org/drawingml/2006/main" w="0">
+            <a:noFill/>
+            <a:prstDash val="solid"/>
+          </a:ln>
+        </p:spPr>
+      </p:sp>
       <p:sp>
         <p:nvSpPr>
           <p:cNvPr id="6" name="">
             <a:extLst xmlns:a="http://schemas.openxmlformats.org/drawingml/2006/main">
               <a:ext uri="{FF2B5EF4-FFF2-40B4-BE49-F238E27FC236}">
-                <a16:creationId xmlns:a16="http://schemas.microsoft.com/office/drawing/2014/main" id="{D5B5749E-40F6-449E-AB8D-79F258AE3CF4}"/>
-              </a:ext>
-            </a:extLst>
-          </p:cNvPr>
-          <p:cNvSpPr>
-            <a:spLocks xmlns:a="http://schemas.openxmlformats.org/drawingml/2006/main" noGrp="1"/>
-          </p:cNvSpPr>
-          <p:nvPr/>
-        </p:nvSpPr>
-        <p:spPr>
-          <a:xfrm xmlns:a="http://schemas.openxmlformats.org/drawingml/2006/main">
-            <a:off x="7524750" y="2781300"/>
-            <a:ext cx="3429000" cy="1352550"/>
+                <a16:creationId xmlns:a16="http://schemas.microsoft.com/office/drawing/2014/main" id="{AA1E37E7-449D-437E-AD54-D9891CD6E0CD}"/>
+              </a:ext>
+            </a:extLst>
+          </p:cNvPr>
+          <p:cNvSpPr>
+            <a:spLocks xmlns:a="http://schemas.openxmlformats.org/drawingml/2006/main" noGrp="1"/>
+          </p:cNvSpPr>
+          <p:nvPr/>
+        </p:nvSpPr>
+        <p:spPr>
+          <a:xfrm xmlns:a="http://schemas.openxmlformats.org/drawingml/2006/main">
+            <a:off x="914400" y="3295650"/>
+            <a:ext cx="2476500" cy="381000"/>
+          </a:xfrm>
+          <a:prstGeom xmlns:a="http://schemas.openxmlformats.org/drawingml/2006/main" prst="rect">
+            <a:avLst/>
+          </a:prstGeom>
+          <a:noFill xmlns:a="http://schemas.openxmlformats.org/drawingml/2006/main"/>
+          <a:ln xmlns:a="http://schemas.openxmlformats.org/drawingml/2006/main" w="0">
+            <a:noFill/>
+            <a:prstDash val="solid"/>
+          </a:ln>
+        </p:spPr>
+        <p:txBody>
+          <a:bodyPr xmlns:a="http://schemas.openxmlformats.org/drawingml/2006/main"/>
+          <a:lstStyle xmlns:a="http://schemas.openxmlformats.org/drawingml/2006/main"/>
+          <a:p xmlns:a="http://schemas.openxmlformats.org/drawingml/2006/main">
+            <a:pPr algn="l">
+              <a:lnSpc>
+                <a:spcPct val="112000"/>
+              </a:lnSpc>
+              <a:buNone/>
+              <a:defRPr sz="2400" b="1">
+                <a:solidFill>
+                  <a:srgbClr val="000000"/>
+                </a:solidFill>
+                <a:latin typeface="Malgun Gothic"/>
+                <a:ea typeface="Malgun Gothic"/>
+                <a:cs typeface="Malgun Gothic"/>
+              </a:defRPr>
+            </a:pPr>
+            <a:r>
+              <a:rPr sz="2400" b="1">
+                <a:solidFill>
+                  <a:srgbClr val="000000"/>
+                </a:solidFill>
+                <a:latin typeface="Malgun Gothic"/>
+                <a:ea typeface="Malgun Gothic"/>
+                <a:cs typeface="Malgun Gothic"/>
+              </a:rPr>
+              <a:t>context-saver</a:t>
+            </a:r>
+          </a:p>
+        </p:txBody>
+      </p:sp>
+      <p:sp>
+        <p:nvSpPr>
+          <p:cNvPr id="7" name="">
+            <a:extLst xmlns:a="http://schemas.openxmlformats.org/drawingml/2006/main">
+              <a:ext uri="{FF2B5EF4-FFF2-40B4-BE49-F238E27FC236}">
+                <a16:creationId xmlns:a16="http://schemas.microsoft.com/office/drawing/2014/main" id="{EF0DA10F-03E2-441F-A974-8C052CF801D6}"/>
+              </a:ext>
+            </a:extLst>
+          </p:cNvPr>
+          <p:cNvSpPr>
+            <a:spLocks xmlns:a="http://schemas.openxmlformats.org/drawingml/2006/main" noGrp="1"/>
+          </p:cNvSpPr>
+          <p:nvPr/>
+        </p:nvSpPr>
+        <p:spPr>
+          <a:xfrm xmlns:a="http://schemas.openxmlformats.org/drawingml/2006/main">
+            <a:off x="914400" y="3848100"/>
+            <a:ext cx="952500" cy="266700"/>
+          </a:xfrm>
+          <a:prstGeom xmlns:a="http://schemas.openxmlformats.org/drawingml/2006/main" prst="rect">
+            <a:avLst/>
+          </a:prstGeom>
+          <a:noFill xmlns:a="http://schemas.openxmlformats.org/drawingml/2006/main"/>
+          <a:ln xmlns:a="http://schemas.openxmlformats.org/drawingml/2006/main" w="0">
+            <a:noFill/>
+            <a:prstDash val="solid"/>
+          </a:ln>
+        </p:spPr>
+        <p:txBody>
+          <a:bodyPr xmlns:a="http://schemas.openxmlformats.org/drawingml/2006/main"/>
+          <a:lstStyle xmlns:a="http://schemas.openxmlformats.org/drawingml/2006/main"/>
+          <a:p xmlns:a="http://schemas.openxmlformats.org/drawingml/2006/main">
+            <a:pPr algn="l">
+              <a:lnSpc>
+                <a:spcPct val="112000"/>
+              </a:lnSpc>
+              <a:buNone/>
+              <a:defRPr sz="1350" b="1">
+                <a:solidFill>
+                  <a:srgbClr val="555555"/>
+                </a:solidFill>
+                <a:latin typeface="Malgun Gothic"/>
+                <a:ea typeface="Malgun Gothic"/>
+                <a:cs typeface="Malgun Gothic"/>
+              </a:defRPr>
+            </a:pPr>
+            <a:r>
+              <a:rPr sz="1350" b="1">
+                <a:solidFill>
+                  <a:srgbClr val="555555"/>
+                </a:solidFill>
+                <a:latin typeface="Malgun Gothic"/>
+                <a:ea typeface="Malgun Gothic"/>
+                <a:cs typeface="Malgun Gothic"/>
+              </a:rPr>
+              <a:t>저장</a:t>
+            </a:r>
+          </a:p>
+        </p:txBody>
+      </p:sp>
+      <p:sp>
+        <p:nvSpPr>
+          <p:cNvPr id="8" name="">
+            <a:extLst xmlns:a="http://schemas.openxmlformats.org/drawingml/2006/main">
+              <a:ext uri="{FF2B5EF4-FFF2-40B4-BE49-F238E27FC236}">
+                <a16:creationId xmlns:a16="http://schemas.microsoft.com/office/drawing/2014/main" id="{EC7BEED0-A04F-44A7-BCAA-5421B75FBD99}"/>
+              </a:ext>
+            </a:extLst>
+          </p:cNvPr>
+          <p:cNvSpPr>
+            <a:spLocks xmlns:a="http://schemas.openxmlformats.org/drawingml/2006/main" noGrp="1"/>
+          </p:cNvSpPr>
+          <p:nvPr/>
+        </p:nvSpPr>
+        <p:spPr>
+          <a:xfrm xmlns:a="http://schemas.openxmlformats.org/drawingml/2006/main">
+            <a:off x="914400" y="4229100"/>
+            <a:ext cx="2571750" cy="438150"/>
+          </a:xfrm>
+          <a:prstGeom xmlns:a="http://schemas.openxmlformats.org/drawingml/2006/main" prst="rect">
+            <a:avLst/>
+          </a:prstGeom>
+          <a:noFill xmlns:a="http://schemas.openxmlformats.org/drawingml/2006/main"/>
+          <a:ln xmlns:a="http://schemas.openxmlformats.org/drawingml/2006/main" w="0">
+            <a:noFill/>
+            <a:prstDash val="solid"/>
+          </a:ln>
+        </p:spPr>
+        <p:txBody>
+          <a:bodyPr xmlns:a="http://schemas.openxmlformats.org/drawingml/2006/main"/>
+          <a:lstStyle xmlns:a="http://schemas.openxmlformats.org/drawingml/2006/main"/>
+          <a:p xmlns:a="http://schemas.openxmlformats.org/drawingml/2006/main">
+            <a:pPr algn="l">
+              <a:lnSpc>
+                <a:spcPct val="118000"/>
+              </a:lnSpc>
+              <a:buNone/>
+              <a:defRPr sz="1350" b="0">
+                <a:solidFill>
+                  <a:srgbClr val="555555"/>
+                </a:solidFill>
+                <a:latin typeface="Malgun Gothic"/>
+                <a:ea typeface="Malgun Gothic"/>
+                <a:cs typeface="Malgun Gothic"/>
+              </a:defRPr>
+            </a:pPr>
+            <a:r>
+              <a:rPr sz="1350" b="0">
+                <a:solidFill>
+                  <a:srgbClr val="555555"/>
+                </a:solidFill>
+                <a:latin typeface="Malgun Gothic"/>
+                <a:ea typeface="Malgun Gothic"/>
+                <a:cs typeface="Malgun Gothic"/>
+              </a:rPr>
+              <a:t>현재 세션 요약을 L2에 저장하고 INDEX/L1 키워드를 갱신</a:t>
+            </a:r>
+          </a:p>
+        </p:txBody>
+      </p:sp>
+      <p:sp>
+        <p:nvSpPr>
+          <p:cNvPr id="9" name="">
+            <a:extLst xmlns:a="http://schemas.openxmlformats.org/drawingml/2006/main">
+              <a:ext uri="{FF2B5EF4-FFF2-40B4-BE49-F238E27FC236}">
+                <a16:creationId xmlns:a16="http://schemas.microsoft.com/office/drawing/2014/main" id="{8B09DD57-E61B-43DB-861C-7BB5C65B9166}"/>
+              </a:ext>
+            </a:extLst>
+          </p:cNvPr>
+          <p:cNvSpPr>
+            <a:spLocks xmlns:a="http://schemas.openxmlformats.org/drawingml/2006/main" noGrp="1"/>
+          </p:cNvSpPr>
+          <p:nvPr/>
+        </p:nvSpPr>
+        <p:spPr>
+          <a:xfrm xmlns:a="http://schemas.openxmlformats.org/drawingml/2006/main">
+            <a:off x="4381500" y="3048000"/>
+            <a:ext cx="3143250" cy="1790700"/>
           </a:xfrm>
           <a:prstGeom xmlns:a="http://schemas.openxmlformats.org/drawingml/2006/main" prst="rect">
             <a:avLst/>
@@ -7201,22 +8114,22 @@
       </p:sp>
       <p:sp>
         <p:nvSpPr>
-          <p:cNvPr id="7" name="">
-            <a:extLst xmlns:a="http://schemas.openxmlformats.org/drawingml/2006/main">
-              <a:ext uri="{FF2B5EF4-FFF2-40B4-BE49-F238E27FC236}">
-                <a16:creationId xmlns:a16="http://schemas.microsoft.com/office/drawing/2014/main" id="{B8E178CF-18B6-46F1-8494-5F1E88EA930B}"/>
-              </a:ext>
-            </a:extLst>
-          </p:cNvPr>
-          <p:cNvSpPr>
-            <a:spLocks xmlns:a="http://schemas.openxmlformats.org/drawingml/2006/main" noGrp="1"/>
-          </p:cNvSpPr>
-          <p:nvPr/>
-        </p:nvSpPr>
-        <p:spPr>
-          <a:xfrm xmlns:a="http://schemas.openxmlformats.org/drawingml/2006/main">
-            <a:off x="7753350" y="2952750"/>
-            <a:ext cx="2971800" cy="590550"/>
+          <p:cNvPr id="10" name="">
+            <a:extLst xmlns:a="http://schemas.openxmlformats.org/drawingml/2006/main">
+              <a:ext uri="{FF2B5EF4-FFF2-40B4-BE49-F238E27FC236}">
+                <a16:creationId xmlns:a16="http://schemas.microsoft.com/office/drawing/2014/main" id="{0FFC0AEE-8032-4745-A33D-781E649A5C5D}"/>
+              </a:ext>
+            </a:extLst>
+          </p:cNvPr>
+          <p:cNvSpPr>
+            <a:spLocks xmlns:a="http://schemas.openxmlformats.org/drawingml/2006/main" noGrp="1"/>
+          </p:cNvSpPr>
+          <p:nvPr/>
+        </p:nvSpPr>
+        <p:spPr>
+          <a:xfrm xmlns:a="http://schemas.openxmlformats.org/drawingml/2006/main">
+            <a:off x="4629150" y="3295650"/>
+            <a:ext cx="2476500" cy="381000"/>
           </a:xfrm>
           <a:prstGeom xmlns:a="http://schemas.openxmlformats.org/drawingml/2006/main" prst="rect">
             <a:avLst/>
@@ -7236,7 +8149,7 @@
                 <a:spcPct val="112000"/>
               </a:lnSpc>
               <a:buNone/>
-              <a:defRPr sz="3900" b="1">
+              <a:defRPr sz="2400" b="1">
                 <a:solidFill>
                   <a:srgbClr val="FF6B35"/>
                 </a:solidFill>
@@ -7246,7 +8159,7 @@
               </a:defRPr>
             </a:pPr>
             <a:r>
-              <a:rPr sz="3900" b="1">
+              <a:rPr sz="2400" b="1">
                 <a:solidFill>
                   <a:srgbClr val="FF6B35"/>
                 </a:solidFill>
@@ -7254,29 +8167,29 @@
                 <a:ea typeface="Malgun Gothic"/>
                 <a:cs typeface="Malgun Gothic"/>
               </a:rPr>
-              <a:t>67%</a:t>
-            </a:r>
-          </a:p>
-        </p:txBody>
-      </p:sp>
-      <p:sp>
-        <p:nvSpPr>
-          <p:cNvPr id="8" name="">
-            <a:extLst xmlns:a="http://schemas.openxmlformats.org/drawingml/2006/main">
-              <a:ext uri="{FF2B5EF4-FFF2-40B4-BE49-F238E27FC236}">
-                <a16:creationId xmlns:a16="http://schemas.microsoft.com/office/drawing/2014/main" id="{4E2BFE2D-A82D-44E8-8E00-E2C2379CDB4D}"/>
-              </a:ext>
-            </a:extLst>
-          </p:cNvPr>
-          <p:cNvSpPr>
-            <a:spLocks xmlns:a="http://schemas.openxmlformats.org/drawingml/2006/main" noGrp="1"/>
-          </p:cNvSpPr>
-          <p:nvPr/>
-        </p:nvSpPr>
-        <p:spPr>
-          <a:xfrm xmlns:a="http://schemas.openxmlformats.org/drawingml/2006/main">
-            <a:off x="7753350" y="3619500"/>
-            <a:ext cx="2971800" cy="400050"/>
+              <a:t>ctxdb</a:t>
+            </a:r>
+          </a:p>
+        </p:txBody>
+      </p:sp>
+      <p:sp>
+        <p:nvSpPr>
+          <p:cNvPr id="11" name="">
+            <a:extLst xmlns:a="http://schemas.openxmlformats.org/drawingml/2006/main">
+              <a:ext uri="{FF2B5EF4-FFF2-40B4-BE49-F238E27FC236}">
+                <a16:creationId xmlns:a16="http://schemas.microsoft.com/office/drawing/2014/main" id="{AC247556-CF20-4403-842F-FC8C04814A19}"/>
+              </a:ext>
+            </a:extLst>
+          </p:cNvPr>
+          <p:cNvSpPr>
+            <a:spLocks xmlns:a="http://schemas.openxmlformats.org/drawingml/2006/main" noGrp="1"/>
+          </p:cNvSpPr>
+          <p:nvPr/>
+        </p:nvSpPr>
+        <p:spPr>
+          <a:xfrm xmlns:a="http://schemas.openxmlformats.org/drawingml/2006/main">
+            <a:off x="4629150" y="3848100"/>
+            <a:ext cx="952500" cy="266700"/>
           </a:xfrm>
           <a:prstGeom xmlns:a="http://schemas.openxmlformats.org/drawingml/2006/main" prst="rect">
             <a:avLst/>
@@ -7293,7 +8206,67 @@
           <a:p xmlns:a="http://schemas.openxmlformats.org/drawingml/2006/main">
             <a:pPr algn="l">
               <a:lnSpc>
-                <a:spcPct val="115000"/>
+                <a:spcPct val="112000"/>
+              </a:lnSpc>
+              <a:buNone/>
+              <a:defRPr sz="1350" b="1">
+                <a:solidFill>
+                  <a:srgbClr val="555555"/>
+                </a:solidFill>
+                <a:latin typeface="Malgun Gothic"/>
+                <a:ea typeface="Malgun Gothic"/>
+                <a:cs typeface="Malgun Gothic"/>
+              </a:defRPr>
+            </a:pPr>
+            <a:r>
+              <a:rPr sz="1350" b="1">
+                <a:solidFill>
+                  <a:srgbClr val="555555"/>
+                </a:solidFill>
+                <a:latin typeface="Malgun Gothic"/>
+                <a:ea typeface="Malgun Gothic"/>
+                <a:cs typeface="Malgun Gothic"/>
+              </a:rPr>
+              <a:t>읽기</a:t>
+            </a:r>
+          </a:p>
+        </p:txBody>
+      </p:sp>
+      <p:sp>
+        <p:nvSpPr>
+          <p:cNvPr id="12" name="">
+            <a:extLst xmlns:a="http://schemas.openxmlformats.org/drawingml/2006/main">
+              <a:ext uri="{FF2B5EF4-FFF2-40B4-BE49-F238E27FC236}">
+                <a16:creationId xmlns:a16="http://schemas.microsoft.com/office/drawing/2014/main" id="{92B9788C-F678-496A-8056-367C41E2FC26}"/>
+              </a:ext>
+            </a:extLst>
+          </p:cNvPr>
+          <p:cNvSpPr>
+            <a:spLocks xmlns:a="http://schemas.openxmlformats.org/drawingml/2006/main" noGrp="1"/>
+          </p:cNvSpPr>
+          <p:nvPr/>
+        </p:nvSpPr>
+        <p:spPr>
+          <a:xfrm xmlns:a="http://schemas.openxmlformats.org/drawingml/2006/main">
+            <a:off x="4629150" y="4229100"/>
+            <a:ext cx="2571750" cy="438150"/>
+          </a:xfrm>
+          <a:prstGeom xmlns:a="http://schemas.openxmlformats.org/drawingml/2006/main" prst="rect">
+            <a:avLst/>
+          </a:prstGeom>
+          <a:noFill xmlns:a="http://schemas.openxmlformats.org/drawingml/2006/main"/>
+          <a:ln xmlns:a="http://schemas.openxmlformats.org/drawingml/2006/main" w="0">
+            <a:noFill/>
+            <a:prstDash val="solid"/>
+          </a:ln>
+        </p:spPr>
+        <p:txBody>
+          <a:bodyPr xmlns:a="http://schemas.openxmlformats.org/drawingml/2006/main"/>
+          <a:lstStyle xmlns:a="http://schemas.openxmlformats.org/drawingml/2006/main"/>
+          <a:p xmlns:a="http://schemas.openxmlformats.org/drawingml/2006/main">
+            <a:pPr algn="l">
+              <a:lnSpc>
+                <a:spcPct val="118000"/>
               </a:lnSpc>
               <a:buNone/>
               <a:defRPr sz="1350" b="0">
@@ -7314,35 +8287,35 @@
                 <a:ea typeface="Malgun Gothic"/>
                 <a:cs typeface="Malgun Gothic"/>
               </a:rPr>
-              <a:t>codemap 사용 시 위치 탐색 절감</a:t>
-            </a:r>
-          </a:p>
-        </p:txBody>
-      </p:sp>
-      <p:sp>
-        <p:nvSpPr>
-          <p:cNvPr id="9" name="">
-            <a:extLst xmlns:a="http://schemas.openxmlformats.org/drawingml/2006/main">
-              <a:ext uri="{FF2B5EF4-FFF2-40B4-BE49-F238E27FC236}">
-                <a16:creationId xmlns:a16="http://schemas.microsoft.com/office/drawing/2014/main" id="{08475025-9E22-4665-AA0F-E9730F36A30B}"/>
-              </a:ext>
-            </a:extLst>
-          </p:cNvPr>
-          <p:cNvSpPr>
-            <a:spLocks xmlns:a="http://schemas.openxmlformats.org/drawingml/2006/main" noGrp="1"/>
-          </p:cNvSpPr>
-          <p:nvPr/>
-        </p:nvSpPr>
-        <p:spPr>
-          <a:xfrm xmlns:a="http://schemas.openxmlformats.org/drawingml/2006/main">
-            <a:off x="7524750" y="4400550"/>
-            <a:ext cx="3429000" cy="1352550"/>
+              <a:t>다음 요청 키워드로 저장된 L2만 읽어 현재 상태를 복원</a:t>
+            </a:r>
+          </a:p>
+        </p:txBody>
+      </p:sp>
+      <p:sp>
+        <p:nvSpPr>
+          <p:cNvPr id="13" name="">
+            <a:extLst xmlns:a="http://schemas.openxmlformats.org/drawingml/2006/main">
+              <a:ext uri="{FF2B5EF4-FFF2-40B4-BE49-F238E27FC236}">
+                <a16:creationId xmlns:a16="http://schemas.microsoft.com/office/drawing/2014/main" id="{C2B8557E-8601-4E1A-B54C-7024FB499627}"/>
+              </a:ext>
+            </a:extLst>
+          </p:cNvPr>
+          <p:cNvSpPr>
+            <a:spLocks xmlns:a="http://schemas.openxmlformats.org/drawingml/2006/main" noGrp="1"/>
+          </p:cNvSpPr>
+          <p:nvPr/>
+        </p:nvSpPr>
+        <p:spPr>
+          <a:xfrm xmlns:a="http://schemas.openxmlformats.org/drawingml/2006/main">
+            <a:off x="8096250" y="3048000"/>
+            <a:ext cx="3143250" cy="1790700"/>
           </a:xfrm>
           <a:prstGeom xmlns:a="http://schemas.openxmlformats.org/drawingml/2006/main" prst="rect">
             <a:avLst/>
           </a:prstGeom>
           <a:solidFill xmlns:a="http://schemas.openxmlformats.org/drawingml/2006/main">
-            <a:srgbClr val="FFE3D6"/>
+            <a:srgbClr val="F7F7F7"/>
           </a:solidFill>
           <a:ln xmlns:a="http://schemas.openxmlformats.org/drawingml/2006/main" w="0">
             <a:noFill/>
@@ -7352,22 +8325,22 @@
       </p:sp>
       <p:sp>
         <p:nvSpPr>
-          <p:cNvPr id="10" name="">
-            <a:extLst xmlns:a="http://schemas.openxmlformats.org/drawingml/2006/main">
-              <a:ext uri="{FF2B5EF4-FFF2-40B4-BE49-F238E27FC236}">
-                <a16:creationId xmlns:a16="http://schemas.microsoft.com/office/drawing/2014/main" id="{6A120156-0F26-4A9A-BA01-A00E8DEDABEB}"/>
-              </a:ext>
-            </a:extLst>
-          </p:cNvPr>
-          <p:cNvSpPr>
-            <a:spLocks xmlns:a="http://schemas.openxmlformats.org/drawingml/2006/main" noGrp="1"/>
-          </p:cNvSpPr>
-          <p:nvPr/>
-        </p:nvSpPr>
-        <p:spPr>
-          <a:xfrm xmlns:a="http://schemas.openxmlformats.org/drawingml/2006/main">
-            <a:off x="7753350" y="4572000"/>
-            <a:ext cx="2971800" cy="590550"/>
+          <p:cNvPr id="14" name="">
+            <a:extLst xmlns:a="http://schemas.openxmlformats.org/drawingml/2006/main">
+              <a:ext uri="{FF2B5EF4-FFF2-40B4-BE49-F238E27FC236}">
+                <a16:creationId xmlns:a16="http://schemas.microsoft.com/office/drawing/2014/main" id="{D65DE323-497D-44E4-A004-AE953E8F692D}"/>
+              </a:ext>
+            </a:extLst>
+          </p:cNvPr>
+          <p:cNvSpPr>
+            <a:spLocks xmlns:a="http://schemas.openxmlformats.org/drawingml/2006/main" noGrp="1"/>
+          </p:cNvSpPr>
+          <p:nvPr/>
+        </p:nvSpPr>
+        <p:spPr>
+          <a:xfrm xmlns:a="http://schemas.openxmlformats.org/drawingml/2006/main">
+            <a:off x="8343900" y="3295650"/>
+            <a:ext cx="2476500" cy="381000"/>
           </a:xfrm>
           <a:prstGeom xmlns:a="http://schemas.openxmlformats.org/drawingml/2006/main" prst="rect">
             <a:avLst/>
@@ -7387,47 +8360,47 @@
                 <a:spcPct val="112000"/>
               </a:lnSpc>
               <a:buNone/>
-              <a:defRPr sz="3900" b="1">
-                <a:solidFill>
-                  <a:srgbClr val="FF6B35"/>
-                </a:solidFill>
-                <a:latin typeface="Malgun Gothic"/>
-                <a:ea typeface="Malgun Gothic"/>
-                <a:cs typeface="Malgun Gothic"/>
-              </a:defRPr>
-            </a:pPr>
-            <a:r>
-              <a:rPr sz="3900" b="1">
-                <a:solidFill>
-                  <a:srgbClr val="FF6B35"/>
-                </a:solidFill>
-                <a:latin typeface="Malgun Gothic"/>
-                <a:ea typeface="Malgun Gothic"/>
-                <a:cs typeface="Malgun Gothic"/>
-              </a:rPr>
-              <a:t>97%</a:t>
-            </a:r>
-          </a:p>
-        </p:txBody>
-      </p:sp>
-      <p:sp>
-        <p:nvSpPr>
-          <p:cNvPr id="11" name="">
-            <a:extLst xmlns:a="http://schemas.openxmlformats.org/drawingml/2006/main">
-              <a:ext uri="{FF2B5EF4-FFF2-40B4-BE49-F238E27FC236}">
-                <a16:creationId xmlns:a16="http://schemas.microsoft.com/office/drawing/2014/main" id="{67B738A9-973B-4B88-8518-F6A1AE1628E9}"/>
-              </a:ext>
-            </a:extLst>
-          </p:cNvPr>
-          <p:cNvSpPr>
-            <a:spLocks xmlns:a="http://schemas.openxmlformats.org/drawingml/2006/main" noGrp="1"/>
-          </p:cNvSpPr>
-          <p:nvPr/>
-        </p:nvSpPr>
-        <p:spPr>
-          <a:xfrm xmlns:a="http://schemas.openxmlformats.org/drawingml/2006/main">
-            <a:off x="7753350" y="5238750"/>
-            <a:ext cx="2971800" cy="400050"/>
+              <a:defRPr sz="2400" b="1">
+                <a:solidFill>
+                  <a:srgbClr val="000000"/>
+                </a:solidFill>
+                <a:latin typeface="Malgun Gothic"/>
+                <a:ea typeface="Malgun Gothic"/>
+                <a:cs typeface="Malgun Gothic"/>
+              </a:defRPr>
+            </a:pPr>
+            <a:r>
+              <a:rPr sz="2400" b="1">
+                <a:solidFill>
+                  <a:srgbClr val="000000"/>
+                </a:solidFill>
+                <a:latin typeface="Malgun Gothic"/>
+                <a:ea typeface="Malgun Gothic"/>
+                <a:cs typeface="Malgun Gothic"/>
+              </a:rPr>
+              <a:t>codemap</a:t>
+            </a:r>
+          </a:p>
+        </p:txBody>
+      </p:sp>
+      <p:sp>
+        <p:nvSpPr>
+          <p:cNvPr id="15" name="">
+            <a:extLst xmlns:a="http://schemas.openxmlformats.org/drawingml/2006/main">
+              <a:ext uri="{FF2B5EF4-FFF2-40B4-BE49-F238E27FC236}">
+                <a16:creationId xmlns:a16="http://schemas.microsoft.com/office/drawing/2014/main" id="{D9BB970C-734B-4903-9E87-CB97615781CE}"/>
+              </a:ext>
+            </a:extLst>
+          </p:cNvPr>
+          <p:cNvSpPr>
+            <a:spLocks xmlns:a="http://schemas.openxmlformats.org/drawingml/2006/main" noGrp="1"/>
+          </p:cNvSpPr>
+          <p:nvPr/>
+        </p:nvSpPr>
+        <p:spPr>
+          <a:xfrm xmlns:a="http://schemas.openxmlformats.org/drawingml/2006/main">
+            <a:off x="8343900" y="3848100"/>
+            <a:ext cx="952500" cy="266700"/>
           </a:xfrm>
           <a:prstGeom xmlns:a="http://schemas.openxmlformats.org/drawingml/2006/main" prst="rect">
             <a:avLst/>
@@ -7444,7 +8417,67 @@
           <a:p xmlns:a="http://schemas.openxmlformats.org/drawingml/2006/main">
             <a:pPr algn="l">
               <a:lnSpc>
-                <a:spcPct val="115000"/>
+                <a:spcPct val="112000"/>
+              </a:lnSpc>
+              <a:buNone/>
+              <a:defRPr sz="1350" b="1">
+                <a:solidFill>
+                  <a:srgbClr val="555555"/>
+                </a:solidFill>
+                <a:latin typeface="Malgun Gothic"/>
+                <a:ea typeface="Malgun Gothic"/>
+                <a:cs typeface="Malgun Gothic"/>
+              </a:defRPr>
+            </a:pPr>
+            <a:r>
+              <a:rPr sz="1350" b="1">
+                <a:solidFill>
+                  <a:srgbClr val="555555"/>
+                </a:solidFill>
+                <a:latin typeface="Malgun Gothic"/>
+                <a:ea typeface="Malgun Gothic"/>
+                <a:cs typeface="Malgun Gothic"/>
+              </a:rPr>
+              <a:t>찾기</a:t>
+            </a:r>
+          </a:p>
+        </p:txBody>
+      </p:sp>
+      <p:sp>
+        <p:nvSpPr>
+          <p:cNvPr id="16" name="">
+            <a:extLst xmlns:a="http://schemas.openxmlformats.org/drawingml/2006/main">
+              <a:ext uri="{FF2B5EF4-FFF2-40B4-BE49-F238E27FC236}">
+                <a16:creationId xmlns:a16="http://schemas.microsoft.com/office/drawing/2014/main" id="{CD64AE5B-7046-4A52-A2A1-D8172677523B}"/>
+              </a:ext>
+            </a:extLst>
+          </p:cNvPr>
+          <p:cNvSpPr>
+            <a:spLocks xmlns:a="http://schemas.openxmlformats.org/drawingml/2006/main" noGrp="1"/>
+          </p:cNvSpPr>
+          <p:nvPr/>
+        </p:nvSpPr>
+        <p:spPr>
+          <a:xfrm xmlns:a="http://schemas.openxmlformats.org/drawingml/2006/main">
+            <a:off x="8343900" y="4229100"/>
+            <a:ext cx="2571750" cy="438150"/>
+          </a:xfrm>
+          <a:prstGeom xmlns:a="http://schemas.openxmlformats.org/drawingml/2006/main" prst="rect">
+            <a:avLst/>
+          </a:prstGeom>
+          <a:noFill xmlns:a="http://schemas.openxmlformats.org/drawingml/2006/main"/>
+          <a:ln xmlns:a="http://schemas.openxmlformats.org/drawingml/2006/main" w="0">
+            <a:noFill/>
+            <a:prstDash val="solid"/>
+          </a:ln>
+        </p:spPr>
+        <p:txBody>
+          <a:bodyPr xmlns:a="http://schemas.openxmlformats.org/drawingml/2006/main"/>
+          <a:lstStyle xmlns:a="http://schemas.openxmlformats.org/drawingml/2006/main"/>
+          <a:p xmlns:a="http://schemas.openxmlformats.org/drawingml/2006/main">
+            <a:pPr algn="l">
+              <a:lnSpc>
+                <a:spcPct val="118000"/>
               </a:lnSpc>
               <a:buNone/>
               <a:defRPr sz="1350" b="0">
@@ -7465,49 +8498,49 @@
                 <a:ea typeface="Malgun Gothic"/>
                 <a:cs typeface="Malgun Gothic"/>
               </a:rPr>
-              <a:t>ctxdb 사용 시 세션 재개 절감</a:t>
-            </a:r>
-          </a:p>
-        </p:txBody>
-      </p:sp>
-      <p:sp>
-        <p:nvSpPr>
-          <p:cNvPr id="12" name="">
-            <a:extLst xmlns:a="http://schemas.openxmlformats.org/drawingml/2006/main">
-              <a:ext uri="{FF2B5EF4-FFF2-40B4-BE49-F238E27FC236}">
-                <a16:creationId xmlns:a16="http://schemas.microsoft.com/office/drawing/2014/main" id="{EB99C5FF-E303-4311-A135-7A67B87B0992}"/>
-              </a:ext>
-            </a:extLst>
-          </p:cNvPr>
-          <p:cNvSpPr>
-            <a:spLocks xmlns:a="http://schemas.openxmlformats.org/drawingml/2006/main" noGrp="1"/>
-          </p:cNvSpPr>
-          <p:nvPr/>
-        </p:nvSpPr>
-        <p:spPr>
-          <a:xfrm xmlns:a="http://schemas.openxmlformats.org/drawingml/2006/main">
-            <a:off x="704850" y="5467350"/>
-            <a:ext cx="1238250" cy="285750"/>
-          </a:xfrm>
-          <a:prstGeom xmlns:a="http://schemas.openxmlformats.org/drawingml/2006/main" prst="rect">
-            <a:avLst/>
-          </a:prstGeom>
-          <a:noFill xmlns:a="http://schemas.openxmlformats.org/drawingml/2006/main"/>
-          <a:ln xmlns:a="http://schemas.openxmlformats.org/drawingml/2006/main" w="0">
-            <a:noFill/>
-            <a:prstDash val="solid"/>
-          </a:ln>
-        </p:spPr>
-        <p:txBody>
-          <a:bodyPr xmlns:a="http://schemas.openxmlformats.org/drawingml/2006/main"/>
-          <a:lstStyle xmlns:a="http://schemas.openxmlformats.org/drawingml/2006/main"/>
-          <a:p xmlns:a="http://schemas.openxmlformats.org/drawingml/2006/main">
-            <a:pPr algn="l">
+              <a:t>코드 수정 직전에 심볼 위치를 조회해 타깃 파일만 open</a:t>
+            </a:r>
+          </a:p>
+        </p:txBody>
+      </p:sp>
+      <p:sp>
+        <p:nvSpPr>
+          <p:cNvPr id="17" name="">
+            <a:extLst xmlns:a="http://schemas.openxmlformats.org/drawingml/2006/main">
+              <a:ext uri="{FF2B5EF4-FFF2-40B4-BE49-F238E27FC236}">
+                <a16:creationId xmlns:a16="http://schemas.microsoft.com/office/drawing/2014/main" id="{DE7BF1C0-1CA6-4662-8889-13FA2043303E}"/>
+              </a:ext>
+            </a:extLst>
+          </p:cNvPr>
+          <p:cNvSpPr>
+            <a:spLocks xmlns:a="http://schemas.openxmlformats.org/drawingml/2006/main" noGrp="1"/>
+          </p:cNvSpPr>
+          <p:nvPr/>
+        </p:nvSpPr>
+        <p:spPr>
+          <a:xfrm xmlns:a="http://schemas.openxmlformats.org/drawingml/2006/main">
+            <a:off x="1123950" y="5524500"/>
+            <a:ext cx="9144000" cy="400050"/>
+          </a:xfrm>
+          <a:prstGeom xmlns:a="http://schemas.openxmlformats.org/drawingml/2006/main" prst="rect">
+            <a:avLst/>
+          </a:prstGeom>
+          <a:noFill xmlns:a="http://schemas.openxmlformats.org/drawingml/2006/main"/>
+          <a:ln xmlns:a="http://schemas.openxmlformats.org/drawingml/2006/main" w="0">
+            <a:noFill/>
+            <a:prstDash val="solid"/>
+          </a:ln>
+        </p:spPr>
+        <p:txBody>
+          <a:bodyPr xmlns:a="http://schemas.openxmlformats.org/drawingml/2006/main"/>
+          <a:lstStyle xmlns:a="http://schemas.openxmlformats.org/drawingml/2006/main"/>
+          <a:p xmlns:a="http://schemas.openxmlformats.org/drawingml/2006/main">
+            <a:pPr algn="ctr">
               <a:lnSpc>
                 <a:spcPct val="112000"/>
               </a:lnSpc>
               <a:buNone/>
-              <a:defRPr sz="1650" b="1">
+              <a:defRPr sz="1800" b="1">
                 <a:solidFill>
                   <a:srgbClr val="000000"/>
                 </a:solidFill>
@@ -7517,7 +8550,7 @@
               </a:defRPr>
             </a:pPr>
             <a:r>
-              <a:rPr sz="1650" b="1">
+              <a:rPr sz="1800" b="1">
                 <a:solidFill>
                   <a:srgbClr val="000000"/>
                 </a:solidFill>
@@ -7525,77 +8558,17 @@
                 <a:ea typeface="Malgun Gothic"/>
                 <a:cs typeface="Malgun Gothic"/>
               </a:rPr>
-              <a:t>핵심 해석</a:t>
-            </a:r>
-          </a:p>
-        </p:txBody>
-      </p:sp>
-      <p:sp>
-        <p:nvSpPr>
-          <p:cNvPr id="13" name="">
-            <a:extLst xmlns:a="http://schemas.openxmlformats.org/drawingml/2006/main">
-              <a:ext uri="{FF2B5EF4-FFF2-40B4-BE49-F238E27FC236}">
-                <a16:creationId xmlns:a16="http://schemas.microsoft.com/office/drawing/2014/main" id="{6250CF3C-4C41-4E14-A388-F23D12FD65A8}"/>
-              </a:ext>
-            </a:extLst>
-          </p:cNvPr>
-          <p:cNvSpPr>
-            <a:spLocks xmlns:a="http://schemas.openxmlformats.org/drawingml/2006/main" noGrp="1"/>
-          </p:cNvSpPr>
-          <p:nvPr/>
-        </p:nvSpPr>
-        <p:spPr>
-          <a:xfrm xmlns:a="http://schemas.openxmlformats.org/drawingml/2006/main">
-            <a:off x="2038350" y="5467350"/>
-            <a:ext cx="4762500" cy="495300"/>
-          </a:xfrm>
-          <a:prstGeom xmlns:a="http://schemas.openxmlformats.org/drawingml/2006/main" prst="rect">
-            <a:avLst/>
-          </a:prstGeom>
-          <a:noFill xmlns:a="http://schemas.openxmlformats.org/drawingml/2006/main"/>
-          <a:ln xmlns:a="http://schemas.openxmlformats.org/drawingml/2006/main" w="0">
-            <a:noFill/>
-            <a:prstDash val="solid"/>
-          </a:ln>
-        </p:spPr>
-        <p:txBody>
-          <a:bodyPr xmlns:a="http://schemas.openxmlformats.org/drawingml/2006/main"/>
-          <a:lstStyle xmlns:a="http://schemas.openxmlformats.org/drawingml/2006/main"/>
-          <a:p xmlns:a="http://schemas.openxmlformats.org/drawingml/2006/main">
-            <a:pPr algn="l">
-              <a:lnSpc>
-                <a:spcPct val="118000"/>
-              </a:lnSpc>
-              <a:buNone/>
-              <a:defRPr sz="1350" b="0">
-                <a:solidFill>
-                  <a:srgbClr val="555555"/>
-                </a:solidFill>
-                <a:latin typeface="Malgun Gothic"/>
-                <a:ea typeface="Malgun Gothic"/>
-                <a:cs typeface="Malgun Gothic"/>
-              </a:defRPr>
-            </a:pPr>
-            <a:r>
-              <a:rPr sz="1350" b="0">
-                <a:solidFill>
-                  <a:srgbClr val="555555"/>
-                </a:solidFill>
-                <a:latin typeface="Malgun Gothic"/>
-                <a:ea typeface="Malgun Gothic"/>
-                <a:cs typeface="Malgun Gothic"/>
-              </a:rPr>
-              <a:t>codemap은 “어느 파일을 열지”를 줄이고, ctxdb는 “어떤 이력을 다시 읽을지”를 줄입니다.</a:t>
-            </a:r>
-          </a:p>
-        </p:txBody>
-      </p:sp>
-      <p:sp>
-        <p:nvSpPr>
-          <p:cNvPr id="14" name="">
-            <a:extLst xmlns:a="http://schemas.openxmlformats.org/drawingml/2006/main">
-              <a:ext uri="{FF2B5EF4-FFF2-40B4-BE49-F238E27FC236}">
-                <a16:creationId xmlns:a16="http://schemas.microsoft.com/office/drawing/2014/main" id="{EB994B6C-338E-4EE8-851E-CB9AD163706D}"/>
+              <a:t>순서: 저장은 context-saver, 읽기는 ctxdb, 수정 위치는 codemap.</a:t>
+            </a:r>
+          </a:p>
+        </p:txBody>
+      </p:sp>
+      <p:sp>
+        <p:nvSpPr>
+          <p:cNvPr id="18" name="">
+            <a:extLst xmlns:a="http://schemas.openxmlformats.org/drawingml/2006/main">
+              <a:ext uri="{FF2B5EF4-FFF2-40B4-BE49-F238E27FC236}">
+                <a16:creationId xmlns:a16="http://schemas.microsoft.com/office/drawing/2014/main" id="{0CA2CC1F-7747-4E25-B78B-6B8EB9A0ED42}"/>
               </a:ext>
             </a:extLst>
           </p:cNvPr>
@@ -7623,10 +8596,10 @@
       </p:sp>
       <p:sp>
         <p:nvSpPr>
-          <p:cNvPr id="15" name="">
-            <a:extLst xmlns:a="http://schemas.openxmlformats.org/drawingml/2006/main">
-              <a:ext uri="{FF2B5EF4-FFF2-40B4-BE49-F238E27FC236}">
-                <a16:creationId xmlns:a16="http://schemas.microsoft.com/office/drawing/2014/main" id="{6CEE1D5B-0B2A-4A12-98FD-27735B5FE374}"/>
+          <p:cNvPr id="19" name="">
+            <a:extLst xmlns:a="http://schemas.openxmlformats.org/drawingml/2006/main">
+              <a:ext uri="{FF2B5EF4-FFF2-40B4-BE49-F238E27FC236}">
+                <a16:creationId xmlns:a16="http://schemas.microsoft.com/office/drawing/2014/main" id="{64E0CF87-B2DC-44E5-8844-31F9B85E9EE7}"/>
               </a:ext>
             </a:extLst>
           </p:cNvPr>
@@ -7683,10 +8656,10 @@
       </p:sp>
       <p:sp>
         <p:nvSpPr>
-          <p:cNvPr id="16" name="">
-            <a:extLst xmlns:a="http://schemas.openxmlformats.org/drawingml/2006/main">
-              <a:ext uri="{FF2B5EF4-FFF2-40B4-BE49-F238E27FC236}">
-                <a16:creationId xmlns:a16="http://schemas.microsoft.com/office/drawing/2014/main" id="{A86235FA-A886-42AE-99AE-CC30853480C3}"/>
+          <p:cNvPr id="20" name="">
+            <a:extLst xmlns:a="http://schemas.openxmlformats.org/drawingml/2006/main">
+              <a:ext uri="{FF2B5EF4-FFF2-40B4-BE49-F238E27FC236}">
+                <a16:creationId xmlns:a16="http://schemas.microsoft.com/office/drawing/2014/main" id="{0667B598-712F-433C-A94F-A503FAED3F64}"/>
               </a:ext>
             </a:extLst>
           </p:cNvPr>
@@ -7744,7 +8717,7 @@
     </p:spTree>
     <p:extLst>
       <p:ext uri="{BB962C8B-B14F-4D97-AF65-F5344CB8AC3E}">
-        <p14:creationId xmlns:p14="http://schemas.microsoft.com/office/powerpoint/2010/main" val="1665129731"/>
+        <p14:creationId xmlns:p14="http://schemas.microsoft.com/office/powerpoint/2010/main" val="396918929"/>
       </p:ext>
     </p:extLst>
   </p:cSld>
@@ -7775,7 +8748,7 @@
           <p:cNvPr id="1" name="">
             <a:extLst xmlns:a="http://schemas.openxmlformats.org/drawingml/2006/main">
               <a:ext uri="{FF2B5EF4-FFF2-40B4-BE49-F238E27FC236}">
-                <a16:creationId xmlns:a16="http://schemas.microsoft.com/office/drawing/2014/main" id="{503C5E28-483A-42A1-9336-60A34DE4E2CF}"/>
+                <a16:creationId xmlns:a16="http://schemas.microsoft.com/office/drawing/2014/main" id="{922D76BE-002F-4F5D-B405-30AECF2421AC}"/>
               </a:ext>
             </a:extLst>
           </p:cNvPr>
@@ -7825,7 +8798,7 @@
                 <a:ea typeface="Malgun Gothic"/>
                 <a:cs typeface="Malgun Gothic"/>
               </a:rPr>
-              <a:t>운영</a:t>
+              <a:t>시뮬레이션</a:t>
             </a:r>
           </a:p>
         </p:txBody>
@@ -7835,7 +8808,7 @@
           <p:cNvPr id="2" name="">
             <a:extLst xmlns:a="http://schemas.openxmlformats.org/drawingml/2006/main">
               <a:ext uri="{FF2B5EF4-FFF2-40B4-BE49-F238E27FC236}">
-                <a16:creationId xmlns:a16="http://schemas.microsoft.com/office/drawing/2014/main" id="{84D5EEC5-F657-4770-9FD5-FBCB614294AA}"/>
+                <a16:creationId xmlns:a16="http://schemas.microsoft.com/office/drawing/2014/main" id="{64C2B601-921E-4D8C-99B8-E9B7D380E959}"/>
               </a:ext>
             </a:extLst>
           </p:cNvPr>
@@ -7885,7 +8858,7 @@
                 <a:ea typeface="Malgun Gothic"/>
                 <a:cs typeface="Malgun Gothic"/>
               </a:rPr>
-              <a:t>두 스킬은 ‘많이 읽기 전에’ 켜져야 효과가 납니다</a:t>
+              <a:t>Project A에서는 두 구간 모두 읽기 비용이 크게 줄었습니다</a:t>
             </a:r>
           </a:p>
         </p:txBody>
@@ -7895,7 +8868,7 @@
           <p:cNvPr id="3" name="">
             <a:extLst xmlns:a="http://schemas.openxmlformats.org/drawingml/2006/main">
               <a:ext uri="{FF2B5EF4-FFF2-40B4-BE49-F238E27FC236}">
-                <a16:creationId xmlns:a16="http://schemas.microsoft.com/office/drawing/2014/main" id="{5149D3E9-BBA3-43B2-BBA8-691E083EBAA5}"/>
+                <a16:creationId xmlns:a16="http://schemas.microsoft.com/office/drawing/2014/main" id="{1BA6B753-3D3F-460B-A4A6-9081C81C9F69}"/>
               </a:ext>
             </a:extLst>
           </p:cNvPr>
@@ -7945,7 +8918,7 @@
                 <a:ea typeface="Malgun Gothic"/>
                 <a:cs typeface="Malgun Gothic"/>
               </a:rPr>
-              <a:t>이미 소스를 많이 읽은 뒤에는 절감 효과가 사라집니다. 기준선을 명확히 두는 것이 중요합니다.</a:t>
+              <a:t>값은 파일 크기 기반 근사 토큰이며, 발표용으로 프로젝트명과 파일명은 일반화했습니다.</a:t>
             </a:r>
           </a:p>
         </p:txBody>
@@ -7955,7 +8928,7 @@
           <p:cNvPr id="4" name="">
             <a:extLst xmlns:a="http://schemas.openxmlformats.org/drawingml/2006/main">
               <a:ext uri="{FF2B5EF4-FFF2-40B4-BE49-F238E27FC236}">
-                <a16:creationId xmlns:a16="http://schemas.microsoft.com/office/drawing/2014/main" id="{1F02B513-EA53-4F20-BED3-DC775D399D44}"/>
+                <a16:creationId xmlns:a16="http://schemas.microsoft.com/office/drawing/2014/main" id="{3F7BE53C-A926-40CF-A4F4-4F79E2A89050}"/>
               </a:ext>
             </a:extLst>
           </p:cNvPr>
@@ -8010,57 +8983,71 @@
           </a:p>
         </p:txBody>
       </p:sp>
-      <p:sp>
-        <p:nvSpPr>
-          <p:cNvPr id="5" name="">
-            <a:extLst xmlns:a="http://schemas.openxmlformats.org/drawingml/2006/main">
-              <a:ext uri="{FF2B5EF4-FFF2-40B4-BE49-F238E27FC236}">
-                <a16:creationId xmlns:a16="http://schemas.microsoft.com/office/drawing/2014/main" id="{77FA610A-33FC-46B2-9297-2A80878A230A}"/>
-              </a:ext>
-            </a:extLst>
-          </p:cNvPr>
-          <p:cNvSpPr>
-            <a:spLocks xmlns:a="http://schemas.openxmlformats.org/drawingml/2006/main" noGrp="1"/>
-          </p:cNvSpPr>
-          <p:nvPr/>
-        </p:nvSpPr>
-        <p:spPr>
-          <a:xfrm xmlns:a="http://schemas.openxmlformats.org/drawingml/2006/main">
-            <a:off x="704850" y="2781300"/>
-            <a:ext cx="10096500" cy="552450"/>
+      <p:graphicFrame>
+        <p:nvGraphicFramePr>
+          <p:cNvPr id="21" name="Chart"/>
+          <p:cNvGraphicFramePr/>
+          <p:nvPr/>
+        </p:nvGraphicFramePr>
+        <p:xfrm>
+          <a:off xmlns:a="http://schemas.openxmlformats.org/drawingml/2006/main" x="704850" y="2781300"/>
+          <a:ext xmlns:a="http://schemas.openxmlformats.org/drawingml/2006/main" cx="6191250" cy="2571750"/>
+        </p:xfrm>
+        <a:graphic xmlns:a="http://schemas.openxmlformats.org/drawingml/2006/main">
+          <a:graphicData uri="http://schemas.openxmlformats.org/drawingml/2006/chart">
+            <c:chart xmlns:r="http://schemas.openxmlformats.org/officeDocument/2006/relationships" xmlns:c="http://schemas.openxmlformats.org/drawingml/2006/chart" r:id="R357693ca0f034f4a"/>
+          </a:graphicData>
+        </a:graphic>
+      </p:graphicFrame>
+      <p:sp>
+        <p:nvSpPr>
+          <p:cNvPr id="6" name="">
+            <a:extLst xmlns:a="http://schemas.openxmlformats.org/drawingml/2006/main">
+              <a:ext uri="{FF2B5EF4-FFF2-40B4-BE49-F238E27FC236}">
+                <a16:creationId xmlns:a16="http://schemas.microsoft.com/office/drawing/2014/main" id="{91C0DA6B-04A4-4F86-AAAC-8D577F32DB2D}"/>
+              </a:ext>
+            </a:extLst>
+          </p:cNvPr>
+          <p:cNvSpPr>
+            <a:spLocks xmlns:a="http://schemas.openxmlformats.org/drawingml/2006/main" noGrp="1"/>
+          </p:cNvSpPr>
+          <p:nvPr/>
+        </p:nvSpPr>
+        <p:spPr>
+          <a:xfrm xmlns:a="http://schemas.openxmlformats.org/drawingml/2006/main">
+            <a:off x="7524750" y="2781300"/>
+            <a:ext cx="3429000" cy="1352550"/>
           </a:xfrm>
           <a:prstGeom xmlns:a="http://schemas.openxmlformats.org/drawingml/2006/main" prst="rect">
             <a:avLst/>
           </a:prstGeom>
           <a:solidFill xmlns:a="http://schemas.openxmlformats.org/drawingml/2006/main">
-            <a:srgbClr val="EDEDED"/>
+            <a:srgbClr val="FFE3D6"/>
           </a:solidFill>
-          <a:ln xmlns:a="http://schemas.openxmlformats.org/drawingml/2006/main" w="9525">
-            <a:solidFill>
-              <a:srgbClr val="B8BCC4"/>
-            </a:solidFill>
-            <a:prstDash val="solid"/>
-          </a:ln>
-        </p:spPr>
-      </p:sp>
-      <p:sp>
-        <p:nvSpPr>
-          <p:cNvPr id="6" name="">
-            <a:extLst xmlns:a="http://schemas.openxmlformats.org/drawingml/2006/main">
-              <a:ext uri="{FF2B5EF4-FFF2-40B4-BE49-F238E27FC236}">
-                <a16:creationId xmlns:a16="http://schemas.microsoft.com/office/drawing/2014/main" id="{FFCFBA1F-5F44-49E9-AE1C-CBDF079D5C22}"/>
-              </a:ext>
-            </a:extLst>
-          </p:cNvPr>
-          <p:cNvSpPr>
-            <a:spLocks xmlns:a="http://schemas.openxmlformats.org/drawingml/2006/main" noGrp="1"/>
-          </p:cNvSpPr>
-          <p:nvPr/>
-        </p:nvSpPr>
-        <p:spPr>
-          <a:xfrm xmlns:a="http://schemas.openxmlformats.org/drawingml/2006/main">
-            <a:off x="857250" y="2924175"/>
-            <a:ext cx="2209800" cy="266700"/>
+          <a:ln xmlns:a="http://schemas.openxmlformats.org/drawingml/2006/main" w="0">
+            <a:noFill/>
+            <a:prstDash val="solid"/>
+          </a:ln>
+        </p:spPr>
+      </p:sp>
+      <p:sp>
+        <p:nvSpPr>
+          <p:cNvPr id="7" name="">
+            <a:extLst xmlns:a="http://schemas.openxmlformats.org/drawingml/2006/main">
+              <a:ext uri="{FF2B5EF4-FFF2-40B4-BE49-F238E27FC236}">
+                <a16:creationId xmlns:a16="http://schemas.microsoft.com/office/drawing/2014/main" id="{0993312B-5291-4D65-B8CC-E4606AE59B39}"/>
+              </a:ext>
+            </a:extLst>
+          </p:cNvPr>
+          <p:cNvSpPr>
+            <a:spLocks xmlns:a="http://schemas.openxmlformats.org/drawingml/2006/main" noGrp="1"/>
+          </p:cNvSpPr>
+          <p:nvPr/>
+        </p:nvSpPr>
+        <p:spPr>
+          <a:xfrm xmlns:a="http://schemas.openxmlformats.org/drawingml/2006/main">
+            <a:off x="7753350" y="2952750"/>
+            <a:ext cx="2971800" cy="590550"/>
           </a:xfrm>
           <a:prstGeom xmlns:a="http://schemas.openxmlformats.org/drawingml/2006/main" prst="rect">
             <a:avLst/>
@@ -8080,7 +9067,278 @@
                 <a:spcPct val="112000"/>
               </a:lnSpc>
               <a:buNone/>
-              <a:defRPr sz="1350" b="1">
+              <a:defRPr sz="3900" b="1">
+                <a:solidFill>
+                  <a:srgbClr val="FF6B35"/>
+                </a:solidFill>
+                <a:latin typeface="Malgun Gothic"/>
+                <a:ea typeface="Malgun Gothic"/>
+                <a:cs typeface="Malgun Gothic"/>
+              </a:defRPr>
+            </a:pPr>
+            <a:r>
+              <a:rPr sz="3900" b="1">
+                <a:solidFill>
+                  <a:srgbClr val="FF6B35"/>
+                </a:solidFill>
+                <a:latin typeface="Malgun Gothic"/>
+                <a:ea typeface="Malgun Gothic"/>
+                <a:cs typeface="Malgun Gothic"/>
+              </a:rPr>
+              <a:t>67%</a:t>
+            </a:r>
+          </a:p>
+        </p:txBody>
+      </p:sp>
+      <p:sp>
+        <p:nvSpPr>
+          <p:cNvPr id="8" name="">
+            <a:extLst xmlns:a="http://schemas.openxmlformats.org/drawingml/2006/main">
+              <a:ext uri="{FF2B5EF4-FFF2-40B4-BE49-F238E27FC236}">
+                <a16:creationId xmlns:a16="http://schemas.microsoft.com/office/drawing/2014/main" id="{8090E76F-7DEF-4ED9-990A-E90C697B05B9}"/>
+              </a:ext>
+            </a:extLst>
+          </p:cNvPr>
+          <p:cNvSpPr>
+            <a:spLocks xmlns:a="http://schemas.openxmlformats.org/drawingml/2006/main" noGrp="1"/>
+          </p:cNvSpPr>
+          <p:nvPr/>
+        </p:nvSpPr>
+        <p:spPr>
+          <a:xfrm xmlns:a="http://schemas.openxmlformats.org/drawingml/2006/main">
+            <a:off x="7753350" y="3619500"/>
+            <a:ext cx="2971800" cy="400050"/>
+          </a:xfrm>
+          <a:prstGeom xmlns:a="http://schemas.openxmlformats.org/drawingml/2006/main" prst="rect">
+            <a:avLst/>
+          </a:prstGeom>
+          <a:noFill xmlns:a="http://schemas.openxmlformats.org/drawingml/2006/main"/>
+          <a:ln xmlns:a="http://schemas.openxmlformats.org/drawingml/2006/main" w="0">
+            <a:noFill/>
+            <a:prstDash val="solid"/>
+          </a:ln>
+        </p:spPr>
+        <p:txBody>
+          <a:bodyPr xmlns:a="http://schemas.openxmlformats.org/drawingml/2006/main"/>
+          <a:lstStyle xmlns:a="http://schemas.openxmlformats.org/drawingml/2006/main"/>
+          <a:p xmlns:a="http://schemas.openxmlformats.org/drawingml/2006/main">
+            <a:pPr algn="l">
+              <a:lnSpc>
+                <a:spcPct val="115000"/>
+              </a:lnSpc>
+              <a:buNone/>
+              <a:defRPr sz="1350" b="0">
+                <a:solidFill>
+                  <a:srgbClr val="555555"/>
+                </a:solidFill>
+                <a:latin typeface="Malgun Gothic"/>
+                <a:ea typeface="Malgun Gothic"/>
+                <a:cs typeface="Malgun Gothic"/>
+              </a:defRPr>
+            </a:pPr>
+            <a:r>
+              <a:rPr sz="1350" b="0">
+                <a:solidFill>
+                  <a:srgbClr val="555555"/>
+                </a:solidFill>
+                <a:latin typeface="Malgun Gothic"/>
+                <a:ea typeface="Malgun Gothic"/>
+                <a:cs typeface="Malgun Gothic"/>
+              </a:rPr>
+              <a:t>codemap 사용 시 위치 탐색 절감</a:t>
+            </a:r>
+          </a:p>
+        </p:txBody>
+      </p:sp>
+      <p:sp>
+        <p:nvSpPr>
+          <p:cNvPr id="9" name="">
+            <a:extLst xmlns:a="http://schemas.openxmlformats.org/drawingml/2006/main">
+              <a:ext uri="{FF2B5EF4-FFF2-40B4-BE49-F238E27FC236}">
+                <a16:creationId xmlns:a16="http://schemas.microsoft.com/office/drawing/2014/main" id="{97013BB6-AC47-4DFF-B501-E4BD416EE1DA}"/>
+              </a:ext>
+            </a:extLst>
+          </p:cNvPr>
+          <p:cNvSpPr>
+            <a:spLocks xmlns:a="http://schemas.openxmlformats.org/drawingml/2006/main" noGrp="1"/>
+          </p:cNvSpPr>
+          <p:nvPr/>
+        </p:nvSpPr>
+        <p:spPr>
+          <a:xfrm xmlns:a="http://schemas.openxmlformats.org/drawingml/2006/main">
+            <a:off x="7524750" y="4400550"/>
+            <a:ext cx="3429000" cy="1352550"/>
+          </a:xfrm>
+          <a:prstGeom xmlns:a="http://schemas.openxmlformats.org/drawingml/2006/main" prst="rect">
+            <a:avLst/>
+          </a:prstGeom>
+          <a:solidFill xmlns:a="http://schemas.openxmlformats.org/drawingml/2006/main">
+            <a:srgbClr val="FFE3D6"/>
+          </a:solidFill>
+          <a:ln xmlns:a="http://schemas.openxmlformats.org/drawingml/2006/main" w="0">
+            <a:noFill/>
+            <a:prstDash val="solid"/>
+          </a:ln>
+        </p:spPr>
+      </p:sp>
+      <p:sp>
+        <p:nvSpPr>
+          <p:cNvPr id="10" name="">
+            <a:extLst xmlns:a="http://schemas.openxmlformats.org/drawingml/2006/main">
+              <a:ext uri="{FF2B5EF4-FFF2-40B4-BE49-F238E27FC236}">
+                <a16:creationId xmlns:a16="http://schemas.microsoft.com/office/drawing/2014/main" id="{E852A710-DA49-4A3C-835F-88EE717AFAA0}"/>
+              </a:ext>
+            </a:extLst>
+          </p:cNvPr>
+          <p:cNvSpPr>
+            <a:spLocks xmlns:a="http://schemas.openxmlformats.org/drawingml/2006/main" noGrp="1"/>
+          </p:cNvSpPr>
+          <p:nvPr/>
+        </p:nvSpPr>
+        <p:spPr>
+          <a:xfrm xmlns:a="http://schemas.openxmlformats.org/drawingml/2006/main">
+            <a:off x="7753350" y="4572000"/>
+            <a:ext cx="2971800" cy="590550"/>
+          </a:xfrm>
+          <a:prstGeom xmlns:a="http://schemas.openxmlformats.org/drawingml/2006/main" prst="rect">
+            <a:avLst/>
+          </a:prstGeom>
+          <a:noFill xmlns:a="http://schemas.openxmlformats.org/drawingml/2006/main"/>
+          <a:ln xmlns:a="http://schemas.openxmlformats.org/drawingml/2006/main" w="0">
+            <a:noFill/>
+            <a:prstDash val="solid"/>
+          </a:ln>
+        </p:spPr>
+        <p:txBody>
+          <a:bodyPr xmlns:a="http://schemas.openxmlformats.org/drawingml/2006/main"/>
+          <a:lstStyle xmlns:a="http://schemas.openxmlformats.org/drawingml/2006/main"/>
+          <a:p xmlns:a="http://schemas.openxmlformats.org/drawingml/2006/main">
+            <a:pPr algn="l">
+              <a:lnSpc>
+                <a:spcPct val="112000"/>
+              </a:lnSpc>
+              <a:buNone/>
+              <a:defRPr sz="3900" b="1">
+                <a:solidFill>
+                  <a:srgbClr val="FF6B35"/>
+                </a:solidFill>
+                <a:latin typeface="Malgun Gothic"/>
+                <a:ea typeface="Malgun Gothic"/>
+                <a:cs typeface="Malgun Gothic"/>
+              </a:defRPr>
+            </a:pPr>
+            <a:r>
+              <a:rPr sz="3900" b="1">
+                <a:solidFill>
+                  <a:srgbClr val="FF6B35"/>
+                </a:solidFill>
+                <a:latin typeface="Malgun Gothic"/>
+                <a:ea typeface="Malgun Gothic"/>
+                <a:cs typeface="Malgun Gothic"/>
+              </a:rPr>
+              <a:t>97%</a:t>
+            </a:r>
+          </a:p>
+        </p:txBody>
+      </p:sp>
+      <p:sp>
+        <p:nvSpPr>
+          <p:cNvPr id="11" name="">
+            <a:extLst xmlns:a="http://schemas.openxmlformats.org/drawingml/2006/main">
+              <a:ext uri="{FF2B5EF4-FFF2-40B4-BE49-F238E27FC236}">
+                <a16:creationId xmlns:a16="http://schemas.microsoft.com/office/drawing/2014/main" id="{77B45D73-E58D-4D4B-BC29-253CD3C4F6FC}"/>
+              </a:ext>
+            </a:extLst>
+          </p:cNvPr>
+          <p:cNvSpPr>
+            <a:spLocks xmlns:a="http://schemas.openxmlformats.org/drawingml/2006/main" noGrp="1"/>
+          </p:cNvSpPr>
+          <p:nvPr/>
+        </p:nvSpPr>
+        <p:spPr>
+          <a:xfrm xmlns:a="http://schemas.openxmlformats.org/drawingml/2006/main">
+            <a:off x="7753350" y="5238750"/>
+            <a:ext cx="2971800" cy="400050"/>
+          </a:xfrm>
+          <a:prstGeom xmlns:a="http://schemas.openxmlformats.org/drawingml/2006/main" prst="rect">
+            <a:avLst/>
+          </a:prstGeom>
+          <a:noFill xmlns:a="http://schemas.openxmlformats.org/drawingml/2006/main"/>
+          <a:ln xmlns:a="http://schemas.openxmlformats.org/drawingml/2006/main" w="0">
+            <a:noFill/>
+            <a:prstDash val="solid"/>
+          </a:ln>
+        </p:spPr>
+        <p:txBody>
+          <a:bodyPr xmlns:a="http://schemas.openxmlformats.org/drawingml/2006/main"/>
+          <a:lstStyle xmlns:a="http://schemas.openxmlformats.org/drawingml/2006/main"/>
+          <a:p xmlns:a="http://schemas.openxmlformats.org/drawingml/2006/main">
+            <a:pPr algn="l">
+              <a:lnSpc>
+                <a:spcPct val="115000"/>
+              </a:lnSpc>
+              <a:buNone/>
+              <a:defRPr sz="1350" b="0">
+                <a:solidFill>
+                  <a:srgbClr val="555555"/>
+                </a:solidFill>
+                <a:latin typeface="Malgun Gothic"/>
+                <a:ea typeface="Malgun Gothic"/>
+                <a:cs typeface="Malgun Gothic"/>
+              </a:defRPr>
+            </a:pPr>
+            <a:r>
+              <a:rPr sz="1350" b="0">
+                <a:solidFill>
+                  <a:srgbClr val="555555"/>
+                </a:solidFill>
+                <a:latin typeface="Malgun Gothic"/>
+                <a:ea typeface="Malgun Gothic"/>
+                <a:cs typeface="Malgun Gothic"/>
+              </a:rPr>
+              <a:t>ctxdb 사용 시 기억 복원 절감</a:t>
+            </a:r>
+          </a:p>
+        </p:txBody>
+      </p:sp>
+      <p:sp>
+        <p:nvSpPr>
+          <p:cNvPr id="12" name="">
+            <a:extLst xmlns:a="http://schemas.openxmlformats.org/drawingml/2006/main">
+              <a:ext uri="{FF2B5EF4-FFF2-40B4-BE49-F238E27FC236}">
+                <a16:creationId xmlns:a16="http://schemas.microsoft.com/office/drawing/2014/main" id="{FE9EFEEA-54CA-42F4-BE37-F971971CCD31}"/>
+              </a:ext>
+            </a:extLst>
+          </p:cNvPr>
+          <p:cNvSpPr>
+            <a:spLocks xmlns:a="http://schemas.openxmlformats.org/drawingml/2006/main" noGrp="1"/>
+          </p:cNvSpPr>
+          <p:nvPr/>
+        </p:nvSpPr>
+        <p:spPr>
+          <a:xfrm xmlns:a="http://schemas.openxmlformats.org/drawingml/2006/main">
+            <a:off x="704850" y="5467350"/>
+            <a:ext cx="1238250" cy="285750"/>
+          </a:xfrm>
+          <a:prstGeom xmlns:a="http://schemas.openxmlformats.org/drawingml/2006/main" prst="rect">
+            <a:avLst/>
+          </a:prstGeom>
+          <a:noFill xmlns:a="http://schemas.openxmlformats.org/drawingml/2006/main"/>
+          <a:ln xmlns:a="http://schemas.openxmlformats.org/drawingml/2006/main" w="0">
+            <a:noFill/>
+            <a:prstDash val="solid"/>
+          </a:ln>
+        </p:spPr>
+        <p:txBody>
+          <a:bodyPr xmlns:a="http://schemas.openxmlformats.org/drawingml/2006/main"/>
+          <a:lstStyle xmlns:a="http://schemas.openxmlformats.org/drawingml/2006/main"/>
+          <a:p xmlns:a="http://schemas.openxmlformats.org/drawingml/2006/main">
+            <a:pPr algn="l">
+              <a:lnSpc>
+                <a:spcPct val="112000"/>
+              </a:lnSpc>
+              <a:buNone/>
+              <a:defRPr sz="1650" b="1">
                 <a:solidFill>
                   <a:srgbClr val="000000"/>
                 </a:solidFill>
@@ -8090,7 +9348,7 @@
               </a:defRPr>
             </a:pPr>
             <a:r>
-              <a:rPr sz="1350" b="1">
+              <a:rPr sz="1650" b="1">
                 <a:solidFill>
                   <a:srgbClr val="000000"/>
                 </a:solidFill>
@@ -8098,29 +9356,89 @@
                 <a:ea typeface="Malgun Gothic"/>
                 <a:cs typeface="Malgun Gothic"/>
               </a:rPr>
-              <a:t>상황</a:t>
-            </a:r>
-          </a:p>
-        </p:txBody>
-      </p:sp>
-      <p:sp>
-        <p:nvSpPr>
-          <p:cNvPr id="7" name="">
-            <a:extLst xmlns:a="http://schemas.openxmlformats.org/drawingml/2006/main">
-              <a:ext uri="{FF2B5EF4-FFF2-40B4-BE49-F238E27FC236}">
-                <a16:creationId xmlns:a16="http://schemas.microsoft.com/office/drawing/2014/main" id="{2C355407-7005-4529-A301-B929CDFE49DA}"/>
-              </a:ext>
-            </a:extLst>
-          </p:cNvPr>
-          <p:cNvSpPr>
-            <a:spLocks xmlns:a="http://schemas.openxmlformats.org/drawingml/2006/main" noGrp="1"/>
-          </p:cNvSpPr>
-          <p:nvPr/>
-        </p:nvSpPr>
-        <p:spPr>
-          <a:xfrm xmlns:a="http://schemas.openxmlformats.org/drawingml/2006/main">
-            <a:off x="3181350" y="2781300"/>
-            <a:ext cx="9525" cy="552450"/>
+              <a:t>핵심 해석</a:t>
+            </a:r>
+          </a:p>
+        </p:txBody>
+      </p:sp>
+      <p:sp>
+        <p:nvSpPr>
+          <p:cNvPr id="13" name="">
+            <a:extLst xmlns:a="http://schemas.openxmlformats.org/drawingml/2006/main">
+              <a:ext uri="{FF2B5EF4-FFF2-40B4-BE49-F238E27FC236}">
+                <a16:creationId xmlns:a16="http://schemas.microsoft.com/office/drawing/2014/main" id="{AC29D324-52FC-49A2-83EA-C25432223E82}"/>
+              </a:ext>
+            </a:extLst>
+          </p:cNvPr>
+          <p:cNvSpPr>
+            <a:spLocks xmlns:a="http://schemas.openxmlformats.org/drawingml/2006/main" noGrp="1"/>
+          </p:cNvSpPr>
+          <p:nvPr/>
+        </p:nvSpPr>
+        <p:spPr>
+          <a:xfrm xmlns:a="http://schemas.openxmlformats.org/drawingml/2006/main">
+            <a:off x="2038350" y="5467350"/>
+            <a:ext cx="4762500" cy="495300"/>
+          </a:xfrm>
+          <a:prstGeom xmlns:a="http://schemas.openxmlformats.org/drawingml/2006/main" prst="rect">
+            <a:avLst/>
+          </a:prstGeom>
+          <a:noFill xmlns:a="http://schemas.openxmlformats.org/drawingml/2006/main"/>
+          <a:ln xmlns:a="http://schemas.openxmlformats.org/drawingml/2006/main" w="0">
+            <a:noFill/>
+            <a:prstDash val="solid"/>
+          </a:ln>
+        </p:spPr>
+        <p:txBody>
+          <a:bodyPr xmlns:a="http://schemas.openxmlformats.org/drawingml/2006/main"/>
+          <a:lstStyle xmlns:a="http://schemas.openxmlformats.org/drawingml/2006/main"/>
+          <a:p xmlns:a="http://schemas.openxmlformats.org/drawingml/2006/main">
+            <a:pPr algn="l">
+              <a:lnSpc>
+                <a:spcPct val="118000"/>
+              </a:lnSpc>
+              <a:buNone/>
+              <a:defRPr sz="1350" b="0">
+                <a:solidFill>
+                  <a:srgbClr val="555555"/>
+                </a:solidFill>
+                <a:latin typeface="Malgun Gothic"/>
+                <a:ea typeface="Malgun Gothic"/>
+                <a:cs typeface="Malgun Gothic"/>
+              </a:defRPr>
+            </a:pPr>
+            <a:r>
+              <a:rPr sz="1350" b="0">
+                <a:solidFill>
+                  <a:srgbClr val="555555"/>
+                </a:solidFill>
+                <a:latin typeface="Malgun Gothic"/>
+                <a:ea typeface="Malgun Gothic"/>
+                <a:cs typeface="Malgun Gothic"/>
+              </a:rPr>
+              <a:t>codemap은 “어느 파일을 열지”를 줄이고, ctxdb는 “저장된 기억 중 무엇을 읽을지”를 줄입니다.</a:t>
+            </a:r>
+          </a:p>
+        </p:txBody>
+      </p:sp>
+      <p:sp>
+        <p:nvSpPr>
+          <p:cNvPr id="14" name="">
+            <a:extLst xmlns:a="http://schemas.openxmlformats.org/drawingml/2006/main">
+              <a:ext uri="{FF2B5EF4-FFF2-40B4-BE49-F238E27FC236}">
+                <a16:creationId xmlns:a16="http://schemas.microsoft.com/office/drawing/2014/main" id="{0961CB42-CCB0-49C3-BC36-CE11F83D2E6B}"/>
+              </a:ext>
+            </a:extLst>
+          </p:cNvPr>
+          <p:cNvSpPr>
+            <a:spLocks xmlns:a="http://schemas.openxmlformats.org/drawingml/2006/main" noGrp="1"/>
+          </p:cNvSpPr>
+          <p:nvPr/>
+        </p:nvSpPr>
+        <p:spPr>
+          <a:xfrm xmlns:a="http://schemas.openxmlformats.org/drawingml/2006/main">
+            <a:off x="400050" y="6191250"/>
+            <a:ext cx="11391900" cy="9525"/>
           </a:xfrm>
           <a:prstGeom xmlns:a="http://schemas.openxmlformats.org/drawingml/2006/main" prst="rect">
             <a:avLst/>
@@ -8136,1292 +9454,10 @@
       </p:sp>
       <p:sp>
         <p:nvSpPr>
-          <p:cNvPr id="8" name="">
-            <a:extLst xmlns:a="http://schemas.openxmlformats.org/drawingml/2006/main">
-              <a:ext uri="{FF2B5EF4-FFF2-40B4-BE49-F238E27FC236}">
-                <a16:creationId xmlns:a16="http://schemas.microsoft.com/office/drawing/2014/main" id="{B47D6E37-E8CF-4646-9F92-3AF858D86D71}"/>
-              </a:ext>
-            </a:extLst>
-          </p:cNvPr>
-          <p:cNvSpPr>
-            <a:spLocks xmlns:a="http://schemas.openxmlformats.org/drawingml/2006/main" noGrp="1"/>
-          </p:cNvSpPr>
-          <p:nvPr/>
-        </p:nvSpPr>
-        <p:spPr>
-          <a:xfrm xmlns:a="http://schemas.openxmlformats.org/drawingml/2006/main">
-            <a:off x="3333750" y="2924175"/>
-            <a:ext cx="3162300" cy="266700"/>
-          </a:xfrm>
-          <a:prstGeom xmlns:a="http://schemas.openxmlformats.org/drawingml/2006/main" prst="rect">
-            <a:avLst/>
-          </a:prstGeom>
-          <a:noFill xmlns:a="http://schemas.openxmlformats.org/drawingml/2006/main"/>
-          <a:ln xmlns:a="http://schemas.openxmlformats.org/drawingml/2006/main" w="0">
-            <a:noFill/>
-            <a:prstDash val="solid"/>
-          </a:ln>
-        </p:spPr>
-        <p:txBody>
-          <a:bodyPr xmlns:a="http://schemas.openxmlformats.org/drawingml/2006/main"/>
-          <a:lstStyle xmlns:a="http://schemas.openxmlformats.org/drawingml/2006/main"/>
-          <a:p xmlns:a="http://schemas.openxmlformats.org/drawingml/2006/main">
-            <a:pPr algn="l">
-              <a:lnSpc>
-                <a:spcPct val="112000"/>
-              </a:lnSpc>
-              <a:buNone/>
-              <a:defRPr sz="1350" b="1">
-                <a:solidFill>
-                  <a:srgbClr val="000000"/>
-                </a:solidFill>
-                <a:latin typeface="Malgun Gothic"/>
-                <a:ea typeface="Malgun Gothic"/>
-                <a:cs typeface="Malgun Gothic"/>
-              </a:defRPr>
-            </a:pPr>
-            <a:r>
-              <a:rPr sz="1350" b="1">
-                <a:solidFill>
-                  <a:srgbClr val="000000"/>
-                </a:solidFill>
-                <a:latin typeface="Malgun Gothic"/>
-                <a:ea typeface="Malgun Gothic"/>
-                <a:cs typeface="Malgun Gothic"/>
-              </a:rPr>
-              <a:t>먼저 할 일</a:t>
-            </a:r>
-          </a:p>
-        </p:txBody>
-      </p:sp>
-      <p:sp>
-        <p:nvSpPr>
-          <p:cNvPr id="9" name="">
-            <a:extLst xmlns:a="http://schemas.openxmlformats.org/drawingml/2006/main">
-              <a:ext uri="{FF2B5EF4-FFF2-40B4-BE49-F238E27FC236}">
-                <a16:creationId xmlns:a16="http://schemas.microsoft.com/office/drawing/2014/main" id="{7E411B48-20CB-4D91-B5A9-8C9355BE4770}"/>
-              </a:ext>
-            </a:extLst>
-          </p:cNvPr>
-          <p:cNvSpPr>
-            <a:spLocks xmlns:a="http://schemas.openxmlformats.org/drawingml/2006/main" noGrp="1"/>
-          </p:cNvSpPr>
-          <p:nvPr/>
-        </p:nvSpPr>
-        <p:spPr>
-          <a:xfrm xmlns:a="http://schemas.openxmlformats.org/drawingml/2006/main">
-            <a:off x="6610350" y="2781300"/>
-            <a:ext cx="9525" cy="552450"/>
-          </a:xfrm>
-          <a:prstGeom xmlns:a="http://schemas.openxmlformats.org/drawingml/2006/main" prst="rect">
-            <a:avLst/>
-          </a:prstGeom>
-          <a:solidFill xmlns:a="http://schemas.openxmlformats.org/drawingml/2006/main">
-            <a:srgbClr val="B8BCC4"/>
-          </a:solidFill>
-          <a:ln xmlns:a="http://schemas.openxmlformats.org/drawingml/2006/main" w="0">
-            <a:noFill/>
-            <a:prstDash val="solid"/>
-          </a:ln>
-        </p:spPr>
-      </p:sp>
-      <p:sp>
-        <p:nvSpPr>
-          <p:cNvPr id="10" name="">
-            <a:extLst xmlns:a="http://schemas.openxmlformats.org/drawingml/2006/main">
-              <a:ext uri="{FF2B5EF4-FFF2-40B4-BE49-F238E27FC236}">
-                <a16:creationId xmlns:a16="http://schemas.microsoft.com/office/drawing/2014/main" id="{4B23FED6-C575-4BC3-93A4-43548FE0DBC5}"/>
-              </a:ext>
-            </a:extLst>
-          </p:cNvPr>
-          <p:cNvSpPr>
-            <a:spLocks xmlns:a="http://schemas.openxmlformats.org/drawingml/2006/main" noGrp="1"/>
-          </p:cNvSpPr>
-          <p:nvPr/>
-        </p:nvSpPr>
-        <p:spPr>
-          <a:xfrm xmlns:a="http://schemas.openxmlformats.org/drawingml/2006/main">
-            <a:off x="6762750" y="2924175"/>
-            <a:ext cx="3924300" cy="266700"/>
-          </a:xfrm>
-          <a:prstGeom xmlns:a="http://schemas.openxmlformats.org/drawingml/2006/main" prst="rect">
-            <a:avLst/>
-          </a:prstGeom>
-          <a:noFill xmlns:a="http://schemas.openxmlformats.org/drawingml/2006/main"/>
-          <a:ln xmlns:a="http://schemas.openxmlformats.org/drawingml/2006/main" w="0">
-            <a:noFill/>
-            <a:prstDash val="solid"/>
-          </a:ln>
-        </p:spPr>
-        <p:txBody>
-          <a:bodyPr xmlns:a="http://schemas.openxmlformats.org/drawingml/2006/main"/>
-          <a:lstStyle xmlns:a="http://schemas.openxmlformats.org/drawingml/2006/main"/>
-          <a:p xmlns:a="http://schemas.openxmlformats.org/drawingml/2006/main">
-            <a:pPr algn="l">
-              <a:lnSpc>
-                <a:spcPct val="112000"/>
-              </a:lnSpc>
-              <a:buNone/>
-              <a:defRPr sz="1350" b="1">
-                <a:solidFill>
-                  <a:srgbClr val="000000"/>
-                </a:solidFill>
-                <a:latin typeface="Malgun Gothic"/>
-                <a:ea typeface="Malgun Gothic"/>
-                <a:cs typeface="Malgun Gothic"/>
-              </a:defRPr>
-            </a:pPr>
-            <a:r>
-              <a:rPr sz="1350" b="1">
-                <a:solidFill>
-                  <a:srgbClr val="000000"/>
-                </a:solidFill>
-                <a:latin typeface="Malgun Gothic"/>
-                <a:ea typeface="Malgun Gothic"/>
-                <a:cs typeface="Malgun Gothic"/>
-              </a:rPr>
-              <a:t>피해야 할 일</a:t>
-            </a:r>
-          </a:p>
-        </p:txBody>
-      </p:sp>
-      <p:sp>
-        <p:nvSpPr>
-          <p:cNvPr id="11" name="">
-            <a:extLst xmlns:a="http://schemas.openxmlformats.org/drawingml/2006/main">
-              <a:ext uri="{FF2B5EF4-FFF2-40B4-BE49-F238E27FC236}">
-                <a16:creationId xmlns:a16="http://schemas.microsoft.com/office/drawing/2014/main" id="{C69AF8E0-272D-4DD7-8F82-A73774BAFAB7}"/>
-              </a:ext>
-            </a:extLst>
-          </p:cNvPr>
-          <p:cNvSpPr>
-            <a:spLocks xmlns:a="http://schemas.openxmlformats.org/drawingml/2006/main" noGrp="1"/>
-          </p:cNvSpPr>
-          <p:nvPr/>
-        </p:nvSpPr>
-        <p:spPr>
-          <a:xfrm xmlns:a="http://schemas.openxmlformats.org/drawingml/2006/main">
-            <a:off x="704850" y="3333750"/>
-            <a:ext cx="10096500" cy="552450"/>
-          </a:xfrm>
-          <a:prstGeom xmlns:a="http://schemas.openxmlformats.org/drawingml/2006/main" prst="rect">
-            <a:avLst/>
-          </a:prstGeom>
-          <a:solidFill xmlns:a="http://schemas.openxmlformats.org/drawingml/2006/main">
-            <a:srgbClr val="FFFFFF"/>
-          </a:solidFill>
-          <a:ln xmlns:a="http://schemas.openxmlformats.org/drawingml/2006/main" w="9525">
-            <a:solidFill>
-              <a:srgbClr val="B8BCC4"/>
-            </a:solidFill>
-            <a:prstDash val="solid"/>
-          </a:ln>
-        </p:spPr>
-      </p:sp>
-      <p:sp>
-        <p:nvSpPr>
-          <p:cNvPr id="12" name="">
-            <a:extLst xmlns:a="http://schemas.openxmlformats.org/drawingml/2006/main">
-              <a:ext uri="{FF2B5EF4-FFF2-40B4-BE49-F238E27FC236}">
-                <a16:creationId xmlns:a16="http://schemas.microsoft.com/office/drawing/2014/main" id="{7E7272B7-E109-4FD2-A0D3-07A49E36A165}"/>
-              </a:ext>
-            </a:extLst>
-          </p:cNvPr>
-          <p:cNvSpPr>
-            <a:spLocks xmlns:a="http://schemas.openxmlformats.org/drawingml/2006/main" noGrp="1"/>
-          </p:cNvSpPr>
-          <p:nvPr/>
-        </p:nvSpPr>
-        <p:spPr>
-          <a:xfrm xmlns:a="http://schemas.openxmlformats.org/drawingml/2006/main">
-            <a:off x="857250" y="3476625"/>
-            <a:ext cx="2209800" cy="266700"/>
-          </a:xfrm>
-          <a:prstGeom xmlns:a="http://schemas.openxmlformats.org/drawingml/2006/main" prst="rect">
-            <a:avLst/>
-          </a:prstGeom>
-          <a:noFill xmlns:a="http://schemas.openxmlformats.org/drawingml/2006/main"/>
-          <a:ln xmlns:a="http://schemas.openxmlformats.org/drawingml/2006/main" w="0">
-            <a:noFill/>
-            <a:prstDash val="solid"/>
-          </a:ln>
-        </p:spPr>
-        <p:txBody>
-          <a:bodyPr xmlns:a="http://schemas.openxmlformats.org/drawingml/2006/main"/>
-          <a:lstStyle xmlns:a="http://schemas.openxmlformats.org/drawingml/2006/main"/>
-          <a:p xmlns:a="http://schemas.openxmlformats.org/drawingml/2006/main">
-            <a:pPr algn="l">
-              <a:lnSpc>
-                <a:spcPct val="112000"/>
-              </a:lnSpc>
-              <a:buNone/>
-              <a:defRPr sz="1275" b="0">
-                <a:solidFill>
-                  <a:srgbClr val="555555"/>
-                </a:solidFill>
-                <a:latin typeface="Malgun Gothic"/>
-                <a:ea typeface="Malgun Gothic"/>
-                <a:cs typeface="Malgun Gothic"/>
-              </a:defRPr>
-            </a:pPr>
-            <a:r>
-              <a:rPr sz="1275" b="0">
-                <a:solidFill>
-                  <a:srgbClr val="555555"/>
-                </a:solidFill>
-                <a:latin typeface="Malgun Gothic"/>
-                <a:ea typeface="Malgun Gothic"/>
-                <a:cs typeface="Malgun Gothic"/>
-              </a:rPr>
-              <a:t>새 세션 시작</a:t>
-            </a:r>
-          </a:p>
-        </p:txBody>
-      </p:sp>
-      <p:sp>
-        <p:nvSpPr>
-          <p:cNvPr id="13" name="">
-            <a:extLst xmlns:a="http://schemas.openxmlformats.org/drawingml/2006/main">
-              <a:ext uri="{FF2B5EF4-FFF2-40B4-BE49-F238E27FC236}">
-                <a16:creationId xmlns:a16="http://schemas.microsoft.com/office/drawing/2014/main" id="{5DAC5AE4-3F63-4197-A87E-E5723FAC7ADA}"/>
-              </a:ext>
-            </a:extLst>
-          </p:cNvPr>
-          <p:cNvSpPr>
-            <a:spLocks xmlns:a="http://schemas.openxmlformats.org/drawingml/2006/main" noGrp="1"/>
-          </p:cNvSpPr>
-          <p:nvPr/>
-        </p:nvSpPr>
-        <p:spPr>
-          <a:xfrm xmlns:a="http://schemas.openxmlformats.org/drawingml/2006/main">
-            <a:off x="3181350" y="3333750"/>
-            <a:ext cx="9525" cy="552450"/>
-          </a:xfrm>
-          <a:prstGeom xmlns:a="http://schemas.openxmlformats.org/drawingml/2006/main" prst="rect">
-            <a:avLst/>
-          </a:prstGeom>
-          <a:solidFill xmlns:a="http://schemas.openxmlformats.org/drawingml/2006/main">
-            <a:srgbClr val="B8BCC4"/>
-          </a:solidFill>
-          <a:ln xmlns:a="http://schemas.openxmlformats.org/drawingml/2006/main" w="0">
-            <a:noFill/>
-            <a:prstDash val="solid"/>
-          </a:ln>
-        </p:spPr>
-      </p:sp>
-      <p:sp>
-        <p:nvSpPr>
-          <p:cNvPr id="14" name="">
-            <a:extLst xmlns:a="http://schemas.openxmlformats.org/drawingml/2006/main">
-              <a:ext uri="{FF2B5EF4-FFF2-40B4-BE49-F238E27FC236}">
-                <a16:creationId xmlns:a16="http://schemas.microsoft.com/office/drawing/2014/main" id="{D1F60045-CE69-482C-9834-BEA47F98DBC9}"/>
-              </a:ext>
-            </a:extLst>
-          </p:cNvPr>
-          <p:cNvSpPr>
-            <a:spLocks xmlns:a="http://schemas.openxmlformats.org/drawingml/2006/main" noGrp="1"/>
-          </p:cNvSpPr>
-          <p:nvPr/>
-        </p:nvSpPr>
-        <p:spPr>
-          <a:xfrm xmlns:a="http://schemas.openxmlformats.org/drawingml/2006/main">
-            <a:off x="3333750" y="3476625"/>
-            <a:ext cx="3162300" cy="266700"/>
-          </a:xfrm>
-          <a:prstGeom xmlns:a="http://schemas.openxmlformats.org/drawingml/2006/main" prst="rect">
-            <a:avLst/>
-          </a:prstGeom>
-          <a:noFill xmlns:a="http://schemas.openxmlformats.org/drawingml/2006/main"/>
-          <a:ln xmlns:a="http://schemas.openxmlformats.org/drawingml/2006/main" w="0">
-            <a:noFill/>
-            <a:prstDash val="solid"/>
-          </a:ln>
-        </p:spPr>
-        <p:txBody>
-          <a:bodyPr xmlns:a="http://schemas.openxmlformats.org/drawingml/2006/main"/>
-          <a:lstStyle xmlns:a="http://schemas.openxmlformats.org/drawingml/2006/main"/>
-          <a:p xmlns:a="http://schemas.openxmlformats.org/drawingml/2006/main">
-            <a:pPr algn="l">
-              <a:lnSpc>
-                <a:spcPct val="112000"/>
-              </a:lnSpc>
-              <a:buNone/>
-              <a:defRPr sz="1275" b="0">
-                <a:solidFill>
-                  <a:srgbClr val="555555"/>
-                </a:solidFill>
-                <a:latin typeface="Malgun Gothic"/>
-                <a:ea typeface="Malgun Gothic"/>
-                <a:cs typeface="Malgun Gothic"/>
-              </a:defRPr>
-            </a:pPr>
-            <a:r>
-              <a:rPr sz="1275" b="0">
-                <a:solidFill>
-                  <a:srgbClr val="555555"/>
-                </a:solidFill>
-                <a:latin typeface="Malgun Gothic"/>
-                <a:ea typeface="Malgun Gothic"/>
-                <a:cs typeface="Malgun Gothic"/>
-              </a:rPr>
-              <a:t>ctxdb INDEX→L2 로드</a:t>
-            </a:r>
-          </a:p>
-        </p:txBody>
-      </p:sp>
-      <p:sp>
-        <p:nvSpPr>
           <p:cNvPr id="15" name="">
             <a:extLst xmlns:a="http://schemas.openxmlformats.org/drawingml/2006/main">
               <a:ext uri="{FF2B5EF4-FFF2-40B4-BE49-F238E27FC236}">
-                <a16:creationId xmlns:a16="http://schemas.microsoft.com/office/drawing/2014/main" id="{B22B4FE8-B0D3-49A6-B19A-2818EE9E514B}"/>
-              </a:ext>
-            </a:extLst>
-          </p:cNvPr>
-          <p:cNvSpPr>
-            <a:spLocks xmlns:a="http://schemas.openxmlformats.org/drawingml/2006/main" noGrp="1"/>
-          </p:cNvSpPr>
-          <p:nvPr/>
-        </p:nvSpPr>
-        <p:spPr>
-          <a:xfrm xmlns:a="http://schemas.openxmlformats.org/drawingml/2006/main">
-            <a:off x="6610350" y="3333750"/>
-            <a:ext cx="9525" cy="552450"/>
-          </a:xfrm>
-          <a:prstGeom xmlns:a="http://schemas.openxmlformats.org/drawingml/2006/main" prst="rect">
-            <a:avLst/>
-          </a:prstGeom>
-          <a:solidFill xmlns:a="http://schemas.openxmlformats.org/drawingml/2006/main">
-            <a:srgbClr val="B8BCC4"/>
-          </a:solidFill>
-          <a:ln xmlns:a="http://schemas.openxmlformats.org/drawingml/2006/main" w="0">
-            <a:noFill/>
-            <a:prstDash val="solid"/>
-          </a:ln>
-        </p:spPr>
-      </p:sp>
-      <p:sp>
-        <p:nvSpPr>
-          <p:cNvPr id="16" name="">
-            <a:extLst xmlns:a="http://schemas.openxmlformats.org/drawingml/2006/main">
-              <a:ext uri="{FF2B5EF4-FFF2-40B4-BE49-F238E27FC236}">
-                <a16:creationId xmlns:a16="http://schemas.microsoft.com/office/drawing/2014/main" id="{157A94EF-155F-4DBA-9EF4-F8E0515E77AA}"/>
-              </a:ext>
-            </a:extLst>
-          </p:cNvPr>
-          <p:cNvSpPr>
-            <a:spLocks xmlns:a="http://schemas.openxmlformats.org/drawingml/2006/main" noGrp="1"/>
-          </p:cNvSpPr>
-          <p:nvPr/>
-        </p:nvSpPr>
-        <p:spPr>
-          <a:xfrm xmlns:a="http://schemas.openxmlformats.org/drawingml/2006/main">
-            <a:off x="6762750" y="3476625"/>
-            <a:ext cx="3924300" cy="266700"/>
-          </a:xfrm>
-          <a:prstGeom xmlns:a="http://schemas.openxmlformats.org/drawingml/2006/main" prst="rect">
-            <a:avLst/>
-          </a:prstGeom>
-          <a:noFill xmlns:a="http://schemas.openxmlformats.org/drawingml/2006/main"/>
-          <a:ln xmlns:a="http://schemas.openxmlformats.org/drawingml/2006/main" w="0">
-            <a:noFill/>
-            <a:prstDash val="solid"/>
-          </a:ln>
-        </p:spPr>
-        <p:txBody>
-          <a:bodyPr xmlns:a="http://schemas.openxmlformats.org/drawingml/2006/main"/>
-          <a:lstStyle xmlns:a="http://schemas.openxmlformats.org/drawingml/2006/main"/>
-          <a:p xmlns:a="http://schemas.openxmlformats.org/drawingml/2006/main">
-            <a:pPr algn="l">
-              <a:lnSpc>
-                <a:spcPct val="112000"/>
-              </a:lnSpc>
-              <a:buNone/>
-              <a:defRPr sz="1275" b="0">
-                <a:solidFill>
-                  <a:srgbClr val="555555"/>
-                </a:solidFill>
-                <a:latin typeface="Malgun Gothic"/>
-                <a:ea typeface="Malgun Gothic"/>
-                <a:cs typeface="Malgun Gothic"/>
-              </a:defRPr>
-            </a:pPr>
-            <a:r>
-              <a:rPr sz="1275" b="0">
-                <a:solidFill>
-                  <a:srgbClr val="555555"/>
-                </a:solidFill>
-                <a:latin typeface="Malgun Gothic"/>
-                <a:ea typeface="Malgun Gothic"/>
-                <a:cs typeface="Malgun Gothic"/>
-              </a:rPr>
-              <a:t>메타/PRD/소스 전체 읽기</a:t>
-            </a:r>
-          </a:p>
-        </p:txBody>
-      </p:sp>
-      <p:sp>
-        <p:nvSpPr>
-          <p:cNvPr id="17" name="">
-            <a:extLst xmlns:a="http://schemas.openxmlformats.org/drawingml/2006/main">
-              <a:ext uri="{FF2B5EF4-FFF2-40B4-BE49-F238E27FC236}">
-                <a16:creationId xmlns:a16="http://schemas.microsoft.com/office/drawing/2014/main" id="{49DAD5AC-D672-450D-BE0C-FC666D89B527}"/>
-              </a:ext>
-            </a:extLst>
-          </p:cNvPr>
-          <p:cNvSpPr>
-            <a:spLocks xmlns:a="http://schemas.openxmlformats.org/drawingml/2006/main" noGrp="1"/>
-          </p:cNvSpPr>
-          <p:nvPr/>
-        </p:nvSpPr>
-        <p:spPr>
-          <a:xfrm xmlns:a="http://schemas.openxmlformats.org/drawingml/2006/main">
-            <a:off x="704850" y="3886200"/>
-            <a:ext cx="10096500" cy="552450"/>
-          </a:xfrm>
-          <a:prstGeom xmlns:a="http://schemas.openxmlformats.org/drawingml/2006/main" prst="rect">
-            <a:avLst/>
-          </a:prstGeom>
-          <a:solidFill xmlns:a="http://schemas.openxmlformats.org/drawingml/2006/main">
-            <a:srgbClr val="FFFFFF"/>
-          </a:solidFill>
-          <a:ln xmlns:a="http://schemas.openxmlformats.org/drawingml/2006/main" w="9525">
-            <a:solidFill>
-              <a:srgbClr val="B8BCC4"/>
-            </a:solidFill>
-            <a:prstDash val="solid"/>
-          </a:ln>
-        </p:spPr>
-      </p:sp>
-      <p:sp>
-        <p:nvSpPr>
-          <p:cNvPr id="18" name="">
-            <a:extLst xmlns:a="http://schemas.openxmlformats.org/drawingml/2006/main">
-              <a:ext uri="{FF2B5EF4-FFF2-40B4-BE49-F238E27FC236}">
-                <a16:creationId xmlns:a16="http://schemas.microsoft.com/office/drawing/2014/main" id="{F27F17F5-85BA-4479-BFF8-4488F8C0A813}"/>
-              </a:ext>
-            </a:extLst>
-          </p:cNvPr>
-          <p:cNvSpPr>
-            <a:spLocks xmlns:a="http://schemas.openxmlformats.org/drawingml/2006/main" noGrp="1"/>
-          </p:cNvSpPr>
-          <p:nvPr/>
-        </p:nvSpPr>
-        <p:spPr>
-          <a:xfrm xmlns:a="http://schemas.openxmlformats.org/drawingml/2006/main">
-            <a:off x="857250" y="4029075"/>
-            <a:ext cx="2209800" cy="266700"/>
-          </a:xfrm>
-          <a:prstGeom xmlns:a="http://schemas.openxmlformats.org/drawingml/2006/main" prst="rect">
-            <a:avLst/>
-          </a:prstGeom>
-          <a:noFill xmlns:a="http://schemas.openxmlformats.org/drawingml/2006/main"/>
-          <a:ln xmlns:a="http://schemas.openxmlformats.org/drawingml/2006/main" w="0">
-            <a:noFill/>
-            <a:prstDash val="solid"/>
-          </a:ln>
-        </p:spPr>
-        <p:txBody>
-          <a:bodyPr xmlns:a="http://schemas.openxmlformats.org/drawingml/2006/main"/>
-          <a:lstStyle xmlns:a="http://schemas.openxmlformats.org/drawingml/2006/main"/>
-          <a:p xmlns:a="http://schemas.openxmlformats.org/drawingml/2006/main">
-            <a:pPr algn="l">
-              <a:lnSpc>
-                <a:spcPct val="112000"/>
-              </a:lnSpc>
-              <a:buNone/>
-              <a:defRPr sz="1275" b="0">
-                <a:solidFill>
-                  <a:srgbClr val="555555"/>
-                </a:solidFill>
-                <a:latin typeface="Malgun Gothic"/>
-                <a:ea typeface="Malgun Gothic"/>
-                <a:cs typeface="Malgun Gothic"/>
-              </a:defRPr>
-            </a:pPr>
-            <a:r>
-              <a:rPr sz="1275" b="0">
-                <a:solidFill>
-                  <a:srgbClr val="555555"/>
-                </a:solidFill>
-                <a:latin typeface="Malgun Gothic"/>
-                <a:ea typeface="Malgun Gothic"/>
-                <a:cs typeface="Malgun Gothic"/>
-              </a:rPr>
-              <a:t>버그 위치 탐색</a:t>
-            </a:r>
-          </a:p>
-        </p:txBody>
-      </p:sp>
-      <p:sp>
-        <p:nvSpPr>
-          <p:cNvPr id="19" name="">
-            <a:extLst xmlns:a="http://schemas.openxmlformats.org/drawingml/2006/main">
-              <a:ext uri="{FF2B5EF4-FFF2-40B4-BE49-F238E27FC236}">
-                <a16:creationId xmlns:a16="http://schemas.microsoft.com/office/drawing/2014/main" id="{F97D1B4F-6576-468B-AA82-939FE99D2491}"/>
-              </a:ext>
-            </a:extLst>
-          </p:cNvPr>
-          <p:cNvSpPr>
-            <a:spLocks xmlns:a="http://schemas.openxmlformats.org/drawingml/2006/main" noGrp="1"/>
-          </p:cNvSpPr>
-          <p:nvPr/>
-        </p:nvSpPr>
-        <p:spPr>
-          <a:xfrm xmlns:a="http://schemas.openxmlformats.org/drawingml/2006/main">
-            <a:off x="3181350" y="3886200"/>
-            <a:ext cx="9525" cy="552450"/>
-          </a:xfrm>
-          <a:prstGeom xmlns:a="http://schemas.openxmlformats.org/drawingml/2006/main" prst="rect">
-            <a:avLst/>
-          </a:prstGeom>
-          <a:solidFill xmlns:a="http://schemas.openxmlformats.org/drawingml/2006/main">
-            <a:srgbClr val="B8BCC4"/>
-          </a:solidFill>
-          <a:ln xmlns:a="http://schemas.openxmlformats.org/drawingml/2006/main" w="0">
-            <a:noFill/>
-            <a:prstDash val="solid"/>
-          </a:ln>
-        </p:spPr>
-      </p:sp>
-      <p:sp>
-        <p:nvSpPr>
-          <p:cNvPr id="20" name="">
-            <a:extLst xmlns:a="http://schemas.openxmlformats.org/drawingml/2006/main">
-              <a:ext uri="{FF2B5EF4-FFF2-40B4-BE49-F238E27FC236}">
-                <a16:creationId xmlns:a16="http://schemas.microsoft.com/office/drawing/2014/main" id="{C3A339F7-FA92-456B-9957-58596C013B46}"/>
-              </a:ext>
-            </a:extLst>
-          </p:cNvPr>
-          <p:cNvSpPr>
-            <a:spLocks xmlns:a="http://schemas.openxmlformats.org/drawingml/2006/main" noGrp="1"/>
-          </p:cNvSpPr>
-          <p:nvPr/>
-        </p:nvSpPr>
-        <p:spPr>
-          <a:xfrm xmlns:a="http://schemas.openxmlformats.org/drawingml/2006/main">
-            <a:off x="3333750" y="4029075"/>
-            <a:ext cx="3162300" cy="266700"/>
-          </a:xfrm>
-          <a:prstGeom xmlns:a="http://schemas.openxmlformats.org/drawingml/2006/main" prst="rect">
-            <a:avLst/>
-          </a:prstGeom>
-          <a:noFill xmlns:a="http://schemas.openxmlformats.org/drawingml/2006/main"/>
-          <a:ln xmlns:a="http://schemas.openxmlformats.org/drawingml/2006/main" w="0">
-            <a:noFill/>
-            <a:prstDash val="solid"/>
-          </a:ln>
-        </p:spPr>
-        <p:txBody>
-          <a:bodyPr xmlns:a="http://schemas.openxmlformats.org/drawingml/2006/main"/>
-          <a:lstStyle xmlns:a="http://schemas.openxmlformats.org/drawingml/2006/main"/>
-          <a:p xmlns:a="http://schemas.openxmlformats.org/drawingml/2006/main">
-            <a:pPr algn="l">
-              <a:lnSpc>
-                <a:spcPct val="112000"/>
-              </a:lnSpc>
-              <a:buNone/>
-              <a:defRPr sz="1275" b="0">
-                <a:solidFill>
-                  <a:srgbClr val="555555"/>
-                </a:solidFill>
-                <a:latin typeface="Malgun Gothic"/>
-                <a:ea typeface="Malgun Gothic"/>
-                <a:cs typeface="Malgun Gothic"/>
-              </a:defRPr>
-            </a:pPr>
-            <a:r>
-              <a:rPr sz="1275" b="0">
-                <a:solidFill>
-                  <a:srgbClr val="555555"/>
-                </a:solidFill>
-                <a:latin typeface="Malgun Gothic"/>
-                <a:ea typeface="Malgun Gothic"/>
-                <a:cs typeface="Malgun Gothic"/>
-              </a:rPr>
-              <a:t>codemap 키워드/심볼 조회</a:t>
-            </a:r>
-          </a:p>
-        </p:txBody>
-      </p:sp>
-      <p:sp>
-        <p:nvSpPr>
-          <p:cNvPr id="21" name="">
-            <a:extLst xmlns:a="http://schemas.openxmlformats.org/drawingml/2006/main">
-              <a:ext uri="{FF2B5EF4-FFF2-40B4-BE49-F238E27FC236}">
-                <a16:creationId xmlns:a16="http://schemas.microsoft.com/office/drawing/2014/main" id="{9B34AD0E-EF2B-4069-85AD-43F72EAD78C0}"/>
-              </a:ext>
-            </a:extLst>
-          </p:cNvPr>
-          <p:cNvSpPr>
-            <a:spLocks xmlns:a="http://schemas.openxmlformats.org/drawingml/2006/main" noGrp="1"/>
-          </p:cNvSpPr>
-          <p:nvPr/>
-        </p:nvSpPr>
-        <p:spPr>
-          <a:xfrm xmlns:a="http://schemas.openxmlformats.org/drawingml/2006/main">
-            <a:off x="6610350" y="3886200"/>
-            <a:ext cx="9525" cy="552450"/>
-          </a:xfrm>
-          <a:prstGeom xmlns:a="http://schemas.openxmlformats.org/drawingml/2006/main" prst="rect">
-            <a:avLst/>
-          </a:prstGeom>
-          <a:solidFill xmlns:a="http://schemas.openxmlformats.org/drawingml/2006/main">
-            <a:srgbClr val="B8BCC4"/>
-          </a:solidFill>
-          <a:ln xmlns:a="http://schemas.openxmlformats.org/drawingml/2006/main" w="0">
-            <a:noFill/>
-            <a:prstDash val="solid"/>
-          </a:ln>
-        </p:spPr>
-      </p:sp>
-      <p:sp>
-        <p:nvSpPr>
-          <p:cNvPr id="22" name="">
-            <a:extLst xmlns:a="http://schemas.openxmlformats.org/drawingml/2006/main">
-              <a:ext uri="{FF2B5EF4-FFF2-40B4-BE49-F238E27FC236}">
-                <a16:creationId xmlns:a16="http://schemas.microsoft.com/office/drawing/2014/main" id="{04705BAC-A2E5-4305-A532-C89F5537FA05}"/>
-              </a:ext>
-            </a:extLst>
-          </p:cNvPr>
-          <p:cNvSpPr>
-            <a:spLocks xmlns:a="http://schemas.openxmlformats.org/drawingml/2006/main" noGrp="1"/>
-          </p:cNvSpPr>
-          <p:nvPr/>
-        </p:nvSpPr>
-        <p:spPr>
-          <a:xfrm xmlns:a="http://schemas.openxmlformats.org/drawingml/2006/main">
-            <a:off x="6762750" y="4029075"/>
-            <a:ext cx="3924300" cy="266700"/>
-          </a:xfrm>
-          <a:prstGeom xmlns:a="http://schemas.openxmlformats.org/drawingml/2006/main" prst="rect">
-            <a:avLst/>
-          </a:prstGeom>
-          <a:noFill xmlns:a="http://schemas.openxmlformats.org/drawingml/2006/main"/>
-          <a:ln xmlns:a="http://schemas.openxmlformats.org/drawingml/2006/main" w="0">
-            <a:noFill/>
-            <a:prstDash val="solid"/>
-          </a:ln>
-        </p:spPr>
-        <p:txBody>
-          <a:bodyPr xmlns:a="http://schemas.openxmlformats.org/drawingml/2006/main"/>
-          <a:lstStyle xmlns:a="http://schemas.openxmlformats.org/drawingml/2006/main"/>
-          <a:p xmlns:a="http://schemas.openxmlformats.org/drawingml/2006/main">
-            <a:pPr algn="l">
-              <a:lnSpc>
-                <a:spcPct val="112000"/>
-              </a:lnSpc>
-              <a:buNone/>
-              <a:defRPr sz="1275" b="0">
-                <a:solidFill>
-                  <a:srgbClr val="555555"/>
-                </a:solidFill>
-                <a:latin typeface="Malgun Gothic"/>
-                <a:ea typeface="Malgun Gothic"/>
-                <a:cs typeface="Malgun Gothic"/>
-              </a:defRPr>
-            </a:pPr>
-            <a:r>
-              <a:rPr sz="1275" b="0">
-                <a:solidFill>
-                  <a:srgbClr val="555555"/>
-                </a:solidFill>
-                <a:latin typeface="Malgun Gothic"/>
-                <a:ea typeface="Malgun Gothic"/>
-                <a:cs typeface="Malgun Gothic"/>
-              </a:rPr>
-              <a:t>관련 feature 전체 열기</a:t>
-            </a:r>
-          </a:p>
-        </p:txBody>
-      </p:sp>
-      <p:sp>
-        <p:nvSpPr>
-          <p:cNvPr id="23" name="">
-            <a:extLst xmlns:a="http://schemas.openxmlformats.org/drawingml/2006/main">
-              <a:ext uri="{FF2B5EF4-FFF2-40B4-BE49-F238E27FC236}">
-                <a16:creationId xmlns:a16="http://schemas.microsoft.com/office/drawing/2014/main" id="{CCD434C4-6A5C-4978-BBBC-38CBDDF730F3}"/>
-              </a:ext>
-            </a:extLst>
-          </p:cNvPr>
-          <p:cNvSpPr>
-            <a:spLocks xmlns:a="http://schemas.openxmlformats.org/drawingml/2006/main" noGrp="1"/>
-          </p:cNvSpPr>
-          <p:nvPr/>
-        </p:nvSpPr>
-        <p:spPr>
-          <a:xfrm xmlns:a="http://schemas.openxmlformats.org/drawingml/2006/main">
-            <a:off x="704850" y="4438650"/>
-            <a:ext cx="10096500" cy="552450"/>
-          </a:xfrm>
-          <a:prstGeom xmlns:a="http://schemas.openxmlformats.org/drawingml/2006/main" prst="rect">
-            <a:avLst/>
-          </a:prstGeom>
-          <a:solidFill xmlns:a="http://schemas.openxmlformats.org/drawingml/2006/main">
-            <a:srgbClr val="FFFFFF"/>
-          </a:solidFill>
-          <a:ln xmlns:a="http://schemas.openxmlformats.org/drawingml/2006/main" w="9525">
-            <a:solidFill>
-              <a:srgbClr val="B8BCC4"/>
-            </a:solidFill>
-            <a:prstDash val="solid"/>
-          </a:ln>
-        </p:spPr>
-      </p:sp>
-      <p:sp>
-        <p:nvSpPr>
-          <p:cNvPr id="24" name="">
-            <a:extLst xmlns:a="http://schemas.openxmlformats.org/drawingml/2006/main">
-              <a:ext uri="{FF2B5EF4-FFF2-40B4-BE49-F238E27FC236}">
-                <a16:creationId xmlns:a16="http://schemas.microsoft.com/office/drawing/2014/main" id="{94446207-82A3-452A-B294-E6D4777E308A}"/>
-              </a:ext>
-            </a:extLst>
-          </p:cNvPr>
-          <p:cNvSpPr>
-            <a:spLocks xmlns:a="http://schemas.openxmlformats.org/drawingml/2006/main" noGrp="1"/>
-          </p:cNvSpPr>
-          <p:nvPr/>
-        </p:nvSpPr>
-        <p:spPr>
-          <a:xfrm xmlns:a="http://schemas.openxmlformats.org/drawingml/2006/main">
-            <a:off x="857250" y="4581525"/>
-            <a:ext cx="2209800" cy="266700"/>
-          </a:xfrm>
-          <a:prstGeom xmlns:a="http://schemas.openxmlformats.org/drawingml/2006/main" prst="rect">
-            <a:avLst/>
-          </a:prstGeom>
-          <a:noFill xmlns:a="http://schemas.openxmlformats.org/drawingml/2006/main"/>
-          <a:ln xmlns:a="http://schemas.openxmlformats.org/drawingml/2006/main" w="0">
-            <a:noFill/>
-            <a:prstDash val="solid"/>
-          </a:ln>
-        </p:spPr>
-        <p:txBody>
-          <a:bodyPr xmlns:a="http://schemas.openxmlformats.org/drawingml/2006/main"/>
-          <a:lstStyle xmlns:a="http://schemas.openxmlformats.org/drawingml/2006/main"/>
-          <a:p xmlns:a="http://schemas.openxmlformats.org/drawingml/2006/main">
-            <a:pPr algn="l">
-              <a:lnSpc>
-                <a:spcPct val="112000"/>
-              </a:lnSpc>
-              <a:buNone/>
-              <a:defRPr sz="1275" b="0">
-                <a:solidFill>
-                  <a:srgbClr val="555555"/>
-                </a:solidFill>
-                <a:latin typeface="Malgun Gothic"/>
-                <a:ea typeface="Malgun Gothic"/>
-                <a:cs typeface="Malgun Gothic"/>
-              </a:defRPr>
-            </a:pPr>
-            <a:r>
-              <a:rPr sz="1275" b="0">
-                <a:solidFill>
-                  <a:srgbClr val="555555"/>
-                </a:solidFill>
-                <a:latin typeface="Malgun Gothic"/>
-                <a:ea typeface="Malgun Gothic"/>
-                <a:cs typeface="Malgun Gothic"/>
-              </a:rPr>
-              <a:t>handoff 인수</a:t>
-            </a:r>
-          </a:p>
-        </p:txBody>
-      </p:sp>
-      <p:sp>
-        <p:nvSpPr>
-          <p:cNvPr id="25" name="">
-            <a:extLst xmlns:a="http://schemas.openxmlformats.org/drawingml/2006/main">
-              <a:ext uri="{FF2B5EF4-FFF2-40B4-BE49-F238E27FC236}">
-                <a16:creationId xmlns:a16="http://schemas.microsoft.com/office/drawing/2014/main" id="{9ACF52C0-6804-4E71-9E6A-982B52689865}"/>
-              </a:ext>
-            </a:extLst>
-          </p:cNvPr>
-          <p:cNvSpPr>
-            <a:spLocks xmlns:a="http://schemas.openxmlformats.org/drawingml/2006/main" noGrp="1"/>
-          </p:cNvSpPr>
-          <p:nvPr/>
-        </p:nvSpPr>
-        <p:spPr>
-          <a:xfrm xmlns:a="http://schemas.openxmlformats.org/drawingml/2006/main">
-            <a:off x="3181350" y="4438650"/>
-            <a:ext cx="9525" cy="552450"/>
-          </a:xfrm>
-          <a:prstGeom xmlns:a="http://schemas.openxmlformats.org/drawingml/2006/main" prst="rect">
-            <a:avLst/>
-          </a:prstGeom>
-          <a:solidFill xmlns:a="http://schemas.openxmlformats.org/drawingml/2006/main">
-            <a:srgbClr val="B8BCC4"/>
-          </a:solidFill>
-          <a:ln xmlns:a="http://schemas.openxmlformats.org/drawingml/2006/main" w="0">
-            <a:noFill/>
-            <a:prstDash val="solid"/>
-          </a:ln>
-        </p:spPr>
-      </p:sp>
-      <p:sp>
-        <p:nvSpPr>
-          <p:cNvPr id="26" name="">
-            <a:extLst xmlns:a="http://schemas.openxmlformats.org/drawingml/2006/main">
-              <a:ext uri="{FF2B5EF4-FFF2-40B4-BE49-F238E27FC236}">
-                <a16:creationId xmlns:a16="http://schemas.microsoft.com/office/drawing/2014/main" id="{A5F8F838-B390-4D14-821C-522E3F2B818F}"/>
-              </a:ext>
-            </a:extLst>
-          </p:cNvPr>
-          <p:cNvSpPr>
-            <a:spLocks xmlns:a="http://schemas.openxmlformats.org/drawingml/2006/main" noGrp="1"/>
-          </p:cNvSpPr>
-          <p:nvPr/>
-        </p:nvSpPr>
-        <p:spPr>
-          <a:xfrm xmlns:a="http://schemas.openxmlformats.org/drawingml/2006/main">
-            <a:off x="3333750" y="4581525"/>
-            <a:ext cx="3162300" cy="266700"/>
-          </a:xfrm>
-          <a:prstGeom xmlns:a="http://schemas.openxmlformats.org/drawingml/2006/main" prst="rect">
-            <a:avLst/>
-          </a:prstGeom>
-          <a:noFill xmlns:a="http://schemas.openxmlformats.org/drawingml/2006/main"/>
-          <a:ln xmlns:a="http://schemas.openxmlformats.org/drawingml/2006/main" w="0">
-            <a:noFill/>
-            <a:prstDash val="solid"/>
-          </a:ln>
-        </p:spPr>
-        <p:txBody>
-          <a:bodyPr xmlns:a="http://schemas.openxmlformats.org/drawingml/2006/main"/>
-          <a:lstStyle xmlns:a="http://schemas.openxmlformats.org/drawingml/2006/main"/>
-          <a:p xmlns:a="http://schemas.openxmlformats.org/drawingml/2006/main">
-            <a:pPr algn="l">
-              <a:lnSpc>
-                <a:spcPct val="112000"/>
-              </a:lnSpc>
-              <a:buNone/>
-              <a:defRPr sz="1275" b="0">
-                <a:solidFill>
-                  <a:srgbClr val="555555"/>
-                </a:solidFill>
-                <a:latin typeface="Malgun Gothic"/>
-                <a:ea typeface="Malgun Gothic"/>
-                <a:cs typeface="Malgun Gothic"/>
-              </a:defRPr>
-            </a:pPr>
-            <a:r>
-              <a:rPr sz="1275" b="0">
-                <a:solidFill>
-                  <a:srgbClr val="555555"/>
-                </a:solidFill>
-                <a:latin typeface="Malgun Gothic"/>
-                <a:ea typeface="Malgun Gothic"/>
-                <a:cs typeface="Malgun Gothic"/>
-              </a:rPr>
-              <a:t>lane + ctxdb 요약 확인</a:t>
-            </a:r>
-          </a:p>
-        </p:txBody>
-      </p:sp>
-      <p:sp>
-        <p:nvSpPr>
-          <p:cNvPr id="27" name="">
-            <a:extLst xmlns:a="http://schemas.openxmlformats.org/drawingml/2006/main">
-              <a:ext uri="{FF2B5EF4-FFF2-40B4-BE49-F238E27FC236}">
-                <a16:creationId xmlns:a16="http://schemas.microsoft.com/office/drawing/2014/main" id="{E8A255CC-8E82-4A5C-AA76-962294599DFA}"/>
-              </a:ext>
-            </a:extLst>
-          </p:cNvPr>
-          <p:cNvSpPr>
-            <a:spLocks xmlns:a="http://schemas.openxmlformats.org/drawingml/2006/main" noGrp="1"/>
-          </p:cNvSpPr>
-          <p:nvPr/>
-        </p:nvSpPr>
-        <p:spPr>
-          <a:xfrm xmlns:a="http://schemas.openxmlformats.org/drawingml/2006/main">
-            <a:off x="6610350" y="4438650"/>
-            <a:ext cx="9525" cy="552450"/>
-          </a:xfrm>
-          <a:prstGeom xmlns:a="http://schemas.openxmlformats.org/drawingml/2006/main" prst="rect">
-            <a:avLst/>
-          </a:prstGeom>
-          <a:solidFill xmlns:a="http://schemas.openxmlformats.org/drawingml/2006/main">
-            <a:srgbClr val="B8BCC4"/>
-          </a:solidFill>
-          <a:ln xmlns:a="http://schemas.openxmlformats.org/drawingml/2006/main" w="0">
-            <a:noFill/>
-            <a:prstDash val="solid"/>
-          </a:ln>
-        </p:spPr>
-      </p:sp>
-      <p:sp>
-        <p:nvSpPr>
-          <p:cNvPr id="28" name="">
-            <a:extLst xmlns:a="http://schemas.openxmlformats.org/drawingml/2006/main">
-              <a:ext uri="{FF2B5EF4-FFF2-40B4-BE49-F238E27FC236}">
-                <a16:creationId xmlns:a16="http://schemas.microsoft.com/office/drawing/2014/main" id="{EA7F3A21-2CEF-43AF-BE5D-670D2E583074}"/>
-              </a:ext>
-            </a:extLst>
-          </p:cNvPr>
-          <p:cNvSpPr>
-            <a:spLocks xmlns:a="http://schemas.openxmlformats.org/drawingml/2006/main" noGrp="1"/>
-          </p:cNvSpPr>
-          <p:nvPr/>
-        </p:nvSpPr>
-        <p:spPr>
-          <a:xfrm xmlns:a="http://schemas.openxmlformats.org/drawingml/2006/main">
-            <a:off x="6762750" y="4581525"/>
-            <a:ext cx="3924300" cy="266700"/>
-          </a:xfrm>
-          <a:prstGeom xmlns:a="http://schemas.openxmlformats.org/drawingml/2006/main" prst="rect">
-            <a:avLst/>
-          </a:prstGeom>
-          <a:noFill xmlns:a="http://schemas.openxmlformats.org/drawingml/2006/main"/>
-          <a:ln xmlns:a="http://schemas.openxmlformats.org/drawingml/2006/main" w="0">
-            <a:noFill/>
-            <a:prstDash val="solid"/>
-          </a:ln>
-        </p:spPr>
-        <p:txBody>
-          <a:bodyPr xmlns:a="http://schemas.openxmlformats.org/drawingml/2006/main"/>
-          <a:lstStyle xmlns:a="http://schemas.openxmlformats.org/drawingml/2006/main"/>
-          <a:p xmlns:a="http://schemas.openxmlformats.org/drawingml/2006/main">
-            <a:pPr algn="l">
-              <a:lnSpc>
-                <a:spcPct val="112000"/>
-              </a:lnSpc>
-              <a:buNone/>
-              <a:defRPr sz="1275" b="0">
-                <a:solidFill>
-                  <a:srgbClr val="555555"/>
-                </a:solidFill>
-                <a:latin typeface="Malgun Gothic"/>
-                <a:ea typeface="Malgun Gothic"/>
-                <a:cs typeface="Malgun Gothic"/>
-              </a:defRPr>
-            </a:pPr>
-            <a:r>
-              <a:rPr sz="1275" b="0">
-                <a:solidFill>
-                  <a:srgbClr val="555555"/>
-                </a:solidFill>
-                <a:latin typeface="Malgun Gothic"/>
-                <a:ea typeface="Malgun Gothic"/>
-                <a:cs typeface="Malgun Gothic"/>
-              </a:rPr>
-              <a:t>이전 대화 재구성</a:t>
-            </a:r>
-          </a:p>
-        </p:txBody>
-      </p:sp>
-      <p:sp>
-        <p:nvSpPr>
-          <p:cNvPr id="29" name="">
-            <a:extLst xmlns:a="http://schemas.openxmlformats.org/drawingml/2006/main">
-              <a:ext uri="{FF2B5EF4-FFF2-40B4-BE49-F238E27FC236}">
-                <a16:creationId xmlns:a16="http://schemas.microsoft.com/office/drawing/2014/main" id="{9AA5E7AA-9BD0-48B9-98E4-0D220CE2052B}"/>
-              </a:ext>
-            </a:extLst>
-          </p:cNvPr>
-          <p:cNvSpPr>
-            <a:spLocks xmlns:a="http://schemas.openxmlformats.org/drawingml/2006/main" noGrp="1"/>
-          </p:cNvSpPr>
-          <p:nvPr/>
-        </p:nvSpPr>
-        <p:spPr>
-          <a:xfrm xmlns:a="http://schemas.openxmlformats.org/drawingml/2006/main">
-            <a:off x="704850" y="4991100"/>
-            <a:ext cx="10096500" cy="552450"/>
-          </a:xfrm>
-          <a:prstGeom xmlns:a="http://schemas.openxmlformats.org/drawingml/2006/main" prst="rect">
-            <a:avLst/>
-          </a:prstGeom>
-          <a:solidFill xmlns:a="http://schemas.openxmlformats.org/drawingml/2006/main">
-            <a:srgbClr val="FFFFFF"/>
-          </a:solidFill>
-          <a:ln xmlns:a="http://schemas.openxmlformats.org/drawingml/2006/main" w="9525">
-            <a:solidFill>
-              <a:srgbClr val="B8BCC4"/>
-            </a:solidFill>
-            <a:prstDash val="solid"/>
-          </a:ln>
-        </p:spPr>
-      </p:sp>
-      <p:sp>
-        <p:nvSpPr>
-          <p:cNvPr id="30" name="">
-            <a:extLst xmlns:a="http://schemas.openxmlformats.org/drawingml/2006/main">
-              <a:ext uri="{FF2B5EF4-FFF2-40B4-BE49-F238E27FC236}">
-                <a16:creationId xmlns:a16="http://schemas.microsoft.com/office/drawing/2014/main" id="{A012EAA6-8A50-46CC-B184-D7AAEB158F74}"/>
-              </a:ext>
-            </a:extLst>
-          </p:cNvPr>
-          <p:cNvSpPr>
-            <a:spLocks xmlns:a="http://schemas.openxmlformats.org/drawingml/2006/main" noGrp="1"/>
-          </p:cNvSpPr>
-          <p:nvPr/>
-        </p:nvSpPr>
-        <p:spPr>
-          <a:xfrm xmlns:a="http://schemas.openxmlformats.org/drawingml/2006/main">
-            <a:off x="857250" y="5133975"/>
-            <a:ext cx="2209800" cy="266700"/>
-          </a:xfrm>
-          <a:prstGeom xmlns:a="http://schemas.openxmlformats.org/drawingml/2006/main" prst="rect">
-            <a:avLst/>
-          </a:prstGeom>
-          <a:noFill xmlns:a="http://schemas.openxmlformats.org/drawingml/2006/main"/>
-          <a:ln xmlns:a="http://schemas.openxmlformats.org/drawingml/2006/main" w="0">
-            <a:noFill/>
-            <a:prstDash val="solid"/>
-          </a:ln>
-        </p:spPr>
-        <p:txBody>
-          <a:bodyPr xmlns:a="http://schemas.openxmlformats.org/drawingml/2006/main"/>
-          <a:lstStyle xmlns:a="http://schemas.openxmlformats.org/drawingml/2006/main"/>
-          <a:p xmlns:a="http://schemas.openxmlformats.org/drawingml/2006/main">
-            <a:pPr algn="l">
-              <a:lnSpc>
-                <a:spcPct val="112000"/>
-              </a:lnSpc>
-              <a:buNone/>
-              <a:defRPr sz="1275" b="0">
-                <a:solidFill>
-                  <a:srgbClr val="555555"/>
-                </a:solidFill>
-                <a:latin typeface="Malgun Gothic"/>
-                <a:ea typeface="Malgun Gothic"/>
-                <a:cs typeface="Malgun Gothic"/>
-              </a:defRPr>
-            </a:pPr>
-            <a:r>
-              <a:rPr sz="1275" b="0">
-                <a:solidFill>
-                  <a:srgbClr val="555555"/>
-                </a:solidFill>
-                <a:latin typeface="Malgun Gothic"/>
-                <a:ea typeface="Malgun Gothic"/>
-                <a:cs typeface="Malgun Gothic"/>
-              </a:rPr>
-              <a:t>수정 직전</a:t>
-            </a:r>
-          </a:p>
-        </p:txBody>
-      </p:sp>
-      <p:sp>
-        <p:nvSpPr>
-          <p:cNvPr id="31" name="">
-            <a:extLst xmlns:a="http://schemas.openxmlformats.org/drawingml/2006/main">
-              <a:ext uri="{FF2B5EF4-FFF2-40B4-BE49-F238E27FC236}">
-                <a16:creationId xmlns:a16="http://schemas.microsoft.com/office/drawing/2014/main" id="{B9ED006E-7F68-4893-9B76-088757B02F30}"/>
-              </a:ext>
-            </a:extLst>
-          </p:cNvPr>
-          <p:cNvSpPr>
-            <a:spLocks xmlns:a="http://schemas.openxmlformats.org/drawingml/2006/main" noGrp="1"/>
-          </p:cNvSpPr>
-          <p:nvPr/>
-        </p:nvSpPr>
-        <p:spPr>
-          <a:xfrm xmlns:a="http://schemas.openxmlformats.org/drawingml/2006/main">
-            <a:off x="3181350" y="4991100"/>
-            <a:ext cx="9525" cy="552450"/>
-          </a:xfrm>
-          <a:prstGeom xmlns:a="http://schemas.openxmlformats.org/drawingml/2006/main" prst="rect">
-            <a:avLst/>
-          </a:prstGeom>
-          <a:solidFill xmlns:a="http://schemas.openxmlformats.org/drawingml/2006/main">
-            <a:srgbClr val="B8BCC4"/>
-          </a:solidFill>
-          <a:ln xmlns:a="http://schemas.openxmlformats.org/drawingml/2006/main" w="0">
-            <a:noFill/>
-            <a:prstDash val="solid"/>
-          </a:ln>
-        </p:spPr>
-      </p:sp>
-      <p:sp>
-        <p:nvSpPr>
-          <p:cNvPr id="32" name="">
-            <a:extLst xmlns:a="http://schemas.openxmlformats.org/drawingml/2006/main">
-              <a:ext uri="{FF2B5EF4-FFF2-40B4-BE49-F238E27FC236}">
-                <a16:creationId xmlns:a16="http://schemas.microsoft.com/office/drawing/2014/main" id="{86B9BB81-6B6F-4FDD-8C3F-41A42B8F901B}"/>
-              </a:ext>
-            </a:extLst>
-          </p:cNvPr>
-          <p:cNvSpPr>
-            <a:spLocks xmlns:a="http://schemas.openxmlformats.org/drawingml/2006/main" noGrp="1"/>
-          </p:cNvSpPr>
-          <p:nvPr/>
-        </p:nvSpPr>
-        <p:spPr>
-          <a:xfrm xmlns:a="http://schemas.openxmlformats.org/drawingml/2006/main">
-            <a:off x="3333750" y="5133975"/>
-            <a:ext cx="3162300" cy="266700"/>
-          </a:xfrm>
-          <a:prstGeom xmlns:a="http://schemas.openxmlformats.org/drawingml/2006/main" prst="rect">
-            <a:avLst/>
-          </a:prstGeom>
-          <a:noFill xmlns:a="http://schemas.openxmlformats.org/drawingml/2006/main"/>
-          <a:ln xmlns:a="http://schemas.openxmlformats.org/drawingml/2006/main" w="0">
-            <a:noFill/>
-            <a:prstDash val="solid"/>
-          </a:ln>
-        </p:spPr>
-        <p:txBody>
-          <a:bodyPr xmlns:a="http://schemas.openxmlformats.org/drawingml/2006/main"/>
-          <a:lstStyle xmlns:a="http://schemas.openxmlformats.org/drawingml/2006/main"/>
-          <a:p xmlns:a="http://schemas.openxmlformats.org/drawingml/2006/main">
-            <a:pPr algn="l">
-              <a:lnSpc>
-                <a:spcPct val="112000"/>
-              </a:lnSpc>
-              <a:buNone/>
-              <a:defRPr sz="1275" b="0">
-                <a:solidFill>
-                  <a:srgbClr val="555555"/>
-                </a:solidFill>
-                <a:latin typeface="Malgun Gothic"/>
-                <a:ea typeface="Malgun Gothic"/>
-                <a:cs typeface="Malgun Gothic"/>
-              </a:defRPr>
-            </a:pPr>
-            <a:r>
-              <a:rPr sz="1275" b="0">
-                <a:solidFill>
-                  <a:srgbClr val="555555"/>
-                </a:solidFill>
-                <a:latin typeface="Malgun Gothic"/>
-                <a:ea typeface="Malgun Gothic"/>
-                <a:cs typeface="Malgun Gothic"/>
-              </a:rPr>
-              <a:t>codemap으로 타깃 파일 확정</a:t>
-            </a:r>
-          </a:p>
-        </p:txBody>
-      </p:sp>
-      <p:sp>
-        <p:nvSpPr>
-          <p:cNvPr id="33" name="">
-            <a:extLst xmlns:a="http://schemas.openxmlformats.org/drawingml/2006/main">
-              <a:ext uri="{FF2B5EF4-FFF2-40B4-BE49-F238E27FC236}">
-                <a16:creationId xmlns:a16="http://schemas.microsoft.com/office/drawing/2014/main" id="{1C2640FF-8045-4A38-9F89-5EC0A6D2DAE4}"/>
-              </a:ext>
-            </a:extLst>
-          </p:cNvPr>
-          <p:cNvSpPr>
-            <a:spLocks xmlns:a="http://schemas.openxmlformats.org/drawingml/2006/main" noGrp="1"/>
-          </p:cNvSpPr>
-          <p:nvPr/>
-        </p:nvSpPr>
-        <p:spPr>
-          <a:xfrm xmlns:a="http://schemas.openxmlformats.org/drawingml/2006/main">
-            <a:off x="6610350" y="4991100"/>
-            <a:ext cx="9525" cy="552450"/>
-          </a:xfrm>
-          <a:prstGeom xmlns:a="http://schemas.openxmlformats.org/drawingml/2006/main" prst="rect">
-            <a:avLst/>
-          </a:prstGeom>
-          <a:solidFill xmlns:a="http://schemas.openxmlformats.org/drawingml/2006/main">
-            <a:srgbClr val="B8BCC4"/>
-          </a:solidFill>
-          <a:ln xmlns:a="http://schemas.openxmlformats.org/drawingml/2006/main" w="0">
-            <a:noFill/>
-            <a:prstDash val="solid"/>
-          </a:ln>
-        </p:spPr>
-      </p:sp>
-      <p:sp>
-        <p:nvSpPr>
-          <p:cNvPr id="34" name="">
-            <a:extLst xmlns:a="http://schemas.openxmlformats.org/drawingml/2006/main">
-              <a:ext uri="{FF2B5EF4-FFF2-40B4-BE49-F238E27FC236}">
-                <a16:creationId xmlns:a16="http://schemas.microsoft.com/office/drawing/2014/main" id="{BD6BE439-0DFA-4266-8731-CA3DC94FBA6D}"/>
-              </a:ext>
-            </a:extLst>
-          </p:cNvPr>
-          <p:cNvSpPr>
-            <a:spLocks xmlns:a="http://schemas.openxmlformats.org/drawingml/2006/main" noGrp="1"/>
-          </p:cNvSpPr>
-          <p:nvPr/>
-        </p:nvSpPr>
-        <p:spPr>
-          <a:xfrm xmlns:a="http://schemas.openxmlformats.org/drawingml/2006/main">
-            <a:off x="6762750" y="5133975"/>
-            <a:ext cx="3924300" cy="266700"/>
-          </a:xfrm>
-          <a:prstGeom xmlns:a="http://schemas.openxmlformats.org/drawingml/2006/main" prst="rect">
-            <a:avLst/>
-          </a:prstGeom>
-          <a:noFill xmlns:a="http://schemas.openxmlformats.org/drawingml/2006/main"/>
-          <a:ln xmlns:a="http://schemas.openxmlformats.org/drawingml/2006/main" w="0">
-            <a:noFill/>
-            <a:prstDash val="solid"/>
-          </a:ln>
-        </p:spPr>
-        <p:txBody>
-          <a:bodyPr xmlns:a="http://schemas.openxmlformats.org/drawingml/2006/main"/>
-          <a:lstStyle xmlns:a="http://schemas.openxmlformats.org/drawingml/2006/main"/>
-          <a:p xmlns:a="http://schemas.openxmlformats.org/drawingml/2006/main">
-            <a:pPr algn="l">
-              <a:lnSpc>
-                <a:spcPct val="112000"/>
-              </a:lnSpc>
-              <a:buNone/>
-              <a:defRPr sz="1275" b="0">
-                <a:solidFill>
-                  <a:srgbClr val="555555"/>
-                </a:solidFill>
-                <a:latin typeface="Malgun Gothic"/>
-                <a:ea typeface="Malgun Gothic"/>
-                <a:cs typeface="Malgun Gothic"/>
-              </a:defRPr>
-            </a:pPr>
-            <a:r>
-              <a:rPr sz="1275" b="0">
-                <a:solidFill>
-                  <a:srgbClr val="555555"/>
-                </a:solidFill>
-                <a:latin typeface="Malgun Gothic"/>
-                <a:ea typeface="Malgun Gothic"/>
-                <a:cs typeface="Malgun Gothic"/>
-              </a:rPr>
-              <a:t>grep hit 파일 전부 읽기</a:t>
-            </a:r>
-          </a:p>
-        </p:txBody>
-      </p:sp>
-      <p:sp>
-        <p:nvSpPr>
-          <p:cNvPr id="35" name="">
-            <a:extLst xmlns:a="http://schemas.openxmlformats.org/drawingml/2006/main">
-              <a:ext uri="{FF2B5EF4-FFF2-40B4-BE49-F238E27FC236}">
-                <a16:creationId xmlns:a16="http://schemas.microsoft.com/office/drawing/2014/main" id="{0C438323-A1BF-43D9-8B41-5F02A7EFC742}"/>
-              </a:ext>
-            </a:extLst>
-          </p:cNvPr>
-          <p:cNvSpPr>
-            <a:spLocks xmlns:a="http://schemas.openxmlformats.org/drawingml/2006/main" noGrp="1"/>
-          </p:cNvSpPr>
-          <p:nvPr/>
-        </p:nvSpPr>
-        <p:spPr>
-          <a:xfrm xmlns:a="http://schemas.openxmlformats.org/drawingml/2006/main">
-            <a:off x="400050" y="6191250"/>
-            <a:ext cx="11391900" cy="9525"/>
-          </a:xfrm>
-          <a:prstGeom xmlns:a="http://schemas.openxmlformats.org/drawingml/2006/main" prst="rect">
-            <a:avLst/>
-          </a:prstGeom>
-          <a:solidFill xmlns:a="http://schemas.openxmlformats.org/drawingml/2006/main">
-            <a:srgbClr val="B8BCC4"/>
-          </a:solidFill>
-          <a:ln xmlns:a="http://schemas.openxmlformats.org/drawingml/2006/main" w="0">
-            <a:noFill/>
-            <a:prstDash val="solid"/>
-          </a:ln>
-        </p:spPr>
-      </p:sp>
-      <p:sp>
-        <p:nvSpPr>
-          <p:cNvPr id="36" name="">
-            <a:extLst xmlns:a="http://schemas.openxmlformats.org/drawingml/2006/main">
-              <a:ext uri="{FF2B5EF4-FFF2-40B4-BE49-F238E27FC236}">
-                <a16:creationId xmlns:a16="http://schemas.microsoft.com/office/drawing/2014/main" id="{12DE23EF-ADF9-43C6-B881-3A0037EED6EF}"/>
+                <a16:creationId xmlns:a16="http://schemas.microsoft.com/office/drawing/2014/main" id="{C81C18D2-3597-4071-8CC7-DDE3199584CC}"/>
               </a:ext>
             </a:extLst>
           </p:cNvPr>
@@ -9478,10 +9514,10 @@
       </p:sp>
       <p:sp>
         <p:nvSpPr>
-          <p:cNvPr id="37" name="">
-            <a:extLst xmlns:a="http://schemas.openxmlformats.org/drawingml/2006/main">
-              <a:ext uri="{FF2B5EF4-FFF2-40B4-BE49-F238E27FC236}">
-                <a16:creationId xmlns:a16="http://schemas.microsoft.com/office/drawing/2014/main" id="{DE502E7D-B176-4C79-9129-38D90ACD7CC6}"/>
+          <p:cNvPr id="16" name="">
+            <a:extLst xmlns:a="http://schemas.openxmlformats.org/drawingml/2006/main">
+              <a:ext uri="{FF2B5EF4-FFF2-40B4-BE49-F238E27FC236}">
+                <a16:creationId xmlns:a16="http://schemas.microsoft.com/office/drawing/2014/main" id="{B4D70BA5-0746-4D5B-957A-D1797D38F14C}"/>
               </a:ext>
             </a:extLst>
           </p:cNvPr>
@@ -9539,7 +9575,7 @@
     </p:spTree>
     <p:extLst>
       <p:ext uri="{BB962C8B-B14F-4D97-AF65-F5344CB8AC3E}">
-        <p14:creationId xmlns:p14="http://schemas.microsoft.com/office/powerpoint/2010/main" val="2001704105"/>
+        <p14:creationId xmlns:p14="http://schemas.microsoft.com/office/powerpoint/2010/main" val="1798371586"/>
       </p:ext>
     </p:extLst>
   </p:cSld>
@@ -9570,7 +9606,7 @@
           <p:cNvPr id="1" name="">
             <a:extLst xmlns:a="http://schemas.openxmlformats.org/drawingml/2006/main">
               <a:ext uri="{FF2B5EF4-FFF2-40B4-BE49-F238E27FC236}">
-                <a16:creationId xmlns:a16="http://schemas.microsoft.com/office/drawing/2014/main" id="{2FF0B34D-578E-4C46-9909-6B5F80681289}"/>
+                <a16:creationId xmlns:a16="http://schemas.microsoft.com/office/drawing/2014/main" id="{4B43DD7B-9C02-47EF-B6E3-60C8FD104D3F}"/>
               </a:ext>
             </a:extLst>
           </p:cNvPr>
@@ -9620,7 +9656,7 @@
                 <a:ea typeface="Malgun Gothic"/>
                 <a:cs typeface="Malgun Gothic"/>
               </a:rPr>
-              <a:t>결론</a:t>
+              <a:t>운영</a:t>
             </a:r>
           </a:p>
         </p:txBody>
@@ -9630,7 +9666,7 @@
           <p:cNvPr id="2" name="">
             <a:extLst xmlns:a="http://schemas.openxmlformats.org/drawingml/2006/main">
               <a:ext uri="{FF2B5EF4-FFF2-40B4-BE49-F238E27FC236}">
-                <a16:creationId xmlns:a16="http://schemas.microsoft.com/office/drawing/2014/main" id="{240D70A0-CB96-48DD-BCB9-742754E4929F}"/>
+                <a16:creationId xmlns:a16="http://schemas.microsoft.com/office/drawing/2014/main" id="{F5FB5BDF-D80E-451A-86DE-25C123BFFC44}"/>
               </a:ext>
             </a:extLst>
           </p:cNvPr>
@@ -9680,7 +9716,7 @@
                 <a:ea typeface="Malgun Gothic"/>
                 <a:cs typeface="Malgun Gothic"/>
               </a:rPr>
-              <a:t>토큰 절감은 읽기 경로를 짧게 만드는 문제입니다</a:t>
+              <a:t>저장은 주기적으로, 읽기는 요청 시점에 작동합니다</a:t>
             </a:r>
           </a:p>
         </p:txBody>
@@ -9690,7 +9726,7 @@
           <p:cNvPr id="3" name="">
             <a:extLst xmlns:a="http://schemas.openxmlformats.org/drawingml/2006/main">
               <a:ext uri="{FF2B5EF4-FFF2-40B4-BE49-F238E27FC236}">
-                <a16:creationId xmlns:a16="http://schemas.microsoft.com/office/drawing/2014/main" id="{556026C1-191A-4060-BF0F-8E2B250C27EF}"/>
+                <a16:creationId xmlns:a16="http://schemas.microsoft.com/office/drawing/2014/main" id="{65B1CCA1-3A00-462F-8CA6-07F4246792EB}"/>
               </a:ext>
             </a:extLst>
           </p:cNvPr>
@@ -9740,7 +9776,7 @@
                 <a:ea typeface="Malgun Gothic"/>
                 <a:cs typeface="Malgun Gothic"/>
               </a:rPr>
-              <a:t>Project A 시뮬레이션은 요약과 레지스트리가 있으면 같은 작업도 훨씬 적은 context로 시작할 수 있음을 보여줍니다.</a:t>
+              <a:t>context-saver가 기억을 남겨야 ctxdb가 다음 요청에서 적게 읽을 수 있습니다.</a:t>
             </a:r>
           </a:p>
         </p:txBody>
@@ -9750,7 +9786,7 @@
           <p:cNvPr id="4" name="">
             <a:extLst xmlns:a="http://schemas.openxmlformats.org/drawingml/2006/main">
               <a:ext uri="{FF2B5EF4-FFF2-40B4-BE49-F238E27FC236}">
-                <a16:creationId xmlns:a16="http://schemas.microsoft.com/office/drawing/2014/main" id="{CB4AA190-94F4-48A4-B85B-EB0B21617F28}"/>
+                <a16:creationId xmlns:a16="http://schemas.microsoft.com/office/drawing/2014/main" id="{0D40BDA2-1BD5-48A4-930A-B9A25D6108D2}"/>
               </a:ext>
             </a:extLst>
           </p:cNvPr>
@@ -9810,19 +9846,19 @@
           <p:cNvPr id="5" name="">
             <a:extLst xmlns:a="http://schemas.openxmlformats.org/drawingml/2006/main">
               <a:ext uri="{FF2B5EF4-FFF2-40B4-BE49-F238E27FC236}">
-                <a16:creationId xmlns:a16="http://schemas.microsoft.com/office/drawing/2014/main" id="{6E79FB0A-4C61-410B-8CF2-D95B6CED4E97}"/>
-              </a:ext>
-            </a:extLst>
-          </p:cNvPr>
-          <p:cNvSpPr>
-            <a:spLocks xmlns:a="http://schemas.openxmlformats.org/drawingml/2006/main" noGrp="1"/>
-          </p:cNvSpPr>
-          <p:nvPr/>
-        </p:nvSpPr>
-        <p:spPr>
-          <a:xfrm xmlns:a="http://schemas.openxmlformats.org/drawingml/2006/main">
-            <a:off x="857250" y="3143250"/>
-            <a:ext cx="3048000" cy="1428750"/>
+                <a16:creationId xmlns:a16="http://schemas.microsoft.com/office/drawing/2014/main" id="{8724610F-F829-4E2B-A0E7-D9A7B61C7079}"/>
+              </a:ext>
+            </a:extLst>
+          </p:cNvPr>
+          <p:cNvSpPr>
+            <a:spLocks xmlns:a="http://schemas.openxmlformats.org/drawingml/2006/main" noGrp="1"/>
+          </p:cNvSpPr>
+          <p:nvPr/>
+        </p:nvSpPr>
+        <p:spPr>
+          <a:xfrm xmlns:a="http://schemas.openxmlformats.org/drawingml/2006/main">
+            <a:off x="704850" y="2724150"/>
+            <a:ext cx="10096500" cy="457200"/>
           </a:xfrm>
           <a:prstGeom xmlns:a="http://schemas.openxmlformats.org/drawingml/2006/main" prst="rect">
             <a:avLst/>
@@ -9830,8 +9866,10 @@
           <a:solidFill xmlns:a="http://schemas.openxmlformats.org/drawingml/2006/main">
             <a:srgbClr val="EDEDED"/>
           </a:solidFill>
-          <a:ln xmlns:a="http://schemas.openxmlformats.org/drawingml/2006/main" w="0">
-            <a:noFill/>
+          <a:ln xmlns:a="http://schemas.openxmlformats.org/drawingml/2006/main" w="9525">
+            <a:solidFill>
+              <a:srgbClr val="B8BCC4"/>
+            </a:solidFill>
             <a:prstDash val="solid"/>
           </a:ln>
         </p:spPr>
@@ -9841,19 +9879,19 @@
           <p:cNvPr id="6" name="">
             <a:extLst xmlns:a="http://schemas.openxmlformats.org/drawingml/2006/main">
               <a:ext uri="{FF2B5EF4-FFF2-40B4-BE49-F238E27FC236}">
-                <a16:creationId xmlns:a16="http://schemas.microsoft.com/office/drawing/2014/main" id="{1E280748-1C2A-4B67-A288-93A953664F0F}"/>
-              </a:ext>
-            </a:extLst>
-          </p:cNvPr>
-          <p:cNvSpPr>
-            <a:spLocks xmlns:a="http://schemas.openxmlformats.org/drawingml/2006/main" noGrp="1"/>
-          </p:cNvSpPr>
-          <p:nvPr/>
-        </p:nvSpPr>
-        <p:spPr>
-          <a:xfrm xmlns:a="http://schemas.openxmlformats.org/drawingml/2006/main">
-            <a:off x="1143000" y="3409950"/>
-            <a:ext cx="2190750" cy="400050"/>
+                <a16:creationId xmlns:a16="http://schemas.microsoft.com/office/drawing/2014/main" id="{0F930BAE-1362-4593-BC23-A904EDE832DF}"/>
+              </a:ext>
+            </a:extLst>
+          </p:cNvPr>
+          <p:cNvSpPr>
+            <a:spLocks xmlns:a="http://schemas.openxmlformats.org/drawingml/2006/main" noGrp="1"/>
+          </p:cNvSpPr>
+          <p:nvPr/>
+        </p:nvSpPr>
+        <p:spPr>
+          <a:xfrm xmlns:a="http://schemas.openxmlformats.org/drawingml/2006/main">
+            <a:off x="857250" y="2867025"/>
+            <a:ext cx="2305050" cy="266700"/>
           </a:xfrm>
           <a:prstGeom xmlns:a="http://schemas.openxmlformats.org/drawingml/2006/main" prst="rect">
             <a:avLst/>
@@ -9873,7 +9911,7 @@
                 <a:spcPct val="112000"/>
               </a:lnSpc>
               <a:buNone/>
-              <a:defRPr sz="2550" b="1">
+              <a:defRPr sz="1350" b="1">
                 <a:solidFill>
                   <a:srgbClr val="000000"/>
                 </a:solidFill>
@@ -9883,7 +9921,7 @@
               </a:defRPr>
             </a:pPr>
             <a:r>
-              <a:rPr sz="2550" b="1">
+              <a:rPr sz="1350" b="1">
                 <a:solidFill>
                   <a:srgbClr val="000000"/>
                 </a:solidFill>
@@ -9891,7 +9929,7 @@
                 <a:ea typeface="Malgun Gothic"/>
                 <a:cs typeface="Malgun Gothic"/>
               </a:rPr>
-              <a:t>ctxdb</a:t>
+              <a:t>상황</a:t>
             </a:r>
           </a:p>
         </p:txBody>
@@ -9901,19 +9939,50 @@
           <p:cNvPr id="7" name="">
             <a:extLst xmlns:a="http://schemas.openxmlformats.org/drawingml/2006/main">
               <a:ext uri="{FF2B5EF4-FFF2-40B4-BE49-F238E27FC236}">
-                <a16:creationId xmlns:a16="http://schemas.microsoft.com/office/drawing/2014/main" id="{B4155CE7-D7BE-48C4-9510-36E714B59E3A}"/>
-              </a:ext>
-            </a:extLst>
-          </p:cNvPr>
-          <p:cNvSpPr>
-            <a:spLocks xmlns:a="http://schemas.openxmlformats.org/drawingml/2006/main" noGrp="1"/>
-          </p:cNvSpPr>
-          <p:nvPr/>
-        </p:nvSpPr>
-        <p:spPr>
-          <a:xfrm xmlns:a="http://schemas.openxmlformats.org/drawingml/2006/main">
-            <a:off x="1143000" y="3943350"/>
-            <a:ext cx="2286000" cy="323850"/>
+                <a16:creationId xmlns:a16="http://schemas.microsoft.com/office/drawing/2014/main" id="{2ABC97E4-4F08-4F52-A0B9-F025EAD3949B}"/>
+              </a:ext>
+            </a:extLst>
+          </p:cNvPr>
+          <p:cNvSpPr>
+            <a:spLocks xmlns:a="http://schemas.openxmlformats.org/drawingml/2006/main" noGrp="1"/>
+          </p:cNvSpPr>
+          <p:nvPr/>
+        </p:nvSpPr>
+        <p:spPr>
+          <a:xfrm xmlns:a="http://schemas.openxmlformats.org/drawingml/2006/main">
+            <a:off x="3276600" y="2724150"/>
+            <a:ext cx="9525" cy="457200"/>
+          </a:xfrm>
+          <a:prstGeom xmlns:a="http://schemas.openxmlformats.org/drawingml/2006/main" prst="rect">
+            <a:avLst/>
+          </a:prstGeom>
+          <a:solidFill xmlns:a="http://schemas.openxmlformats.org/drawingml/2006/main">
+            <a:srgbClr val="B8BCC4"/>
+          </a:solidFill>
+          <a:ln xmlns:a="http://schemas.openxmlformats.org/drawingml/2006/main" w="0">
+            <a:noFill/>
+            <a:prstDash val="solid"/>
+          </a:ln>
+        </p:spPr>
+      </p:sp>
+      <p:sp>
+        <p:nvSpPr>
+          <p:cNvPr id="8" name="">
+            <a:extLst xmlns:a="http://schemas.openxmlformats.org/drawingml/2006/main">
+              <a:ext uri="{FF2B5EF4-FFF2-40B4-BE49-F238E27FC236}">
+                <a16:creationId xmlns:a16="http://schemas.microsoft.com/office/drawing/2014/main" id="{B45C89C9-7E3E-4F02-947F-E26355880175}"/>
+              </a:ext>
+            </a:extLst>
+          </p:cNvPr>
+          <p:cNvSpPr>
+            <a:spLocks xmlns:a="http://schemas.openxmlformats.org/drawingml/2006/main" noGrp="1"/>
+          </p:cNvSpPr>
+          <p:nvPr/>
+        </p:nvSpPr>
+        <p:spPr>
+          <a:xfrm xmlns:a="http://schemas.openxmlformats.org/drawingml/2006/main">
+            <a:off x="3429000" y="2867025"/>
+            <a:ext cx="3543300" cy="266700"/>
           </a:xfrm>
           <a:prstGeom xmlns:a="http://schemas.openxmlformats.org/drawingml/2006/main" prst="rect">
             <a:avLst/>
@@ -9933,46 +10002,1932 @@
                 <a:spcPct val="112000"/>
               </a:lnSpc>
               <a:buNone/>
-              <a:defRPr sz="1650" b="0">
-                <a:solidFill>
-                  <a:srgbClr val="555555"/>
-                </a:solidFill>
-                <a:latin typeface="Malgun Gothic"/>
-                <a:ea typeface="Malgun Gothic"/>
-                <a:cs typeface="Malgun Gothic"/>
-              </a:defRPr>
-            </a:pPr>
-            <a:r>
-              <a:rPr sz="1650" b="0">
-                <a:solidFill>
-                  <a:srgbClr val="555555"/>
-                </a:solidFill>
-                <a:latin typeface="Malgun Gothic"/>
-                <a:ea typeface="Malgun Gothic"/>
-                <a:cs typeface="Malgun Gothic"/>
-              </a:rPr>
-              <a:t>현재 상태를 요약으로 시작</a:t>
-            </a:r>
-          </a:p>
-        </p:txBody>
-      </p:sp>
-      <p:sp>
-        <p:nvSpPr>
-          <p:cNvPr id="8" name="">
-            <a:extLst xmlns:a="http://schemas.openxmlformats.org/drawingml/2006/main">
-              <a:ext uri="{FF2B5EF4-FFF2-40B4-BE49-F238E27FC236}">
-                <a16:creationId xmlns:a16="http://schemas.microsoft.com/office/drawing/2014/main" id="{EF17AB41-E148-4A15-9976-E953EC836BAF}"/>
-              </a:ext>
-            </a:extLst>
-          </p:cNvPr>
-          <p:cNvSpPr>
-            <a:spLocks xmlns:a="http://schemas.openxmlformats.org/drawingml/2006/main" noGrp="1"/>
-          </p:cNvSpPr>
-          <p:nvPr/>
-        </p:nvSpPr>
-        <p:spPr>
-          <a:xfrm xmlns:a="http://schemas.openxmlformats.org/drawingml/2006/main">
-            <a:off x="4572000" y="3143250"/>
+              <a:defRPr sz="1350" b="1">
+                <a:solidFill>
+                  <a:srgbClr val="000000"/>
+                </a:solidFill>
+                <a:latin typeface="Malgun Gothic"/>
+                <a:ea typeface="Malgun Gothic"/>
+                <a:cs typeface="Malgun Gothic"/>
+              </a:defRPr>
+            </a:pPr>
+            <a:r>
+              <a:rPr sz="1350" b="1">
+                <a:solidFill>
+                  <a:srgbClr val="000000"/>
+                </a:solidFill>
+                <a:latin typeface="Malgun Gothic"/>
+                <a:ea typeface="Malgun Gothic"/>
+                <a:cs typeface="Malgun Gothic"/>
+              </a:rPr>
+              <a:t>먼저 할 일</a:t>
+            </a:r>
+          </a:p>
+        </p:txBody>
+      </p:sp>
+      <p:sp>
+        <p:nvSpPr>
+          <p:cNvPr id="9" name="">
+            <a:extLst xmlns:a="http://schemas.openxmlformats.org/drawingml/2006/main">
+              <a:ext uri="{FF2B5EF4-FFF2-40B4-BE49-F238E27FC236}">
+                <a16:creationId xmlns:a16="http://schemas.microsoft.com/office/drawing/2014/main" id="{318D8B59-0BE0-4D5F-9397-DC3A7D219A53}"/>
+              </a:ext>
+            </a:extLst>
+          </p:cNvPr>
+          <p:cNvSpPr>
+            <a:spLocks xmlns:a="http://schemas.openxmlformats.org/drawingml/2006/main" noGrp="1"/>
+          </p:cNvSpPr>
+          <p:nvPr/>
+        </p:nvSpPr>
+        <p:spPr>
+          <a:xfrm xmlns:a="http://schemas.openxmlformats.org/drawingml/2006/main">
+            <a:off x="7086600" y="2724150"/>
+            <a:ext cx="9525" cy="457200"/>
+          </a:xfrm>
+          <a:prstGeom xmlns:a="http://schemas.openxmlformats.org/drawingml/2006/main" prst="rect">
+            <a:avLst/>
+          </a:prstGeom>
+          <a:solidFill xmlns:a="http://schemas.openxmlformats.org/drawingml/2006/main">
+            <a:srgbClr val="B8BCC4"/>
+          </a:solidFill>
+          <a:ln xmlns:a="http://schemas.openxmlformats.org/drawingml/2006/main" w="0">
+            <a:noFill/>
+            <a:prstDash val="solid"/>
+          </a:ln>
+        </p:spPr>
+      </p:sp>
+      <p:sp>
+        <p:nvSpPr>
+          <p:cNvPr id="10" name="">
+            <a:extLst xmlns:a="http://schemas.openxmlformats.org/drawingml/2006/main">
+              <a:ext uri="{FF2B5EF4-FFF2-40B4-BE49-F238E27FC236}">
+                <a16:creationId xmlns:a16="http://schemas.microsoft.com/office/drawing/2014/main" id="{E354CBB1-7472-48D2-80DE-593A31334A44}"/>
+              </a:ext>
+            </a:extLst>
+          </p:cNvPr>
+          <p:cNvSpPr>
+            <a:spLocks xmlns:a="http://schemas.openxmlformats.org/drawingml/2006/main" noGrp="1"/>
+          </p:cNvSpPr>
+          <p:nvPr/>
+        </p:nvSpPr>
+        <p:spPr>
+          <a:xfrm xmlns:a="http://schemas.openxmlformats.org/drawingml/2006/main">
+            <a:off x="7239000" y="2867025"/>
+            <a:ext cx="3448050" cy="266700"/>
+          </a:xfrm>
+          <a:prstGeom xmlns:a="http://schemas.openxmlformats.org/drawingml/2006/main" prst="rect">
+            <a:avLst/>
+          </a:prstGeom>
+          <a:noFill xmlns:a="http://schemas.openxmlformats.org/drawingml/2006/main"/>
+          <a:ln xmlns:a="http://schemas.openxmlformats.org/drawingml/2006/main" w="0">
+            <a:noFill/>
+            <a:prstDash val="solid"/>
+          </a:ln>
+        </p:spPr>
+        <p:txBody>
+          <a:bodyPr xmlns:a="http://schemas.openxmlformats.org/drawingml/2006/main"/>
+          <a:lstStyle xmlns:a="http://schemas.openxmlformats.org/drawingml/2006/main"/>
+          <a:p xmlns:a="http://schemas.openxmlformats.org/drawingml/2006/main">
+            <a:pPr algn="l">
+              <a:lnSpc>
+                <a:spcPct val="112000"/>
+              </a:lnSpc>
+              <a:buNone/>
+              <a:defRPr sz="1350" b="1">
+                <a:solidFill>
+                  <a:srgbClr val="000000"/>
+                </a:solidFill>
+                <a:latin typeface="Malgun Gothic"/>
+                <a:ea typeface="Malgun Gothic"/>
+                <a:cs typeface="Malgun Gothic"/>
+              </a:defRPr>
+            </a:pPr>
+            <a:r>
+              <a:rPr sz="1350" b="1">
+                <a:solidFill>
+                  <a:srgbClr val="000000"/>
+                </a:solidFill>
+                <a:latin typeface="Malgun Gothic"/>
+                <a:ea typeface="Malgun Gothic"/>
+                <a:cs typeface="Malgun Gothic"/>
+              </a:rPr>
+              <a:t>피해야 할 일</a:t>
+            </a:r>
+          </a:p>
+        </p:txBody>
+      </p:sp>
+      <p:sp>
+        <p:nvSpPr>
+          <p:cNvPr id="11" name="">
+            <a:extLst xmlns:a="http://schemas.openxmlformats.org/drawingml/2006/main">
+              <a:ext uri="{FF2B5EF4-FFF2-40B4-BE49-F238E27FC236}">
+                <a16:creationId xmlns:a16="http://schemas.microsoft.com/office/drawing/2014/main" id="{007B9E69-CD17-4995-8F82-6F656B54BFDA}"/>
+              </a:ext>
+            </a:extLst>
+          </p:cNvPr>
+          <p:cNvSpPr>
+            <a:spLocks xmlns:a="http://schemas.openxmlformats.org/drawingml/2006/main" noGrp="1"/>
+          </p:cNvSpPr>
+          <p:nvPr/>
+        </p:nvSpPr>
+        <p:spPr>
+          <a:xfrm xmlns:a="http://schemas.openxmlformats.org/drawingml/2006/main">
+            <a:off x="704850" y="3181350"/>
+            <a:ext cx="10096500" cy="457200"/>
+          </a:xfrm>
+          <a:prstGeom xmlns:a="http://schemas.openxmlformats.org/drawingml/2006/main" prst="rect">
+            <a:avLst/>
+          </a:prstGeom>
+          <a:solidFill xmlns:a="http://schemas.openxmlformats.org/drawingml/2006/main">
+            <a:srgbClr val="FFFFFF"/>
+          </a:solidFill>
+          <a:ln xmlns:a="http://schemas.openxmlformats.org/drawingml/2006/main" w="9525">
+            <a:solidFill>
+              <a:srgbClr val="B8BCC4"/>
+            </a:solidFill>
+            <a:prstDash val="solid"/>
+          </a:ln>
+        </p:spPr>
+      </p:sp>
+      <p:sp>
+        <p:nvSpPr>
+          <p:cNvPr id="12" name="">
+            <a:extLst xmlns:a="http://schemas.openxmlformats.org/drawingml/2006/main">
+              <a:ext uri="{FF2B5EF4-FFF2-40B4-BE49-F238E27FC236}">
+                <a16:creationId xmlns:a16="http://schemas.microsoft.com/office/drawing/2014/main" id="{79399056-7AC5-4F91-B5E9-04301A293840}"/>
+              </a:ext>
+            </a:extLst>
+          </p:cNvPr>
+          <p:cNvSpPr>
+            <a:spLocks xmlns:a="http://schemas.openxmlformats.org/drawingml/2006/main" noGrp="1"/>
+          </p:cNvSpPr>
+          <p:nvPr/>
+        </p:nvSpPr>
+        <p:spPr>
+          <a:xfrm xmlns:a="http://schemas.openxmlformats.org/drawingml/2006/main">
+            <a:off x="857250" y="3324225"/>
+            <a:ext cx="2305050" cy="266700"/>
+          </a:xfrm>
+          <a:prstGeom xmlns:a="http://schemas.openxmlformats.org/drawingml/2006/main" prst="rect">
+            <a:avLst/>
+          </a:prstGeom>
+          <a:noFill xmlns:a="http://schemas.openxmlformats.org/drawingml/2006/main"/>
+          <a:ln xmlns:a="http://schemas.openxmlformats.org/drawingml/2006/main" w="0">
+            <a:noFill/>
+            <a:prstDash val="solid"/>
+          </a:ln>
+        </p:spPr>
+        <p:txBody>
+          <a:bodyPr xmlns:a="http://schemas.openxmlformats.org/drawingml/2006/main"/>
+          <a:lstStyle xmlns:a="http://schemas.openxmlformats.org/drawingml/2006/main"/>
+          <a:p xmlns:a="http://schemas.openxmlformats.org/drawingml/2006/main">
+            <a:pPr algn="l">
+              <a:lnSpc>
+                <a:spcPct val="112000"/>
+              </a:lnSpc>
+              <a:buNone/>
+              <a:defRPr sz="1275" b="0">
+                <a:solidFill>
+                  <a:srgbClr val="555555"/>
+                </a:solidFill>
+                <a:latin typeface="Malgun Gothic"/>
+                <a:ea typeface="Malgun Gothic"/>
+                <a:cs typeface="Malgun Gothic"/>
+              </a:defRPr>
+            </a:pPr>
+            <a:r>
+              <a:rPr sz="1275" b="0">
+                <a:solidFill>
+                  <a:srgbClr val="555555"/>
+                </a:solidFill>
+                <a:latin typeface="Malgun Gothic"/>
+                <a:ea typeface="Malgun Gothic"/>
+                <a:cs typeface="Malgun Gothic"/>
+              </a:rPr>
+              <a:t>이어서 작업 요청</a:t>
+            </a:r>
+          </a:p>
+        </p:txBody>
+      </p:sp>
+      <p:sp>
+        <p:nvSpPr>
+          <p:cNvPr id="13" name="">
+            <a:extLst xmlns:a="http://schemas.openxmlformats.org/drawingml/2006/main">
+              <a:ext uri="{FF2B5EF4-FFF2-40B4-BE49-F238E27FC236}">
+                <a16:creationId xmlns:a16="http://schemas.microsoft.com/office/drawing/2014/main" id="{27E6F858-81D3-4A64-84C4-5E90B2E3D935}"/>
+              </a:ext>
+            </a:extLst>
+          </p:cNvPr>
+          <p:cNvSpPr>
+            <a:spLocks xmlns:a="http://schemas.openxmlformats.org/drawingml/2006/main" noGrp="1"/>
+          </p:cNvSpPr>
+          <p:nvPr/>
+        </p:nvSpPr>
+        <p:spPr>
+          <a:xfrm xmlns:a="http://schemas.openxmlformats.org/drawingml/2006/main">
+            <a:off x="3276600" y="3181350"/>
+            <a:ext cx="9525" cy="457200"/>
+          </a:xfrm>
+          <a:prstGeom xmlns:a="http://schemas.openxmlformats.org/drawingml/2006/main" prst="rect">
+            <a:avLst/>
+          </a:prstGeom>
+          <a:solidFill xmlns:a="http://schemas.openxmlformats.org/drawingml/2006/main">
+            <a:srgbClr val="B8BCC4"/>
+          </a:solidFill>
+          <a:ln xmlns:a="http://schemas.openxmlformats.org/drawingml/2006/main" w="0">
+            <a:noFill/>
+            <a:prstDash val="solid"/>
+          </a:ln>
+        </p:spPr>
+      </p:sp>
+      <p:sp>
+        <p:nvSpPr>
+          <p:cNvPr id="14" name="">
+            <a:extLst xmlns:a="http://schemas.openxmlformats.org/drawingml/2006/main">
+              <a:ext uri="{FF2B5EF4-FFF2-40B4-BE49-F238E27FC236}">
+                <a16:creationId xmlns:a16="http://schemas.microsoft.com/office/drawing/2014/main" id="{4AD53BE3-6139-4A46-A2A5-ACFDB63A10A6}"/>
+              </a:ext>
+            </a:extLst>
+          </p:cNvPr>
+          <p:cNvSpPr>
+            <a:spLocks xmlns:a="http://schemas.openxmlformats.org/drawingml/2006/main" noGrp="1"/>
+          </p:cNvSpPr>
+          <p:nvPr/>
+        </p:nvSpPr>
+        <p:spPr>
+          <a:xfrm xmlns:a="http://schemas.openxmlformats.org/drawingml/2006/main">
+            <a:off x="3429000" y="3324225"/>
+            <a:ext cx="3543300" cy="266700"/>
+          </a:xfrm>
+          <a:prstGeom xmlns:a="http://schemas.openxmlformats.org/drawingml/2006/main" prst="rect">
+            <a:avLst/>
+          </a:prstGeom>
+          <a:noFill xmlns:a="http://schemas.openxmlformats.org/drawingml/2006/main"/>
+          <a:ln xmlns:a="http://schemas.openxmlformats.org/drawingml/2006/main" w="0">
+            <a:noFill/>
+            <a:prstDash val="solid"/>
+          </a:ln>
+        </p:spPr>
+        <p:txBody>
+          <a:bodyPr xmlns:a="http://schemas.openxmlformats.org/drawingml/2006/main"/>
+          <a:lstStyle xmlns:a="http://schemas.openxmlformats.org/drawingml/2006/main"/>
+          <a:p xmlns:a="http://schemas.openxmlformats.org/drawingml/2006/main">
+            <a:pPr algn="l">
+              <a:lnSpc>
+                <a:spcPct val="112000"/>
+              </a:lnSpc>
+              <a:buNone/>
+              <a:defRPr sz="1275" b="0">
+                <a:solidFill>
+                  <a:srgbClr val="555555"/>
+                </a:solidFill>
+                <a:latin typeface="Malgun Gothic"/>
+                <a:ea typeface="Malgun Gothic"/>
+                <a:cs typeface="Malgun Gothic"/>
+              </a:defRPr>
+            </a:pPr>
+            <a:r>
+              <a:rPr sz="1275" b="0">
+                <a:solidFill>
+                  <a:srgbClr val="555555"/>
+                </a:solidFill>
+                <a:latin typeface="Malgun Gothic"/>
+                <a:ea typeface="Malgun Gothic"/>
+                <a:cs typeface="Malgun Gothic"/>
+              </a:rPr>
+              <a:t>ctxdb INDEX→L2 로드</a:t>
+            </a:r>
+          </a:p>
+        </p:txBody>
+      </p:sp>
+      <p:sp>
+        <p:nvSpPr>
+          <p:cNvPr id="15" name="">
+            <a:extLst xmlns:a="http://schemas.openxmlformats.org/drawingml/2006/main">
+              <a:ext uri="{FF2B5EF4-FFF2-40B4-BE49-F238E27FC236}">
+                <a16:creationId xmlns:a16="http://schemas.microsoft.com/office/drawing/2014/main" id="{A4F1BE40-BF2F-4658-83E4-C1D1C17BED37}"/>
+              </a:ext>
+            </a:extLst>
+          </p:cNvPr>
+          <p:cNvSpPr>
+            <a:spLocks xmlns:a="http://schemas.openxmlformats.org/drawingml/2006/main" noGrp="1"/>
+          </p:cNvSpPr>
+          <p:nvPr/>
+        </p:nvSpPr>
+        <p:spPr>
+          <a:xfrm xmlns:a="http://schemas.openxmlformats.org/drawingml/2006/main">
+            <a:off x="7086600" y="3181350"/>
+            <a:ext cx="9525" cy="457200"/>
+          </a:xfrm>
+          <a:prstGeom xmlns:a="http://schemas.openxmlformats.org/drawingml/2006/main" prst="rect">
+            <a:avLst/>
+          </a:prstGeom>
+          <a:solidFill xmlns:a="http://schemas.openxmlformats.org/drawingml/2006/main">
+            <a:srgbClr val="B8BCC4"/>
+          </a:solidFill>
+          <a:ln xmlns:a="http://schemas.openxmlformats.org/drawingml/2006/main" w="0">
+            <a:noFill/>
+            <a:prstDash val="solid"/>
+          </a:ln>
+        </p:spPr>
+      </p:sp>
+      <p:sp>
+        <p:nvSpPr>
+          <p:cNvPr id="16" name="">
+            <a:extLst xmlns:a="http://schemas.openxmlformats.org/drawingml/2006/main">
+              <a:ext uri="{FF2B5EF4-FFF2-40B4-BE49-F238E27FC236}">
+                <a16:creationId xmlns:a16="http://schemas.microsoft.com/office/drawing/2014/main" id="{7A9F533B-D926-47CB-889B-4ABA650EAEEB}"/>
+              </a:ext>
+            </a:extLst>
+          </p:cNvPr>
+          <p:cNvSpPr>
+            <a:spLocks xmlns:a="http://schemas.openxmlformats.org/drawingml/2006/main" noGrp="1"/>
+          </p:cNvSpPr>
+          <p:nvPr/>
+        </p:nvSpPr>
+        <p:spPr>
+          <a:xfrm xmlns:a="http://schemas.openxmlformats.org/drawingml/2006/main">
+            <a:off x="7239000" y="3324225"/>
+            <a:ext cx="3448050" cy="266700"/>
+          </a:xfrm>
+          <a:prstGeom xmlns:a="http://schemas.openxmlformats.org/drawingml/2006/main" prst="rect">
+            <a:avLst/>
+          </a:prstGeom>
+          <a:noFill xmlns:a="http://schemas.openxmlformats.org/drawingml/2006/main"/>
+          <a:ln xmlns:a="http://schemas.openxmlformats.org/drawingml/2006/main" w="0">
+            <a:noFill/>
+            <a:prstDash val="solid"/>
+          </a:ln>
+        </p:spPr>
+        <p:txBody>
+          <a:bodyPr xmlns:a="http://schemas.openxmlformats.org/drawingml/2006/main"/>
+          <a:lstStyle xmlns:a="http://schemas.openxmlformats.org/drawingml/2006/main"/>
+          <a:p xmlns:a="http://schemas.openxmlformats.org/drawingml/2006/main">
+            <a:pPr algn="l">
+              <a:lnSpc>
+                <a:spcPct val="112000"/>
+              </a:lnSpc>
+              <a:buNone/>
+              <a:defRPr sz="1275" b="0">
+                <a:solidFill>
+                  <a:srgbClr val="555555"/>
+                </a:solidFill>
+                <a:latin typeface="Malgun Gothic"/>
+                <a:ea typeface="Malgun Gothic"/>
+                <a:cs typeface="Malgun Gothic"/>
+              </a:defRPr>
+            </a:pPr>
+            <a:r>
+              <a:rPr sz="1275" b="0">
+                <a:solidFill>
+                  <a:srgbClr val="555555"/>
+                </a:solidFill>
+                <a:latin typeface="Malgun Gothic"/>
+                <a:ea typeface="Malgun Gothic"/>
+                <a:cs typeface="Malgun Gothic"/>
+              </a:rPr>
+              <a:t>원문 기록부터 재구성</a:t>
+            </a:r>
+          </a:p>
+        </p:txBody>
+      </p:sp>
+      <p:sp>
+        <p:nvSpPr>
+          <p:cNvPr id="17" name="">
+            <a:extLst xmlns:a="http://schemas.openxmlformats.org/drawingml/2006/main">
+              <a:ext uri="{FF2B5EF4-FFF2-40B4-BE49-F238E27FC236}">
+                <a16:creationId xmlns:a16="http://schemas.microsoft.com/office/drawing/2014/main" id="{A939033A-2EC4-4328-8FB1-6BDF5C6726E5}"/>
+              </a:ext>
+            </a:extLst>
+          </p:cNvPr>
+          <p:cNvSpPr>
+            <a:spLocks xmlns:a="http://schemas.openxmlformats.org/drawingml/2006/main" noGrp="1"/>
+          </p:cNvSpPr>
+          <p:nvPr/>
+        </p:nvSpPr>
+        <p:spPr>
+          <a:xfrm xmlns:a="http://schemas.openxmlformats.org/drawingml/2006/main">
+            <a:off x="704850" y="3638550"/>
+            <a:ext cx="10096500" cy="457200"/>
+          </a:xfrm>
+          <a:prstGeom xmlns:a="http://schemas.openxmlformats.org/drawingml/2006/main" prst="rect">
+            <a:avLst/>
+          </a:prstGeom>
+          <a:solidFill xmlns:a="http://schemas.openxmlformats.org/drawingml/2006/main">
+            <a:srgbClr val="FFFFFF"/>
+          </a:solidFill>
+          <a:ln xmlns:a="http://schemas.openxmlformats.org/drawingml/2006/main" w="9525">
+            <a:solidFill>
+              <a:srgbClr val="B8BCC4"/>
+            </a:solidFill>
+            <a:prstDash val="solid"/>
+          </a:ln>
+        </p:spPr>
+      </p:sp>
+      <p:sp>
+        <p:nvSpPr>
+          <p:cNvPr id="18" name="">
+            <a:extLst xmlns:a="http://schemas.openxmlformats.org/drawingml/2006/main">
+              <a:ext uri="{FF2B5EF4-FFF2-40B4-BE49-F238E27FC236}">
+                <a16:creationId xmlns:a16="http://schemas.microsoft.com/office/drawing/2014/main" id="{DAD8FE14-BF86-47CB-A675-1E9994EA6E67}"/>
+              </a:ext>
+            </a:extLst>
+          </p:cNvPr>
+          <p:cNvSpPr>
+            <a:spLocks xmlns:a="http://schemas.openxmlformats.org/drawingml/2006/main" noGrp="1"/>
+          </p:cNvSpPr>
+          <p:nvPr/>
+        </p:nvSpPr>
+        <p:spPr>
+          <a:xfrm xmlns:a="http://schemas.openxmlformats.org/drawingml/2006/main">
+            <a:off x="857250" y="3781425"/>
+            <a:ext cx="2305050" cy="266700"/>
+          </a:xfrm>
+          <a:prstGeom xmlns:a="http://schemas.openxmlformats.org/drawingml/2006/main" prst="rect">
+            <a:avLst/>
+          </a:prstGeom>
+          <a:noFill xmlns:a="http://schemas.openxmlformats.org/drawingml/2006/main"/>
+          <a:ln xmlns:a="http://schemas.openxmlformats.org/drawingml/2006/main" w="0">
+            <a:noFill/>
+            <a:prstDash val="solid"/>
+          </a:ln>
+        </p:spPr>
+        <p:txBody>
+          <a:bodyPr xmlns:a="http://schemas.openxmlformats.org/drawingml/2006/main"/>
+          <a:lstStyle xmlns:a="http://schemas.openxmlformats.org/drawingml/2006/main"/>
+          <a:p xmlns:a="http://schemas.openxmlformats.org/drawingml/2006/main">
+            <a:pPr algn="l">
+              <a:lnSpc>
+                <a:spcPct val="112000"/>
+              </a:lnSpc>
+              <a:buNone/>
+              <a:defRPr sz="1275" b="0">
+                <a:solidFill>
+                  <a:srgbClr val="555555"/>
+                </a:solidFill>
+                <a:latin typeface="Malgun Gothic"/>
+                <a:ea typeface="Malgun Gothic"/>
+                <a:cs typeface="Malgun Gothic"/>
+              </a:defRPr>
+            </a:pPr>
+            <a:r>
+              <a:rPr sz="1275" b="0">
+                <a:solidFill>
+                  <a:srgbClr val="555555"/>
+                </a:solidFill>
+                <a:latin typeface="Malgun Gothic"/>
+                <a:ea typeface="Malgun Gothic"/>
+                <a:cs typeface="Malgun Gothic"/>
+              </a:rPr>
+              <a:t>세션 길어짐</a:t>
+            </a:r>
+          </a:p>
+        </p:txBody>
+      </p:sp>
+      <p:sp>
+        <p:nvSpPr>
+          <p:cNvPr id="19" name="">
+            <a:extLst xmlns:a="http://schemas.openxmlformats.org/drawingml/2006/main">
+              <a:ext uri="{FF2B5EF4-FFF2-40B4-BE49-F238E27FC236}">
+                <a16:creationId xmlns:a16="http://schemas.microsoft.com/office/drawing/2014/main" id="{7A97CFB4-9DDE-402E-9105-C998EA0F6C81}"/>
+              </a:ext>
+            </a:extLst>
+          </p:cNvPr>
+          <p:cNvSpPr>
+            <a:spLocks xmlns:a="http://schemas.openxmlformats.org/drawingml/2006/main" noGrp="1"/>
+          </p:cNvSpPr>
+          <p:nvPr/>
+        </p:nvSpPr>
+        <p:spPr>
+          <a:xfrm xmlns:a="http://schemas.openxmlformats.org/drawingml/2006/main">
+            <a:off x="3276600" y="3638550"/>
+            <a:ext cx="9525" cy="457200"/>
+          </a:xfrm>
+          <a:prstGeom xmlns:a="http://schemas.openxmlformats.org/drawingml/2006/main" prst="rect">
+            <a:avLst/>
+          </a:prstGeom>
+          <a:solidFill xmlns:a="http://schemas.openxmlformats.org/drawingml/2006/main">
+            <a:srgbClr val="B8BCC4"/>
+          </a:solidFill>
+          <a:ln xmlns:a="http://schemas.openxmlformats.org/drawingml/2006/main" w="0">
+            <a:noFill/>
+            <a:prstDash val="solid"/>
+          </a:ln>
+        </p:spPr>
+      </p:sp>
+      <p:sp>
+        <p:nvSpPr>
+          <p:cNvPr id="20" name="">
+            <a:extLst xmlns:a="http://schemas.openxmlformats.org/drawingml/2006/main">
+              <a:ext uri="{FF2B5EF4-FFF2-40B4-BE49-F238E27FC236}">
+                <a16:creationId xmlns:a16="http://schemas.microsoft.com/office/drawing/2014/main" id="{13703AEB-4B33-4F00-A64C-206851C3BA06}"/>
+              </a:ext>
+            </a:extLst>
+          </p:cNvPr>
+          <p:cNvSpPr>
+            <a:spLocks xmlns:a="http://schemas.openxmlformats.org/drawingml/2006/main" noGrp="1"/>
+          </p:cNvSpPr>
+          <p:nvPr/>
+        </p:nvSpPr>
+        <p:spPr>
+          <a:xfrm xmlns:a="http://schemas.openxmlformats.org/drawingml/2006/main">
+            <a:off x="3429000" y="3781425"/>
+            <a:ext cx="3543300" cy="266700"/>
+          </a:xfrm>
+          <a:prstGeom xmlns:a="http://schemas.openxmlformats.org/drawingml/2006/main" prst="rect">
+            <a:avLst/>
+          </a:prstGeom>
+          <a:noFill xmlns:a="http://schemas.openxmlformats.org/drawingml/2006/main"/>
+          <a:ln xmlns:a="http://schemas.openxmlformats.org/drawingml/2006/main" w="0">
+            <a:noFill/>
+            <a:prstDash val="solid"/>
+          </a:ln>
+        </p:spPr>
+        <p:txBody>
+          <a:bodyPr xmlns:a="http://schemas.openxmlformats.org/drawingml/2006/main"/>
+          <a:lstStyle xmlns:a="http://schemas.openxmlformats.org/drawingml/2006/main"/>
+          <a:p xmlns:a="http://schemas.openxmlformats.org/drawingml/2006/main">
+            <a:pPr algn="l">
+              <a:lnSpc>
+                <a:spcPct val="112000"/>
+              </a:lnSpc>
+              <a:buNone/>
+              <a:defRPr sz="1275" b="0">
+                <a:solidFill>
+                  <a:srgbClr val="555555"/>
+                </a:solidFill>
+                <a:latin typeface="Malgun Gothic"/>
+                <a:ea typeface="Malgun Gothic"/>
+                <a:cs typeface="Malgun Gothic"/>
+              </a:defRPr>
+            </a:pPr>
+            <a:r>
+              <a:rPr sz="1275" b="0">
+                <a:solidFill>
+                  <a:srgbClr val="555555"/>
+                </a:solidFill>
+                <a:latin typeface="Malgun Gothic"/>
+                <a:ea typeface="Malgun Gothic"/>
+                <a:cs typeface="Malgun Gothic"/>
+              </a:rPr>
+              <a:t>context-saver로 L2 저장</a:t>
+            </a:r>
+          </a:p>
+        </p:txBody>
+      </p:sp>
+      <p:sp>
+        <p:nvSpPr>
+          <p:cNvPr id="21" name="">
+            <a:extLst xmlns:a="http://schemas.openxmlformats.org/drawingml/2006/main">
+              <a:ext uri="{FF2B5EF4-FFF2-40B4-BE49-F238E27FC236}">
+                <a16:creationId xmlns:a16="http://schemas.microsoft.com/office/drawing/2014/main" id="{434DFD63-2D03-4FA2-87EE-7F7B62120151}"/>
+              </a:ext>
+            </a:extLst>
+          </p:cNvPr>
+          <p:cNvSpPr>
+            <a:spLocks xmlns:a="http://schemas.openxmlformats.org/drawingml/2006/main" noGrp="1"/>
+          </p:cNvSpPr>
+          <p:nvPr/>
+        </p:nvSpPr>
+        <p:spPr>
+          <a:xfrm xmlns:a="http://schemas.openxmlformats.org/drawingml/2006/main">
+            <a:off x="7086600" y="3638550"/>
+            <a:ext cx="9525" cy="457200"/>
+          </a:xfrm>
+          <a:prstGeom xmlns:a="http://schemas.openxmlformats.org/drawingml/2006/main" prst="rect">
+            <a:avLst/>
+          </a:prstGeom>
+          <a:solidFill xmlns:a="http://schemas.openxmlformats.org/drawingml/2006/main">
+            <a:srgbClr val="B8BCC4"/>
+          </a:solidFill>
+          <a:ln xmlns:a="http://schemas.openxmlformats.org/drawingml/2006/main" w="0">
+            <a:noFill/>
+            <a:prstDash val="solid"/>
+          </a:ln>
+        </p:spPr>
+      </p:sp>
+      <p:sp>
+        <p:nvSpPr>
+          <p:cNvPr id="22" name="">
+            <a:extLst xmlns:a="http://schemas.openxmlformats.org/drawingml/2006/main">
+              <a:ext uri="{FF2B5EF4-FFF2-40B4-BE49-F238E27FC236}">
+                <a16:creationId xmlns:a16="http://schemas.microsoft.com/office/drawing/2014/main" id="{2F7EE00E-7A8B-40B0-A580-050261747C5E}"/>
+              </a:ext>
+            </a:extLst>
+          </p:cNvPr>
+          <p:cNvSpPr>
+            <a:spLocks xmlns:a="http://schemas.openxmlformats.org/drawingml/2006/main" noGrp="1"/>
+          </p:cNvSpPr>
+          <p:nvPr/>
+        </p:nvSpPr>
+        <p:spPr>
+          <a:xfrm xmlns:a="http://schemas.openxmlformats.org/drawingml/2006/main">
+            <a:off x="7239000" y="3781425"/>
+            <a:ext cx="3448050" cy="266700"/>
+          </a:xfrm>
+          <a:prstGeom xmlns:a="http://schemas.openxmlformats.org/drawingml/2006/main" prst="rect">
+            <a:avLst/>
+          </a:prstGeom>
+          <a:noFill xmlns:a="http://schemas.openxmlformats.org/drawingml/2006/main"/>
+          <a:ln xmlns:a="http://schemas.openxmlformats.org/drawingml/2006/main" w="0">
+            <a:noFill/>
+            <a:prstDash val="solid"/>
+          </a:ln>
+        </p:spPr>
+        <p:txBody>
+          <a:bodyPr xmlns:a="http://schemas.openxmlformats.org/drawingml/2006/main"/>
+          <a:lstStyle xmlns:a="http://schemas.openxmlformats.org/drawingml/2006/main"/>
+          <a:p xmlns:a="http://schemas.openxmlformats.org/drawingml/2006/main">
+            <a:pPr algn="l">
+              <a:lnSpc>
+                <a:spcPct val="112000"/>
+              </a:lnSpc>
+              <a:buNone/>
+              <a:defRPr sz="1275" b="0">
+                <a:solidFill>
+                  <a:srgbClr val="555555"/>
+                </a:solidFill>
+                <a:latin typeface="Malgun Gothic"/>
+                <a:ea typeface="Malgun Gothic"/>
+                <a:cs typeface="Malgun Gothic"/>
+              </a:defRPr>
+            </a:pPr>
+            <a:r>
+              <a:rPr sz="1275" b="0">
+                <a:solidFill>
+                  <a:srgbClr val="555555"/>
+                </a:solidFill>
+                <a:latin typeface="Malgun Gothic"/>
+                <a:ea typeface="Malgun Gothic"/>
+                <a:cs typeface="Malgun Gothic"/>
+              </a:rPr>
+              <a:t>대화만 믿고 종료</a:t>
+            </a:r>
+          </a:p>
+        </p:txBody>
+      </p:sp>
+      <p:sp>
+        <p:nvSpPr>
+          <p:cNvPr id="23" name="">
+            <a:extLst xmlns:a="http://schemas.openxmlformats.org/drawingml/2006/main">
+              <a:ext uri="{FF2B5EF4-FFF2-40B4-BE49-F238E27FC236}">
+                <a16:creationId xmlns:a16="http://schemas.microsoft.com/office/drawing/2014/main" id="{432662F1-FA56-4AEA-8EE0-836F021FAE5B}"/>
+              </a:ext>
+            </a:extLst>
+          </p:cNvPr>
+          <p:cNvSpPr>
+            <a:spLocks xmlns:a="http://schemas.openxmlformats.org/drawingml/2006/main" noGrp="1"/>
+          </p:cNvSpPr>
+          <p:nvPr/>
+        </p:nvSpPr>
+        <p:spPr>
+          <a:xfrm xmlns:a="http://schemas.openxmlformats.org/drawingml/2006/main">
+            <a:off x="704850" y="4095750"/>
+            <a:ext cx="10096500" cy="457200"/>
+          </a:xfrm>
+          <a:prstGeom xmlns:a="http://schemas.openxmlformats.org/drawingml/2006/main" prst="rect">
+            <a:avLst/>
+          </a:prstGeom>
+          <a:solidFill xmlns:a="http://schemas.openxmlformats.org/drawingml/2006/main">
+            <a:srgbClr val="FFFFFF"/>
+          </a:solidFill>
+          <a:ln xmlns:a="http://schemas.openxmlformats.org/drawingml/2006/main" w="9525">
+            <a:solidFill>
+              <a:srgbClr val="B8BCC4"/>
+            </a:solidFill>
+            <a:prstDash val="solid"/>
+          </a:ln>
+        </p:spPr>
+      </p:sp>
+      <p:sp>
+        <p:nvSpPr>
+          <p:cNvPr id="24" name="">
+            <a:extLst xmlns:a="http://schemas.openxmlformats.org/drawingml/2006/main">
+              <a:ext uri="{FF2B5EF4-FFF2-40B4-BE49-F238E27FC236}">
+                <a16:creationId xmlns:a16="http://schemas.microsoft.com/office/drawing/2014/main" id="{DC9E770F-EFBD-48D7-8B2D-0B8D6505F24A}"/>
+              </a:ext>
+            </a:extLst>
+          </p:cNvPr>
+          <p:cNvSpPr>
+            <a:spLocks xmlns:a="http://schemas.openxmlformats.org/drawingml/2006/main" noGrp="1"/>
+          </p:cNvSpPr>
+          <p:nvPr/>
+        </p:nvSpPr>
+        <p:spPr>
+          <a:xfrm xmlns:a="http://schemas.openxmlformats.org/drawingml/2006/main">
+            <a:off x="857250" y="4238625"/>
+            <a:ext cx="2305050" cy="266700"/>
+          </a:xfrm>
+          <a:prstGeom xmlns:a="http://schemas.openxmlformats.org/drawingml/2006/main" prst="rect">
+            <a:avLst/>
+          </a:prstGeom>
+          <a:noFill xmlns:a="http://schemas.openxmlformats.org/drawingml/2006/main"/>
+          <a:ln xmlns:a="http://schemas.openxmlformats.org/drawingml/2006/main" w="0">
+            <a:noFill/>
+            <a:prstDash val="solid"/>
+          </a:ln>
+        </p:spPr>
+        <p:txBody>
+          <a:bodyPr xmlns:a="http://schemas.openxmlformats.org/drawingml/2006/main"/>
+          <a:lstStyle xmlns:a="http://schemas.openxmlformats.org/drawingml/2006/main"/>
+          <a:p xmlns:a="http://schemas.openxmlformats.org/drawingml/2006/main">
+            <a:pPr algn="l">
+              <a:lnSpc>
+                <a:spcPct val="112000"/>
+              </a:lnSpc>
+              <a:buNone/>
+              <a:defRPr sz="1275" b="0">
+                <a:solidFill>
+                  <a:srgbClr val="555555"/>
+                </a:solidFill>
+                <a:latin typeface="Malgun Gothic"/>
+                <a:ea typeface="Malgun Gothic"/>
+                <a:cs typeface="Malgun Gothic"/>
+              </a:defRPr>
+            </a:pPr>
+            <a:r>
+              <a:rPr sz="1275" b="0">
+                <a:solidFill>
+                  <a:srgbClr val="555555"/>
+                </a:solidFill>
+                <a:latin typeface="Malgun Gothic"/>
+                <a:ea typeface="Malgun Gothic"/>
+                <a:cs typeface="Malgun Gothic"/>
+              </a:rPr>
+              <a:t>/checkpoint</a:t>
+            </a:r>
+          </a:p>
+        </p:txBody>
+      </p:sp>
+      <p:sp>
+        <p:nvSpPr>
+          <p:cNvPr id="25" name="">
+            <a:extLst xmlns:a="http://schemas.openxmlformats.org/drawingml/2006/main">
+              <a:ext uri="{FF2B5EF4-FFF2-40B4-BE49-F238E27FC236}">
+                <a16:creationId xmlns:a16="http://schemas.microsoft.com/office/drawing/2014/main" id="{06DF79E1-A628-418F-B57C-26AC111C14F1}"/>
+              </a:ext>
+            </a:extLst>
+          </p:cNvPr>
+          <p:cNvSpPr>
+            <a:spLocks xmlns:a="http://schemas.openxmlformats.org/drawingml/2006/main" noGrp="1"/>
+          </p:cNvSpPr>
+          <p:nvPr/>
+        </p:nvSpPr>
+        <p:spPr>
+          <a:xfrm xmlns:a="http://schemas.openxmlformats.org/drawingml/2006/main">
+            <a:off x="3276600" y="4095750"/>
+            <a:ext cx="9525" cy="457200"/>
+          </a:xfrm>
+          <a:prstGeom xmlns:a="http://schemas.openxmlformats.org/drawingml/2006/main" prst="rect">
+            <a:avLst/>
+          </a:prstGeom>
+          <a:solidFill xmlns:a="http://schemas.openxmlformats.org/drawingml/2006/main">
+            <a:srgbClr val="B8BCC4"/>
+          </a:solidFill>
+          <a:ln xmlns:a="http://schemas.openxmlformats.org/drawingml/2006/main" w="0">
+            <a:noFill/>
+            <a:prstDash val="solid"/>
+          </a:ln>
+        </p:spPr>
+      </p:sp>
+      <p:sp>
+        <p:nvSpPr>
+          <p:cNvPr id="26" name="">
+            <a:extLst xmlns:a="http://schemas.openxmlformats.org/drawingml/2006/main">
+              <a:ext uri="{FF2B5EF4-FFF2-40B4-BE49-F238E27FC236}">
+                <a16:creationId xmlns:a16="http://schemas.microsoft.com/office/drawing/2014/main" id="{243F808A-523B-4093-B06F-59F0AA50EF8F}"/>
+              </a:ext>
+            </a:extLst>
+          </p:cNvPr>
+          <p:cNvSpPr>
+            <a:spLocks xmlns:a="http://schemas.openxmlformats.org/drawingml/2006/main" noGrp="1"/>
+          </p:cNvSpPr>
+          <p:nvPr/>
+        </p:nvSpPr>
+        <p:spPr>
+          <a:xfrm xmlns:a="http://schemas.openxmlformats.org/drawingml/2006/main">
+            <a:off x="3429000" y="4238625"/>
+            <a:ext cx="3543300" cy="266700"/>
+          </a:xfrm>
+          <a:prstGeom xmlns:a="http://schemas.openxmlformats.org/drawingml/2006/main" prst="rect">
+            <a:avLst/>
+          </a:prstGeom>
+          <a:noFill xmlns:a="http://schemas.openxmlformats.org/drawingml/2006/main"/>
+          <a:ln xmlns:a="http://schemas.openxmlformats.org/drawingml/2006/main" w="0">
+            <a:noFill/>
+            <a:prstDash val="solid"/>
+          </a:ln>
+        </p:spPr>
+        <p:txBody>
+          <a:bodyPr xmlns:a="http://schemas.openxmlformats.org/drawingml/2006/main"/>
+          <a:lstStyle xmlns:a="http://schemas.openxmlformats.org/drawingml/2006/main"/>
+          <a:p xmlns:a="http://schemas.openxmlformats.org/drawingml/2006/main">
+            <a:pPr algn="l">
+              <a:lnSpc>
+                <a:spcPct val="112000"/>
+              </a:lnSpc>
+              <a:buNone/>
+              <a:defRPr sz="1275" b="0">
+                <a:solidFill>
+                  <a:srgbClr val="555555"/>
+                </a:solidFill>
+                <a:latin typeface="Malgun Gothic"/>
+                <a:ea typeface="Malgun Gothic"/>
+                <a:cs typeface="Malgun Gothic"/>
+              </a:defRPr>
+            </a:pPr>
+            <a:r>
+              <a:rPr sz="1275" b="0">
+                <a:solidFill>
+                  <a:srgbClr val="555555"/>
+                </a:solidFill>
+                <a:latin typeface="Malgun Gothic"/>
+                <a:ea typeface="Malgun Gothic"/>
+                <a:cs typeface="Malgun Gothic"/>
+              </a:rPr>
+              <a:t>lane/codemap/meta + ctxdb 저장</a:t>
+            </a:r>
+          </a:p>
+        </p:txBody>
+      </p:sp>
+      <p:sp>
+        <p:nvSpPr>
+          <p:cNvPr id="27" name="">
+            <a:extLst xmlns:a="http://schemas.openxmlformats.org/drawingml/2006/main">
+              <a:ext uri="{FF2B5EF4-FFF2-40B4-BE49-F238E27FC236}">
+                <a16:creationId xmlns:a16="http://schemas.microsoft.com/office/drawing/2014/main" id="{56658F41-6AB1-4298-925E-743C512B6794}"/>
+              </a:ext>
+            </a:extLst>
+          </p:cNvPr>
+          <p:cNvSpPr>
+            <a:spLocks xmlns:a="http://schemas.openxmlformats.org/drawingml/2006/main" noGrp="1"/>
+          </p:cNvSpPr>
+          <p:nvPr/>
+        </p:nvSpPr>
+        <p:spPr>
+          <a:xfrm xmlns:a="http://schemas.openxmlformats.org/drawingml/2006/main">
+            <a:off x="7086600" y="4095750"/>
+            <a:ext cx="9525" cy="457200"/>
+          </a:xfrm>
+          <a:prstGeom xmlns:a="http://schemas.openxmlformats.org/drawingml/2006/main" prst="rect">
+            <a:avLst/>
+          </a:prstGeom>
+          <a:solidFill xmlns:a="http://schemas.openxmlformats.org/drawingml/2006/main">
+            <a:srgbClr val="B8BCC4"/>
+          </a:solidFill>
+          <a:ln xmlns:a="http://schemas.openxmlformats.org/drawingml/2006/main" w="0">
+            <a:noFill/>
+            <a:prstDash val="solid"/>
+          </a:ln>
+        </p:spPr>
+      </p:sp>
+      <p:sp>
+        <p:nvSpPr>
+          <p:cNvPr id="28" name="">
+            <a:extLst xmlns:a="http://schemas.openxmlformats.org/drawingml/2006/main">
+              <a:ext uri="{FF2B5EF4-FFF2-40B4-BE49-F238E27FC236}">
+                <a16:creationId xmlns:a16="http://schemas.microsoft.com/office/drawing/2014/main" id="{D5DCD15E-A61E-4F32-8D55-1643FC8C644A}"/>
+              </a:ext>
+            </a:extLst>
+          </p:cNvPr>
+          <p:cNvSpPr>
+            <a:spLocks xmlns:a="http://schemas.openxmlformats.org/drawingml/2006/main" noGrp="1"/>
+          </p:cNvSpPr>
+          <p:nvPr/>
+        </p:nvSpPr>
+        <p:spPr>
+          <a:xfrm xmlns:a="http://schemas.openxmlformats.org/drawingml/2006/main">
+            <a:off x="7239000" y="4238625"/>
+            <a:ext cx="3448050" cy="266700"/>
+          </a:xfrm>
+          <a:prstGeom xmlns:a="http://schemas.openxmlformats.org/drawingml/2006/main" prst="rect">
+            <a:avLst/>
+          </a:prstGeom>
+          <a:noFill xmlns:a="http://schemas.openxmlformats.org/drawingml/2006/main"/>
+          <a:ln xmlns:a="http://schemas.openxmlformats.org/drawingml/2006/main" w="0">
+            <a:noFill/>
+            <a:prstDash val="solid"/>
+          </a:ln>
+        </p:spPr>
+        <p:txBody>
+          <a:bodyPr xmlns:a="http://schemas.openxmlformats.org/drawingml/2006/main"/>
+          <a:lstStyle xmlns:a="http://schemas.openxmlformats.org/drawingml/2006/main"/>
+          <a:p xmlns:a="http://schemas.openxmlformats.org/drawingml/2006/main">
+            <a:pPr algn="l">
+              <a:lnSpc>
+                <a:spcPct val="112000"/>
+              </a:lnSpc>
+              <a:buNone/>
+              <a:defRPr sz="1275" b="0">
+                <a:solidFill>
+                  <a:srgbClr val="555555"/>
+                </a:solidFill>
+                <a:latin typeface="Malgun Gothic"/>
+                <a:ea typeface="Malgun Gothic"/>
+                <a:cs typeface="Malgun Gothic"/>
+              </a:defRPr>
+            </a:pPr>
+            <a:r>
+              <a:rPr sz="1275" b="0">
+                <a:solidFill>
+                  <a:srgbClr val="555555"/>
+                </a:solidFill>
+                <a:latin typeface="Malgun Gothic"/>
+                <a:ea typeface="Malgun Gothic"/>
+                <a:cs typeface="Malgun Gothic"/>
+              </a:rPr>
+              <a:t>정리 없이 계속 진행</a:t>
+            </a:r>
+          </a:p>
+        </p:txBody>
+      </p:sp>
+      <p:sp>
+        <p:nvSpPr>
+          <p:cNvPr id="29" name="">
+            <a:extLst xmlns:a="http://schemas.openxmlformats.org/drawingml/2006/main">
+              <a:ext uri="{FF2B5EF4-FFF2-40B4-BE49-F238E27FC236}">
+                <a16:creationId xmlns:a16="http://schemas.microsoft.com/office/drawing/2014/main" id="{CD39863C-C6E6-4114-8DA8-950C7FB24354}"/>
+              </a:ext>
+            </a:extLst>
+          </p:cNvPr>
+          <p:cNvSpPr>
+            <a:spLocks xmlns:a="http://schemas.openxmlformats.org/drawingml/2006/main" noGrp="1"/>
+          </p:cNvSpPr>
+          <p:nvPr/>
+        </p:nvSpPr>
+        <p:spPr>
+          <a:xfrm xmlns:a="http://schemas.openxmlformats.org/drawingml/2006/main">
+            <a:off x="704850" y="4552950"/>
+            <a:ext cx="10096500" cy="457200"/>
+          </a:xfrm>
+          <a:prstGeom xmlns:a="http://schemas.openxmlformats.org/drawingml/2006/main" prst="rect">
+            <a:avLst/>
+          </a:prstGeom>
+          <a:solidFill xmlns:a="http://schemas.openxmlformats.org/drawingml/2006/main">
+            <a:srgbClr val="FFFFFF"/>
+          </a:solidFill>
+          <a:ln xmlns:a="http://schemas.openxmlformats.org/drawingml/2006/main" w="9525">
+            <a:solidFill>
+              <a:srgbClr val="B8BCC4"/>
+            </a:solidFill>
+            <a:prstDash val="solid"/>
+          </a:ln>
+        </p:spPr>
+      </p:sp>
+      <p:sp>
+        <p:nvSpPr>
+          <p:cNvPr id="30" name="">
+            <a:extLst xmlns:a="http://schemas.openxmlformats.org/drawingml/2006/main">
+              <a:ext uri="{FF2B5EF4-FFF2-40B4-BE49-F238E27FC236}">
+                <a16:creationId xmlns:a16="http://schemas.microsoft.com/office/drawing/2014/main" id="{8A470B58-4463-4924-9905-43C05DD17B55}"/>
+              </a:ext>
+            </a:extLst>
+          </p:cNvPr>
+          <p:cNvSpPr>
+            <a:spLocks xmlns:a="http://schemas.openxmlformats.org/drawingml/2006/main" noGrp="1"/>
+          </p:cNvSpPr>
+          <p:nvPr/>
+        </p:nvSpPr>
+        <p:spPr>
+          <a:xfrm xmlns:a="http://schemas.openxmlformats.org/drawingml/2006/main">
+            <a:off x="857250" y="4695825"/>
+            <a:ext cx="2305050" cy="266700"/>
+          </a:xfrm>
+          <a:prstGeom xmlns:a="http://schemas.openxmlformats.org/drawingml/2006/main" prst="rect">
+            <a:avLst/>
+          </a:prstGeom>
+          <a:noFill xmlns:a="http://schemas.openxmlformats.org/drawingml/2006/main"/>
+          <a:ln xmlns:a="http://schemas.openxmlformats.org/drawingml/2006/main" w="0">
+            <a:noFill/>
+            <a:prstDash val="solid"/>
+          </a:ln>
+        </p:spPr>
+        <p:txBody>
+          <a:bodyPr xmlns:a="http://schemas.openxmlformats.org/drawingml/2006/main"/>
+          <a:lstStyle xmlns:a="http://schemas.openxmlformats.org/drawingml/2006/main"/>
+          <a:p xmlns:a="http://schemas.openxmlformats.org/drawingml/2006/main">
+            <a:pPr algn="l">
+              <a:lnSpc>
+                <a:spcPct val="112000"/>
+              </a:lnSpc>
+              <a:buNone/>
+              <a:defRPr sz="1275" b="0">
+                <a:solidFill>
+                  <a:srgbClr val="555555"/>
+                </a:solidFill>
+                <a:latin typeface="Malgun Gothic"/>
+                <a:ea typeface="Malgun Gothic"/>
+                <a:cs typeface="Malgun Gothic"/>
+              </a:defRPr>
+            </a:pPr>
+            <a:r>
+              <a:rPr sz="1275" b="0">
+                <a:solidFill>
+                  <a:srgbClr val="555555"/>
+                </a:solidFill>
+                <a:latin typeface="Malgun Gothic"/>
+                <a:ea typeface="Malgun Gothic"/>
+                <a:cs typeface="Malgun Gothic"/>
+              </a:rPr>
+              <a:t>/handoff</a:t>
+            </a:r>
+          </a:p>
+        </p:txBody>
+      </p:sp>
+      <p:sp>
+        <p:nvSpPr>
+          <p:cNvPr id="31" name="">
+            <a:extLst xmlns:a="http://schemas.openxmlformats.org/drawingml/2006/main">
+              <a:ext uri="{FF2B5EF4-FFF2-40B4-BE49-F238E27FC236}">
+                <a16:creationId xmlns:a16="http://schemas.microsoft.com/office/drawing/2014/main" id="{B7C0AD8B-1898-4746-A3E9-EAF8B6B6EC89}"/>
+              </a:ext>
+            </a:extLst>
+          </p:cNvPr>
+          <p:cNvSpPr>
+            <a:spLocks xmlns:a="http://schemas.openxmlformats.org/drawingml/2006/main" noGrp="1"/>
+          </p:cNvSpPr>
+          <p:nvPr/>
+        </p:nvSpPr>
+        <p:spPr>
+          <a:xfrm xmlns:a="http://schemas.openxmlformats.org/drawingml/2006/main">
+            <a:off x="3276600" y="4552950"/>
+            <a:ext cx="9525" cy="457200"/>
+          </a:xfrm>
+          <a:prstGeom xmlns:a="http://schemas.openxmlformats.org/drawingml/2006/main" prst="rect">
+            <a:avLst/>
+          </a:prstGeom>
+          <a:solidFill xmlns:a="http://schemas.openxmlformats.org/drawingml/2006/main">
+            <a:srgbClr val="B8BCC4"/>
+          </a:solidFill>
+          <a:ln xmlns:a="http://schemas.openxmlformats.org/drawingml/2006/main" w="0">
+            <a:noFill/>
+            <a:prstDash val="solid"/>
+          </a:ln>
+        </p:spPr>
+      </p:sp>
+      <p:sp>
+        <p:nvSpPr>
+          <p:cNvPr id="32" name="">
+            <a:extLst xmlns:a="http://schemas.openxmlformats.org/drawingml/2006/main">
+              <a:ext uri="{FF2B5EF4-FFF2-40B4-BE49-F238E27FC236}">
+                <a16:creationId xmlns:a16="http://schemas.microsoft.com/office/drawing/2014/main" id="{3130485B-7CD9-4BD1-AA40-004BC625A8F0}"/>
+              </a:ext>
+            </a:extLst>
+          </p:cNvPr>
+          <p:cNvSpPr>
+            <a:spLocks xmlns:a="http://schemas.openxmlformats.org/drawingml/2006/main" noGrp="1"/>
+          </p:cNvSpPr>
+          <p:nvPr/>
+        </p:nvSpPr>
+        <p:spPr>
+          <a:xfrm xmlns:a="http://schemas.openxmlformats.org/drawingml/2006/main">
+            <a:off x="3429000" y="4695825"/>
+            <a:ext cx="3543300" cy="266700"/>
+          </a:xfrm>
+          <a:prstGeom xmlns:a="http://schemas.openxmlformats.org/drawingml/2006/main" prst="rect">
+            <a:avLst/>
+          </a:prstGeom>
+          <a:noFill xmlns:a="http://schemas.openxmlformats.org/drawingml/2006/main"/>
+          <a:ln xmlns:a="http://schemas.openxmlformats.org/drawingml/2006/main" w="0">
+            <a:noFill/>
+            <a:prstDash val="solid"/>
+          </a:ln>
+        </p:spPr>
+        <p:txBody>
+          <a:bodyPr xmlns:a="http://schemas.openxmlformats.org/drawingml/2006/main"/>
+          <a:lstStyle xmlns:a="http://schemas.openxmlformats.org/drawingml/2006/main"/>
+          <a:p xmlns:a="http://schemas.openxmlformats.org/drawingml/2006/main">
+            <a:pPr algn="l">
+              <a:lnSpc>
+                <a:spcPct val="112000"/>
+              </a:lnSpc>
+              <a:buNone/>
+              <a:defRPr sz="1275" b="0">
+                <a:solidFill>
+                  <a:srgbClr val="555555"/>
+                </a:solidFill>
+                <a:latin typeface="Malgun Gothic"/>
+                <a:ea typeface="Malgun Gothic"/>
+                <a:cs typeface="Malgun Gothic"/>
+              </a:defRPr>
+            </a:pPr>
+            <a:r>
+              <a:rPr sz="1275" b="0">
+                <a:solidFill>
+                  <a:srgbClr val="555555"/>
+                </a:solidFill>
+                <a:latin typeface="Malgun Gothic"/>
+                <a:ea typeface="Malgun Gothic"/>
+                <a:cs typeface="Malgun Gothic"/>
+              </a:rPr>
+              <a:t>snapshot + context-saver 저장</a:t>
+            </a:r>
+          </a:p>
+        </p:txBody>
+      </p:sp>
+      <p:sp>
+        <p:nvSpPr>
+          <p:cNvPr id="33" name="">
+            <a:extLst xmlns:a="http://schemas.openxmlformats.org/drawingml/2006/main">
+              <a:ext uri="{FF2B5EF4-FFF2-40B4-BE49-F238E27FC236}">
+                <a16:creationId xmlns:a16="http://schemas.microsoft.com/office/drawing/2014/main" id="{DE46A5BB-7DD9-4F77-9191-9A152914B921}"/>
+              </a:ext>
+            </a:extLst>
+          </p:cNvPr>
+          <p:cNvSpPr>
+            <a:spLocks xmlns:a="http://schemas.openxmlformats.org/drawingml/2006/main" noGrp="1"/>
+          </p:cNvSpPr>
+          <p:nvPr/>
+        </p:nvSpPr>
+        <p:spPr>
+          <a:xfrm xmlns:a="http://schemas.openxmlformats.org/drawingml/2006/main">
+            <a:off x="7086600" y="4552950"/>
+            <a:ext cx="9525" cy="457200"/>
+          </a:xfrm>
+          <a:prstGeom xmlns:a="http://schemas.openxmlformats.org/drawingml/2006/main" prst="rect">
+            <a:avLst/>
+          </a:prstGeom>
+          <a:solidFill xmlns:a="http://schemas.openxmlformats.org/drawingml/2006/main">
+            <a:srgbClr val="B8BCC4"/>
+          </a:solidFill>
+          <a:ln xmlns:a="http://schemas.openxmlformats.org/drawingml/2006/main" w="0">
+            <a:noFill/>
+            <a:prstDash val="solid"/>
+          </a:ln>
+        </p:spPr>
+      </p:sp>
+      <p:sp>
+        <p:nvSpPr>
+          <p:cNvPr id="34" name="">
+            <a:extLst xmlns:a="http://schemas.openxmlformats.org/drawingml/2006/main">
+              <a:ext uri="{FF2B5EF4-FFF2-40B4-BE49-F238E27FC236}">
+                <a16:creationId xmlns:a16="http://schemas.microsoft.com/office/drawing/2014/main" id="{3A9F18B3-D098-4DF8-ABE7-4E9857A5A418}"/>
+              </a:ext>
+            </a:extLst>
+          </p:cNvPr>
+          <p:cNvSpPr>
+            <a:spLocks xmlns:a="http://schemas.openxmlformats.org/drawingml/2006/main" noGrp="1"/>
+          </p:cNvSpPr>
+          <p:nvPr/>
+        </p:nvSpPr>
+        <p:spPr>
+          <a:xfrm xmlns:a="http://schemas.openxmlformats.org/drawingml/2006/main">
+            <a:off x="7239000" y="4695825"/>
+            <a:ext cx="3448050" cy="266700"/>
+          </a:xfrm>
+          <a:prstGeom xmlns:a="http://schemas.openxmlformats.org/drawingml/2006/main" prst="rect">
+            <a:avLst/>
+          </a:prstGeom>
+          <a:noFill xmlns:a="http://schemas.openxmlformats.org/drawingml/2006/main"/>
+          <a:ln xmlns:a="http://schemas.openxmlformats.org/drawingml/2006/main" w="0">
+            <a:noFill/>
+            <a:prstDash val="solid"/>
+          </a:ln>
+        </p:spPr>
+        <p:txBody>
+          <a:bodyPr xmlns:a="http://schemas.openxmlformats.org/drawingml/2006/main"/>
+          <a:lstStyle xmlns:a="http://schemas.openxmlformats.org/drawingml/2006/main"/>
+          <a:p xmlns:a="http://schemas.openxmlformats.org/drawingml/2006/main">
+            <a:pPr algn="l">
+              <a:lnSpc>
+                <a:spcPct val="112000"/>
+              </a:lnSpc>
+              <a:buNone/>
+              <a:defRPr sz="1275" b="0">
+                <a:solidFill>
+                  <a:srgbClr val="555555"/>
+                </a:solidFill>
+                <a:latin typeface="Malgun Gothic"/>
+                <a:ea typeface="Malgun Gothic"/>
+                <a:cs typeface="Malgun Gothic"/>
+              </a:defRPr>
+            </a:pPr>
+            <a:r>
+              <a:rPr sz="1275" b="0">
+                <a:solidFill>
+                  <a:srgbClr val="555555"/>
+                </a:solidFill>
+                <a:latin typeface="Malgun Gothic"/>
+                <a:ea typeface="Malgun Gothic"/>
+                <a:cs typeface="Malgun Gothic"/>
+              </a:rPr>
+              <a:t>이전 대화 재구성 맡기기</a:t>
+            </a:r>
+          </a:p>
+        </p:txBody>
+      </p:sp>
+      <p:sp>
+        <p:nvSpPr>
+          <p:cNvPr id="35" name="">
+            <a:extLst xmlns:a="http://schemas.openxmlformats.org/drawingml/2006/main">
+              <a:ext uri="{FF2B5EF4-FFF2-40B4-BE49-F238E27FC236}">
+                <a16:creationId xmlns:a16="http://schemas.microsoft.com/office/drawing/2014/main" id="{91D8432E-71FA-4DE9-814F-AD6C8665207A}"/>
+              </a:ext>
+            </a:extLst>
+          </p:cNvPr>
+          <p:cNvSpPr>
+            <a:spLocks xmlns:a="http://schemas.openxmlformats.org/drawingml/2006/main" noGrp="1"/>
+          </p:cNvSpPr>
+          <p:nvPr/>
+        </p:nvSpPr>
+        <p:spPr>
+          <a:xfrm xmlns:a="http://schemas.openxmlformats.org/drawingml/2006/main">
+            <a:off x="704850" y="5010150"/>
+            <a:ext cx="10096500" cy="457200"/>
+          </a:xfrm>
+          <a:prstGeom xmlns:a="http://schemas.openxmlformats.org/drawingml/2006/main" prst="rect">
+            <a:avLst/>
+          </a:prstGeom>
+          <a:solidFill xmlns:a="http://schemas.openxmlformats.org/drawingml/2006/main">
+            <a:srgbClr val="FFFFFF"/>
+          </a:solidFill>
+          <a:ln xmlns:a="http://schemas.openxmlformats.org/drawingml/2006/main" w="9525">
+            <a:solidFill>
+              <a:srgbClr val="B8BCC4"/>
+            </a:solidFill>
+            <a:prstDash val="solid"/>
+          </a:ln>
+        </p:spPr>
+      </p:sp>
+      <p:sp>
+        <p:nvSpPr>
+          <p:cNvPr id="36" name="">
+            <a:extLst xmlns:a="http://schemas.openxmlformats.org/drawingml/2006/main">
+              <a:ext uri="{FF2B5EF4-FFF2-40B4-BE49-F238E27FC236}">
+                <a16:creationId xmlns:a16="http://schemas.microsoft.com/office/drawing/2014/main" id="{C66067A3-2705-466F-9856-8B3F8F19EFDB}"/>
+              </a:ext>
+            </a:extLst>
+          </p:cNvPr>
+          <p:cNvSpPr>
+            <a:spLocks xmlns:a="http://schemas.openxmlformats.org/drawingml/2006/main" noGrp="1"/>
+          </p:cNvSpPr>
+          <p:nvPr/>
+        </p:nvSpPr>
+        <p:spPr>
+          <a:xfrm xmlns:a="http://schemas.openxmlformats.org/drawingml/2006/main">
+            <a:off x="857250" y="5153025"/>
+            <a:ext cx="2305050" cy="266700"/>
+          </a:xfrm>
+          <a:prstGeom xmlns:a="http://schemas.openxmlformats.org/drawingml/2006/main" prst="rect">
+            <a:avLst/>
+          </a:prstGeom>
+          <a:noFill xmlns:a="http://schemas.openxmlformats.org/drawingml/2006/main"/>
+          <a:ln xmlns:a="http://schemas.openxmlformats.org/drawingml/2006/main" w="0">
+            <a:noFill/>
+            <a:prstDash val="solid"/>
+          </a:ln>
+        </p:spPr>
+        <p:txBody>
+          <a:bodyPr xmlns:a="http://schemas.openxmlformats.org/drawingml/2006/main"/>
+          <a:lstStyle xmlns:a="http://schemas.openxmlformats.org/drawingml/2006/main"/>
+          <a:p xmlns:a="http://schemas.openxmlformats.org/drawingml/2006/main">
+            <a:pPr algn="l">
+              <a:lnSpc>
+                <a:spcPct val="112000"/>
+              </a:lnSpc>
+              <a:buNone/>
+              <a:defRPr sz="1275" b="0">
+                <a:solidFill>
+                  <a:srgbClr val="555555"/>
+                </a:solidFill>
+                <a:latin typeface="Malgun Gothic"/>
+                <a:ea typeface="Malgun Gothic"/>
+                <a:cs typeface="Malgun Gothic"/>
+              </a:defRPr>
+            </a:pPr>
+            <a:r>
+              <a:rPr sz="1275" b="0">
+                <a:solidFill>
+                  <a:srgbClr val="555555"/>
+                </a:solidFill>
+                <a:latin typeface="Malgun Gothic"/>
+                <a:ea typeface="Malgun Gothic"/>
+                <a:cs typeface="Malgun Gothic"/>
+              </a:rPr>
+              <a:t>코드 위치 탐색</a:t>
+            </a:r>
+          </a:p>
+        </p:txBody>
+      </p:sp>
+      <p:sp>
+        <p:nvSpPr>
+          <p:cNvPr id="37" name="">
+            <a:extLst xmlns:a="http://schemas.openxmlformats.org/drawingml/2006/main">
+              <a:ext uri="{FF2B5EF4-FFF2-40B4-BE49-F238E27FC236}">
+                <a16:creationId xmlns:a16="http://schemas.microsoft.com/office/drawing/2014/main" id="{E04722BD-0D90-4C42-8D15-5149F7C6B7D2}"/>
+              </a:ext>
+            </a:extLst>
+          </p:cNvPr>
+          <p:cNvSpPr>
+            <a:spLocks xmlns:a="http://schemas.openxmlformats.org/drawingml/2006/main" noGrp="1"/>
+          </p:cNvSpPr>
+          <p:nvPr/>
+        </p:nvSpPr>
+        <p:spPr>
+          <a:xfrm xmlns:a="http://schemas.openxmlformats.org/drawingml/2006/main">
+            <a:off x="3276600" y="5010150"/>
+            <a:ext cx="9525" cy="457200"/>
+          </a:xfrm>
+          <a:prstGeom xmlns:a="http://schemas.openxmlformats.org/drawingml/2006/main" prst="rect">
+            <a:avLst/>
+          </a:prstGeom>
+          <a:solidFill xmlns:a="http://schemas.openxmlformats.org/drawingml/2006/main">
+            <a:srgbClr val="B8BCC4"/>
+          </a:solidFill>
+          <a:ln xmlns:a="http://schemas.openxmlformats.org/drawingml/2006/main" w="0">
+            <a:noFill/>
+            <a:prstDash val="solid"/>
+          </a:ln>
+        </p:spPr>
+      </p:sp>
+      <p:sp>
+        <p:nvSpPr>
+          <p:cNvPr id="38" name="">
+            <a:extLst xmlns:a="http://schemas.openxmlformats.org/drawingml/2006/main">
+              <a:ext uri="{FF2B5EF4-FFF2-40B4-BE49-F238E27FC236}">
+                <a16:creationId xmlns:a16="http://schemas.microsoft.com/office/drawing/2014/main" id="{1A20C5A1-7A61-436D-9BA4-8D3D81CCDA1E}"/>
+              </a:ext>
+            </a:extLst>
+          </p:cNvPr>
+          <p:cNvSpPr>
+            <a:spLocks xmlns:a="http://schemas.openxmlformats.org/drawingml/2006/main" noGrp="1"/>
+          </p:cNvSpPr>
+          <p:nvPr/>
+        </p:nvSpPr>
+        <p:spPr>
+          <a:xfrm xmlns:a="http://schemas.openxmlformats.org/drawingml/2006/main">
+            <a:off x="3429000" y="5153025"/>
+            <a:ext cx="3543300" cy="266700"/>
+          </a:xfrm>
+          <a:prstGeom xmlns:a="http://schemas.openxmlformats.org/drawingml/2006/main" prst="rect">
+            <a:avLst/>
+          </a:prstGeom>
+          <a:noFill xmlns:a="http://schemas.openxmlformats.org/drawingml/2006/main"/>
+          <a:ln xmlns:a="http://schemas.openxmlformats.org/drawingml/2006/main" w="0">
+            <a:noFill/>
+            <a:prstDash val="solid"/>
+          </a:ln>
+        </p:spPr>
+        <p:txBody>
+          <a:bodyPr xmlns:a="http://schemas.openxmlformats.org/drawingml/2006/main"/>
+          <a:lstStyle xmlns:a="http://schemas.openxmlformats.org/drawingml/2006/main"/>
+          <a:p xmlns:a="http://schemas.openxmlformats.org/drawingml/2006/main">
+            <a:pPr algn="l">
+              <a:lnSpc>
+                <a:spcPct val="112000"/>
+              </a:lnSpc>
+              <a:buNone/>
+              <a:defRPr sz="1275" b="0">
+                <a:solidFill>
+                  <a:srgbClr val="555555"/>
+                </a:solidFill>
+                <a:latin typeface="Malgun Gothic"/>
+                <a:ea typeface="Malgun Gothic"/>
+                <a:cs typeface="Malgun Gothic"/>
+              </a:defRPr>
+            </a:pPr>
+            <a:r>
+              <a:rPr sz="1275" b="0">
+                <a:solidFill>
+                  <a:srgbClr val="555555"/>
+                </a:solidFill>
+                <a:latin typeface="Malgun Gothic"/>
+                <a:ea typeface="Malgun Gothic"/>
+                <a:cs typeface="Malgun Gothic"/>
+              </a:rPr>
+              <a:t>codemap 키워드/심볼 조회</a:t>
+            </a:r>
+          </a:p>
+        </p:txBody>
+      </p:sp>
+      <p:sp>
+        <p:nvSpPr>
+          <p:cNvPr id="39" name="">
+            <a:extLst xmlns:a="http://schemas.openxmlformats.org/drawingml/2006/main">
+              <a:ext uri="{FF2B5EF4-FFF2-40B4-BE49-F238E27FC236}">
+                <a16:creationId xmlns:a16="http://schemas.microsoft.com/office/drawing/2014/main" id="{A871A2EB-510E-4FD4-A39F-183512F49C94}"/>
+              </a:ext>
+            </a:extLst>
+          </p:cNvPr>
+          <p:cNvSpPr>
+            <a:spLocks xmlns:a="http://schemas.openxmlformats.org/drawingml/2006/main" noGrp="1"/>
+          </p:cNvSpPr>
+          <p:nvPr/>
+        </p:nvSpPr>
+        <p:spPr>
+          <a:xfrm xmlns:a="http://schemas.openxmlformats.org/drawingml/2006/main">
+            <a:off x="7086600" y="5010150"/>
+            <a:ext cx="9525" cy="457200"/>
+          </a:xfrm>
+          <a:prstGeom xmlns:a="http://schemas.openxmlformats.org/drawingml/2006/main" prst="rect">
+            <a:avLst/>
+          </a:prstGeom>
+          <a:solidFill xmlns:a="http://schemas.openxmlformats.org/drawingml/2006/main">
+            <a:srgbClr val="B8BCC4"/>
+          </a:solidFill>
+          <a:ln xmlns:a="http://schemas.openxmlformats.org/drawingml/2006/main" w="0">
+            <a:noFill/>
+            <a:prstDash val="solid"/>
+          </a:ln>
+        </p:spPr>
+      </p:sp>
+      <p:sp>
+        <p:nvSpPr>
+          <p:cNvPr id="40" name="">
+            <a:extLst xmlns:a="http://schemas.openxmlformats.org/drawingml/2006/main">
+              <a:ext uri="{FF2B5EF4-FFF2-40B4-BE49-F238E27FC236}">
+                <a16:creationId xmlns:a16="http://schemas.microsoft.com/office/drawing/2014/main" id="{85BD13E9-07CD-41D7-A015-0C7A8719AE73}"/>
+              </a:ext>
+            </a:extLst>
+          </p:cNvPr>
+          <p:cNvSpPr>
+            <a:spLocks xmlns:a="http://schemas.openxmlformats.org/drawingml/2006/main" noGrp="1"/>
+          </p:cNvSpPr>
+          <p:nvPr/>
+        </p:nvSpPr>
+        <p:spPr>
+          <a:xfrm xmlns:a="http://schemas.openxmlformats.org/drawingml/2006/main">
+            <a:off x="7239000" y="5153025"/>
+            <a:ext cx="3448050" cy="266700"/>
+          </a:xfrm>
+          <a:prstGeom xmlns:a="http://schemas.openxmlformats.org/drawingml/2006/main" prst="rect">
+            <a:avLst/>
+          </a:prstGeom>
+          <a:noFill xmlns:a="http://schemas.openxmlformats.org/drawingml/2006/main"/>
+          <a:ln xmlns:a="http://schemas.openxmlformats.org/drawingml/2006/main" w="0">
+            <a:noFill/>
+            <a:prstDash val="solid"/>
+          </a:ln>
+        </p:spPr>
+        <p:txBody>
+          <a:bodyPr xmlns:a="http://schemas.openxmlformats.org/drawingml/2006/main"/>
+          <a:lstStyle xmlns:a="http://schemas.openxmlformats.org/drawingml/2006/main"/>
+          <a:p xmlns:a="http://schemas.openxmlformats.org/drawingml/2006/main">
+            <a:pPr algn="l">
+              <a:lnSpc>
+                <a:spcPct val="112000"/>
+              </a:lnSpc>
+              <a:buNone/>
+              <a:defRPr sz="1275" b="0">
+                <a:solidFill>
+                  <a:srgbClr val="555555"/>
+                </a:solidFill>
+                <a:latin typeface="Malgun Gothic"/>
+                <a:ea typeface="Malgun Gothic"/>
+                <a:cs typeface="Malgun Gothic"/>
+              </a:defRPr>
+            </a:pPr>
+            <a:r>
+              <a:rPr sz="1275" b="0">
+                <a:solidFill>
+                  <a:srgbClr val="555555"/>
+                </a:solidFill>
+                <a:latin typeface="Malgun Gothic"/>
+                <a:ea typeface="Malgun Gothic"/>
+                <a:cs typeface="Malgun Gothic"/>
+              </a:rPr>
+              <a:t>grep hit 파일 전부 읽기</a:t>
+            </a:r>
+          </a:p>
+        </p:txBody>
+      </p:sp>
+      <p:sp>
+        <p:nvSpPr>
+          <p:cNvPr id="41" name="">
+            <a:extLst xmlns:a="http://schemas.openxmlformats.org/drawingml/2006/main">
+              <a:ext uri="{FF2B5EF4-FFF2-40B4-BE49-F238E27FC236}">
+                <a16:creationId xmlns:a16="http://schemas.microsoft.com/office/drawing/2014/main" id="{E1D92F40-50C8-46F4-9986-0BF5557BFA02}"/>
+              </a:ext>
+            </a:extLst>
+          </p:cNvPr>
+          <p:cNvSpPr>
+            <a:spLocks xmlns:a="http://schemas.openxmlformats.org/drawingml/2006/main" noGrp="1"/>
+          </p:cNvSpPr>
+          <p:nvPr/>
+        </p:nvSpPr>
+        <p:spPr>
+          <a:xfrm xmlns:a="http://schemas.openxmlformats.org/drawingml/2006/main">
+            <a:off x="400050" y="6191250"/>
+            <a:ext cx="11391900" cy="9525"/>
+          </a:xfrm>
+          <a:prstGeom xmlns:a="http://schemas.openxmlformats.org/drawingml/2006/main" prst="rect">
+            <a:avLst/>
+          </a:prstGeom>
+          <a:solidFill xmlns:a="http://schemas.openxmlformats.org/drawingml/2006/main">
+            <a:srgbClr val="B8BCC4"/>
+          </a:solidFill>
+          <a:ln xmlns:a="http://schemas.openxmlformats.org/drawingml/2006/main" w="0">
+            <a:noFill/>
+            <a:prstDash val="solid"/>
+          </a:ln>
+        </p:spPr>
+      </p:sp>
+      <p:sp>
+        <p:nvSpPr>
+          <p:cNvPr id="42" name="">
+            <a:extLst xmlns:a="http://schemas.openxmlformats.org/drawingml/2006/main">
+              <a:ext uri="{FF2B5EF4-FFF2-40B4-BE49-F238E27FC236}">
+                <a16:creationId xmlns:a16="http://schemas.microsoft.com/office/drawing/2014/main" id="{E65D5907-126A-4FA6-8376-621E2C620584}"/>
+              </a:ext>
+            </a:extLst>
+          </p:cNvPr>
+          <p:cNvSpPr>
+            <a:spLocks xmlns:a="http://schemas.openxmlformats.org/drawingml/2006/main" noGrp="1"/>
+          </p:cNvSpPr>
+          <p:nvPr/>
+        </p:nvSpPr>
+        <p:spPr>
+          <a:xfrm xmlns:a="http://schemas.openxmlformats.org/drawingml/2006/main">
+            <a:off x="400050" y="6343650"/>
+            <a:ext cx="3429000" cy="228600"/>
+          </a:xfrm>
+          <a:prstGeom xmlns:a="http://schemas.openxmlformats.org/drawingml/2006/main" prst="rect">
+            <a:avLst/>
+          </a:prstGeom>
+          <a:noFill xmlns:a="http://schemas.openxmlformats.org/drawingml/2006/main"/>
+          <a:ln xmlns:a="http://schemas.openxmlformats.org/drawingml/2006/main" w="0">
+            <a:noFill/>
+            <a:prstDash val="solid"/>
+          </a:ln>
+        </p:spPr>
+        <p:txBody>
+          <a:bodyPr xmlns:a="http://schemas.openxmlformats.org/drawingml/2006/main"/>
+          <a:lstStyle xmlns:a="http://schemas.openxmlformats.org/drawingml/2006/main"/>
+          <a:p xmlns:a="http://schemas.openxmlformats.org/drawingml/2006/main">
+            <a:pPr algn="l">
+              <a:lnSpc>
+                <a:spcPct val="112000"/>
+              </a:lnSpc>
+              <a:buNone/>
+              <a:defRPr sz="1050" b="0">
+                <a:solidFill>
+                  <a:srgbClr val="555555"/>
+                </a:solidFill>
+                <a:latin typeface="Malgun Gothic"/>
+                <a:ea typeface="Malgun Gothic"/>
+                <a:cs typeface="Malgun Gothic"/>
+              </a:defRPr>
+            </a:pPr>
+            <a:r>
+              <a:rPr sz="1050" b="0">
+                <a:solidFill>
+                  <a:srgbClr val="555555"/>
+                </a:solidFill>
+                <a:latin typeface="Malgun Gothic"/>
+                <a:ea typeface="Malgun Gothic"/>
+                <a:cs typeface="Malgun Gothic"/>
+              </a:rPr>
+              <a:t>codemap + ctxdb 설명 자료</a:t>
+            </a:r>
+          </a:p>
+        </p:txBody>
+      </p:sp>
+      <p:sp>
+        <p:nvSpPr>
+          <p:cNvPr id="43" name="">
+            <a:extLst xmlns:a="http://schemas.openxmlformats.org/drawingml/2006/main">
+              <a:ext uri="{FF2B5EF4-FFF2-40B4-BE49-F238E27FC236}">
+                <a16:creationId xmlns:a16="http://schemas.microsoft.com/office/drawing/2014/main" id="{22AFF064-0A28-4386-A482-5A55FC39B415}"/>
+              </a:ext>
+            </a:extLst>
+          </p:cNvPr>
+          <p:cNvSpPr>
+            <a:spLocks xmlns:a="http://schemas.openxmlformats.org/drawingml/2006/main" noGrp="1"/>
+          </p:cNvSpPr>
+          <p:nvPr/>
+        </p:nvSpPr>
+        <p:spPr>
+          <a:xfrm xmlns:a="http://schemas.openxmlformats.org/drawingml/2006/main">
+            <a:off x="11391900" y="6343650"/>
+            <a:ext cx="400050" cy="228600"/>
+          </a:xfrm>
+          <a:prstGeom xmlns:a="http://schemas.openxmlformats.org/drawingml/2006/main" prst="rect">
+            <a:avLst/>
+          </a:prstGeom>
+          <a:noFill xmlns:a="http://schemas.openxmlformats.org/drawingml/2006/main"/>
+          <a:ln xmlns:a="http://schemas.openxmlformats.org/drawingml/2006/main" w="0">
+            <a:noFill/>
+            <a:prstDash val="solid"/>
+          </a:ln>
+        </p:spPr>
+        <p:txBody>
+          <a:bodyPr xmlns:a="http://schemas.openxmlformats.org/drawingml/2006/main"/>
+          <a:lstStyle xmlns:a="http://schemas.openxmlformats.org/drawingml/2006/main"/>
+          <a:p xmlns:a="http://schemas.openxmlformats.org/drawingml/2006/main">
+            <a:pPr algn="r">
+              <a:lnSpc>
+                <a:spcPct val="112000"/>
+              </a:lnSpc>
+              <a:buNone/>
+              <a:defRPr sz="1050" b="0">
+                <a:solidFill>
+                  <a:srgbClr val="555555"/>
+                </a:solidFill>
+                <a:latin typeface="Malgun Gothic"/>
+                <a:ea typeface="Malgun Gothic"/>
+                <a:cs typeface="Malgun Gothic"/>
+              </a:defRPr>
+            </a:pPr>
+            <a:r>
+              <a:rPr sz="1050" b="0">
+                <a:solidFill>
+                  <a:srgbClr val="555555"/>
+                </a:solidFill>
+                <a:latin typeface="Malgun Gothic"/>
+                <a:ea typeface="Malgun Gothic"/>
+                <a:cs typeface="Malgun Gothic"/>
+              </a:rPr>
+              <a:t>08</a:t>
+            </a:r>
+          </a:p>
+        </p:txBody>
+      </p:sp>
+    </p:spTree>
+    <p:extLst>
+      <p:ext uri="{BB962C8B-B14F-4D97-AF65-F5344CB8AC3E}">
+        <p14:creationId xmlns:p14="http://schemas.microsoft.com/office/powerpoint/2010/main" val="1574790465"/>
+      </p:ext>
+    </p:extLst>
+  </p:cSld>
+</p:sld>
+</file>
+
+<file path=ppt/slides/slide9.xml><?xml version="1.0" encoding="utf-8"?>
+<p:sld xmlns:p="http://schemas.openxmlformats.org/presentationml/2006/main">
+  <p:cSld>
+    <p:bg>
+      <p:bgPr>
+        <a:solidFill xmlns:a="http://schemas.openxmlformats.org/drawingml/2006/main">
+          <a:srgbClr val="FFFFFF"/>
+        </a:solidFill>
+      </p:bgPr>
+    </p:bg>
+    <p:spTree>
+      <p:nvGrpSpPr>
+        <p:cNvPr id="1" name=""/>
+        <p:cNvGrpSpPr/>
+        <p:nvPr/>
+      </p:nvGrpSpPr>
+      <p:grpSpPr>
+        <a:xfrm xmlns:a="http://schemas.openxmlformats.org/drawingml/2006/main"/>
+      </p:grpSpPr>
+      <p:sp>
+        <p:nvSpPr>
+          <p:cNvPr id="1" name="">
+            <a:extLst xmlns:a="http://schemas.openxmlformats.org/drawingml/2006/main">
+              <a:ext uri="{FF2B5EF4-FFF2-40B4-BE49-F238E27FC236}">
+                <a16:creationId xmlns:a16="http://schemas.microsoft.com/office/drawing/2014/main" id="{10B624AB-1696-43A7-A276-84DF0B3C98F2}"/>
+              </a:ext>
+            </a:extLst>
+          </p:cNvPr>
+          <p:cNvSpPr>
+            <a:spLocks xmlns:a="http://schemas.openxmlformats.org/drawingml/2006/main" noGrp="1"/>
+          </p:cNvSpPr>
+          <p:nvPr/>
+        </p:nvSpPr>
+        <p:spPr>
+          <a:xfrm xmlns:a="http://schemas.openxmlformats.org/drawingml/2006/main">
+            <a:off x="400050" y="342900"/>
+            <a:ext cx="2381250" cy="266700"/>
+          </a:xfrm>
+          <a:prstGeom xmlns:a="http://schemas.openxmlformats.org/drawingml/2006/main" prst="rect">
+            <a:avLst/>
+          </a:prstGeom>
+          <a:noFill xmlns:a="http://schemas.openxmlformats.org/drawingml/2006/main"/>
+          <a:ln xmlns:a="http://schemas.openxmlformats.org/drawingml/2006/main" w="0">
+            <a:noFill/>
+            <a:prstDash val="solid"/>
+          </a:ln>
+        </p:spPr>
+        <p:txBody>
+          <a:bodyPr xmlns:a="http://schemas.openxmlformats.org/drawingml/2006/main"/>
+          <a:lstStyle xmlns:a="http://schemas.openxmlformats.org/drawingml/2006/main"/>
+          <a:p xmlns:a="http://schemas.openxmlformats.org/drawingml/2006/main">
+            <a:pPr algn="l">
+              <a:lnSpc>
+                <a:spcPct val="112000"/>
+              </a:lnSpc>
+              <a:buNone/>
+              <a:defRPr sz="1200" b="1">
+                <a:solidFill>
+                  <a:srgbClr val="555555"/>
+                </a:solidFill>
+                <a:latin typeface="Malgun Gothic"/>
+                <a:ea typeface="Malgun Gothic"/>
+                <a:cs typeface="Malgun Gothic"/>
+              </a:defRPr>
+            </a:pPr>
+            <a:r>
+              <a:rPr sz="1200" b="1">
+                <a:solidFill>
+                  <a:srgbClr val="555555"/>
+                </a:solidFill>
+                <a:latin typeface="Malgun Gothic"/>
+                <a:ea typeface="Malgun Gothic"/>
+                <a:cs typeface="Malgun Gothic"/>
+              </a:rPr>
+              <a:t>결론</a:t>
+            </a:r>
+          </a:p>
+        </p:txBody>
+      </p:sp>
+      <p:sp>
+        <p:nvSpPr>
+          <p:cNvPr id="2" name="">
+            <a:extLst xmlns:a="http://schemas.openxmlformats.org/drawingml/2006/main">
+              <a:ext uri="{FF2B5EF4-FFF2-40B4-BE49-F238E27FC236}">
+                <a16:creationId xmlns:a16="http://schemas.microsoft.com/office/drawing/2014/main" id="{40B99FE0-FD00-43BF-B41A-D6114649B3EA}"/>
+              </a:ext>
+            </a:extLst>
+          </p:cNvPr>
+          <p:cNvSpPr>
+            <a:spLocks xmlns:a="http://schemas.openxmlformats.org/drawingml/2006/main" noGrp="1"/>
+          </p:cNvSpPr>
+          <p:nvPr/>
+        </p:nvSpPr>
+        <p:spPr>
+          <a:xfrm xmlns:a="http://schemas.openxmlformats.org/drawingml/2006/main">
+            <a:off x="400050" y="742950"/>
+            <a:ext cx="8572500" cy="1238250"/>
+          </a:xfrm>
+          <a:prstGeom xmlns:a="http://schemas.openxmlformats.org/drawingml/2006/main" prst="rect">
+            <a:avLst/>
+          </a:prstGeom>
+          <a:noFill xmlns:a="http://schemas.openxmlformats.org/drawingml/2006/main"/>
+          <a:ln xmlns:a="http://schemas.openxmlformats.org/drawingml/2006/main" w="0">
+            <a:noFill/>
+            <a:prstDash val="solid"/>
+          </a:ln>
+        </p:spPr>
+        <p:txBody>
+          <a:bodyPr xmlns:a="http://schemas.openxmlformats.org/drawingml/2006/main"/>
+          <a:lstStyle xmlns:a="http://schemas.openxmlformats.org/drawingml/2006/main"/>
+          <a:p xmlns:a="http://schemas.openxmlformats.org/drawingml/2006/main">
+            <a:pPr algn="l">
+              <a:lnSpc>
+                <a:spcPct val="105000"/>
+              </a:lnSpc>
+              <a:buNone/>
+              <a:defRPr sz="3150" b="1">
+                <a:solidFill>
+                  <a:srgbClr val="000000"/>
+                </a:solidFill>
+                <a:latin typeface="Malgun Gothic"/>
+                <a:ea typeface="Malgun Gothic"/>
+                <a:cs typeface="Malgun Gothic"/>
+              </a:defRPr>
+            </a:pPr>
+            <a:r>
+              <a:rPr sz="3150" b="1">
+                <a:solidFill>
+                  <a:srgbClr val="000000"/>
+                </a:solidFill>
+                <a:latin typeface="Malgun Gothic"/>
+                <a:ea typeface="Malgun Gothic"/>
+                <a:cs typeface="Malgun Gothic"/>
+              </a:rPr>
+              <a:t>토큰 절감은 읽기 경로를 짧게 만드는 문제입니다</a:t>
+            </a:r>
+          </a:p>
+        </p:txBody>
+      </p:sp>
+      <p:sp>
+        <p:nvSpPr>
+          <p:cNvPr id="3" name="">
+            <a:extLst xmlns:a="http://schemas.openxmlformats.org/drawingml/2006/main">
+              <a:ext uri="{FF2B5EF4-FFF2-40B4-BE49-F238E27FC236}">
+                <a16:creationId xmlns:a16="http://schemas.microsoft.com/office/drawing/2014/main" id="{FA127C22-71F0-4C25-BFE4-8FB97CE0A110}"/>
+              </a:ext>
+            </a:extLst>
+          </p:cNvPr>
+          <p:cNvSpPr>
+            <a:spLocks xmlns:a="http://schemas.openxmlformats.org/drawingml/2006/main" noGrp="1"/>
+          </p:cNvSpPr>
+          <p:nvPr/>
+        </p:nvSpPr>
+        <p:spPr>
+          <a:xfrm xmlns:a="http://schemas.openxmlformats.org/drawingml/2006/main">
+            <a:off x="400050" y="2076450"/>
+            <a:ext cx="7620000" cy="590550"/>
+          </a:xfrm>
+          <a:prstGeom xmlns:a="http://schemas.openxmlformats.org/drawingml/2006/main" prst="rect">
+            <a:avLst/>
+          </a:prstGeom>
+          <a:noFill xmlns:a="http://schemas.openxmlformats.org/drawingml/2006/main"/>
+          <a:ln xmlns:a="http://schemas.openxmlformats.org/drawingml/2006/main" w="0">
+            <a:noFill/>
+            <a:prstDash val="solid"/>
+          </a:ln>
+        </p:spPr>
+        <p:txBody>
+          <a:bodyPr xmlns:a="http://schemas.openxmlformats.org/drawingml/2006/main"/>
+          <a:lstStyle xmlns:a="http://schemas.openxmlformats.org/drawingml/2006/main"/>
+          <a:p xmlns:a="http://schemas.openxmlformats.org/drawingml/2006/main">
+            <a:pPr algn="l">
+              <a:lnSpc>
+                <a:spcPct val="122000"/>
+              </a:lnSpc>
+              <a:buNone/>
+              <a:defRPr sz="1500" b="0">
+                <a:solidFill>
+                  <a:srgbClr val="555555"/>
+                </a:solidFill>
+                <a:latin typeface="Malgun Gothic"/>
+                <a:ea typeface="Malgun Gothic"/>
+                <a:cs typeface="Malgun Gothic"/>
+              </a:defRPr>
+            </a:pPr>
+            <a:r>
+              <a:rPr sz="1500" b="0">
+                <a:solidFill>
+                  <a:srgbClr val="555555"/>
+                </a:solidFill>
+                <a:latin typeface="Malgun Gothic"/>
+                <a:ea typeface="Malgun Gothic"/>
+                <a:cs typeface="Malgun Gothic"/>
+              </a:rPr>
+              <a:t>Project A 시뮬레이션은 저장된 기억과 레지스트리가 있으면 같은 작업도 훨씬 적은 context로 시작할 수 있음을 보여줍니다.</a:t>
+            </a:r>
+          </a:p>
+        </p:txBody>
+      </p:sp>
+      <p:sp>
+        <p:nvSpPr>
+          <p:cNvPr id="4" name="">
+            <a:extLst xmlns:a="http://schemas.openxmlformats.org/drawingml/2006/main">
+              <a:ext uri="{FF2B5EF4-FFF2-40B4-BE49-F238E27FC236}">
+                <a16:creationId xmlns:a16="http://schemas.microsoft.com/office/drawing/2014/main" id="{FC07771F-C0C5-491E-A4C3-53D696D09FC0}"/>
+              </a:ext>
+            </a:extLst>
+          </p:cNvPr>
+          <p:cNvSpPr>
+            <a:spLocks xmlns:a="http://schemas.openxmlformats.org/drawingml/2006/main" noGrp="1"/>
+          </p:cNvSpPr>
+          <p:nvPr/>
+        </p:nvSpPr>
+        <p:spPr>
+          <a:xfrm xmlns:a="http://schemas.openxmlformats.org/drawingml/2006/main">
+            <a:off x="9772650" y="400050"/>
+            <a:ext cx="2000250" cy="228600"/>
+          </a:xfrm>
+          <a:prstGeom xmlns:a="http://schemas.openxmlformats.org/drawingml/2006/main" prst="rect">
+            <a:avLst/>
+          </a:prstGeom>
+          <a:noFill xmlns:a="http://schemas.openxmlformats.org/drawingml/2006/main"/>
+          <a:ln xmlns:a="http://schemas.openxmlformats.org/drawingml/2006/main" w="0">
+            <a:noFill/>
+            <a:prstDash val="solid"/>
+          </a:ln>
+        </p:spPr>
+        <p:txBody>
+          <a:bodyPr xmlns:a="http://schemas.openxmlformats.org/drawingml/2006/main"/>
+          <a:lstStyle xmlns:a="http://schemas.openxmlformats.org/drawingml/2006/main"/>
+          <a:p xmlns:a="http://schemas.openxmlformats.org/drawingml/2006/main">
+            <a:pPr algn="r">
+              <a:lnSpc>
+                <a:spcPct val="112000"/>
+              </a:lnSpc>
+              <a:buNone/>
+              <a:defRPr sz="1125" b="0">
+                <a:solidFill>
+                  <a:srgbClr val="555555"/>
+                </a:solidFill>
+                <a:latin typeface="Malgun Gothic"/>
+                <a:ea typeface="Malgun Gothic"/>
+                <a:cs typeface="Malgun Gothic"/>
+              </a:defRPr>
+            </a:pPr>
+            <a:r>
+              <a:rPr sz="1125" b="0">
+                <a:solidFill>
+                  <a:srgbClr val="555555"/>
+                </a:solidFill>
+                <a:latin typeface="Malgun Gothic"/>
+                <a:ea typeface="Malgun Gothic"/>
+                <a:cs typeface="Malgun Gothic"/>
+              </a:rPr>
+              <a:t>Project A 기준 예시</a:t>
+            </a:r>
+          </a:p>
+        </p:txBody>
+      </p:sp>
+      <p:sp>
+        <p:nvSpPr>
+          <p:cNvPr id="5" name="">
+            <a:extLst xmlns:a="http://schemas.openxmlformats.org/drawingml/2006/main">
+              <a:ext uri="{FF2B5EF4-FFF2-40B4-BE49-F238E27FC236}">
+                <a16:creationId xmlns:a16="http://schemas.microsoft.com/office/drawing/2014/main" id="{224E99D7-065E-4B06-8AA5-D6C3D708623C}"/>
+              </a:ext>
+            </a:extLst>
+          </p:cNvPr>
+          <p:cNvSpPr>
+            <a:spLocks xmlns:a="http://schemas.openxmlformats.org/drawingml/2006/main" noGrp="1"/>
+          </p:cNvSpPr>
+          <p:nvPr/>
+        </p:nvSpPr>
+        <p:spPr>
+          <a:xfrm xmlns:a="http://schemas.openxmlformats.org/drawingml/2006/main">
+            <a:off x="857250" y="3143250"/>
             <a:ext cx="3048000" cy="1428750"/>
           </a:xfrm>
           <a:prstGeom xmlns:a="http://schemas.openxmlformats.org/drawingml/2006/main" prst="rect">
@@ -9989,10 +11944,161 @@
       </p:sp>
       <p:sp>
         <p:nvSpPr>
+          <p:cNvPr id="6" name="">
+            <a:extLst xmlns:a="http://schemas.openxmlformats.org/drawingml/2006/main">
+              <a:ext uri="{FF2B5EF4-FFF2-40B4-BE49-F238E27FC236}">
+                <a16:creationId xmlns:a16="http://schemas.microsoft.com/office/drawing/2014/main" id="{534B67D2-FB62-4203-858A-966FBC6E1B13}"/>
+              </a:ext>
+            </a:extLst>
+          </p:cNvPr>
+          <p:cNvSpPr>
+            <a:spLocks xmlns:a="http://schemas.openxmlformats.org/drawingml/2006/main" noGrp="1"/>
+          </p:cNvSpPr>
+          <p:nvPr/>
+        </p:nvSpPr>
+        <p:spPr>
+          <a:xfrm xmlns:a="http://schemas.openxmlformats.org/drawingml/2006/main">
+            <a:off x="1143000" y="3409950"/>
+            <a:ext cx="2476500" cy="400050"/>
+          </a:xfrm>
+          <a:prstGeom xmlns:a="http://schemas.openxmlformats.org/drawingml/2006/main" prst="rect">
+            <a:avLst/>
+          </a:prstGeom>
+          <a:noFill xmlns:a="http://schemas.openxmlformats.org/drawingml/2006/main"/>
+          <a:ln xmlns:a="http://schemas.openxmlformats.org/drawingml/2006/main" w="0">
+            <a:noFill/>
+            <a:prstDash val="solid"/>
+          </a:ln>
+        </p:spPr>
+        <p:txBody>
+          <a:bodyPr xmlns:a="http://schemas.openxmlformats.org/drawingml/2006/main"/>
+          <a:lstStyle xmlns:a="http://schemas.openxmlformats.org/drawingml/2006/main"/>
+          <a:p xmlns:a="http://schemas.openxmlformats.org/drawingml/2006/main">
+            <a:pPr algn="l">
+              <a:lnSpc>
+                <a:spcPct val="112000"/>
+              </a:lnSpc>
+              <a:buNone/>
+              <a:defRPr sz="2250" b="1">
+                <a:solidFill>
+                  <a:srgbClr val="000000"/>
+                </a:solidFill>
+                <a:latin typeface="Malgun Gothic"/>
+                <a:ea typeface="Malgun Gothic"/>
+                <a:cs typeface="Malgun Gothic"/>
+              </a:defRPr>
+            </a:pPr>
+            <a:r>
+              <a:rPr sz="2250" b="1">
+                <a:solidFill>
+                  <a:srgbClr val="000000"/>
+                </a:solidFill>
+                <a:latin typeface="Malgun Gothic"/>
+                <a:ea typeface="Malgun Gothic"/>
+                <a:cs typeface="Malgun Gothic"/>
+              </a:rPr>
+              <a:t>context-saver</a:t>
+            </a:r>
+          </a:p>
+        </p:txBody>
+      </p:sp>
+      <p:sp>
+        <p:nvSpPr>
+          <p:cNvPr id="7" name="">
+            <a:extLst xmlns:a="http://schemas.openxmlformats.org/drawingml/2006/main">
+              <a:ext uri="{FF2B5EF4-FFF2-40B4-BE49-F238E27FC236}">
+                <a16:creationId xmlns:a16="http://schemas.microsoft.com/office/drawing/2014/main" id="{CF2B84CC-D61C-45E4-8C37-77F335D8238E}"/>
+              </a:ext>
+            </a:extLst>
+          </p:cNvPr>
+          <p:cNvSpPr>
+            <a:spLocks xmlns:a="http://schemas.openxmlformats.org/drawingml/2006/main" noGrp="1"/>
+          </p:cNvSpPr>
+          <p:nvPr/>
+        </p:nvSpPr>
+        <p:spPr>
+          <a:xfrm xmlns:a="http://schemas.openxmlformats.org/drawingml/2006/main">
+            <a:off x="1143000" y="3943350"/>
+            <a:ext cx="2286000" cy="323850"/>
+          </a:xfrm>
+          <a:prstGeom xmlns:a="http://schemas.openxmlformats.org/drawingml/2006/main" prst="rect">
+            <a:avLst/>
+          </a:prstGeom>
+          <a:noFill xmlns:a="http://schemas.openxmlformats.org/drawingml/2006/main"/>
+          <a:ln xmlns:a="http://schemas.openxmlformats.org/drawingml/2006/main" w="0">
+            <a:noFill/>
+            <a:prstDash val="solid"/>
+          </a:ln>
+        </p:spPr>
+        <p:txBody>
+          <a:bodyPr xmlns:a="http://schemas.openxmlformats.org/drawingml/2006/main"/>
+          <a:lstStyle xmlns:a="http://schemas.openxmlformats.org/drawingml/2006/main"/>
+          <a:p xmlns:a="http://schemas.openxmlformats.org/drawingml/2006/main">
+            <a:pPr algn="l">
+              <a:lnSpc>
+                <a:spcPct val="112000"/>
+              </a:lnSpc>
+              <a:buNone/>
+              <a:defRPr sz="1650" b="0">
+                <a:solidFill>
+                  <a:srgbClr val="555555"/>
+                </a:solidFill>
+                <a:latin typeface="Malgun Gothic"/>
+                <a:ea typeface="Malgun Gothic"/>
+                <a:cs typeface="Malgun Gothic"/>
+              </a:defRPr>
+            </a:pPr>
+            <a:r>
+              <a:rPr sz="1650" b="0">
+                <a:solidFill>
+                  <a:srgbClr val="555555"/>
+                </a:solidFill>
+                <a:latin typeface="Malgun Gothic"/>
+                <a:ea typeface="Malgun Gothic"/>
+                <a:cs typeface="Malgun Gothic"/>
+              </a:rPr>
+              <a:t>작업 기억을 저장</a:t>
+            </a:r>
+          </a:p>
+        </p:txBody>
+      </p:sp>
+      <p:sp>
+        <p:nvSpPr>
+          <p:cNvPr id="8" name="">
+            <a:extLst xmlns:a="http://schemas.openxmlformats.org/drawingml/2006/main">
+              <a:ext uri="{FF2B5EF4-FFF2-40B4-BE49-F238E27FC236}">
+                <a16:creationId xmlns:a16="http://schemas.microsoft.com/office/drawing/2014/main" id="{AD1649C0-399D-4606-93C0-607D987B0035}"/>
+              </a:ext>
+            </a:extLst>
+          </p:cNvPr>
+          <p:cNvSpPr>
+            <a:spLocks xmlns:a="http://schemas.openxmlformats.org/drawingml/2006/main" noGrp="1"/>
+          </p:cNvSpPr>
+          <p:nvPr/>
+        </p:nvSpPr>
+        <p:spPr>
+          <a:xfrm xmlns:a="http://schemas.openxmlformats.org/drawingml/2006/main">
+            <a:off x="4572000" y="3143250"/>
+            <a:ext cx="3048000" cy="1428750"/>
+          </a:xfrm>
+          <a:prstGeom xmlns:a="http://schemas.openxmlformats.org/drawingml/2006/main" prst="rect">
+            <a:avLst/>
+          </a:prstGeom>
+          <a:solidFill xmlns:a="http://schemas.openxmlformats.org/drawingml/2006/main">
+            <a:srgbClr val="EDEDED"/>
+          </a:solidFill>
+          <a:ln xmlns:a="http://schemas.openxmlformats.org/drawingml/2006/main" w="0">
+            <a:noFill/>
+            <a:prstDash val="solid"/>
+          </a:ln>
+        </p:spPr>
+      </p:sp>
+      <p:sp>
+        <p:nvSpPr>
           <p:cNvPr id="9" name="">
             <a:extLst xmlns:a="http://schemas.openxmlformats.org/drawingml/2006/main">
               <a:ext uri="{FF2B5EF4-FFF2-40B4-BE49-F238E27FC236}">
-                <a16:creationId xmlns:a16="http://schemas.microsoft.com/office/drawing/2014/main" id="{06C5807E-1237-423F-9F06-53C77336B0CF}"/>
+                <a16:creationId xmlns:a16="http://schemas.microsoft.com/office/drawing/2014/main" id="{16BD02D0-8980-4B31-8EA3-A41CE296BA73}"/>
               </a:ext>
             </a:extLst>
           </p:cNvPr>
@@ -10042,7 +12148,7 @@
                 <a:ea typeface="Malgun Gothic"/>
                 <a:cs typeface="Malgun Gothic"/>
               </a:rPr>
-              <a:t>codemap</a:t>
+              <a:t>ctxdb</a:t>
             </a:r>
           </a:p>
         </p:txBody>
@@ -10052,7 +12158,7 @@
           <p:cNvPr id="10" name="">
             <a:extLst xmlns:a="http://schemas.openxmlformats.org/drawingml/2006/main">
               <a:ext uri="{FF2B5EF4-FFF2-40B4-BE49-F238E27FC236}">
-                <a16:creationId xmlns:a16="http://schemas.microsoft.com/office/drawing/2014/main" id="{D6DB51B0-B2BA-4B8A-A604-155A13F124DD}"/>
+                <a16:creationId xmlns:a16="http://schemas.microsoft.com/office/drawing/2014/main" id="{0A5B6F53-AA11-4C65-8253-DA200A663E65}"/>
               </a:ext>
             </a:extLst>
           </p:cNvPr>
@@ -10102,7 +12208,7 @@
                 <a:ea typeface="Malgun Gothic"/>
                 <a:cs typeface="Malgun Gothic"/>
               </a:rPr>
-              <a:t>수정 위치를 레지스트리로 찾음</a:t>
+              <a:t>명령 키워드로 읽음</a:t>
             </a:r>
           </a:p>
         </p:txBody>
@@ -10112,7 +12218,7 @@
           <p:cNvPr id="11" name="">
             <a:extLst xmlns:a="http://schemas.openxmlformats.org/drawingml/2006/main">
               <a:ext uri="{FF2B5EF4-FFF2-40B4-BE49-F238E27FC236}">
-                <a16:creationId xmlns:a16="http://schemas.microsoft.com/office/drawing/2014/main" id="{3AF1F0B1-6A0F-4A6C-A633-791BEC9A6F86}"/>
+                <a16:creationId xmlns:a16="http://schemas.microsoft.com/office/drawing/2014/main" id="{7D4AB7DA-B0D9-4DD8-B62D-44784D4E9815}"/>
               </a:ext>
             </a:extLst>
           </p:cNvPr>
@@ -10143,7 +12249,7 @@
           <p:cNvPr id="12" name="">
             <a:extLst xmlns:a="http://schemas.openxmlformats.org/drawingml/2006/main">
               <a:ext uri="{FF2B5EF4-FFF2-40B4-BE49-F238E27FC236}">
-                <a16:creationId xmlns:a16="http://schemas.microsoft.com/office/drawing/2014/main" id="{C0B5A739-859E-4689-BB96-C43A5973D50B}"/>
+                <a16:creationId xmlns:a16="http://schemas.microsoft.com/office/drawing/2014/main" id="{0EC56FCD-1569-487E-96B3-1B832A1F09CB}"/>
               </a:ext>
             </a:extLst>
           </p:cNvPr>
@@ -10193,7 +12299,7 @@
                 <a:ea typeface="Malgun Gothic"/>
                 <a:cs typeface="Malgun Gothic"/>
               </a:rPr>
-              <a:t>효과</a:t>
+              <a:t>codemap</a:t>
             </a:r>
           </a:p>
         </p:txBody>
@@ -10203,7 +12309,7 @@
           <p:cNvPr id="13" name="">
             <a:extLst xmlns:a="http://schemas.openxmlformats.org/drawingml/2006/main">
               <a:ext uri="{FF2B5EF4-FFF2-40B4-BE49-F238E27FC236}">
-                <a16:creationId xmlns:a16="http://schemas.microsoft.com/office/drawing/2014/main" id="{0D0F70D2-01EA-4CD9-A7AA-8D6B59EB080C}"/>
+                <a16:creationId xmlns:a16="http://schemas.microsoft.com/office/drawing/2014/main" id="{9582FC5C-C4B8-4CE5-9870-63F3E68FF25E}"/>
               </a:ext>
             </a:extLst>
           </p:cNvPr>
@@ -10253,7 +12359,7 @@
                 <a:ea typeface="Malgun Gothic"/>
                 <a:cs typeface="Malgun Gothic"/>
               </a:rPr>
-              <a:t>더 적은 파일, 더 선명한 context</a:t>
+              <a:t>수정 위치를 찾음</a:t>
             </a:r>
           </a:p>
         </p:txBody>
@@ -10263,7 +12369,7 @@
           <p:cNvPr id="14" name="">
             <a:extLst xmlns:a="http://schemas.openxmlformats.org/drawingml/2006/main">
               <a:ext uri="{FF2B5EF4-FFF2-40B4-BE49-F238E27FC236}">
-                <a16:creationId xmlns:a16="http://schemas.microsoft.com/office/drawing/2014/main" id="{9CB6013D-1E68-4885-980F-863C5EC2CAD0}"/>
+                <a16:creationId xmlns:a16="http://schemas.microsoft.com/office/drawing/2014/main" id="{CEF7F0AC-A94F-4B75-8570-47D2007D5EF1}"/>
               </a:ext>
             </a:extLst>
           </p:cNvPr>
@@ -10295,7 +12401,7 @@
                 <a:spcPct val="112000"/>
               </a:lnSpc>
               <a:buNone/>
-              <a:defRPr sz="1950" b="1">
+              <a:defRPr sz="1875" b="1">
                 <a:solidFill>
                   <a:srgbClr val="000000"/>
                 </a:solidFill>
@@ -10305,7 +12411,7 @@
               </a:defRPr>
             </a:pPr>
             <a:r>
-              <a:rPr sz="1950" b="1">
+              <a:rPr sz="1875" b="1">
                 <a:solidFill>
                   <a:srgbClr val="000000"/>
                 </a:solidFill>
@@ -10313,7 +12419,7 @@
                 <a:ea typeface="Malgun Gothic"/>
                 <a:cs typeface="Malgun Gothic"/>
               </a:rPr>
-              <a:t>적용 기준: 세션 시작에는 ctxdb, 코드 탐색 전에는 codemap.</a:t>
+              <a:t>기준: 저장은 context-saver, 기억 읽기는 ctxdb, 코드 위치 탐색은 codemap.</a:t>
             </a:r>
           </a:p>
         </p:txBody>
@@ -10323,7 +12429,7 @@
           <p:cNvPr id="15" name="">
             <a:extLst xmlns:a="http://schemas.openxmlformats.org/drawingml/2006/main">
               <a:ext uri="{FF2B5EF4-FFF2-40B4-BE49-F238E27FC236}">
-                <a16:creationId xmlns:a16="http://schemas.microsoft.com/office/drawing/2014/main" id="{0EB42AFC-B2E4-4275-8721-3148D93AC413}"/>
+                <a16:creationId xmlns:a16="http://schemas.microsoft.com/office/drawing/2014/main" id="{D9A121C6-707E-43C2-A1B4-9501BE69AB83}"/>
               </a:ext>
             </a:extLst>
           </p:cNvPr>
@@ -10354,7 +12460,7 @@
           <p:cNvPr id="16" name="">
             <a:extLst xmlns:a="http://schemas.openxmlformats.org/drawingml/2006/main">
               <a:ext uri="{FF2B5EF4-FFF2-40B4-BE49-F238E27FC236}">
-                <a16:creationId xmlns:a16="http://schemas.microsoft.com/office/drawing/2014/main" id="{B4B71F1C-7D73-4A11-9CE9-82F5505E1742}"/>
+                <a16:creationId xmlns:a16="http://schemas.microsoft.com/office/drawing/2014/main" id="{8E6A2B0F-0AB6-4FF3-ADDC-D3543AA78860}"/>
               </a:ext>
             </a:extLst>
           </p:cNvPr>
@@ -10414,7 +12520,7 @@
           <p:cNvPr id="17" name="">
             <a:extLst xmlns:a="http://schemas.openxmlformats.org/drawingml/2006/main">
               <a:ext uri="{FF2B5EF4-FFF2-40B4-BE49-F238E27FC236}">
-                <a16:creationId xmlns:a16="http://schemas.microsoft.com/office/drawing/2014/main" id="{8D1696D4-5438-4C17-B10F-5AF83295C8ED}"/>
+                <a16:creationId xmlns:a16="http://schemas.microsoft.com/office/drawing/2014/main" id="{C1EE8CD0-1C5F-4E02-B8D4-A2BAE5D61898}"/>
               </a:ext>
             </a:extLst>
           </p:cNvPr>
@@ -10464,7 +12570,7 @@
                 <a:ea typeface="Malgun Gothic"/>
                 <a:cs typeface="Malgun Gothic"/>
               </a:rPr>
-              <a:t>08</a:t>
+              <a:t>09</a:t>
             </a:r>
           </a:p>
         </p:txBody>
@@ -10472,7 +12578,7 @@
     </p:spTree>
     <p:extLst>
       <p:ext uri="{BB962C8B-B14F-4D97-AF65-F5344CB8AC3E}">
-        <p14:creationId xmlns:p14="http://schemas.microsoft.com/office/powerpoint/2010/main" val="557607530"/>
+        <p14:creationId xmlns:p14="http://schemas.microsoft.com/office/powerpoint/2010/main" val="752175156"/>
       </p:ext>
     </p:extLst>
   </p:cSld>
